--- a/Week 7/L14_Making_It_Yours.pptx
+++ b/Week 7/L14_Making_It_Yours.pptx
@@ -21,6 +21,7 @@
     <p:sldId id="269" r:id="rId20"/>
     <p:sldId id="270" r:id="rId21"/>
     <p:sldId id="271" r:id="rId22"/>
+    <p:sldId id="272" r:id="rId23"/>
   </p:sldIdLst>
   <p:sldSz cx="12191695" cy="6858000" type="screen4x3"/>
   <p:notesSz cx="6858000" cy="9144000"/>
@@ -3742,11 +3743,11 @@
             <a:r>
               <a:rPr sz="1250" b="1" i="0" spc="220">
                 <a:solidFill>
-                  <a:srgbClr val="7C3AED"/>
-                </a:solidFill>
-                <a:latin typeface="Helvetica Neue"/>
-              </a:rPr>
-              <a:t>THE GAME</a:t>
+                  <a:srgbClr val="059669"/>
+                </a:solidFill>
+                <a:latin typeface="Helvetica Neue"/>
+              </a:rPr>
+              <a:t>HOW MANY LABELS?</a:t>
             </a:r>
           </a:p>
         </p:txBody>
@@ -3760,7 +3761,7 @@
         <p:spPr>
           <a:xfrm>
             <a:off x="640080" y="758952"/>
-            <a:ext cx="10972800" cy="704088"/>
+            <a:ext cx="7315200" cy="704088"/>
           </a:xfrm>
           <a:prstGeom prst="rect">
             <a:avLst/>
@@ -3781,7 +3782,7 @@
                 </a:solidFill>
                 <a:latin typeface="Helvetica Neue"/>
               </a:rPr>
-              <a:t>You have money for 240 labels. Choose.</a:t>
+              <a:t>What your own data actually buys.</a:t>
             </a:r>
           </a:p>
         </p:txBody>
@@ -3816,14 +3817,617 @@
                 </a:solidFill>
                 <a:latin typeface="Helvetica Neue"/>
               </a:rPr>
-              <a:t>Thirty minutes. Same budget for every team. The results are not close.</a:t>
-            </a:r>
-          </a:p>
-        </p:txBody>
-      </p:sp>
-      <p:sp>
-        <p:nvSpPr>
-          <p:cNvPr id="5" name="TextBox 4"/>
+              <a:t>Both rungs, every budget, measured on tickets neither of them ever trained on.</a:t>
+            </a:r>
+          </a:p>
+        </p:txBody>
+      </p:sp>
+      <p:sp>
+        <p:nvSpPr>
+          <p:cNvPr id="5" name="Rounded Rectangle 4"/>
+          <p:cNvSpPr/>
+          <p:nvPr/>
+        </p:nvSpPr>
+        <p:spPr>
+          <a:xfrm>
+            <a:off x="8302752" y="593445"/>
+            <a:ext cx="2852928" cy="20116"/>
+          </a:xfrm>
+          <a:prstGeom prst="roundRect">
+            <a:avLst/>
+          </a:prstGeom>
+          <a:solidFill>
+            <a:srgbClr val="E9EBF0"/>
+          </a:solidFill>
+          <a:ln>
+            <a:noFill/>
+          </a:ln>
+        </p:spPr>
+        <p:style>
+          <a:lnRef idx="1">
+            <a:schemeClr val="accent1"/>
+          </a:lnRef>
+          <a:fillRef idx="3">
+            <a:schemeClr val="accent1"/>
+          </a:fillRef>
+          <a:effectRef idx="2">
+            <a:schemeClr val="accent1"/>
+          </a:effectRef>
+          <a:fontRef idx="minor">
+            <a:schemeClr val="lt1"/>
+          </a:fontRef>
+        </p:style>
+        <p:txBody>
+          <a:bodyPr rtlCol="0" anchor="ctr"/>
+          <a:lstStyle/>
+          <a:p>
+            <a:pPr algn="ctr"/>
+          </a:p>
+        </p:txBody>
+      </p:sp>
+      <p:sp>
+        <p:nvSpPr>
+          <p:cNvPr id="6" name="Rounded Rectangle 5"/>
+          <p:cNvSpPr/>
+          <p:nvPr/>
+        </p:nvSpPr>
+        <p:spPr>
+          <a:xfrm>
+            <a:off x="8220455" y="493776"/>
+            <a:ext cx="219456" cy="219456"/>
+          </a:xfrm>
+          <a:prstGeom prst="roundRect">
+            <a:avLst>
+              <a:gd name="adj" fmla="val 32000"/>
+            </a:avLst>
+          </a:prstGeom>
+          <a:solidFill>
+            <a:srgbClr val="0EA5E9"/>
+          </a:solidFill>
+          <a:ln>
+            <a:noFill/>
+          </a:ln>
+        </p:spPr>
+        <p:style>
+          <a:lnRef idx="1">
+            <a:schemeClr val="accent1"/>
+          </a:lnRef>
+          <a:fillRef idx="3">
+            <a:schemeClr val="accent1"/>
+          </a:fillRef>
+          <a:effectRef idx="2">
+            <a:schemeClr val="accent1"/>
+          </a:effectRef>
+          <a:fontRef idx="minor">
+            <a:schemeClr val="lt1"/>
+          </a:fontRef>
+        </p:style>
+        <p:txBody>
+          <a:bodyPr rtlCol="0" anchor="ctr"/>
+          <a:lstStyle/>
+          <a:p>
+            <a:pPr algn="ctr"/>
+          </a:p>
+        </p:txBody>
+      </p:sp>
+      <p:sp>
+        <p:nvSpPr>
+          <p:cNvPr id="7" name="TextBox 6"/>
+          <p:cNvSpPr txBox="1"/>
+          <p:nvPr/>
+        </p:nvSpPr>
+        <p:spPr>
+          <a:xfrm>
+            <a:off x="8165591" y="489204"/>
+            <a:ext cx="329184" cy="228600"/>
+          </a:xfrm>
+          <a:prstGeom prst="rect">
+            <a:avLst/>
+          </a:prstGeom>
+          <a:noFill/>
+        </p:spPr>
+        <p:txBody>
+          <a:bodyPr wrap="square" lIns="0" rIns="0" tIns="0" bIns="0">
+            <a:spAutoFit/>
+          </a:bodyPr>
+          <a:lstStyle/>
+          <a:p>
+            <a:pPr algn="ctr"/>
+            <a:r>
+              <a:rPr sz="950" b="1" i="0">
+                <a:solidFill>
+                  <a:srgbClr val="FFFFFF"/>
+                </a:solidFill>
+                <a:latin typeface="Helvetica Neue"/>
+              </a:rPr>
+              <a:t>1</a:t>
+            </a:r>
+          </a:p>
+        </p:txBody>
+      </p:sp>
+      <p:sp>
+        <p:nvSpPr>
+          <p:cNvPr id="8" name="Rounded Rectangle 7"/>
+          <p:cNvSpPr/>
+          <p:nvPr/>
+        </p:nvSpPr>
+        <p:spPr>
+          <a:xfrm>
+            <a:off x="8695943" y="493776"/>
+            <a:ext cx="219456" cy="219456"/>
+          </a:xfrm>
+          <a:prstGeom prst="roundRect">
+            <a:avLst>
+              <a:gd name="adj" fmla="val 32000"/>
+            </a:avLst>
+          </a:prstGeom>
+          <a:solidFill>
+            <a:srgbClr val="0EA5E9"/>
+          </a:solidFill>
+          <a:ln>
+            <a:noFill/>
+          </a:ln>
+        </p:spPr>
+        <p:style>
+          <a:lnRef idx="1">
+            <a:schemeClr val="accent1"/>
+          </a:lnRef>
+          <a:fillRef idx="3">
+            <a:schemeClr val="accent1"/>
+          </a:fillRef>
+          <a:effectRef idx="2">
+            <a:schemeClr val="accent1"/>
+          </a:effectRef>
+          <a:fontRef idx="minor">
+            <a:schemeClr val="lt1"/>
+          </a:fontRef>
+        </p:style>
+        <p:txBody>
+          <a:bodyPr rtlCol="0" anchor="ctr"/>
+          <a:lstStyle/>
+          <a:p>
+            <a:pPr algn="ctr"/>
+          </a:p>
+        </p:txBody>
+      </p:sp>
+      <p:sp>
+        <p:nvSpPr>
+          <p:cNvPr id="9" name="TextBox 8"/>
+          <p:cNvSpPr txBox="1"/>
+          <p:nvPr/>
+        </p:nvSpPr>
+        <p:spPr>
+          <a:xfrm>
+            <a:off x="8641079" y="489204"/>
+            <a:ext cx="329184" cy="228600"/>
+          </a:xfrm>
+          <a:prstGeom prst="rect">
+            <a:avLst/>
+          </a:prstGeom>
+          <a:noFill/>
+        </p:spPr>
+        <p:txBody>
+          <a:bodyPr wrap="square" lIns="0" rIns="0" tIns="0" bIns="0">
+            <a:spAutoFit/>
+          </a:bodyPr>
+          <a:lstStyle/>
+          <a:p>
+            <a:pPr algn="ctr"/>
+            <a:r>
+              <a:rPr sz="950" b="1" i="0">
+                <a:solidFill>
+                  <a:srgbClr val="FFFFFF"/>
+                </a:solidFill>
+                <a:latin typeface="Helvetica Neue"/>
+              </a:rPr>
+              <a:t>2</a:t>
+            </a:r>
+          </a:p>
+        </p:txBody>
+      </p:sp>
+      <p:sp>
+        <p:nvSpPr>
+          <p:cNvPr id="10" name="Rounded Rectangle 9"/>
+          <p:cNvSpPr/>
+          <p:nvPr/>
+        </p:nvSpPr>
+        <p:spPr>
+          <a:xfrm>
+            <a:off x="9171431" y="493776"/>
+            <a:ext cx="219456" cy="219456"/>
+          </a:xfrm>
+          <a:prstGeom prst="roundRect">
+            <a:avLst>
+              <a:gd name="adj" fmla="val 32000"/>
+            </a:avLst>
+          </a:prstGeom>
+          <a:solidFill>
+            <a:srgbClr val="D97706"/>
+          </a:solidFill>
+          <a:ln>
+            <a:noFill/>
+          </a:ln>
+        </p:spPr>
+        <p:style>
+          <a:lnRef idx="1">
+            <a:schemeClr val="accent1"/>
+          </a:lnRef>
+          <a:fillRef idx="3">
+            <a:schemeClr val="accent1"/>
+          </a:fillRef>
+          <a:effectRef idx="2">
+            <a:schemeClr val="accent1"/>
+          </a:effectRef>
+          <a:fontRef idx="minor">
+            <a:schemeClr val="lt1"/>
+          </a:fontRef>
+        </p:style>
+        <p:txBody>
+          <a:bodyPr rtlCol="0" anchor="ctr"/>
+          <a:lstStyle/>
+          <a:p>
+            <a:pPr algn="ctr"/>
+          </a:p>
+        </p:txBody>
+      </p:sp>
+      <p:sp>
+        <p:nvSpPr>
+          <p:cNvPr id="11" name="TextBox 10"/>
+          <p:cNvSpPr txBox="1"/>
+          <p:nvPr/>
+        </p:nvSpPr>
+        <p:spPr>
+          <a:xfrm>
+            <a:off x="9116567" y="489204"/>
+            <a:ext cx="329184" cy="228600"/>
+          </a:xfrm>
+          <a:prstGeom prst="rect">
+            <a:avLst/>
+          </a:prstGeom>
+          <a:noFill/>
+        </p:spPr>
+        <p:txBody>
+          <a:bodyPr wrap="square" lIns="0" rIns="0" tIns="0" bIns="0">
+            <a:spAutoFit/>
+          </a:bodyPr>
+          <a:lstStyle/>
+          <a:p>
+            <a:pPr algn="ctr"/>
+            <a:r>
+              <a:rPr sz="950" b="1" i="0">
+                <a:solidFill>
+                  <a:srgbClr val="FFFFFF"/>
+                </a:solidFill>
+                <a:latin typeface="Helvetica Neue"/>
+              </a:rPr>
+              <a:t>3</a:t>
+            </a:r>
+          </a:p>
+        </p:txBody>
+      </p:sp>
+      <p:sp>
+        <p:nvSpPr>
+          <p:cNvPr id="12" name="Rounded Rectangle 11"/>
+          <p:cNvSpPr/>
+          <p:nvPr/>
+        </p:nvSpPr>
+        <p:spPr>
+          <a:xfrm>
+            <a:off x="9610344" y="457200"/>
+            <a:ext cx="292608" cy="292608"/>
+          </a:xfrm>
+          <a:prstGeom prst="roundRect">
+            <a:avLst>
+              <a:gd name="adj" fmla="val 32000"/>
+            </a:avLst>
+          </a:prstGeom>
+          <a:solidFill>
+            <a:srgbClr val="059669"/>
+          </a:solidFill>
+          <a:ln>
+            <a:noFill/>
+          </a:ln>
+        </p:spPr>
+        <p:style>
+          <a:lnRef idx="1">
+            <a:schemeClr val="accent1"/>
+          </a:lnRef>
+          <a:fillRef idx="3">
+            <a:schemeClr val="accent1"/>
+          </a:fillRef>
+          <a:effectRef idx="2">
+            <a:schemeClr val="accent1"/>
+          </a:effectRef>
+          <a:fontRef idx="minor">
+            <a:schemeClr val="lt1"/>
+          </a:fontRef>
+        </p:style>
+        <p:txBody>
+          <a:bodyPr rtlCol="0" anchor="ctr"/>
+          <a:lstStyle/>
+          <a:p>
+            <a:pPr algn="ctr"/>
+          </a:p>
+        </p:txBody>
+      </p:sp>
+      <p:sp>
+        <p:nvSpPr>
+          <p:cNvPr id="13" name="TextBox 12"/>
+          <p:cNvSpPr txBox="1"/>
+          <p:nvPr/>
+        </p:nvSpPr>
+        <p:spPr>
+          <a:xfrm>
+            <a:off x="9555480" y="489204"/>
+            <a:ext cx="402336" cy="228600"/>
+          </a:xfrm>
+          <a:prstGeom prst="rect">
+            <a:avLst/>
+          </a:prstGeom>
+          <a:noFill/>
+        </p:spPr>
+        <p:txBody>
+          <a:bodyPr wrap="square" lIns="0" rIns="0" tIns="0" bIns="0">
+            <a:spAutoFit/>
+          </a:bodyPr>
+          <a:lstStyle/>
+          <a:p>
+            <a:pPr algn="ctr"/>
+            <a:r>
+              <a:rPr sz="1200" b="1" i="0">
+                <a:solidFill>
+                  <a:srgbClr val="FFFFFF"/>
+                </a:solidFill>
+                <a:latin typeface="Helvetica Neue"/>
+              </a:rPr>
+              <a:t>4</a:t>
+            </a:r>
+          </a:p>
+        </p:txBody>
+      </p:sp>
+      <p:sp>
+        <p:nvSpPr>
+          <p:cNvPr id="14" name="Rounded Rectangle 13"/>
+          <p:cNvSpPr/>
+          <p:nvPr/>
+        </p:nvSpPr>
+        <p:spPr>
+          <a:xfrm>
+            <a:off x="10122407" y="493776"/>
+            <a:ext cx="219456" cy="219456"/>
+          </a:xfrm>
+          <a:prstGeom prst="roundRect">
+            <a:avLst>
+              <a:gd name="adj" fmla="val 32000"/>
+            </a:avLst>
+          </a:prstGeom>
+          <a:solidFill>
+            <a:srgbClr val="E9EBF0"/>
+          </a:solidFill>
+          <a:ln>
+            <a:noFill/>
+          </a:ln>
+        </p:spPr>
+        <p:style>
+          <a:lnRef idx="1">
+            <a:schemeClr val="accent1"/>
+          </a:lnRef>
+          <a:fillRef idx="3">
+            <a:schemeClr val="accent1"/>
+          </a:fillRef>
+          <a:effectRef idx="2">
+            <a:schemeClr val="accent1"/>
+          </a:effectRef>
+          <a:fontRef idx="minor">
+            <a:schemeClr val="lt1"/>
+          </a:fontRef>
+        </p:style>
+        <p:txBody>
+          <a:bodyPr rtlCol="0" anchor="ctr"/>
+          <a:lstStyle/>
+          <a:p>
+            <a:pPr algn="ctr"/>
+          </a:p>
+        </p:txBody>
+      </p:sp>
+      <p:sp>
+        <p:nvSpPr>
+          <p:cNvPr id="15" name="TextBox 14"/>
+          <p:cNvSpPr txBox="1"/>
+          <p:nvPr/>
+        </p:nvSpPr>
+        <p:spPr>
+          <a:xfrm>
+            <a:off x="10067543" y="489204"/>
+            <a:ext cx="329184" cy="228600"/>
+          </a:xfrm>
+          <a:prstGeom prst="rect">
+            <a:avLst/>
+          </a:prstGeom>
+          <a:noFill/>
+        </p:spPr>
+        <p:txBody>
+          <a:bodyPr wrap="square" lIns="0" rIns="0" tIns="0" bIns="0">
+            <a:spAutoFit/>
+          </a:bodyPr>
+          <a:lstStyle/>
+          <a:p>
+            <a:pPr algn="ctr"/>
+            <a:r>
+              <a:rPr sz="950" b="1" i="0">
+                <a:solidFill>
+                  <a:srgbClr val="AEB4BF"/>
+                </a:solidFill>
+                <a:latin typeface="Helvetica Neue"/>
+              </a:rPr>
+              <a:t>5</a:t>
+            </a:r>
+          </a:p>
+        </p:txBody>
+      </p:sp>
+      <p:sp>
+        <p:nvSpPr>
+          <p:cNvPr id="16" name="Rounded Rectangle 15"/>
+          <p:cNvSpPr/>
+          <p:nvPr/>
+        </p:nvSpPr>
+        <p:spPr>
+          <a:xfrm>
+            <a:off x="10597895" y="493776"/>
+            <a:ext cx="219456" cy="219456"/>
+          </a:xfrm>
+          <a:prstGeom prst="roundRect">
+            <a:avLst>
+              <a:gd name="adj" fmla="val 32000"/>
+            </a:avLst>
+          </a:prstGeom>
+          <a:solidFill>
+            <a:srgbClr val="E9EBF0"/>
+          </a:solidFill>
+          <a:ln>
+            <a:noFill/>
+          </a:ln>
+        </p:spPr>
+        <p:style>
+          <a:lnRef idx="1">
+            <a:schemeClr val="accent1"/>
+          </a:lnRef>
+          <a:fillRef idx="3">
+            <a:schemeClr val="accent1"/>
+          </a:fillRef>
+          <a:effectRef idx="2">
+            <a:schemeClr val="accent1"/>
+          </a:effectRef>
+          <a:fontRef idx="minor">
+            <a:schemeClr val="lt1"/>
+          </a:fontRef>
+        </p:style>
+        <p:txBody>
+          <a:bodyPr rtlCol="0" anchor="ctr"/>
+          <a:lstStyle/>
+          <a:p>
+            <a:pPr algn="ctr"/>
+          </a:p>
+        </p:txBody>
+      </p:sp>
+      <p:sp>
+        <p:nvSpPr>
+          <p:cNvPr id="17" name="TextBox 16"/>
+          <p:cNvSpPr txBox="1"/>
+          <p:nvPr/>
+        </p:nvSpPr>
+        <p:spPr>
+          <a:xfrm>
+            <a:off x="10543031" y="489204"/>
+            <a:ext cx="329184" cy="228600"/>
+          </a:xfrm>
+          <a:prstGeom prst="rect">
+            <a:avLst/>
+          </a:prstGeom>
+          <a:noFill/>
+        </p:spPr>
+        <p:txBody>
+          <a:bodyPr wrap="square" lIns="0" rIns="0" tIns="0" bIns="0">
+            <a:spAutoFit/>
+          </a:bodyPr>
+          <a:lstStyle/>
+          <a:p>
+            <a:pPr algn="ctr"/>
+            <a:r>
+              <a:rPr sz="950" b="1" i="0">
+                <a:solidFill>
+                  <a:srgbClr val="AEB4BF"/>
+                </a:solidFill>
+                <a:latin typeface="Helvetica Neue"/>
+              </a:rPr>
+              <a:t>6</a:t>
+            </a:r>
+          </a:p>
+        </p:txBody>
+      </p:sp>
+      <p:sp>
+        <p:nvSpPr>
+          <p:cNvPr id="18" name="Rounded Rectangle 17"/>
+          <p:cNvSpPr/>
+          <p:nvPr/>
+        </p:nvSpPr>
+        <p:spPr>
+          <a:xfrm>
+            <a:off x="11073384" y="493776"/>
+            <a:ext cx="219456" cy="219456"/>
+          </a:xfrm>
+          <a:prstGeom prst="roundRect">
+            <a:avLst>
+              <a:gd name="adj" fmla="val 32000"/>
+            </a:avLst>
+          </a:prstGeom>
+          <a:solidFill>
+            <a:srgbClr val="E9EBF0"/>
+          </a:solidFill>
+          <a:ln>
+            <a:noFill/>
+          </a:ln>
+        </p:spPr>
+        <p:style>
+          <a:lnRef idx="1">
+            <a:schemeClr val="accent1"/>
+          </a:lnRef>
+          <a:fillRef idx="3">
+            <a:schemeClr val="accent1"/>
+          </a:fillRef>
+          <a:effectRef idx="2">
+            <a:schemeClr val="accent1"/>
+          </a:effectRef>
+          <a:fontRef idx="minor">
+            <a:schemeClr val="lt1"/>
+          </a:fontRef>
+        </p:style>
+        <p:txBody>
+          <a:bodyPr rtlCol="0" anchor="ctr"/>
+          <a:lstStyle/>
+          <a:p>
+            <a:pPr algn="ctr"/>
+          </a:p>
+        </p:txBody>
+      </p:sp>
+      <p:sp>
+        <p:nvSpPr>
+          <p:cNvPr id="19" name="TextBox 18"/>
+          <p:cNvSpPr txBox="1"/>
+          <p:nvPr/>
+        </p:nvSpPr>
+        <p:spPr>
+          <a:xfrm>
+            <a:off x="11018519" y="489204"/>
+            <a:ext cx="329184" cy="228600"/>
+          </a:xfrm>
+          <a:prstGeom prst="rect">
+            <a:avLst/>
+          </a:prstGeom>
+          <a:noFill/>
+        </p:spPr>
+        <p:txBody>
+          <a:bodyPr wrap="square" lIns="0" rIns="0" tIns="0" bIns="0">
+            <a:spAutoFit/>
+          </a:bodyPr>
+          <a:lstStyle/>
+          <a:p>
+            <a:pPr algn="ctr"/>
+            <a:r>
+              <a:rPr sz="950" b="1" i="0">
+                <a:solidFill>
+                  <a:srgbClr val="AEB4BF"/>
+                </a:solidFill>
+                <a:latin typeface="Helvetica Neue"/>
+              </a:rPr>
+              <a:t>7</a:t>
+            </a:r>
+          </a:p>
+        </p:txBody>
+      </p:sp>
+      <p:sp>
+        <p:nvSpPr>
+          <p:cNvPr id="20" name="TextBox 19"/>
           <p:cNvSpPr txBox="1"/>
           <p:nvPr/>
         </p:nvSpPr>
@@ -3858,7 +4462,7 @@
       </p:sp>
       <p:pic>
         <p:nvPicPr>
-          <p:cNvPr id="6" name="Picture 5" descr="d_gamebrief.png"/>
+          <p:cNvPr id="21" name="Picture 20" descr="fig_curve.png"/>
           <p:cNvPicPr>
             <a:picLocks noChangeAspect="1"/>
           </p:cNvPicPr>
@@ -3872,8 +4476,8 @@
         </p:blipFill>
         <p:spPr>
           <a:xfrm>
-            <a:off x="518007" y="2936926"/>
-            <a:ext cx="11155680" cy="2447186"/>
+            <a:off x="2025496" y="1965960"/>
+            <a:ext cx="8140702" cy="4023360"/>
           </a:xfrm>
           <a:prstGeom prst="rect">
             <a:avLst/>
@@ -3882,14 +4486,14 @@
       </p:pic>
       <p:sp>
         <p:nvSpPr>
-          <p:cNvPr id="7" name="Rounded Rectangle 6"/>
+          <p:cNvPr id="22" name="Rounded Rectangle 21"/>
           <p:cNvSpPr/>
           <p:nvPr/>
         </p:nvSpPr>
         <p:spPr>
           <a:xfrm>
-            <a:off x="6905548" y="6345936"/>
-            <a:ext cx="4646066" cy="365760"/>
+            <a:off x="7773314" y="6345936"/>
+            <a:ext cx="3778300" cy="365760"/>
           </a:xfrm>
           <a:prstGeom prst="roundRect">
             <a:avLst>
@@ -3927,13 +4531,13 @@
       </p:sp>
       <p:sp>
         <p:nvSpPr>
-          <p:cNvPr id="8" name="Rounded Rectangle 7"/>
+          <p:cNvPr id="23" name="Rounded Rectangle 22"/>
           <p:cNvSpPr/>
           <p:nvPr/>
         </p:nvSpPr>
         <p:spPr>
           <a:xfrm>
-            <a:off x="7947964" y="6396228"/>
+            <a:off x="8815730" y="6396228"/>
             <a:ext cx="754380" cy="265176"/>
           </a:xfrm>
           <a:prstGeom prst="roundRect">
@@ -3972,13 +4576,13 @@
       </p:sp>
       <p:sp>
         <p:nvSpPr>
-          <p:cNvPr id="9" name="TextBox 8"/>
-          <p:cNvSpPr txBox="1"/>
-          <p:nvPr/>
-        </p:nvSpPr>
-        <p:spPr>
-          <a:xfrm>
-            <a:off x="7060996" y="6460236"/>
+          <p:cNvPr id="24" name="TextBox 23"/>
+          <p:cNvSpPr txBox="1"/>
+          <p:nvPr/>
+        </p:nvSpPr>
+        <p:spPr>
+          <a:xfrm>
+            <a:off x="7928762" y="6460236"/>
             <a:ext cx="914400" cy="219456"/>
           </a:xfrm>
           <a:prstGeom prst="rect">
@@ -4007,13 +4611,13 @@
       </p:sp>
       <p:sp>
         <p:nvSpPr>
-          <p:cNvPr id="10" name="TextBox 9"/>
-          <p:cNvSpPr txBox="1"/>
-          <p:nvPr/>
-        </p:nvSpPr>
-        <p:spPr>
-          <a:xfrm>
-            <a:off x="7947964" y="6451092"/>
+          <p:cNvPr id="25" name="TextBox 24"/>
+          <p:cNvSpPr txBox="1"/>
+          <p:nvPr/>
+        </p:nvSpPr>
+        <p:spPr>
+          <a:xfrm>
+            <a:off x="8815730" y="6451092"/>
             <a:ext cx="754380" cy="219456"/>
           </a:xfrm>
           <a:prstGeom prst="rect">
@@ -4035,21 +4639,21 @@
                 </a:solidFill>
                 <a:latin typeface="Helvetica Neue"/>
               </a:rPr>
-              <a:t>STEP 13</a:t>
-            </a:r>
-          </a:p>
-        </p:txBody>
-      </p:sp>
-      <p:sp>
-        <p:nvSpPr>
-          <p:cNvPr id="11" name="TextBox 10"/>
-          <p:cNvSpPr txBox="1"/>
-          <p:nvPr/>
-        </p:nvSpPr>
-        <p:spPr>
-          <a:xfrm>
-            <a:off x="8821216" y="6460236"/>
-            <a:ext cx="2629814" cy="219456"/>
+              <a:t>STEP 11</a:t>
+            </a:r>
+          </a:p>
+        </p:txBody>
+      </p:sp>
+      <p:sp>
+        <p:nvSpPr>
+          <p:cNvPr id="26" name="TextBox 25"/>
+          <p:cNvSpPr txBox="1"/>
+          <p:nvPr/>
+        </p:nvSpPr>
+        <p:spPr>
+          <a:xfrm>
+            <a:off x="9688982" y="6460236"/>
+            <a:ext cx="1762048" cy="219456"/>
           </a:xfrm>
           <a:prstGeom prst="rect">
             <a:avLst/>
@@ -4070,7 +4674,42 @@
                 </a:solidFill>
                 <a:latin typeface="Helvetica Neue"/>
               </a:rPr>
-              <a:t>THE GAME: your labelling budget</a:t>
+              <a:t>The learning curve</a:t>
+            </a:r>
+          </a:p>
+        </p:txBody>
+      </p:sp>
+      <p:sp>
+        <p:nvSpPr>
+          <p:cNvPr id="27" name="TextBox 26"/>
+          <p:cNvSpPr txBox="1"/>
+          <p:nvPr/>
+        </p:nvSpPr>
+        <p:spPr>
+          <a:xfrm>
+            <a:off x="640080" y="6053328"/>
+            <a:ext cx="10881360" cy="365760"/>
+          </a:xfrm>
+          <a:prstGeom prst="rect">
+            <a:avLst/>
+          </a:prstGeom>
+          <a:noFill/>
+        </p:spPr>
+        <p:txBody>
+          <a:bodyPr wrap="square" lIns="0" rIns="0" tIns="0" bIns="0">
+            <a:spAutoFit/>
+          </a:bodyPr>
+          <a:lstStyle/>
+          <a:p>
+            <a:pPr algn="ctr"/>
+            <a:r>
+              <a:rPr sz="1500" b="0" i="1">
+                <a:solidFill>
+                  <a:srgbClr val="475569"/>
+                </a:solidFill>
+                <a:latin typeface="Helvetica Neue"/>
+              </a:rPr>
+              <a:t>The cheap rung is above the expensive one at every budget we can afford. And the curve bends: the next hundred labels is worth less than the last.</a:t>
             </a:r>
           </a:p>
         </p:txBody>
@@ -4123,7 +4762,7 @@
                 </a:solidFill>
                 <a:latin typeface="Helvetica Neue"/>
               </a:rPr>
-              <a:t>THE REVEAL</a:t>
+              <a:t>THE GAME</a:t>
             </a:r>
           </a:p>
         </p:txBody>
@@ -4158,7 +4797,7 @@
                 </a:solidFill>
                 <a:latin typeface="Helvetica Neue"/>
               </a:rPr>
-              <a:t>Same budget. Same model. Same code.</a:t>
+              <a:t>You have money for 240 labels. Choose.</a:t>
             </a:r>
           </a:p>
         </p:txBody>
@@ -4193,7 +4832,7 @@
                 </a:solidFill>
                 <a:latin typeface="Helvetica Neue"/>
               </a:rPr>
-              <a:t>Only the choice of WHICH 240 tickets to pay for changed.</a:t>
+              <a:t>Thirty minutes. Same budget for every team. The results are not close.</a:t>
             </a:r>
           </a:p>
         </p:txBody>
@@ -4235,7 +4874,7 @@
       </p:sp>
       <p:pic>
         <p:nvPicPr>
-          <p:cNvPr id="6" name="Picture 5" descr="d_reveal.png"/>
+          <p:cNvPr id="6" name="Picture 5" descr="d_gamebrief.png"/>
           <p:cNvPicPr>
             <a:picLocks noChangeAspect="1"/>
           </p:cNvPicPr>
@@ -4249,8 +4888,8 @@
         </p:blipFill>
         <p:spPr>
           <a:xfrm>
-            <a:off x="883767" y="2620080"/>
-            <a:ext cx="10424160" cy="2623678"/>
+            <a:off x="518007" y="2936926"/>
+            <a:ext cx="11155680" cy="2447186"/>
           </a:xfrm>
           <a:prstGeom prst="rect">
             <a:avLst/>
@@ -4259,35 +4898,195 @@
       </p:pic>
       <p:sp>
         <p:nvSpPr>
-          <p:cNvPr id="7" name="TextBox 6"/>
-          <p:cNvSpPr txBox="1"/>
-          <p:nvPr/>
-        </p:nvSpPr>
-        <p:spPr>
-          <a:xfrm>
-            <a:off x="640080" y="5897880"/>
-            <a:ext cx="10881360" cy="457200"/>
-          </a:xfrm>
-          <a:prstGeom prst="rect">
-            <a:avLst/>
-          </a:prstGeom>
-          <a:noFill/>
-        </p:spPr>
-        <p:txBody>
-          <a:bodyPr wrap="square" lIns="0" rIns="0" tIns="0" bIns="0">
-            <a:spAutoFit/>
-          </a:bodyPr>
+          <p:cNvPr id="7" name="Rounded Rectangle 6"/>
+          <p:cNvSpPr/>
+          <p:nvPr/>
+        </p:nvSpPr>
+        <p:spPr>
+          <a:xfrm>
+            <a:off x="6905548" y="6345936"/>
+            <a:ext cx="4646066" cy="365760"/>
+          </a:xfrm>
+          <a:prstGeom prst="roundRect">
+            <a:avLst>
+              <a:gd name="adj" fmla="val 44000"/>
+            </a:avLst>
+          </a:prstGeom>
+          <a:solidFill>
+            <a:srgbClr val="059669"/>
+          </a:solidFill>
+          <a:ln>
+            <a:noFill/>
+          </a:ln>
+        </p:spPr>
+        <p:style>
+          <a:lnRef idx="1">
+            <a:schemeClr val="accent1"/>
+          </a:lnRef>
+          <a:fillRef idx="3">
+            <a:schemeClr val="accent1"/>
+          </a:fillRef>
+          <a:effectRef idx="2">
+            <a:schemeClr val="accent1"/>
+          </a:effectRef>
+          <a:fontRef idx="minor">
+            <a:schemeClr val="lt1"/>
+          </a:fontRef>
+        </p:style>
+        <p:txBody>
+          <a:bodyPr rtlCol="0" anchor="ctr"/>
           <a:lstStyle/>
           <a:p>
             <a:pPr algn="ctr"/>
-            <a:r>
-              <a:rPr sz="1600" b="1" i="0">
-                <a:solidFill>
-                  <a:srgbClr val="0F172A"/>
-                </a:solidFill>
-                <a:latin typeface="Helvetica Neue"/>
-              </a:rPr>
-              <a:t>0.247 macro-F1 points between best and worst, for exactly the same money. Only one strategy beat random, and every rule that ranked by a score lost to it.</a:t>
+          </a:p>
+        </p:txBody>
+      </p:sp>
+      <p:sp>
+        <p:nvSpPr>
+          <p:cNvPr id="8" name="Rounded Rectangle 7"/>
+          <p:cNvSpPr/>
+          <p:nvPr/>
+        </p:nvSpPr>
+        <p:spPr>
+          <a:xfrm>
+            <a:off x="7947964" y="6396228"/>
+            <a:ext cx="754380" cy="265176"/>
+          </a:xfrm>
+          <a:prstGeom prst="roundRect">
+            <a:avLst>
+              <a:gd name="adj" fmla="val 44000"/>
+            </a:avLst>
+          </a:prstGeom>
+          <a:solidFill>
+            <a:srgbClr val="064E3B"/>
+          </a:solidFill>
+          <a:ln>
+            <a:noFill/>
+          </a:ln>
+        </p:spPr>
+        <p:style>
+          <a:lnRef idx="1">
+            <a:schemeClr val="accent1"/>
+          </a:lnRef>
+          <a:fillRef idx="3">
+            <a:schemeClr val="accent1"/>
+          </a:fillRef>
+          <a:effectRef idx="2">
+            <a:schemeClr val="accent1"/>
+          </a:effectRef>
+          <a:fontRef idx="minor">
+            <a:schemeClr val="lt1"/>
+          </a:fontRef>
+        </p:style>
+        <p:txBody>
+          <a:bodyPr rtlCol="0" anchor="ctr"/>
+          <a:lstStyle/>
+          <a:p>
+            <a:pPr algn="ctr"/>
+          </a:p>
+        </p:txBody>
+      </p:sp>
+      <p:sp>
+        <p:nvSpPr>
+          <p:cNvPr id="9" name="TextBox 8"/>
+          <p:cNvSpPr txBox="1"/>
+          <p:nvPr/>
+        </p:nvSpPr>
+        <p:spPr>
+          <a:xfrm>
+            <a:off x="7060996" y="6460236"/>
+            <a:ext cx="914400" cy="219456"/>
+          </a:xfrm>
+          <a:prstGeom prst="rect">
+            <a:avLst/>
+          </a:prstGeom>
+          <a:noFill/>
+        </p:spPr>
+        <p:txBody>
+          <a:bodyPr wrap="none" lIns="0" rIns="0" tIns="0" bIns="0">
+            <a:spAutoFit/>
+          </a:bodyPr>
+          <a:lstStyle/>
+          <a:p>
+            <a:pPr algn="l"/>
+            <a:r>
+              <a:rPr sz="950" b="1" i="0">
+                <a:solidFill>
+                  <a:srgbClr val="A7F3D0"/>
+                </a:solidFill>
+                <a:latin typeface="Helvetica Neue"/>
+              </a:rPr>
+              <a:t>▶ NOTEBOOK</a:t>
+            </a:r>
+          </a:p>
+        </p:txBody>
+      </p:sp>
+      <p:sp>
+        <p:nvSpPr>
+          <p:cNvPr id="10" name="TextBox 9"/>
+          <p:cNvSpPr txBox="1"/>
+          <p:nvPr/>
+        </p:nvSpPr>
+        <p:spPr>
+          <a:xfrm>
+            <a:off x="7947964" y="6451092"/>
+            <a:ext cx="754380" cy="219456"/>
+          </a:xfrm>
+          <a:prstGeom prst="rect">
+            <a:avLst/>
+          </a:prstGeom>
+          <a:noFill/>
+        </p:spPr>
+        <p:txBody>
+          <a:bodyPr wrap="none" lIns="0" rIns="0" tIns="0" bIns="0">
+            <a:spAutoFit/>
+          </a:bodyPr>
+          <a:lstStyle/>
+          <a:p>
+            <a:pPr algn="ctr"/>
+            <a:r>
+              <a:rPr sz="1100" b="1" i="0">
+                <a:solidFill>
+                  <a:srgbClr val="FFFFFF"/>
+                </a:solidFill>
+                <a:latin typeface="Helvetica Neue"/>
+              </a:rPr>
+              <a:t>STEP 13</a:t>
+            </a:r>
+          </a:p>
+        </p:txBody>
+      </p:sp>
+      <p:sp>
+        <p:nvSpPr>
+          <p:cNvPr id="11" name="TextBox 10"/>
+          <p:cNvSpPr txBox="1"/>
+          <p:nvPr/>
+        </p:nvSpPr>
+        <p:spPr>
+          <a:xfrm>
+            <a:off x="8821216" y="6460236"/>
+            <a:ext cx="2629814" cy="219456"/>
+          </a:xfrm>
+          <a:prstGeom prst="rect">
+            <a:avLst/>
+          </a:prstGeom>
+          <a:noFill/>
+        </p:spPr>
+        <p:txBody>
+          <a:bodyPr wrap="none" lIns="0" rIns="0" tIns="0" bIns="0">
+            <a:spAutoFit/>
+          </a:bodyPr>
+          <a:lstStyle/>
+          <a:p>
+            <a:pPr algn="l"/>
+            <a:r>
+              <a:rPr sz="1000" b="1" i="0">
+                <a:solidFill>
+                  <a:srgbClr val="FFFFFF"/>
+                </a:solidFill>
+                <a:latin typeface="Helvetica Neue"/>
+              </a:rPr>
+              <a:t>THE GAME: your labelling budget</a:t>
             </a:r>
           </a:p>
         </p:txBody>
@@ -4340,7 +5139,7 @@
                 </a:solidFill>
                 <a:latin typeface="Helvetica Neue"/>
               </a:rPr>
-              <a:t>WHY THE WINNER WON</a:t>
+              <a:t>THE REVEAL</a:t>
             </a:r>
           </a:p>
         </p:txBody>
@@ -4375,7 +5174,7 @@
                 </a:solidFill>
                 <a:latin typeface="Helvetica Neue"/>
               </a:rPr>
-              <a:t>Cover the space, not the score.</a:t>
+              <a:t>Same budget. Same model. Same code.</a:t>
             </a:r>
           </a:p>
         </p:txBody>
@@ -4410,7 +5209,7 @@
                 </a:solidFill>
                 <a:latin typeface="Helvetica Neue"/>
               </a:rPr>
-              <a:t>What each strategy actually bought. Flat bars at the top, lopsided ones at the bottom.</a:t>
+              <a:t>Only the choice of WHICH 240 tickets to pay for changed.</a:t>
             </a:r>
           </a:p>
         </p:txBody>
@@ -4452,7 +5251,7 @@
       </p:sp>
       <p:pic>
         <p:nvPicPr>
-          <p:cNvPr id="6" name="Picture 5" descr="fig_mix.png"/>
+          <p:cNvPr id="6" name="Picture 5" descr="d_reveal.png"/>
           <p:cNvPicPr>
             <a:picLocks noChangeAspect="1"/>
           </p:cNvPicPr>
@@ -4466,8 +5265,8 @@
         </p:blipFill>
         <p:spPr>
           <a:xfrm>
-            <a:off x="1261658" y="1965960"/>
-            <a:ext cx="9668377" cy="3977639"/>
+            <a:off x="883767" y="2620080"/>
+            <a:ext cx="10424160" cy="2623678"/>
           </a:xfrm>
           <a:prstGeom prst="rect">
             <a:avLst/>
@@ -4476,230 +5275,35 @@
       </p:pic>
       <p:sp>
         <p:nvSpPr>
-          <p:cNvPr id="7" name="Rounded Rectangle 6"/>
-          <p:cNvSpPr/>
-          <p:nvPr/>
-        </p:nvSpPr>
-        <p:spPr>
-          <a:xfrm>
-            <a:off x="7773314" y="6345936"/>
-            <a:ext cx="3778300" cy="365760"/>
-          </a:xfrm>
-          <a:prstGeom prst="roundRect">
-            <a:avLst>
-              <a:gd name="adj" fmla="val 44000"/>
-            </a:avLst>
-          </a:prstGeom>
-          <a:solidFill>
-            <a:srgbClr val="059669"/>
-          </a:solidFill>
-          <a:ln>
-            <a:noFill/>
-          </a:ln>
-        </p:spPr>
-        <p:style>
-          <a:lnRef idx="1">
-            <a:schemeClr val="accent1"/>
-          </a:lnRef>
-          <a:fillRef idx="3">
-            <a:schemeClr val="accent1"/>
-          </a:fillRef>
-          <a:effectRef idx="2">
-            <a:schemeClr val="accent1"/>
-          </a:effectRef>
-          <a:fontRef idx="minor">
-            <a:schemeClr val="lt1"/>
-          </a:fontRef>
-        </p:style>
-        <p:txBody>
-          <a:bodyPr rtlCol="0" anchor="ctr"/>
+          <p:cNvPr id="7" name="TextBox 6"/>
+          <p:cNvSpPr txBox="1"/>
+          <p:nvPr/>
+        </p:nvSpPr>
+        <p:spPr>
+          <a:xfrm>
+            <a:off x="640080" y="5897880"/>
+            <a:ext cx="10881360" cy="457200"/>
+          </a:xfrm>
+          <a:prstGeom prst="rect">
+            <a:avLst/>
+          </a:prstGeom>
+          <a:noFill/>
+        </p:spPr>
+        <p:txBody>
+          <a:bodyPr wrap="square" lIns="0" rIns="0" tIns="0" bIns="0">
+            <a:spAutoFit/>
+          </a:bodyPr>
           <a:lstStyle/>
           <a:p>
             <a:pPr algn="ctr"/>
-          </a:p>
-        </p:txBody>
-      </p:sp>
-      <p:sp>
-        <p:nvSpPr>
-          <p:cNvPr id="8" name="Rounded Rectangle 7"/>
-          <p:cNvSpPr/>
-          <p:nvPr/>
-        </p:nvSpPr>
-        <p:spPr>
-          <a:xfrm>
-            <a:off x="8815730" y="6396228"/>
-            <a:ext cx="754380" cy="265176"/>
-          </a:xfrm>
-          <a:prstGeom prst="roundRect">
-            <a:avLst>
-              <a:gd name="adj" fmla="val 44000"/>
-            </a:avLst>
-          </a:prstGeom>
-          <a:solidFill>
-            <a:srgbClr val="064E3B"/>
-          </a:solidFill>
-          <a:ln>
-            <a:noFill/>
-          </a:ln>
-        </p:spPr>
-        <p:style>
-          <a:lnRef idx="1">
-            <a:schemeClr val="accent1"/>
-          </a:lnRef>
-          <a:fillRef idx="3">
-            <a:schemeClr val="accent1"/>
-          </a:fillRef>
-          <a:effectRef idx="2">
-            <a:schemeClr val="accent1"/>
-          </a:effectRef>
-          <a:fontRef idx="minor">
-            <a:schemeClr val="lt1"/>
-          </a:fontRef>
-        </p:style>
-        <p:txBody>
-          <a:bodyPr rtlCol="0" anchor="ctr"/>
-          <a:lstStyle/>
-          <a:p>
-            <a:pPr algn="ctr"/>
-          </a:p>
-        </p:txBody>
-      </p:sp>
-      <p:sp>
-        <p:nvSpPr>
-          <p:cNvPr id="9" name="TextBox 8"/>
-          <p:cNvSpPr txBox="1"/>
-          <p:nvPr/>
-        </p:nvSpPr>
-        <p:spPr>
-          <a:xfrm>
-            <a:off x="7928762" y="6460236"/>
-            <a:ext cx="914400" cy="219456"/>
-          </a:xfrm>
-          <a:prstGeom prst="rect">
-            <a:avLst/>
-          </a:prstGeom>
-          <a:noFill/>
-        </p:spPr>
-        <p:txBody>
-          <a:bodyPr wrap="none" lIns="0" rIns="0" tIns="0" bIns="0">
-            <a:spAutoFit/>
-          </a:bodyPr>
-          <a:lstStyle/>
-          <a:p>
-            <a:pPr algn="l"/>
-            <a:r>
-              <a:rPr sz="950" b="1" i="0">
-                <a:solidFill>
-                  <a:srgbClr val="A7F3D0"/>
-                </a:solidFill>
-                <a:latin typeface="Helvetica Neue"/>
-              </a:rPr>
-              <a:t>▶ NOTEBOOK</a:t>
-            </a:r>
-          </a:p>
-        </p:txBody>
-      </p:sp>
-      <p:sp>
-        <p:nvSpPr>
-          <p:cNvPr id="10" name="TextBox 9"/>
-          <p:cNvSpPr txBox="1"/>
-          <p:nvPr/>
-        </p:nvSpPr>
-        <p:spPr>
-          <a:xfrm>
-            <a:off x="8815730" y="6451092"/>
-            <a:ext cx="754380" cy="219456"/>
-          </a:xfrm>
-          <a:prstGeom prst="rect">
-            <a:avLst/>
-          </a:prstGeom>
-          <a:noFill/>
-        </p:spPr>
-        <p:txBody>
-          <a:bodyPr wrap="none" lIns="0" rIns="0" tIns="0" bIns="0">
-            <a:spAutoFit/>
-          </a:bodyPr>
-          <a:lstStyle/>
-          <a:p>
-            <a:pPr algn="ctr"/>
-            <a:r>
-              <a:rPr sz="1100" b="1" i="0">
-                <a:solidFill>
-                  <a:srgbClr val="FFFFFF"/>
-                </a:solidFill>
-                <a:latin typeface="Helvetica Neue"/>
-              </a:rPr>
-              <a:t>STEP 19</a:t>
-            </a:r>
-          </a:p>
-        </p:txBody>
-      </p:sp>
-      <p:sp>
-        <p:nvSpPr>
-          <p:cNvPr id="11" name="TextBox 10"/>
-          <p:cNvSpPr txBox="1"/>
-          <p:nvPr/>
-        </p:nvSpPr>
-        <p:spPr>
-          <a:xfrm>
-            <a:off x="9688982" y="6460236"/>
-            <a:ext cx="1762048" cy="219456"/>
-          </a:xfrm>
-          <a:prstGeom prst="rect">
-            <a:avLst/>
-          </a:prstGeom>
-          <a:noFill/>
-        </p:spPr>
-        <p:txBody>
-          <a:bodyPr wrap="none" lIns="0" rIns="0" tIns="0" bIns="0">
-            <a:spAutoFit/>
-          </a:bodyPr>
-          <a:lstStyle/>
-          <a:p>
-            <a:pPr algn="l"/>
-            <a:r>
-              <a:rPr sz="1000" b="1" i="0">
-                <a:solidFill>
-                  <a:srgbClr val="FFFFFF"/>
-                </a:solidFill>
-                <a:latin typeface="Helvetica Neue"/>
-              </a:rPr>
-              <a:t>Why the winner won</a:t>
-            </a:r>
-          </a:p>
-        </p:txBody>
-      </p:sp>
-      <p:sp>
-        <p:nvSpPr>
-          <p:cNvPr id="12" name="TextBox 11"/>
-          <p:cNvSpPr txBox="1"/>
-          <p:nvPr/>
-        </p:nvSpPr>
-        <p:spPr>
-          <a:xfrm>
-            <a:off x="640080" y="6016752"/>
-            <a:ext cx="10881360" cy="365760"/>
-          </a:xfrm>
-          <a:prstGeom prst="rect">
-            <a:avLst/>
-          </a:prstGeom>
-          <a:noFill/>
-        </p:spPr>
-        <p:txBody>
-          <a:bodyPr wrap="square" lIns="0" rIns="0" tIns="0" bIns="0">
-            <a:spAutoFit/>
-          </a:bodyPr>
-          <a:lstStyle/>
-          <a:p>
-            <a:pPr algn="ctr"/>
-            <a:r>
-              <a:rPr sz="1500" b="0" i="1">
-                <a:solidFill>
-                  <a:srgbClr val="475569"/>
-                </a:solidFill>
-                <a:latin typeface="Helvetica Neue"/>
-              </a:rPr>
-              <a:t>Nobody could balance on the true labels: that is what we were paying for. Covering the vector space bought an even spread anyway, for free.</a:t>
+            <a:r>
+              <a:rPr sz="1600" b="1" i="0">
+                <a:solidFill>
+                  <a:srgbClr val="0F172A"/>
+                </a:solidFill>
+                <a:latin typeface="Helvetica Neue"/>
+              </a:rPr>
+              <a:t>0.247 macro-F1 points between best and worst, for exactly the same money. Only one strategy beat random, and every rule that ranked by a score lost to it.</a:t>
             </a:r>
           </a:p>
         </p:txBody>
@@ -4787,7 +5391,7 @@
                 </a:solidFill>
                 <a:latin typeface="Helvetica Neue"/>
               </a:rPr>
-              <a:t>And it is not a coincidence.</a:t>
+              <a:t>Cover the space, not the score.</a:t>
             </a:r>
           </a:p>
         </p:txBody>
@@ -4822,7 +5426,7 @@
                 </a:solidFill>
                 <a:latin typeface="Helvetica Neue"/>
               </a:rPr>
-              <a:t>Every strategy from the reveal, plotted by how lopsided its purchase turned out.</a:t>
+              <a:t>What each strategy actually bought. Flat bars at the top, lopsided ones at the bottom.</a:t>
             </a:r>
           </a:p>
         </p:txBody>
@@ -4864,7 +5468,7 @@
       </p:sp>
       <p:pic>
         <p:nvPicPr>
-          <p:cNvPr id="6" name="Picture 5" descr="fig_imbal.png"/>
+          <p:cNvPr id="6" name="Picture 5" descr="fig_mix.png"/>
           <p:cNvPicPr>
             <a:picLocks noChangeAspect="1"/>
           </p:cNvPicPr>
@@ -4878,8 +5482,8 @@
         </p:blipFill>
         <p:spPr>
           <a:xfrm>
-            <a:off x="2300333" y="2011680"/>
-            <a:ext cx="7591027" cy="3977639"/>
+            <a:off x="1261658" y="1965960"/>
+            <a:ext cx="9668377" cy="3977639"/>
           </a:xfrm>
           <a:prstGeom prst="rect">
             <a:avLst/>
@@ -4888,13 +5492,208 @@
       </p:pic>
       <p:sp>
         <p:nvSpPr>
-          <p:cNvPr id="7" name="TextBox 6"/>
-          <p:cNvSpPr txBox="1"/>
-          <p:nvPr/>
-        </p:nvSpPr>
-        <p:spPr>
-          <a:xfrm>
-            <a:off x="640080" y="6053328"/>
+          <p:cNvPr id="7" name="Rounded Rectangle 6"/>
+          <p:cNvSpPr/>
+          <p:nvPr/>
+        </p:nvSpPr>
+        <p:spPr>
+          <a:xfrm>
+            <a:off x="7773314" y="6345936"/>
+            <a:ext cx="3778300" cy="365760"/>
+          </a:xfrm>
+          <a:prstGeom prst="roundRect">
+            <a:avLst>
+              <a:gd name="adj" fmla="val 44000"/>
+            </a:avLst>
+          </a:prstGeom>
+          <a:solidFill>
+            <a:srgbClr val="059669"/>
+          </a:solidFill>
+          <a:ln>
+            <a:noFill/>
+          </a:ln>
+        </p:spPr>
+        <p:style>
+          <a:lnRef idx="1">
+            <a:schemeClr val="accent1"/>
+          </a:lnRef>
+          <a:fillRef idx="3">
+            <a:schemeClr val="accent1"/>
+          </a:fillRef>
+          <a:effectRef idx="2">
+            <a:schemeClr val="accent1"/>
+          </a:effectRef>
+          <a:fontRef idx="minor">
+            <a:schemeClr val="lt1"/>
+          </a:fontRef>
+        </p:style>
+        <p:txBody>
+          <a:bodyPr rtlCol="0" anchor="ctr"/>
+          <a:lstStyle/>
+          <a:p>
+            <a:pPr algn="ctr"/>
+          </a:p>
+        </p:txBody>
+      </p:sp>
+      <p:sp>
+        <p:nvSpPr>
+          <p:cNvPr id="8" name="Rounded Rectangle 7"/>
+          <p:cNvSpPr/>
+          <p:nvPr/>
+        </p:nvSpPr>
+        <p:spPr>
+          <a:xfrm>
+            <a:off x="8815730" y="6396228"/>
+            <a:ext cx="754380" cy="265176"/>
+          </a:xfrm>
+          <a:prstGeom prst="roundRect">
+            <a:avLst>
+              <a:gd name="adj" fmla="val 44000"/>
+            </a:avLst>
+          </a:prstGeom>
+          <a:solidFill>
+            <a:srgbClr val="064E3B"/>
+          </a:solidFill>
+          <a:ln>
+            <a:noFill/>
+          </a:ln>
+        </p:spPr>
+        <p:style>
+          <a:lnRef idx="1">
+            <a:schemeClr val="accent1"/>
+          </a:lnRef>
+          <a:fillRef idx="3">
+            <a:schemeClr val="accent1"/>
+          </a:fillRef>
+          <a:effectRef idx="2">
+            <a:schemeClr val="accent1"/>
+          </a:effectRef>
+          <a:fontRef idx="minor">
+            <a:schemeClr val="lt1"/>
+          </a:fontRef>
+        </p:style>
+        <p:txBody>
+          <a:bodyPr rtlCol="0" anchor="ctr"/>
+          <a:lstStyle/>
+          <a:p>
+            <a:pPr algn="ctr"/>
+          </a:p>
+        </p:txBody>
+      </p:sp>
+      <p:sp>
+        <p:nvSpPr>
+          <p:cNvPr id="9" name="TextBox 8"/>
+          <p:cNvSpPr txBox="1"/>
+          <p:nvPr/>
+        </p:nvSpPr>
+        <p:spPr>
+          <a:xfrm>
+            <a:off x="7928762" y="6460236"/>
+            <a:ext cx="914400" cy="219456"/>
+          </a:xfrm>
+          <a:prstGeom prst="rect">
+            <a:avLst/>
+          </a:prstGeom>
+          <a:noFill/>
+        </p:spPr>
+        <p:txBody>
+          <a:bodyPr wrap="none" lIns="0" rIns="0" tIns="0" bIns="0">
+            <a:spAutoFit/>
+          </a:bodyPr>
+          <a:lstStyle/>
+          <a:p>
+            <a:pPr algn="l"/>
+            <a:r>
+              <a:rPr sz="950" b="1" i="0">
+                <a:solidFill>
+                  <a:srgbClr val="A7F3D0"/>
+                </a:solidFill>
+                <a:latin typeface="Helvetica Neue"/>
+              </a:rPr>
+              <a:t>▶ NOTEBOOK</a:t>
+            </a:r>
+          </a:p>
+        </p:txBody>
+      </p:sp>
+      <p:sp>
+        <p:nvSpPr>
+          <p:cNvPr id="10" name="TextBox 9"/>
+          <p:cNvSpPr txBox="1"/>
+          <p:nvPr/>
+        </p:nvSpPr>
+        <p:spPr>
+          <a:xfrm>
+            <a:off x="8815730" y="6451092"/>
+            <a:ext cx="754380" cy="219456"/>
+          </a:xfrm>
+          <a:prstGeom prst="rect">
+            <a:avLst/>
+          </a:prstGeom>
+          <a:noFill/>
+        </p:spPr>
+        <p:txBody>
+          <a:bodyPr wrap="none" lIns="0" rIns="0" tIns="0" bIns="0">
+            <a:spAutoFit/>
+          </a:bodyPr>
+          <a:lstStyle/>
+          <a:p>
+            <a:pPr algn="ctr"/>
+            <a:r>
+              <a:rPr sz="1100" b="1" i="0">
+                <a:solidFill>
+                  <a:srgbClr val="FFFFFF"/>
+                </a:solidFill>
+                <a:latin typeface="Helvetica Neue"/>
+              </a:rPr>
+              <a:t>STEP 19</a:t>
+            </a:r>
+          </a:p>
+        </p:txBody>
+      </p:sp>
+      <p:sp>
+        <p:nvSpPr>
+          <p:cNvPr id="11" name="TextBox 10"/>
+          <p:cNvSpPr txBox="1"/>
+          <p:nvPr/>
+        </p:nvSpPr>
+        <p:spPr>
+          <a:xfrm>
+            <a:off x="9688982" y="6460236"/>
+            <a:ext cx="1762048" cy="219456"/>
+          </a:xfrm>
+          <a:prstGeom prst="rect">
+            <a:avLst/>
+          </a:prstGeom>
+          <a:noFill/>
+        </p:spPr>
+        <p:txBody>
+          <a:bodyPr wrap="none" lIns="0" rIns="0" tIns="0" bIns="0">
+            <a:spAutoFit/>
+          </a:bodyPr>
+          <a:lstStyle/>
+          <a:p>
+            <a:pPr algn="l"/>
+            <a:r>
+              <a:rPr sz="1000" b="1" i="0">
+                <a:solidFill>
+                  <a:srgbClr val="FFFFFF"/>
+                </a:solidFill>
+                <a:latin typeface="Helvetica Neue"/>
+              </a:rPr>
+              <a:t>Why the winner won</a:t>
+            </a:r>
+          </a:p>
+        </p:txBody>
+      </p:sp>
+      <p:sp>
+        <p:nvSpPr>
+          <p:cNvPr id="12" name="TextBox 11"/>
+          <p:cNvSpPr txBox="1"/>
+          <p:nvPr/>
+        </p:nvSpPr>
+        <p:spPr>
+          <a:xfrm>
+            <a:off x="640080" y="6016752"/>
             <a:ext cx="10881360" cy="365760"/>
           </a:xfrm>
           <a:prstGeom prst="rect">
@@ -4916,7 +5715,7 @@
                 </a:solidFill>
                 <a:latin typeface="Helvetica Neue"/>
               </a:rPr>
-              <a:t>Your selection rule quietly chooses your training distribution. Any rule that sorts by a score will skew it, and nobody notices until the model has a hole in it.</a:t>
+              <a:t>Nobody could balance on the true labels: that is what we were paying for. Covering the vector space bought an even spread anyway, for free.</a:t>
             </a:r>
           </a:p>
         </p:txBody>
@@ -4965,11 +5764,11 @@
             <a:r>
               <a:rPr sz="1250" b="1" i="0" spc="220">
                 <a:solidFill>
-                  <a:srgbClr val="E11D48"/>
-                </a:solidFill>
-                <a:latin typeface="Helvetica Neue"/>
-              </a:rPr>
-              <a:t>THE TOP OF THE LADDER</a:t>
+                  <a:srgbClr val="7C3AED"/>
+                </a:solidFill>
+                <a:latin typeface="Helvetica Neue"/>
+              </a:rPr>
+              <a:t>WHY THE WINNER WON</a:t>
             </a:r>
           </a:p>
         </p:txBody>
@@ -4983,7 +5782,7 @@
         <p:spPr>
           <a:xfrm>
             <a:off x="640080" y="758952"/>
-            <a:ext cx="7315200" cy="704088"/>
+            <a:ext cx="10972800" cy="704088"/>
           </a:xfrm>
           <a:prstGeom prst="rect">
             <a:avLst/>
@@ -5004,7 +5803,7 @@
                 </a:solidFill>
                 <a:latin typeface="Helvetica Neue"/>
               </a:rPr>
-              <a:t>Should Cobalt train its own model?</a:t>
+              <a:t>And it is not a coincidence.</a:t>
             </a:r>
           </a:p>
         </p:txBody>
@@ -5039,617 +5838,14 @@
                 </a:solidFill>
                 <a:latin typeface="Helvetica Neue"/>
               </a:rPr>
-              <a:t>Somebody in the room is thinking it, so let us price it honestly.</a:t>
-            </a:r>
-          </a:p>
-        </p:txBody>
-      </p:sp>
-      <p:sp>
-        <p:nvSpPr>
-          <p:cNvPr id="5" name="Rounded Rectangle 4"/>
-          <p:cNvSpPr/>
-          <p:nvPr/>
-        </p:nvSpPr>
-        <p:spPr>
-          <a:xfrm>
-            <a:off x="8302752" y="593445"/>
-            <a:ext cx="2852928" cy="20116"/>
-          </a:xfrm>
-          <a:prstGeom prst="roundRect">
-            <a:avLst/>
-          </a:prstGeom>
-          <a:solidFill>
-            <a:srgbClr val="E9EBF0"/>
-          </a:solidFill>
-          <a:ln>
-            <a:noFill/>
-          </a:ln>
-        </p:spPr>
-        <p:style>
-          <a:lnRef idx="1">
-            <a:schemeClr val="accent1"/>
-          </a:lnRef>
-          <a:fillRef idx="3">
-            <a:schemeClr val="accent1"/>
-          </a:fillRef>
-          <a:effectRef idx="2">
-            <a:schemeClr val="accent1"/>
-          </a:effectRef>
-          <a:fontRef idx="minor">
-            <a:schemeClr val="lt1"/>
-          </a:fontRef>
-        </p:style>
-        <p:txBody>
-          <a:bodyPr rtlCol="0" anchor="ctr"/>
-          <a:lstStyle/>
-          <a:p>
-            <a:pPr algn="ctr"/>
-          </a:p>
-        </p:txBody>
-      </p:sp>
-      <p:sp>
-        <p:nvSpPr>
-          <p:cNvPr id="6" name="Rounded Rectangle 5"/>
-          <p:cNvSpPr/>
-          <p:nvPr/>
-        </p:nvSpPr>
-        <p:spPr>
-          <a:xfrm>
-            <a:off x="8220455" y="493776"/>
-            <a:ext cx="219456" cy="219456"/>
-          </a:xfrm>
-          <a:prstGeom prst="roundRect">
-            <a:avLst>
-              <a:gd name="adj" fmla="val 32000"/>
-            </a:avLst>
-          </a:prstGeom>
-          <a:solidFill>
-            <a:srgbClr val="0EA5E9"/>
-          </a:solidFill>
-          <a:ln>
-            <a:noFill/>
-          </a:ln>
-        </p:spPr>
-        <p:style>
-          <a:lnRef idx="1">
-            <a:schemeClr val="accent1"/>
-          </a:lnRef>
-          <a:fillRef idx="3">
-            <a:schemeClr val="accent1"/>
-          </a:fillRef>
-          <a:effectRef idx="2">
-            <a:schemeClr val="accent1"/>
-          </a:effectRef>
-          <a:fontRef idx="minor">
-            <a:schemeClr val="lt1"/>
-          </a:fontRef>
-        </p:style>
-        <p:txBody>
-          <a:bodyPr rtlCol="0" anchor="ctr"/>
-          <a:lstStyle/>
-          <a:p>
-            <a:pPr algn="ctr"/>
-          </a:p>
-        </p:txBody>
-      </p:sp>
-      <p:sp>
-        <p:nvSpPr>
-          <p:cNvPr id="7" name="TextBox 6"/>
-          <p:cNvSpPr txBox="1"/>
-          <p:nvPr/>
-        </p:nvSpPr>
-        <p:spPr>
-          <a:xfrm>
-            <a:off x="8165591" y="489204"/>
-            <a:ext cx="329184" cy="228600"/>
-          </a:xfrm>
-          <a:prstGeom prst="rect">
-            <a:avLst/>
-          </a:prstGeom>
-          <a:noFill/>
-        </p:spPr>
-        <p:txBody>
-          <a:bodyPr wrap="square" lIns="0" rIns="0" tIns="0" bIns="0">
-            <a:spAutoFit/>
-          </a:bodyPr>
-          <a:lstStyle/>
-          <a:p>
-            <a:pPr algn="ctr"/>
-            <a:r>
-              <a:rPr sz="950" b="1" i="0">
-                <a:solidFill>
-                  <a:srgbClr val="FFFFFF"/>
-                </a:solidFill>
-                <a:latin typeface="Helvetica Neue"/>
-              </a:rPr>
-              <a:t>1</a:t>
-            </a:r>
-          </a:p>
-        </p:txBody>
-      </p:sp>
-      <p:sp>
-        <p:nvSpPr>
-          <p:cNvPr id="8" name="Rounded Rectangle 7"/>
-          <p:cNvSpPr/>
-          <p:nvPr/>
-        </p:nvSpPr>
-        <p:spPr>
-          <a:xfrm>
-            <a:off x="8695943" y="493776"/>
-            <a:ext cx="219456" cy="219456"/>
-          </a:xfrm>
-          <a:prstGeom prst="roundRect">
-            <a:avLst>
-              <a:gd name="adj" fmla="val 32000"/>
-            </a:avLst>
-          </a:prstGeom>
-          <a:solidFill>
-            <a:srgbClr val="0EA5E9"/>
-          </a:solidFill>
-          <a:ln>
-            <a:noFill/>
-          </a:ln>
-        </p:spPr>
-        <p:style>
-          <a:lnRef idx="1">
-            <a:schemeClr val="accent1"/>
-          </a:lnRef>
-          <a:fillRef idx="3">
-            <a:schemeClr val="accent1"/>
-          </a:fillRef>
-          <a:effectRef idx="2">
-            <a:schemeClr val="accent1"/>
-          </a:effectRef>
-          <a:fontRef idx="minor">
-            <a:schemeClr val="lt1"/>
-          </a:fontRef>
-        </p:style>
-        <p:txBody>
-          <a:bodyPr rtlCol="0" anchor="ctr"/>
-          <a:lstStyle/>
-          <a:p>
-            <a:pPr algn="ctr"/>
-          </a:p>
-        </p:txBody>
-      </p:sp>
-      <p:sp>
-        <p:nvSpPr>
-          <p:cNvPr id="9" name="TextBox 8"/>
-          <p:cNvSpPr txBox="1"/>
-          <p:nvPr/>
-        </p:nvSpPr>
-        <p:spPr>
-          <a:xfrm>
-            <a:off x="8641079" y="489204"/>
-            <a:ext cx="329184" cy="228600"/>
-          </a:xfrm>
-          <a:prstGeom prst="rect">
-            <a:avLst/>
-          </a:prstGeom>
-          <a:noFill/>
-        </p:spPr>
-        <p:txBody>
-          <a:bodyPr wrap="square" lIns="0" rIns="0" tIns="0" bIns="0">
-            <a:spAutoFit/>
-          </a:bodyPr>
-          <a:lstStyle/>
-          <a:p>
-            <a:pPr algn="ctr"/>
-            <a:r>
-              <a:rPr sz="950" b="1" i="0">
-                <a:solidFill>
-                  <a:srgbClr val="FFFFFF"/>
-                </a:solidFill>
-                <a:latin typeface="Helvetica Neue"/>
-              </a:rPr>
-              <a:t>2</a:t>
-            </a:r>
-          </a:p>
-        </p:txBody>
-      </p:sp>
-      <p:sp>
-        <p:nvSpPr>
-          <p:cNvPr id="10" name="Rounded Rectangle 9"/>
-          <p:cNvSpPr/>
-          <p:nvPr/>
-        </p:nvSpPr>
-        <p:spPr>
-          <a:xfrm>
-            <a:off x="9171431" y="493776"/>
-            <a:ext cx="219456" cy="219456"/>
-          </a:xfrm>
-          <a:prstGeom prst="roundRect">
-            <a:avLst>
-              <a:gd name="adj" fmla="val 32000"/>
-            </a:avLst>
-          </a:prstGeom>
-          <a:solidFill>
-            <a:srgbClr val="D97706"/>
-          </a:solidFill>
-          <a:ln>
-            <a:noFill/>
-          </a:ln>
-        </p:spPr>
-        <p:style>
-          <a:lnRef idx="1">
-            <a:schemeClr val="accent1"/>
-          </a:lnRef>
-          <a:fillRef idx="3">
-            <a:schemeClr val="accent1"/>
-          </a:fillRef>
-          <a:effectRef idx="2">
-            <a:schemeClr val="accent1"/>
-          </a:effectRef>
-          <a:fontRef idx="minor">
-            <a:schemeClr val="lt1"/>
-          </a:fontRef>
-        </p:style>
-        <p:txBody>
-          <a:bodyPr rtlCol="0" anchor="ctr"/>
-          <a:lstStyle/>
-          <a:p>
-            <a:pPr algn="ctr"/>
-          </a:p>
-        </p:txBody>
-      </p:sp>
-      <p:sp>
-        <p:nvSpPr>
-          <p:cNvPr id="11" name="TextBox 10"/>
-          <p:cNvSpPr txBox="1"/>
-          <p:nvPr/>
-        </p:nvSpPr>
-        <p:spPr>
-          <a:xfrm>
-            <a:off x="9116567" y="489204"/>
-            <a:ext cx="329184" cy="228600"/>
-          </a:xfrm>
-          <a:prstGeom prst="rect">
-            <a:avLst/>
-          </a:prstGeom>
-          <a:noFill/>
-        </p:spPr>
-        <p:txBody>
-          <a:bodyPr wrap="square" lIns="0" rIns="0" tIns="0" bIns="0">
-            <a:spAutoFit/>
-          </a:bodyPr>
-          <a:lstStyle/>
-          <a:p>
-            <a:pPr algn="ctr"/>
-            <a:r>
-              <a:rPr sz="950" b="1" i="0">
-                <a:solidFill>
-                  <a:srgbClr val="FFFFFF"/>
-                </a:solidFill>
-                <a:latin typeface="Helvetica Neue"/>
-              </a:rPr>
-              <a:t>3</a:t>
-            </a:r>
-          </a:p>
-        </p:txBody>
-      </p:sp>
-      <p:sp>
-        <p:nvSpPr>
-          <p:cNvPr id="12" name="Rounded Rectangle 11"/>
-          <p:cNvSpPr/>
-          <p:nvPr/>
-        </p:nvSpPr>
-        <p:spPr>
-          <a:xfrm>
-            <a:off x="9646919" y="493776"/>
-            <a:ext cx="219456" cy="219456"/>
-          </a:xfrm>
-          <a:prstGeom prst="roundRect">
-            <a:avLst>
-              <a:gd name="adj" fmla="val 32000"/>
-            </a:avLst>
-          </a:prstGeom>
-          <a:solidFill>
-            <a:srgbClr val="059669"/>
-          </a:solidFill>
-          <a:ln>
-            <a:noFill/>
-          </a:ln>
-        </p:spPr>
-        <p:style>
-          <a:lnRef idx="1">
-            <a:schemeClr val="accent1"/>
-          </a:lnRef>
-          <a:fillRef idx="3">
-            <a:schemeClr val="accent1"/>
-          </a:fillRef>
-          <a:effectRef idx="2">
-            <a:schemeClr val="accent1"/>
-          </a:effectRef>
-          <a:fontRef idx="minor">
-            <a:schemeClr val="lt1"/>
-          </a:fontRef>
-        </p:style>
-        <p:txBody>
-          <a:bodyPr rtlCol="0" anchor="ctr"/>
-          <a:lstStyle/>
-          <a:p>
-            <a:pPr algn="ctr"/>
-          </a:p>
-        </p:txBody>
-      </p:sp>
-      <p:sp>
-        <p:nvSpPr>
-          <p:cNvPr id="13" name="TextBox 12"/>
-          <p:cNvSpPr txBox="1"/>
-          <p:nvPr/>
-        </p:nvSpPr>
-        <p:spPr>
-          <a:xfrm>
-            <a:off x="9592055" y="489204"/>
-            <a:ext cx="329184" cy="228600"/>
-          </a:xfrm>
-          <a:prstGeom prst="rect">
-            <a:avLst/>
-          </a:prstGeom>
-          <a:noFill/>
-        </p:spPr>
-        <p:txBody>
-          <a:bodyPr wrap="square" lIns="0" rIns="0" tIns="0" bIns="0">
-            <a:spAutoFit/>
-          </a:bodyPr>
-          <a:lstStyle/>
-          <a:p>
-            <a:pPr algn="ctr"/>
-            <a:r>
-              <a:rPr sz="950" b="1" i="0">
-                <a:solidFill>
-                  <a:srgbClr val="FFFFFF"/>
-                </a:solidFill>
-                <a:latin typeface="Helvetica Neue"/>
-              </a:rPr>
-              <a:t>4</a:t>
-            </a:r>
-          </a:p>
-        </p:txBody>
-      </p:sp>
-      <p:sp>
-        <p:nvSpPr>
-          <p:cNvPr id="14" name="Rounded Rectangle 13"/>
-          <p:cNvSpPr/>
-          <p:nvPr/>
-        </p:nvSpPr>
-        <p:spPr>
-          <a:xfrm>
-            <a:off x="10122407" y="493776"/>
-            <a:ext cx="219456" cy="219456"/>
-          </a:xfrm>
-          <a:prstGeom prst="roundRect">
-            <a:avLst>
-              <a:gd name="adj" fmla="val 32000"/>
-            </a:avLst>
-          </a:prstGeom>
-          <a:solidFill>
-            <a:srgbClr val="059669"/>
-          </a:solidFill>
-          <a:ln>
-            <a:noFill/>
-          </a:ln>
-        </p:spPr>
-        <p:style>
-          <a:lnRef idx="1">
-            <a:schemeClr val="accent1"/>
-          </a:lnRef>
-          <a:fillRef idx="3">
-            <a:schemeClr val="accent1"/>
-          </a:fillRef>
-          <a:effectRef idx="2">
-            <a:schemeClr val="accent1"/>
-          </a:effectRef>
-          <a:fontRef idx="minor">
-            <a:schemeClr val="lt1"/>
-          </a:fontRef>
-        </p:style>
-        <p:txBody>
-          <a:bodyPr rtlCol="0" anchor="ctr"/>
-          <a:lstStyle/>
-          <a:p>
-            <a:pPr algn="ctr"/>
-          </a:p>
-        </p:txBody>
-      </p:sp>
-      <p:sp>
-        <p:nvSpPr>
-          <p:cNvPr id="15" name="TextBox 14"/>
-          <p:cNvSpPr txBox="1"/>
-          <p:nvPr/>
-        </p:nvSpPr>
-        <p:spPr>
-          <a:xfrm>
-            <a:off x="10067543" y="489204"/>
-            <a:ext cx="329184" cy="228600"/>
-          </a:xfrm>
-          <a:prstGeom prst="rect">
-            <a:avLst/>
-          </a:prstGeom>
-          <a:noFill/>
-        </p:spPr>
-        <p:txBody>
-          <a:bodyPr wrap="square" lIns="0" rIns="0" tIns="0" bIns="0">
-            <a:spAutoFit/>
-          </a:bodyPr>
-          <a:lstStyle/>
-          <a:p>
-            <a:pPr algn="ctr"/>
-            <a:r>
-              <a:rPr sz="950" b="1" i="0">
-                <a:solidFill>
-                  <a:srgbClr val="FFFFFF"/>
-                </a:solidFill>
-                <a:latin typeface="Helvetica Neue"/>
-              </a:rPr>
-              <a:t>5</a:t>
-            </a:r>
-          </a:p>
-        </p:txBody>
-      </p:sp>
-      <p:sp>
-        <p:nvSpPr>
-          <p:cNvPr id="16" name="Rounded Rectangle 15"/>
-          <p:cNvSpPr/>
-          <p:nvPr/>
-        </p:nvSpPr>
-        <p:spPr>
-          <a:xfrm>
-            <a:off x="10561319" y="457200"/>
-            <a:ext cx="292608" cy="292608"/>
-          </a:xfrm>
-          <a:prstGeom prst="roundRect">
-            <a:avLst>
-              <a:gd name="adj" fmla="val 32000"/>
-            </a:avLst>
-          </a:prstGeom>
-          <a:solidFill>
-            <a:srgbClr val="7C3AED"/>
-          </a:solidFill>
-          <a:ln>
-            <a:noFill/>
-          </a:ln>
-        </p:spPr>
-        <p:style>
-          <a:lnRef idx="1">
-            <a:schemeClr val="accent1"/>
-          </a:lnRef>
-          <a:fillRef idx="3">
-            <a:schemeClr val="accent1"/>
-          </a:fillRef>
-          <a:effectRef idx="2">
-            <a:schemeClr val="accent1"/>
-          </a:effectRef>
-          <a:fontRef idx="minor">
-            <a:schemeClr val="lt1"/>
-          </a:fontRef>
-        </p:style>
-        <p:txBody>
-          <a:bodyPr rtlCol="0" anchor="ctr"/>
-          <a:lstStyle/>
-          <a:p>
-            <a:pPr algn="ctr"/>
-          </a:p>
-        </p:txBody>
-      </p:sp>
-      <p:sp>
-        <p:nvSpPr>
-          <p:cNvPr id="17" name="TextBox 16"/>
-          <p:cNvSpPr txBox="1"/>
-          <p:nvPr/>
-        </p:nvSpPr>
-        <p:spPr>
-          <a:xfrm>
-            <a:off x="10506455" y="489204"/>
-            <a:ext cx="402336" cy="228600"/>
-          </a:xfrm>
-          <a:prstGeom prst="rect">
-            <a:avLst/>
-          </a:prstGeom>
-          <a:noFill/>
-        </p:spPr>
-        <p:txBody>
-          <a:bodyPr wrap="square" lIns="0" rIns="0" tIns="0" bIns="0">
-            <a:spAutoFit/>
-          </a:bodyPr>
-          <a:lstStyle/>
-          <a:p>
-            <a:pPr algn="ctr"/>
-            <a:r>
-              <a:rPr sz="1200" b="1" i="0">
-                <a:solidFill>
-                  <a:srgbClr val="FFFFFF"/>
-                </a:solidFill>
-                <a:latin typeface="Helvetica Neue"/>
-              </a:rPr>
-              <a:t>6</a:t>
-            </a:r>
-          </a:p>
-        </p:txBody>
-      </p:sp>
-      <p:sp>
-        <p:nvSpPr>
-          <p:cNvPr id="18" name="Rounded Rectangle 17"/>
-          <p:cNvSpPr/>
-          <p:nvPr/>
-        </p:nvSpPr>
-        <p:spPr>
-          <a:xfrm>
-            <a:off x="11073384" y="493776"/>
-            <a:ext cx="219456" cy="219456"/>
-          </a:xfrm>
-          <a:prstGeom prst="roundRect">
-            <a:avLst>
-              <a:gd name="adj" fmla="val 32000"/>
-            </a:avLst>
-          </a:prstGeom>
-          <a:solidFill>
-            <a:srgbClr val="E9EBF0"/>
-          </a:solidFill>
-          <a:ln>
-            <a:noFill/>
-          </a:ln>
-        </p:spPr>
-        <p:style>
-          <a:lnRef idx="1">
-            <a:schemeClr val="accent1"/>
-          </a:lnRef>
-          <a:fillRef idx="3">
-            <a:schemeClr val="accent1"/>
-          </a:fillRef>
-          <a:effectRef idx="2">
-            <a:schemeClr val="accent1"/>
-          </a:effectRef>
-          <a:fontRef idx="minor">
-            <a:schemeClr val="lt1"/>
-          </a:fontRef>
-        </p:style>
-        <p:txBody>
-          <a:bodyPr rtlCol="0" anchor="ctr"/>
-          <a:lstStyle/>
-          <a:p>
-            <a:pPr algn="ctr"/>
-          </a:p>
-        </p:txBody>
-      </p:sp>
-      <p:sp>
-        <p:nvSpPr>
-          <p:cNvPr id="19" name="TextBox 18"/>
-          <p:cNvSpPr txBox="1"/>
-          <p:nvPr/>
-        </p:nvSpPr>
-        <p:spPr>
-          <a:xfrm>
-            <a:off x="11018519" y="489204"/>
-            <a:ext cx="329184" cy="228600"/>
-          </a:xfrm>
-          <a:prstGeom prst="rect">
-            <a:avLst/>
-          </a:prstGeom>
-          <a:noFill/>
-        </p:spPr>
-        <p:txBody>
-          <a:bodyPr wrap="square" lIns="0" rIns="0" tIns="0" bIns="0">
-            <a:spAutoFit/>
-          </a:bodyPr>
-          <a:lstStyle/>
-          <a:p>
-            <a:pPr algn="ctr"/>
-            <a:r>
-              <a:rPr sz="950" b="1" i="0">
-                <a:solidFill>
-                  <a:srgbClr val="AEB4BF"/>
-                </a:solidFill>
-                <a:latin typeface="Helvetica Neue"/>
-              </a:rPr>
-              <a:t>7</a:t>
-            </a:r>
-          </a:p>
-        </p:txBody>
-      </p:sp>
-      <p:sp>
-        <p:nvSpPr>
-          <p:cNvPr id="20" name="TextBox 19"/>
+              <a:t>Every strategy from the reveal, plotted by how lopsided its purchase turned out.</a:t>
+            </a:r>
+          </a:p>
+        </p:txBody>
+      </p:sp>
+      <p:sp>
+        <p:nvSpPr>
+          <p:cNvPr id="5" name="TextBox 4"/>
           <p:cNvSpPr txBox="1"/>
           <p:nvPr/>
         </p:nvSpPr>
@@ -5684,7 +5880,7 @@
       </p:sp>
       <p:pic>
         <p:nvPicPr>
-          <p:cNvPr id="21" name="Picture 20" descr="d_top.png"/>
+          <p:cNvPr id="6" name="Picture 5" descr="fig_imbal.png"/>
           <p:cNvPicPr>
             <a:picLocks noChangeAspect="1"/>
           </p:cNvPicPr>
@@ -5698,8 +5894,8 @@
         </p:blipFill>
         <p:spPr>
           <a:xfrm>
-            <a:off x="518007" y="3102514"/>
-            <a:ext cx="11155680" cy="2116011"/>
+            <a:off x="2300333" y="2011680"/>
+            <a:ext cx="7591027" cy="3977639"/>
           </a:xfrm>
           <a:prstGeom prst="rect">
             <a:avLst/>
@@ -5708,195 +5904,35 @@
       </p:pic>
       <p:sp>
         <p:nvSpPr>
-          <p:cNvPr id="22" name="Rounded Rectangle 21"/>
-          <p:cNvSpPr/>
-          <p:nvPr/>
-        </p:nvSpPr>
-        <p:spPr>
-          <a:xfrm>
-            <a:off x="6104534" y="6345936"/>
-            <a:ext cx="5447080" cy="365760"/>
-          </a:xfrm>
-          <a:prstGeom prst="roundRect">
-            <a:avLst>
-              <a:gd name="adj" fmla="val 44000"/>
-            </a:avLst>
-          </a:prstGeom>
-          <a:solidFill>
-            <a:srgbClr val="059669"/>
-          </a:solidFill>
-          <a:ln>
-            <a:noFill/>
-          </a:ln>
-        </p:spPr>
-        <p:style>
-          <a:lnRef idx="1">
-            <a:schemeClr val="accent1"/>
-          </a:lnRef>
-          <a:fillRef idx="3">
-            <a:schemeClr val="accent1"/>
-          </a:fillRef>
-          <a:effectRef idx="2">
-            <a:schemeClr val="accent1"/>
-          </a:effectRef>
-          <a:fontRef idx="minor">
-            <a:schemeClr val="lt1"/>
-          </a:fontRef>
-        </p:style>
-        <p:txBody>
-          <a:bodyPr rtlCol="0" anchor="ctr"/>
+          <p:cNvPr id="7" name="TextBox 6"/>
+          <p:cNvSpPr txBox="1"/>
+          <p:nvPr/>
+        </p:nvSpPr>
+        <p:spPr>
+          <a:xfrm>
+            <a:off x="640080" y="6053328"/>
+            <a:ext cx="10881360" cy="365760"/>
+          </a:xfrm>
+          <a:prstGeom prst="rect">
+            <a:avLst/>
+          </a:prstGeom>
+          <a:noFill/>
+        </p:spPr>
+        <p:txBody>
+          <a:bodyPr wrap="square" lIns="0" rIns="0" tIns="0" bIns="0">
+            <a:spAutoFit/>
+          </a:bodyPr>
           <a:lstStyle/>
           <a:p>
             <a:pPr algn="ctr"/>
-          </a:p>
-        </p:txBody>
-      </p:sp>
-      <p:sp>
-        <p:nvSpPr>
-          <p:cNvPr id="23" name="Rounded Rectangle 22"/>
-          <p:cNvSpPr/>
-          <p:nvPr/>
-        </p:nvSpPr>
-        <p:spPr>
-          <a:xfrm>
-            <a:off x="7146950" y="6396228"/>
-            <a:ext cx="754380" cy="265176"/>
-          </a:xfrm>
-          <a:prstGeom prst="roundRect">
-            <a:avLst>
-              <a:gd name="adj" fmla="val 44000"/>
-            </a:avLst>
-          </a:prstGeom>
-          <a:solidFill>
-            <a:srgbClr val="064E3B"/>
-          </a:solidFill>
-          <a:ln>
-            <a:noFill/>
-          </a:ln>
-        </p:spPr>
-        <p:style>
-          <a:lnRef idx="1">
-            <a:schemeClr val="accent1"/>
-          </a:lnRef>
-          <a:fillRef idx="3">
-            <a:schemeClr val="accent1"/>
-          </a:fillRef>
-          <a:effectRef idx="2">
-            <a:schemeClr val="accent1"/>
-          </a:effectRef>
-          <a:fontRef idx="minor">
-            <a:schemeClr val="lt1"/>
-          </a:fontRef>
-        </p:style>
-        <p:txBody>
-          <a:bodyPr rtlCol="0" anchor="ctr"/>
-          <a:lstStyle/>
-          <a:p>
-            <a:pPr algn="ctr"/>
-          </a:p>
-        </p:txBody>
-      </p:sp>
-      <p:sp>
-        <p:nvSpPr>
-          <p:cNvPr id="24" name="TextBox 23"/>
-          <p:cNvSpPr txBox="1"/>
-          <p:nvPr/>
-        </p:nvSpPr>
-        <p:spPr>
-          <a:xfrm>
-            <a:off x="6259982" y="6460236"/>
-            <a:ext cx="914400" cy="219456"/>
-          </a:xfrm>
-          <a:prstGeom prst="rect">
-            <a:avLst/>
-          </a:prstGeom>
-          <a:noFill/>
-        </p:spPr>
-        <p:txBody>
-          <a:bodyPr wrap="none" lIns="0" rIns="0" tIns="0" bIns="0">
-            <a:spAutoFit/>
-          </a:bodyPr>
-          <a:lstStyle/>
-          <a:p>
-            <a:pPr algn="l"/>
-            <a:r>
-              <a:rPr sz="950" b="1" i="0">
-                <a:solidFill>
-                  <a:srgbClr val="A7F3D0"/>
-                </a:solidFill>
-                <a:latin typeface="Helvetica Neue"/>
-              </a:rPr>
-              <a:t>▶ NOTEBOOK</a:t>
-            </a:r>
-          </a:p>
-        </p:txBody>
-      </p:sp>
-      <p:sp>
-        <p:nvSpPr>
-          <p:cNvPr id="25" name="TextBox 24"/>
-          <p:cNvSpPr txBox="1"/>
-          <p:nvPr/>
-        </p:nvSpPr>
-        <p:spPr>
-          <a:xfrm>
-            <a:off x="7146950" y="6451092"/>
-            <a:ext cx="754380" cy="219456"/>
-          </a:xfrm>
-          <a:prstGeom prst="rect">
-            <a:avLst/>
-          </a:prstGeom>
-          <a:noFill/>
-        </p:spPr>
-        <p:txBody>
-          <a:bodyPr wrap="none" lIns="0" rIns="0" tIns="0" bIns="0">
-            <a:spAutoFit/>
-          </a:bodyPr>
-          <a:lstStyle/>
-          <a:p>
-            <a:pPr algn="ctr"/>
-            <a:r>
-              <a:rPr sz="1100" b="1" i="0">
-                <a:solidFill>
-                  <a:srgbClr val="FFFFFF"/>
-                </a:solidFill>
-                <a:latin typeface="Helvetica Neue"/>
-              </a:rPr>
-              <a:t>STEP 20</a:t>
-            </a:r>
-          </a:p>
-        </p:txBody>
-      </p:sp>
-      <p:sp>
-        <p:nvSpPr>
-          <p:cNvPr id="26" name="TextBox 25"/>
-          <p:cNvSpPr txBox="1"/>
-          <p:nvPr/>
-        </p:nvSpPr>
-        <p:spPr>
-          <a:xfrm>
-            <a:off x="8020202" y="6460236"/>
-            <a:ext cx="3430828" cy="219456"/>
-          </a:xfrm>
-          <a:prstGeom prst="rect">
-            <a:avLst/>
-          </a:prstGeom>
-          <a:noFill/>
-        </p:spPr>
-        <p:txBody>
-          <a:bodyPr wrap="none" lIns="0" rIns="0" tIns="0" bIns="0">
-            <a:spAutoFit/>
-          </a:bodyPr>
-          <a:lstStyle/>
-          <a:p>
-            <a:pPr algn="l"/>
-            <a:r>
-              <a:rPr sz="1000" b="1" i="0">
-                <a:solidFill>
-                  <a:srgbClr val="FFFFFF"/>
-                </a:solidFill>
-                <a:latin typeface="Helvetica Neue"/>
-              </a:rPr>
-              <a:t>RUNGS 6 and 7: should Cobalt train its own?</a:t>
+            <a:r>
+              <a:rPr sz="1500" b="0" i="1">
+                <a:solidFill>
+                  <a:srgbClr val="475569"/>
+                </a:solidFill>
+                <a:latin typeface="Helvetica Neue"/>
+              </a:rPr>
+              <a:t>Your selection rule quietly chooses your training distribution. Any rule that sorts by a score will skew it, and nobody notices until the model has a hole in it.</a:t>
             </a:r>
           </a:p>
         </p:txBody>
@@ -5945,11 +5981,11 @@
             <a:r>
               <a:rPr sz="1250" b="1" i="0" spc="220">
                 <a:solidFill>
-                  <a:srgbClr val="4F46E5"/>
-                </a:solidFill>
-                <a:latin typeface="Helvetica Neue"/>
-              </a:rPr>
-              <a:t>FULL CIRCLE</a:t>
+                  <a:srgbClr val="E11D48"/>
+                </a:solidFill>
+                <a:latin typeface="Helvetica Neue"/>
+              </a:rPr>
+              <a:t>THE TOP OF THE LADDER</a:t>
             </a:r>
           </a:p>
         </p:txBody>
@@ -5963,7 +5999,7 @@
         <p:spPr>
           <a:xfrm>
             <a:off x="640080" y="758952"/>
-            <a:ext cx="10972800" cy="704088"/>
+            <a:ext cx="7315200" cy="704088"/>
           </a:xfrm>
           <a:prstGeom prst="rect">
             <a:avLst/>
@@ -5984,7 +6020,7 @@
                 </a:solidFill>
                 <a:latin typeface="Helvetica Neue"/>
               </a:rPr>
-              <a:t>Everything from both lectures, on one axis.</a:t>
+              <a:t>Should Cobalt train its own model?</a:t>
             </a:r>
           </a:p>
         </p:txBody>
@@ -6019,14 +6055,617 @@
                 </a:solidFill>
                 <a:latin typeface="Helvetica Neue"/>
               </a:rPr>
-              <a:t>Two evenings, one afternoon of labelling, no GPU bill.</a:t>
-            </a:r>
-          </a:p>
-        </p:txBody>
-      </p:sp>
-      <p:sp>
-        <p:nvSpPr>
-          <p:cNvPr id="5" name="TextBox 4"/>
+              <a:t>Somebody in the room is thinking it, so let us price it honestly.</a:t>
+            </a:r>
+          </a:p>
+        </p:txBody>
+      </p:sp>
+      <p:sp>
+        <p:nvSpPr>
+          <p:cNvPr id="5" name="Rounded Rectangle 4"/>
+          <p:cNvSpPr/>
+          <p:nvPr/>
+        </p:nvSpPr>
+        <p:spPr>
+          <a:xfrm>
+            <a:off x="8302752" y="593445"/>
+            <a:ext cx="2852928" cy="20116"/>
+          </a:xfrm>
+          <a:prstGeom prst="roundRect">
+            <a:avLst/>
+          </a:prstGeom>
+          <a:solidFill>
+            <a:srgbClr val="E9EBF0"/>
+          </a:solidFill>
+          <a:ln>
+            <a:noFill/>
+          </a:ln>
+        </p:spPr>
+        <p:style>
+          <a:lnRef idx="1">
+            <a:schemeClr val="accent1"/>
+          </a:lnRef>
+          <a:fillRef idx="3">
+            <a:schemeClr val="accent1"/>
+          </a:fillRef>
+          <a:effectRef idx="2">
+            <a:schemeClr val="accent1"/>
+          </a:effectRef>
+          <a:fontRef idx="minor">
+            <a:schemeClr val="lt1"/>
+          </a:fontRef>
+        </p:style>
+        <p:txBody>
+          <a:bodyPr rtlCol="0" anchor="ctr"/>
+          <a:lstStyle/>
+          <a:p>
+            <a:pPr algn="ctr"/>
+          </a:p>
+        </p:txBody>
+      </p:sp>
+      <p:sp>
+        <p:nvSpPr>
+          <p:cNvPr id="6" name="Rounded Rectangle 5"/>
+          <p:cNvSpPr/>
+          <p:nvPr/>
+        </p:nvSpPr>
+        <p:spPr>
+          <a:xfrm>
+            <a:off x="8220455" y="493776"/>
+            <a:ext cx="219456" cy="219456"/>
+          </a:xfrm>
+          <a:prstGeom prst="roundRect">
+            <a:avLst>
+              <a:gd name="adj" fmla="val 32000"/>
+            </a:avLst>
+          </a:prstGeom>
+          <a:solidFill>
+            <a:srgbClr val="0EA5E9"/>
+          </a:solidFill>
+          <a:ln>
+            <a:noFill/>
+          </a:ln>
+        </p:spPr>
+        <p:style>
+          <a:lnRef idx="1">
+            <a:schemeClr val="accent1"/>
+          </a:lnRef>
+          <a:fillRef idx="3">
+            <a:schemeClr val="accent1"/>
+          </a:fillRef>
+          <a:effectRef idx="2">
+            <a:schemeClr val="accent1"/>
+          </a:effectRef>
+          <a:fontRef idx="minor">
+            <a:schemeClr val="lt1"/>
+          </a:fontRef>
+        </p:style>
+        <p:txBody>
+          <a:bodyPr rtlCol="0" anchor="ctr"/>
+          <a:lstStyle/>
+          <a:p>
+            <a:pPr algn="ctr"/>
+          </a:p>
+        </p:txBody>
+      </p:sp>
+      <p:sp>
+        <p:nvSpPr>
+          <p:cNvPr id="7" name="TextBox 6"/>
+          <p:cNvSpPr txBox="1"/>
+          <p:nvPr/>
+        </p:nvSpPr>
+        <p:spPr>
+          <a:xfrm>
+            <a:off x="8165591" y="489204"/>
+            <a:ext cx="329184" cy="228600"/>
+          </a:xfrm>
+          <a:prstGeom prst="rect">
+            <a:avLst/>
+          </a:prstGeom>
+          <a:noFill/>
+        </p:spPr>
+        <p:txBody>
+          <a:bodyPr wrap="square" lIns="0" rIns="0" tIns="0" bIns="0">
+            <a:spAutoFit/>
+          </a:bodyPr>
+          <a:lstStyle/>
+          <a:p>
+            <a:pPr algn="ctr"/>
+            <a:r>
+              <a:rPr sz="950" b="1" i="0">
+                <a:solidFill>
+                  <a:srgbClr val="FFFFFF"/>
+                </a:solidFill>
+                <a:latin typeface="Helvetica Neue"/>
+              </a:rPr>
+              <a:t>1</a:t>
+            </a:r>
+          </a:p>
+        </p:txBody>
+      </p:sp>
+      <p:sp>
+        <p:nvSpPr>
+          <p:cNvPr id="8" name="Rounded Rectangle 7"/>
+          <p:cNvSpPr/>
+          <p:nvPr/>
+        </p:nvSpPr>
+        <p:spPr>
+          <a:xfrm>
+            <a:off x="8695943" y="493776"/>
+            <a:ext cx="219456" cy="219456"/>
+          </a:xfrm>
+          <a:prstGeom prst="roundRect">
+            <a:avLst>
+              <a:gd name="adj" fmla="val 32000"/>
+            </a:avLst>
+          </a:prstGeom>
+          <a:solidFill>
+            <a:srgbClr val="0EA5E9"/>
+          </a:solidFill>
+          <a:ln>
+            <a:noFill/>
+          </a:ln>
+        </p:spPr>
+        <p:style>
+          <a:lnRef idx="1">
+            <a:schemeClr val="accent1"/>
+          </a:lnRef>
+          <a:fillRef idx="3">
+            <a:schemeClr val="accent1"/>
+          </a:fillRef>
+          <a:effectRef idx="2">
+            <a:schemeClr val="accent1"/>
+          </a:effectRef>
+          <a:fontRef idx="minor">
+            <a:schemeClr val="lt1"/>
+          </a:fontRef>
+        </p:style>
+        <p:txBody>
+          <a:bodyPr rtlCol="0" anchor="ctr"/>
+          <a:lstStyle/>
+          <a:p>
+            <a:pPr algn="ctr"/>
+          </a:p>
+        </p:txBody>
+      </p:sp>
+      <p:sp>
+        <p:nvSpPr>
+          <p:cNvPr id="9" name="TextBox 8"/>
+          <p:cNvSpPr txBox="1"/>
+          <p:nvPr/>
+        </p:nvSpPr>
+        <p:spPr>
+          <a:xfrm>
+            <a:off x="8641079" y="489204"/>
+            <a:ext cx="329184" cy="228600"/>
+          </a:xfrm>
+          <a:prstGeom prst="rect">
+            <a:avLst/>
+          </a:prstGeom>
+          <a:noFill/>
+        </p:spPr>
+        <p:txBody>
+          <a:bodyPr wrap="square" lIns="0" rIns="0" tIns="0" bIns="0">
+            <a:spAutoFit/>
+          </a:bodyPr>
+          <a:lstStyle/>
+          <a:p>
+            <a:pPr algn="ctr"/>
+            <a:r>
+              <a:rPr sz="950" b="1" i="0">
+                <a:solidFill>
+                  <a:srgbClr val="FFFFFF"/>
+                </a:solidFill>
+                <a:latin typeface="Helvetica Neue"/>
+              </a:rPr>
+              <a:t>2</a:t>
+            </a:r>
+          </a:p>
+        </p:txBody>
+      </p:sp>
+      <p:sp>
+        <p:nvSpPr>
+          <p:cNvPr id="10" name="Rounded Rectangle 9"/>
+          <p:cNvSpPr/>
+          <p:nvPr/>
+        </p:nvSpPr>
+        <p:spPr>
+          <a:xfrm>
+            <a:off x="9171431" y="493776"/>
+            <a:ext cx="219456" cy="219456"/>
+          </a:xfrm>
+          <a:prstGeom prst="roundRect">
+            <a:avLst>
+              <a:gd name="adj" fmla="val 32000"/>
+            </a:avLst>
+          </a:prstGeom>
+          <a:solidFill>
+            <a:srgbClr val="D97706"/>
+          </a:solidFill>
+          <a:ln>
+            <a:noFill/>
+          </a:ln>
+        </p:spPr>
+        <p:style>
+          <a:lnRef idx="1">
+            <a:schemeClr val="accent1"/>
+          </a:lnRef>
+          <a:fillRef idx="3">
+            <a:schemeClr val="accent1"/>
+          </a:fillRef>
+          <a:effectRef idx="2">
+            <a:schemeClr val="accent1"/>
+          </a:effectRef>
+          <a:fontRef idx="minor">
+            <a:schemeClr val="lt1"/>
+          </a:fontRef>
+        </p:style>
+        <p:txBody>
+          <a:bodyPr rtlCol="0" anchor="ctr"/>
+          <a:lstStyle/>
+          <a:p>
+            <a:pPr algn="ctr"/>
+          </a:p>
+        </p:txBody>
+      </p:sp>
+      <p:sp>
+        <p:nvSpPr>
+          <p:cNvPr id="11" name="TextBox 10"/>
+          <p:cNvSpPr txBox="1"/>
+          <p:nvPr/>
+        </p:nvSpPr>
+        <p:spPr>
+          <a:xfrm>
+            <a:off x="9116567" y="489204"/>
+            <a:ext cx="329184" cy="228600"/>
+          </a:xfrm>
+          <a:prstGeom prst="rect">
+            <a:avLst/>
+          </a:prstGeom>
+          <a:noFill/>
+        </p:spPr>
+        <p:txBody>
+          <a:bodyPr wrap="square" lIns="0" rIns="0" tIns="0" bIns="0">
+            <a:spAutoFit/>
+          </a:bodyPr>
+          <a:lstStyle/>
+          <a:p>
+            <a:pPr algn="ctr"/>
+            <a:r>
+              <a:rPr sz="950" b="1" i="0">
+                <a:solidFill>
+                  <a:srgbClr val="FFFFFF"/>
+                </a:solidFill>
+                <a:latin typeface="Helvetica Neue"/>
+              </a:rPr>
+              <a:t>3</a:t>
+            </a:r>
+          </a:p>
+        </p:txBody>
+      </p:sp>
+      <p:sp>
+        <p:nvSpPr>
+          <p:cNvPr id="12" name="Rounded Rectangle 11"/>
+          <p:cNvSpPr/>
+          <p:nvPr/>
+        </p:nvSpPr>
+        <p:spPr>
+          <a:xfrm>
+            <a:off x="9646919" y="493776"/>
+            <a:ext cx="219456" cy="219456"/>
+          </a:xfrm>
+          <a:prstGeom prst="roundRect">
+            <a:avLst>
+              <a:gd name="adj" fmla="val 32000"/>
+            </a:avLst>
+          </a:prstGeom>
+          <a:solidFill>
+            <a:srgbClr val="059669"/>
+          </a:solidFill>
+          <a:ln>
+            <a:noFill/>
+          </a:ln>
+        </p:spPr>
+        <p:style>
+          <a:lnRef idx="1">
+            <a:schemeClr val="accent1"/>
+          </a:lnRef>
+          <a:fillRef idx="3">
+            <a:schemeClr val="accent1"/>
+          </a:fillRef>
+          <a:effectRef idx="2">
+            <a:schemeClr val="accent1"/>
+          </a:effectRef>
+          <a:fontRef idx="minor">
+            <a:schemeClr val="lt1"/>
+          </a:fontRef>
+        </p:style>
+        <p:txBody>
+          <a:bodyPr rtlCol="0" anchor="ctr"/>
+          <a:lstStyle/>
+          <a:p>
+            <a:pPr algn="ctr"/>
+          </a:p>
+        </p:txBody>
+      </p:sp>
+      <p:sp>
+        <p:nvSpPr>
+          <p:cNvPr id="13" name="TextBox 12"/>
+          <p:cNvSpPr txBox="1"/>
+          <p:nvPr/>
+        </p:nvSpPr>
+        <p:spPr>
+          <a:xfrm>
+            <a:off x="9592055" y="489204"/>
+            <a:ext cx="329184" cy="228600"/>
+          </a:xfrm>
+          <a:prstGeom prst="rect">
+            <a:avLst/>
+          </a:prstGeom>
+          <a:noFill/>
+        </p:spPr>
+        <p:txBody>
+          <a:bodyPr wrap="square" lIns="0" rIns="0" tIns="0" bIns="0">
+            <a:spAutoFit/>
+          </a:bodyPr>
+          <a:lstStyle/>
+          <a:p>
+            <a:pPr algn="ctr"/>
+            <a:r>
+              <a:rPr sz="950" b="1" i="0">
+                <a:solidFill>
+                  <a:srgbClr val="FFFFFF"/>
+                </a:solidFill>
+                <a:latin typeface="Helvetica Neue"/>
+              </a:rPr>
+              <a:t>4</a:t>
+            </a:r>
+          </a:p>
+        </p:txBody>
+      </p:sp>
+      <p:sp>
+        <p:nvSpPr>
+          <p:cNvPr id="14" name="Rounded Rectangle 13"/>
+          <p:cNvSpPr/>
+          <p:nvPr/>
+        </p:nvSpPr>
+        <p:spPr>
+          <a:xfrm>
+            <a:off x="10122407" y="493776"/>
+            <a:ext cx="219456" cy="219456"/>
+          </a:xfrm>
+          <a:prstGeom prst="roundRect">
+            <a:avLst>
+              <a:gd name="adj" fmla="val 32000"/>
+            </a:avLst>
+          </a:prstGeom>
+          <a:solidFill>
+            <a:srgbClr val="059669"/>
+          </a:solidFill>
+          <a:ln>
+            <a:noFill/>
+          </a:ln>
+        </p:spPr>
+        <p:style>
+          <a:lnRef idx="1">
+            <a:schemeClr val="accent1"/>
+          </a:lnRef>
+          <a:fillRef idx="3">
+            <a:schemeClr val="accent1"/>
+          </a:fillRef>
+          <a:effectRef idx="2">
+            <a:schemeClr val="accent1"/>
+          </a:effectRef>
+          <a:fontRef idx="minor">
+            <a:schemeClr val="lt1"/>
+          </a:fontRef>
+        </p:style>
+        <p:txBody>
+          <a:bodyPr rtlCol="0" anchor="ctr"/>
+          <a:lstStyle/>
+          <a:p>
+            <a:pPr algn="ctr"/>
+          </a:p>
+        </p:txBody>
+      </p:sp>
+      <p:sp>
+        <p:nvSpPr>
+          <p:cNvPr id="15" name="TextBox 14"/>
+          <p:cNvSpPr txBox="1"/>
+          <p:nvPr/>
+        </p:nvSpPr>
+        <p:spPr>
+          <a:xfrm>
+            <a:off x="10067543" y="489204"/>
+            <a:ext cx="329184" cy="228600"/>
+          </a:xfrm>
+          <a:prstGeom prst="rect">
+            <a:avLst/>
+          </a:prstGeom>
+          <a:noFill/>
+        </p:spPr>
+        <p:txBody>
+          <a:bodyPr wrap="square" lIns="0" rIns="0" tIns="0" bIns="0">
+            <a:spAutoFit/>
+          </a:bodyPr>
+          <a:lstStyle/>
+          <a:p>
+            <a:pPr algn="ctr"/>
+            <a:r>
+              <a:rPr sz="950" b="1" i="0">
+                <a:solidFill>
+                  <a:srgbClr val="FFFFFF"/>
+                </a:solidFill>
+                <a:latin typeface="Helvetica Neue"/>
+              </a:rPr>
+              <a:t>5</a:t>
+            </a:r>
+          </a:p>
+        </p:txBody>
+      </p:sp>
+      <p:sp>
+        <p:nvSpPr>
+          <p:cNvPr id="16" name="Rounded Rectangle 15"/>
+          <p:cNvSpPr/>
+          <p:nvPr/>
+        </p:nvSpPr>
+        <p:spPr>
+          <a:xfrm>
+            <a:off x="10561319" y="457200"/>
+            <a:ext cx="292608" cy="292608"/>
+          </a:xfrm>
+          <a:prstGeom prst="roundRect">
+            <a:avLst>
+              <a:gd name="adj" fmla="val 32000"/>
+            </a:avLst>
+          </a:prstGeom>
+          <a:solidFill>
+            <a:srgbClr val="7C3AED"/>
+          </a:solidFill>
+          <a:ln>
+            <a:noFill/>
+          </a:ln>
+        </p:spPr>
+        <p:style>
+          <a:lnRef idx="1">
+            <a:schemeClr val="accent1"/>
+          </a:lnRef>
+          <a:fillRef idx="3">
+            <a:schemeClr val="accent1"/>
+          </a:fillRef>
+          <a:effectRef idx="2">
+            <a:schemeClr val="accent1"/>
+          </a:effectRef>
+          <a:fontRef idx="minor">
+            <a:schemeClr val="lt1"/>
+          </a:fontRef>
+        </p:style>
+        <p:txBody>
+          <a:bodyPr rtlCol="0" anchor="ctr"/>
+          <a:lstStyle/>
+          <a:p>
+            <a:pPr algn="ctr"/>
+          </a:p>
+        </p:txBody>
+      </p:sp>
+      <p:sp>
+        <p:nvSpPr>
+          <p:cNvPr id="17" name="TextBox 16"/>
+          <p:cNvSpPr txBox="1"/>
+          <p:nvPr/>
+        </p:nvSpPr>
+        <p:spPr>
+          <a:xfrm>
+            <a:off x="10506455" y="489204"/>
+            <a:ext cx="402336" cy="228600"/>
+          </a:xfrm>
+          <a:prstGeom prst="rect">
+            <a:avLst/>
+          </a:prstGeom>
+          <a:noFill/>
+        </p:spPr>
+        <p:txBody>
+          <a:bodyPr wrap="square" lIns="0" rIns="0" tIns="0" bIns="0">
+            <a:spAutoFit/>
+          </a:bodyPr>
+          <a:lstStyle/>
+          <a:p>
+            <a:pPr algn="ctr"/>
+            <a:r>
+              <a:rPr sz="1200" b="1" i="0">
+                <a:solidFill>
+                  <a:srgbClr val="FFFFFF"/>
+                </a:solidFill>
+                <a:latin typeface="Helvetica Neue"/>
+              </a:rPr>
+              <a:t>6</a:t>
+            </a:r>
+          </a:p>
+        </p:txBody>
+      </p:sp>
+      <p:sp>
+        <p:nvSpPr>
+          <p:cNvPr id="18" name="Rounded Rectangle 17"/>
+          <p:cNvSpPr/>
+          <p:nvPr/>
+        </p:nvSpPr>
+        <p:spPr>
+          <a:xfrm>
+            <a:off x="11073384" y="493776"/>
+            <a:ext cx="219456" cy="219456"/>
+          </a:xfrm>
+          <a:prstGeom prst="roundRect">
+            <a:avLst>
+              <a:gd name="adj" fmla="val 32000"/>
+            </a:avLst>
+          </a:prstGeom>
+          <a:solidFill>
+            <a:srgbClr val="E9EBF0"/>
+          </a:solidFill>
+          <a:ln>
+            <a:noFill/>
+          </a:ln>
+        </p:spPr>
+        <p:style>
+          <a:lnRef idx="1">
+            <a:schemeClr val="accent1"/>
+          </a:lnRef>
+          <a:fillRef idx="3">
+            <a:schemeClr val="accent1"/>
+          </a:fillRef>
+          <a:effectRef idx="2">
+            <a:schemeClr val="accent1"/>
+          </a:effectRef>
+          <a:fontRef idx="minor">
+            <a:schemeClr val="lt1"/>
+          </a:fontRef>
+        </p:style>
+        <p:txBody>
+          <a:bodyPr rtlCol="0" anchor="ctr"/>
+          <a:lstStyle/>
+          <a:p>
+            <a:pPr algn="ctr"/>
+          </a:p>
+        </p:txBody>
+      </p:sp>
+      <p:sp>
+        <p:nvSpPr>
+          <p:cNvPr id="19" name="TextBox 18"/>
+          <p:cNvSpPr txBox="1"/>
+          <p:nvPr/>
+        </p:nvSpPr>
+        <p:spPr>
+          <a:xfrm>
+            <a:off x="11018519" y="489204"/>
+            <a:ext cx="329184" cy="228600"/>
+          </a:xfrm>
+          <a:prstGeom prst="rect">
+            <a:avLst/>
+          </a:prstGeom>
+          <a:noFill/>
+        </p:spPr>
+        <p:txBody>
+          <a:bodyPr wrap="square" lIns="0" rIns="0" tIns="0" bIns="0">
+            <a:spAutoFit/>
+          </a:bodyPr>
+          <a:lstStyle/>
+          <a:p>
+            <a:pPr algn="ctr"/>
+            <a:r>
+              <a:rPr sz="950" b="1" i="0">
+                <a:solidFill>
+                  <a:srgbClr val="AEB4BF"/>
+                </a:solidFill>
+                <a:latin typeface="Helvetica Neue"/>
+              </a:rPr>
+              <a:t>7</a:t>
+            </a:r>
+          </a:p>
+        </p:txBody>
+      </p:sp>
+      <p:sp>
+        <p:nvSpPr>
+          <p:cNvPr id="20" name="TextBox 19"/>
           <p:cNvSpPr txBox="1"/>
           <p:nvPr/>
         </p:nvSpPr>
@@ -6061,7 +6700,7 @@
       </p:sp>
       <p:pic>
         <p:nvPicPr>
-          <p:cNvPr id="6" name="Picture 5" descr="fig_circle.png"/>
+          <p:cNvPr id="21" name="Picture 20" descr="d_top.png"/>
           <p:cNvPicPr>
             <a:picLocks noChangeAspect="1"/>
           </p:cNvPicPr>
@@ -6075,8 +6714,8 @@
         </p:blipFill>
         <p:spPr>
           <a:xfrm>
-            <a:off x="1804154" y="2011680"/>
-            <a:ext cx="8583385" cy="3794759"/>
+            <a:off x="518007" y="3102514"/>
+            <a:ext cx="11155680" cy="2116011"/>
           </a:xfrm>
           <a:prstGeom prst="rect">
             <a:avLst/>
@@ -6085,35 +6724,195 @@
       </p:pic>
       <p:sp>
         <p:nvSpPr>
-          <p:cNvPr id="7" name="TextBox 6"/>
-          <p:cNvSpPr txBox="1"/>
-          <p:nvPr/>
-        </p:nvSpPr>
-        <p:spPr>
-          <a:xfrm>
-            <a:off x="640080" y="5943600"/>
-            <a:ext cx="10881360" cy="457200"/>
-          </a:xfrm>
-          <a:prstGeom prst="rect">
-            <a:avLst/>
-          </a:prstGeom>
-          <a:noFill/>
-        </p:spPr>
-        <p:txBody>
-          <a:bodyPr wrap="square" lIns="0" rIns="0" tIns="0" bIns="0">
-            <a:spAutoFit/>
-          </a:bodyPr>
+          <p:cNvPr id="22" name="Rounded Rectangle 21"/>
+          <p:cNvSpPr/>
+          <p:nvPr/>
+        </p:nvSpPr>
+        <p:spPr>
+          <a:xfrm>
+            <a:off x="6104534" y="6345936"/>
+            <a:ext cx="5447080" cy="365760"/>
+          </a:xfrm>
+          <a:prstGeom prst="roundRect">
+            <a:avLst>
+              <a:gd name="adj" fmla="val 44000"/>
+            </a:avLst>
+          </a:prstGeom>
+          <a:solidFill>
+            <a:srgbClr val="059669"/>
+          </a:solidFill>
+          <a:ln>
+            <a:noFill/>
+          </a:ln>
+        </p:spPr>
+        <p:style>
+          <a:lnRef idx="1">
+            <a:schemeClr val="accent1"/>
+          </a:lnRef>
+          <a:fillRef idx="3">
+            <a:schemeClr val="accent1"/>
+          </a:fillRef>
+          <a:effectRef idx="2">
+            <a:schemeClr val="accent1"/>
+          </a:effectRef>
+          <a:fontRef idx="minor">
+            <a:schemeClr val="lt1"/>
+          </a:fontRef>
+        </p:style>
+        <p:txBody>
+          <a:bodyPr rtlCol="0" anchor="ctr"/>
           <a:lstStyle/>
           <a:p>
             <a:pPr algn="ctr"/>
-            <a:r>
-              <a:rPr sz="1800" b="1" i="0">
-                <a:solidFill>
-                  <a:srgbClr val="0F172A"/>
-                </a:solidFill>
-                <a:latin typeface="Helvetica Neue"/>
-              </a:rPr>
-              <a:t>Adapting a model is mostly a purchasing decision, not an engineering one.</a:t>
+          </a:p>
+        </p:txBody>
+      </p:sp>
+      <p:sp>
+        <p:nvSpPr>
+          <p:cNvPr id="23" name="Rounded Rectangle 22"/>
+          <p:cNvSpPr/>
+          <p:nvPr/>
+        </p:nvSpPr>
+        <p:spPr>
+          <a:xfrm>
+            <a:off x="7146950" y="6396228"/>
+            <a:ext cx="754380" cy="265176"/>
+          </a:xfrm>
+          <a:prstGeom prst="roundRect">
+            <a:avLst>
+              <a:gd name="adj" fmla="val 44000"/>
+            </a:avLst>
+          </a:prstGeom>
+          <a:solidFill>
+            <a:srgbClr val="064E3B"/>
+          </a:solidFill>
+          <a:ln>
+            <a:noFill/>
+          </a:ln>
+        </p:spPr>
+        <p:style>
+          <a:lnRef idx="1">
+            <a:schemeClr val="accent1"/>
+          </a:lnRef>
+          <a:fillRef idx="3">
+            <a:schemeClr val="accent1"/>
+          </a:fillRef>
+          <a:effectRef idx="2">
+            <a:schemeClr val="accent1"/>
+          </a:effectRef>
+          <a:fontRef idx="minor">
+            <a:schemeClr val="lt1"/>
+          </a:fontRef>
+        </p:style>
+        <p:txBody>
+          <a:bodyPr rtlCol="0" anchor="ctr"/>
+          <a:lstStyle/>
+          <a:p>
+            <a:pPr algn="ctr"/>
+          </a:p>
+        </p:txBody>
+      </p:sp>
+      <p:sp>
+        <p:nvSpPr>
+          <p:cNvPr id="24" name="TextBox 23"/>
+          <p:cNvSpPr txBox="1"/>
+          <p:nvPr/>
+        </p:nvSpPr>
+        <p:spPr>
+          <a:xfrm>
+            <a:off x="6259982" y="6460236"/>
+            <a:ext cx="914400" cy="219456"/>
+          </a:xfrm>
+          <a:prstGeom prst="rect">
+            <a:avLst/>
+          </a:prstGeom>
+          <a:noFill/>
+        </p:spPr>
+        <p:txBody>
+          <a:bodyPr wrap="none" lIns="0" rIns="0" tIns="0" bIns="0">
+            <a:spAutoFit/>
+          </a:bodyPr>
+          <a:lstStyle/>
+          <a:p>
+            <a:pPr algn="l"/>
+            <a:r>
+              <a:rPr sz="950" b="1" i="0">
+                <a:solidFill>
+                  <a:srgbClr val="A7F3D0"/>
+                </a:solidFill>
+                <a:latin typeface="Helvetica Neue"/>
+              </a:rPr>
+              <a:t>▶ NOTEBOOK</a:t>
+            </a:r>
+          </a:p>
+        </p:txBody>
+      </p:sp>
+      <p:sp>
+        <p:nvSpPr>
+          <p:cNvPr id="25" name="TextBox 24"/>
+          <p:cNvSpPr txBox="1"/>
+          <p:nvPr/>
+        </p:nvSpPr>
+        <p:spPr>
+          <a:xfrm>
+            <a:off x="7146950" y="6451092"/>
+            <a:ext cx="754380" cy="219456"/>
+          </a:xfrm>
+          <a:prstGeom prst="rect">
+            <a:avLst/>
+          </a:prstGeom>
+          <a:noFill/>
+        </p:spPr>
+        <p:txBody>
+          <a:bodyPr wrap="none" lIns="0" rIns="0" tIns="0" bIns="0">
+            <a:spAutoFit/>
+          </a:bodyPr>
+          <a:lstStyle/>
+          <a:p>
+            <a:pPr algn="ctr"/>
+            <a:r>
+              <a:rPr sz="1100" b="1" i="0">
+                <a:solidFill>
+                  <a:srgbClr val="FFFFFF"/>
+                </a:solidFill>
+                <a:latin typeface="Helvetica Neue"/>
+              </a:rPr>
+              <a:t>STEP 20</a:t>
+            </a:r>
+          </a:p>
+        </p:txBody>
+      </p:sp>
+      <p:sp>
+        <p:nvSpPr>
+          <p:cNvPr id="26" name="TextBox 25"/>
+          <p:cNvSpPr txBox="1"/>
+          <p:nvPr/>
+        </p:nvSpPr>
+        <p:spPr>
+          <a:xfrm>
+            <a:off x="8020202" y="6460236"/>
+            <a:ext cx="3430828" cy="219456"/>
+          </a:xfrm>
+          <a:prstGeom prst="rect">
+            <a:avLst/>
+          </a:prstGeom>
+          <a:noFill/>
+        </p:spPr>
+        <p:txBody>
+          <a:bodyPr wrap="none" lIns="0" rIns="0" tIns="0" bIns="0">
+            <a:spAutoFit/>
+          </a:bodyPr>
+          <a:lstStyle/>
+          <a:p>
+            <a:pPr algn="l"/>
+            <a:r>
+              <a:rPr sz="1000" b="1" i="0">
+                <a:solidFill>
+                  <a:srgbClr val="FFFFFF"/>
+                </a:solidFill>
+                <a:latin typeface="Helvetica Neue"/>
+              </a:rPr>
+              <a:t>RUNGS 6 and 7: should Cobalt train its own?</a:t>
             </a:r>
           </a:p>
         </p:txBody>
@@ -6166,6 +6965,223 @@
                 </a:solidFill>
                 <a:latin typeface="Helvetica Neue"/>
               </a:rPr>
+              <a:t>FULL CIRCLE</a:t>
+            </a:r>
+          </a:p>
+        </p:txBody>
+      </p:sp>
+      <p:sp>
+        <p:nvSpPr>
+          <p:cNvPr id="3" name="TextBox 2"/>
+          <p:cNvSpPr txBox="1"/>
+          <p:nvPr/>
+        </p:nvSpPr>
+        <p:spPr>
+          <a:xfrm>
+            <a:off x="640080" y="758952"/>
+            <a:ext cx="10972800" cy="704088"/>
+          </a:xfrm>
+          <a:prstGeom prst="rect">
+            <a:avLst/>
+          </a:prstGeom>
+          <a:noFill/>
+        </p:spPr>
+        <p:txBody>
+          <a:bodyPr wrap="square" lIns="0" rIns="0" tIns="0" bIns="0">
+            <a:spAutoFit/>
+          </a:bodyPr>
+          <a:lstStyle/>
+          <a:p>
+            <a:pPr algn="l"/>
+            <a:r>
+              <a:rPr sz="2900" b="1" i="0">
+                <a:solidFill>
+                  <a:srgbClr val="0F172A"/>
+                </a:solidFill>
+                <a:latin typeface="Helvetica Neue"/>
+              </a:rPr>
+              <a:t>Everything from both lectures, on one axis.</a:t>
+            </a:r>
+          </a:p>
+        </p:txBody>
+      </p:sp>
+      <p:sp>
+        <p:nvSpPr>
+          <p:cNvPr id="4" name="TextBox 3"/>
+          <p:cNvSpPr txBox="1"/>
+          <p:nvPr/>
+        </p:nvSpPr>
+        <p:spPr>
+          <a:xfrm>
+            <a:off x="640080" y="1417320"/>
+            <a:ext cx="10424160" cy="457200"/>
+          </a:xfrm>
+          <a:prstGeom prst="rect">
+            <a:avLst/>
+          </a:prstGeom>
+          <a:noFill/>
+        </p:spPr>
+        <p:txBody>
+          <a:bodyPr wrap="square" lIns="0" rIns="0" tIns="0" bIns="0">
+            <a:spAutoFit/>
+          </a:bodyPr>
+          <a:lstStyle/>
+          <a:p>
+            <a:pPr algn="l"/>
+            <a:r>
+              <a:rPr sz="1500" b="0" i="0">
+                <a:solidFill>
+                  <a:srgbClr val="475569"/>
+                </a:solidFill>
+                <a:latin typeface="Helvetica Neue"/>
+              </a:rPr>
+              <a:t>Two evenings, one afternoon of labelling, no GPU bill.</a:t>
+            </a:r>
+          </a:p>
+        </p:txBody>
+      </p:sp>
+      <p:sp>
+        <p:nvSpPr>
+          <p:cNvPr id="5" name="TextBox 4"/>
+          <p:cNvSpPr txBox="1"/>
+          <p:nvPr/>
+        </p:nvSpPr>
+        <p:spPr>
+          <a:xfrm>
+            <a:off x="640080" y="6492240"/>
+            <a:ext cx="8229600" cy="274320"/>
+          </a:xfrm>
+          <a:prstGeom prst="rect">
+            <a:avLst/>
+          </a:prstGeom>
+          <a:noFill/>
+        </p:spPr>
+        <p:txBody>
+          <a:bodyPr wrap="square" lIns="0" rIns="0" tIns="0" bIns="0">
+            <a:spAutoFit/>
+          </a:bodyPr>
+          <a:lstStyle/>
+          <a:p>
+            <a:pPr algn="l"/>
+            <a:r>
+              <a:rPr sz="900" b="0" i="0">
+                <a:solidFill>
+                  <a:srgbClr val="BCC1CC"/>
+                </a:solidFill>
+                <a:latin typeface="Helvetica Neue"/>
+              </a:rPr>
+              <a:t>ISBA 2411 · Natural Language Processing &amp; AI · Summer 2026</a:t>
+            </a:r>
+          </a:p>
+        </p:txBody>
+      </p:sp>
+      <p:pic>
+        <p:nvPicPr>
+          <p:cNvPr id="6" name="Picture 5" descr="fig_circle.png"/>
+          <p:cNvPicPr>
+            <a:picLocks noChangeAspect="1"/>
+          </p:cNvPicPr>
+          <p:nvPr/>
+        </p:nvPicPr>
+        <p:blipFill>
+          <a:blip r:embed="rId2"/>
+          <a:stretch>
+            <a:fillRect/>
+          </a:stretch>
+        </p:blipFill>
+        <p:spPr>
+          <a:xfrm>
+            <a:off x="1804154" y="2011680"/>
+            <a:ext cx="8583385" cy="3794759"/>
+          </a:xfrm>
+          <a:prstGeom prst="rect">
+            <a:avLst/>
+          </a:prstGeom>
+        </p:spPr>
+      </p:pic>
+      <p:sp>
+        <p:nvSpPr>
+          <p:cNvPr id="7" name="TextBox 6"/>
+          <p:cNvSpPr txBox="1"/>
+          <p:nvPr/>
+        </p:nvSpPr>
+        <p:spPr>
+          <a:xfrm>
+            <a:off x="640080" y="5943600"/>
+            <a:ext cx="10881360" cy="457200"/>
+          </a:xfrm>
+          <a:prstGeom prst="rect">
+            <a:avLst/>
+          </a:prstGeom>
+          <a:noFill/>
+        </p:spPr>
+        <p:txBody>
+          <a:bodyPr wrap="square" lIns="0" rIns="0" tIns="0" bIns="0">
+            <a:spAutoFit/>
+          </a:bodyPr>
+          <a:lstStyle/>
+          <a:p>
+            <a:pPr algn="ctr"/>
+            <a:r>
+              <a:rPr sz="1800" b="1" i="0">
+                <a:solidFill>
+                  <a:srgbClr val="0F172A"/>
+                </a:solidFill>
+                <a:latin typeface="Helvetica Neue"/>
+              </a:rPr>
+              <a:t>Adapting a model is mostly a purchasing decision, not an engineering one.</a:t>
+            </a:r>
+          </a:p>
+        </p:txBody>
+      </p:sp>
+    </p:spTree>
+  </p:cSld>
+  <p:clrMapOvr>
+    <a:masterClrMapping/>
+  </p:clrMapOvr>
+</p:sld>
+</file>
+
+<file path=ppt/slides/slide17.xml><?xml version="1.0" encoding="utf-8"?>
+<p:sld xmlns:a="http://schemas.openxmlformats.org/drawingml/2006/main" xmlns:p="http://schemas.openxmlformats.org/presentationml/2006/main" xmlns:r="http://schemas.openxmlformats.org/officeDocument/2006/relationships">
+  <p:cSld>
+    <p:spTree>
+      <p:nvGrpSpPr>
+        <p:cNvPr id="1" name=""/>
+        <p:cNvGrpSpPr/>
+        <p:nvPr/>
+      </p:nvGrpSpPr>
+      <p:grpSpPr/>
+      <p:sp>
+        <p:nvSpPr>
+          <p:cNvPr id="2" name="TextBox 1"/>
+          <p:cNvSpPr txBox="1"/>
+          <p:nvPr/>
+        </p:nvSpPr>
+        <p:spPr>
+          <a:xfrm>
+            <a:off x="640080" y="457200"/>
+            <a:ext cx="6766560" cy="274320"/>
+          </a:xfrm>
+          <a:prstGeom prst="rect">
+            <a:avLst/>
+          </a:prstGeom>
+          <a:noFill/>
+        </p:spPr>
+        <p:txBody>
+          <a:bodyPr wrap="square" lIns="0" rIns="0" tIns="0" bIns="0">
+            <a:spAutoFit/>
+          </a:bodyPr>
+          <a:lstStyle/>
+          <a:p>
+            <a:pPr algn="l"/>
+            <a:r>
+              <a:rPr sz="1250" b="1" i="0" spc="220">
+                <a:solidFill>
+                  <a:srgbClr val="4F46E5"/>
+                </a:solidFill>
+                <a:latin typeface="Helvetica Neue"/>
+              </a:rPr>
               <a:t>BEFORE YOU GO</a:t>
             </a:r>
           </a:p>
@@ -7061,7 +8077,7 @@
                 </a:solidFill>
                 <a:latin typeface="Helvetica Neue"/>
               </a:rPr>
-              <a:t>WHERE WE LEFT OFF</a:t>
+              <a:t>WEEK 7 · AT A GLANCE</a:t>
             </a:r>
           </a:p>
         </p:txBody>
@@ -7096,7 +8112,7 @@
                 </a:solidFill>
                 <a:latin typeface="Helvetica Neue"/>
               </a:rPr>
-              <a:t>Last lecture, with no training data at all.</a:t>
+              <a:t>Language Models &amp; Transformers</a:t>
             </a:r>
           </a:p>
         </p:txBody>
@@ -7131,7 +8147,7 @@
                 </a:solidFill>
                 <a:latin typeface="Helvetica Neue"/>
               </a:rPr>
-              <a:t>Same company, same inbox, same copilot. Tonight we ask what our own data would add.</a:t>
+              <a:t>The same map as last lecture. Greyed out is what we have already done; tonight is the bottom four.</a:t>
             </a:r>
           </a:p>
         </p:txBody>
@@ -7173,7 +8189,7 @@
       </p:sp>
       <p:pic>
         <p:nvPicPr>
-          <p:cNvPr id="6" name="Picture 5" descr="d_recap.png"/>
+          <p:cNvPr id="6" name="Picture 5" descr="d_week.png"/>
           <p:cNvPicPr>
             <a:picLocks noChangeAspect="1"/>
           </p:cNvPicPr>
@@ -7187,8 +8203,8 @@
         </p:blipFill>
         <p:spPr>
           <a:xfrm>
-            <a:off x="518007" y="3255053"/>
-            <a:ext cx="11155680" cy="1810933"/>
+            <a:off x="380847" y="2025280"/>
+            <a:ext cx="11430000" cy="4316199"/>
           </a:xfrm>
           <a:prstGeom prst="rect">
             <a:avLst/>
@@ -7243,7 +8259,7 @@
                 </a:solidFill>
                 <a:latin typeface="Helvetica Neue"/>
               </a:rPr>
-              <a:t>TONIGHT</a:t>
+              <a:t>WHERE WE LEFT OFF</a:t>
             </a:r>
           </a:p>
         </p:txBody>
@@ -7278,7 +8294,7 @@
                 </a:solidFill>
                 <a:latin typeface="Helvetica Neue"/>
               </a:rPr>
-              <a:t>There are seven ways to make a model yours.</a:t>
+              <a:t>Last lecture, with no training data at all.</a:t>
             </a:r>
           </a:p>
         </p:txBody>
@@ -7313,7 +8329,7 @@
                 </a:solidFill>
                 <a:latin typeface="Helvetica Neue"/>
               </a:rPr>
-              <a:t>Read it bottom to top. Cost climbs steeply. The payoff flattens early.</a:t>
+              <a:t>Same company, same inbox, same copilot. Tonight we ask what our own data would add.</a:t>
             </a:r>
           </a:p>
         </p:txBody>
@@ -7355,7 +8371,7 @@
       </p:sp>
       <p:pic>
         <p:nvPicPr>
-          <p:cNvPr id="6" name="Picture 5" descr="fig_ladder.png"/>
+          <p:cNvPr id="6" name="Picture 5" descr="d_recap.png"/>
           <p:cNvPicPr>
             <a:picLocks noChangeAspect="1"/>
           </p:cNvPicPr>
@@ -7369,8 +8385,8 @@
         </p:blipFill>
         <p:spPr>
           <a:xfrm>
-            <a:off x="1577949" y="1874519"/>
-            <a:ext cx="9035796" cy="4480560"/>
+            <a:off x="518007" y="3255053"/>
+            <a:ext cx="11155680" cy="1810933"/>
           </a:xfrm>
           <a:prstGeom prst="rect">
             <a:avLst/>
@@ -7421,11 +8437,11 @@
             <a:r>
               <a:rPr sz="1250" b="1" i="0" spc="220">
                 <a:solidFill>
-                  <a:srgbClr val="D97706"/>
-                </a:solidFill>
-                <a:latin typeface="Helvetica Neue"/>
-              </a:rPr>
-              <a:t>WHY ANY OF THIS WORKS</a:t>
+                  <a:srgbClr val="4F46E5"/>
+                </a:solidFill>
+                <a:latin typeface="Helvetica Neue"/>
+              </a:rPr>
+              <a:t>TONIGHT</a:t>
             </a:r>
           </a:p>
         </p:txBody>
@@ -7439,7 +8455,7 @@
         <p:spPr>
           <a:xfrm>
             <a:off x="640080" y="758952"/>
-            <a:ext cx="7315200" cy="704088"/>
+            <a:ext cx="10972800" cy="704088"/>
           </a:xfrm>
           <a:prstGeom prst="rect">
             <a:avLst/>
@@ -7454,13 +8470,13 @@
           <a:p>
             <a:pPr algn="l"/>
             <a:r>
-              <a:rPr sz="2500" b="1" i="0">
+              <a:rPr sz="2900" b="1" i="0">
                 <a:solidFill>
                   <a:srgbClr val="0F172A"/>
                 </a:solidFill>
                 <a:latin typeface="Helvetica Neue"/>
               </a:rPr>
-              <a:t>Somebody already paid to teach it English.</a:t>
+              <a:t>There are seven ways to make a model yours.</a:t>
             </a:r>
           </a:p>
         </p:txBody>
@@ -7495,617 +8511,14 @@
                 </a:solidFill>
                 <a:latin typeface="Helvetica Neue"/>
               </a:rPr>
-              <a:t>This is the exercise they used. It needs no labelled data, which is why it could be done at scale.</a:t>
-            </a:r>
-          </a:p>
-        </p:txBody>
-      </p:sp>
-      <p:sp>
-        <p:nvSpPr>
-          <p:cNvPr id="5" name="Rounded Rectangle 4"/>
-          <p:cNvSpPr/>
-          <p:nvPr/>
-        </p:nvSpPr>
-        <p:spPr>
-          <a:xfrm>
-            <a:off x="8302752" y="593445"/>
-            <a:ext cx="2852928" cy="20116"/>
-          </a:xfrm>
-          <a:prstGeom prst="roundRect">
-            <a:avLst/>
-          </a:prstGeom>
-          <a:solidFill>
-            <a:srgbClr val="E9EBF0"/>
-          </a:solidFill>
-          <a:ln>
-            <a:noFill/>
-          </a:ln>
-        </p:spPr>
-        <p:style>
-          <a:lnRef idx="1">
-            <a:schemeClr val="accent1"/>
-          </a:lnRef>
-          <a:fillRef idx="3">
-            <a:schemeClr val="accent1"/>
-          </a:fillRef>
-          <a:effectRef idx="2">
-            <a:schemeClr val="accent1"/>
-          </a:effectRef>
-          <a:fontRef idx="minor">
-            <a:schemeClr val="lt1"/>
-          </a:fontRef>
-        </p:style>
-        <p:txBody>
-          <a:bodyPr rtlCol="0" anchor="ctr"/>
-          <a:lstStyle/>
-          <a:p>
-            <a:pPr algn="ctr"/>
-          </a:p>
-        </p:txBody>
-      </p:sp>
-      <p:sp>
-        <p:nvSpPr>
-          <p:cNvPr id="6" name="Rounded Rectangle 5"/>
-          <p:cNvSpPr/>
-          <p:nvPr/>
-        </p:nvSpPr>
-        <p:spPr>
-          <a:xfrm>
-            <a:off x="8183879" y="457200"/>
-            <a:ext cx="292608" cy="292608"/>
-          </a:xfrm>
-          <a:prstGeom prst="roundRect">
-            <a:avLst>
-              <a:gd name="adj" fmla="val 32000"/>
-            </a:avLst>
-          </a:prstGeom>
-          <a:solidFill>
-            <a:srgbClr val="0EA5E9"/>
-          </a:solidFill>
-          <a:ln>
-            <a:noFill/>
-          </a:ln>
-        </p:spPr>
-        <p:style>
-          <a:lnRef idx="1">
-            <a:schemeClr val="accent1"/>
-          </a:lnRef>
-          <a:fillRef idx="3">
-            <a:schemeClr val="accent1"/>
-          </a:fillRef>
-          <a:effectRef idx="2">
-            <a:schemeClr val="accent1"/>
-          </a:effectRef>
-          <a:fontRef idx="minor">
-            <a:schemeClr val="lt1"/>
-          </a:fontRef>
-        </p:style>
-        <p:txBody>
-          <a:bodyPr rtlCol="0" anchor="ctr"/>
-          <a:lstStyle/>
-          <a:p>
-            <a:pPr algn="ctr"/>
-          </a:p>
-        </p:txBody>
-      </p:sp>
-      <p:sp>
-        <p:nvSpPr>
-          <p:cNvPr id="7" name="TextBox 6"/>
-          <p:cNvSpPr txBox="1"/>
-          <p:nvPr/>
-        </p:nvSpPr>
-        <p:spPr>
-          <a:xfrm>
-            <a:off x="8129015" y="489204"/>
-            <a:ext cx="402336" cy="228600"/>
-          </a:xfrm>
-          <a:prstGeom prst="rect">
-            <a:avLst/>
-          </a:prstGeom>
-          <a:noFill/>
-        </p:spPr>
-        <p:txBody>
-          <a:bodyPr wrap="square" lIns="0" rIns="0" tIns="0" bIns="0">
-            <a:spAutoFit/>
-          </a:bodyPr>
-          <a:lstStyle/>
-          <a:p>
-            <a:pPr algn="ctr"/>
-            <a:r>
-              <a:rPr sz="1200" b="1" i="0">
-                <a:solidFill>
-                  <a:srgbClr val="FFFFFF"/>
-                </a:solidFill>
-                <a:latin typeface="Helvetica Neue"/>
-              </a:rPr>
-              <a:t>1</a:t>
-            </a:r>
-          </a:p>
-        </p:txBody>
-      </p:sp>
-      <p:sp>
-        <p:nvSpPr>
-          <p:cNvPr id="8" name="Rounded Rectangle 7"/>
-          <p:cNvSpPr/>
-          <p:nvPr/>
-        </p:nvSpPr>
-        <p:spPr>
-          <a:xfrm>
-            <a:off x="8695943" y="493776"/>
-            <a:ext cx="219456" cy="219456"/>
-          </a:xfrm>
-          <a:prstGeom prst="roundRect">
-            <a:avLst>
-              <a:gd name="adj" fmla="val 32000"/>
-            </a:avLst>
-          </a:prstGeom>
-          <a:solidFill>
-            <a:srgbClr val="E9EBF0"/>
-          </a:solidFill>
-          <a:ln>
-            <a:noFill/>
-          </a:ln>
-        </p:spPr>
-        <p:style>
-          <a:lnRef idx="1">
-            <a:schemeClr val="accent1"/>
-          </a:lnRef>
-          <a:fillRef idx="3">
-            <a:schemeClr val="accent1"/>
-          </a:fillRef>
-          <a:effectRef idx="2">
-            <a:schemeClr val="accent1"/>
-          </a:effectRef>
-          <a:fontRef idx="minor">
-            <a:schemeClr val="lt1"/>
-          </a:fontRef>
-        </p:style>
-        <p:txBody>
-          <a:bodyPr rtlCol="0" anchor="ctr"/>
-          <a:lstStyle/>
-          <a:p>
-            <a:pPr algn="ctr"/>
-          </a:p>
-        </p:txBody>
-      </p:sp>
-      <p:sp>
-        <p:nvSpPr>
-          <p:cNvPr id="9" name="TextBox 8"/>
-          <p:cNvSpPr txBox="1"/>
-          <p:nvPr/>
-        </p:nvSpPr>
-        <p:spPr>
-          <a:xfrm>
-            <a:off x="8641079" y="489204"/>
-            <a:ext cx="329184" cy="228600"/>
-          </a:xfrm>
-          <a:prstGeom prst="rect">
-            <a:avLst/>
-          </a:prstGeom>
-          <a:noFill/>
-        </p:spPr>
-        <p:txBody>
-          <a:bodyPr wrap="square" lIns="0" rIns="0" tIns="0" bIns="0">
-            <a:spAutoFit/>
-          </a:bodyPr>
-          <a:lstStyle/>
-          <a:p>
-            <a:pPr algn="ctr"/>
-            <a:r>
-              <a:rPr sz="950" b="1" i="0">
-                <a:solidFill>
-                  <a:srgbClr val="AEB4BF"/>
-                </a:solidFill>
-                <a:latin typeface="Helvetica Neue"/>
-              </a:rPr>
-              <a:t>2</a:t>
-            </a:r>
-          </a:p>
-        </p:txBody>
-      </p:sp>
-      <p:sp>
-        <p:nvSpPr>
-          <p:cNvPr id="10" name="Rounded Rectangle 9"/>
-          <p:cNvSpPr/>
-          <p:nvPr/>
-        </p:nvSpPr>
-        <p:spPr>
-          <a:xfrm>
-            <a:off x="9171431" y="493776"/>
-            <a:ext cx="219456" cy="219456"/>
-          </a:xfrm>
-          <a:prstGeom prst="roundRect">
-            <a:avLst>
-              <a:gd name="adj" fmla="val 32000"/>
-            </a:avLst>
-          </a:prstGeom>
-          <a:solidFill>
-            <a:srgbClr val="E9EBF0"/>
-          </a:solidFill>
-          <a:ln>
-            <a:noFill/>
-          </a:ln>
-        </p:spPr>
-        <p:style>
-          <a:lnRef idx="1">
-            <a:schemeClr val="accent1"/>
-          </a:lnRef>
-          <a:fillRef idx="3">
-            <a:schemeClr val="accent1"/>
-          </a:fillRef>
-          <a:effectRef idx="2">
-            <a:schemeClr val="accent1"/>
-          </a:effectRef>
-          <a:fontRef idx="minor">
-            <a:schemeClr val="lt1"/>
-          </a:fontRef>
-        </p:style>
-        <p:txBody>
-          <a:bodyPr rtlCol="0" anchor="ctr"/>
-          <a:lstStyle/>
-          <a:p>
-            <a:pPr algn="ctr"/>
-          </a:p>
-        </p:txBody>
-      </p:sp>
-      <p:sp>
-        <p:nvSpPr>
-          <p:cNvPr id="11" name="TextBox 10"/>
-          <p:cNvSpPr txBox="1"/>
-          <p:nvPr/>
-        </p:nvSpPr>
-        <p:spPr>
-          <a:xfrm>
-            <a:off x="9116567" y="489204"/>
-            <a:ext cx="329184" cy="228600"/>
-          </a:xfrm>
-          <a:prstGeom prst="rect">
-            <a:avLst/>
-          </a:prstGeom>
-          <a:noFill/>
-        </p:spPr>
-        <p:txBody>
-          <a:bodyPr wrap="square" lIns="0" rIns="0" tIns="0" bIns="0">
-            <a:spAutoFit/>
-          </a:bodyPr>
-          <a:lstStyle/>
-          <a:p>
-            <a:pPr algn="ctr"/>
-            <a:r>
-              <a:rPr sz="950" b="1" i="0">
-                <a:solidFill>
-                  <a:srgbClr val="AEB4BF"/>
-                </a:solidFill>
-                <a:latin typeface="Helvetica Neue"/>
-              </a:rPr>
-              <a:t>3</a:t>
-            </a:r>
-          </a:p>
-        </p:txBody>
-      </p:sp>
-      <p:sp>
-        <p:nvSpPr>
-          <p:cNvPr id="12" name="Rounded Rectangle 11"/>
-          <p:cNvSpPr/>
-          <p:nvPr/>
-        </p:nvSpPr>
-        <p:spPr>
-          <a:xfrm>
-            <a:off x="9646919" y="493776"/>
-            <a:ext cx="219456" cy="219456"/>
-          </a:xfrm>
-          <a:prstGeom prst="roundRect">
-            <a:avLst>
-              <a:gd name="adj" fmla="val 32000"/>
-            </a:avLst>
-          </a:prstGeom>
-          <a:solidFill>
-            <a:srgbClr val="E9EBF0"/>
-          </a:solidFill>
-          <a:ln>
-            <a:noFill/>
-          </a:ln>
-        </p:spPr>
-        <p:style>
-          <a:lnRef idx="1">
-            <a:schemeClr val="accent1"/>
-          </a:lnRef>
-          <a:fillRef idx="3">
-            <a:schemeClr val="accent1"/>
-          </a:fillRef>
-          <a:effectRef idx="2">
-            <a:schemeClr val="accent1"/>
-          </a:effectRef>
-          <a:fontRef idx="minor">
-            <a:schemeClr val="lt1"/>
-          </a:fontRef>
-        </p:style>
-        <p:txBody>
-          <a:bodyPr rtlCol="0" anchor="ctr"/>
-          <a:lstStyle/>
-          <a:p>
-            <a:pPr algn="ctr"/>
-          </a:p>
-        </p:txBody>
-      </p:sp>
-      <p:sp>
-        <p:nvSpPr>
-          <p:cNvPr id="13" name="TextBox 12"/>
-          <p:cNvSpPr txBox="1"/>
-          <p:nvPr/>
-        </p:nvSpPr>
-        <p:spPr>
-          <a:xfrm>
-            <a:off x="9592055" y="489204"/>
-            <a:ext cx="329184" cy="228600"/>
-          </a:xfrm>
-          <a:prstGeom prst="rect">
-            <a:avLst/>
-          </a:prstGeom>
-          <a:noFill/>
-        </p:spPr>
-        <p:txBody>
-          <a:bodyPr wrap="square" lIns="0" rIns="0" tIns="0" bIns="0">
-            <a:spAutoFit/>
-          </a:bodyPr>
-          <a:lstStyle/>
-          <a:p>
-            <a:pPr algn="ctr"/>
-            <a:r>
-              <a:rPr sz="950" b="1" i="0">
-                <a:solidFill>
-                  <a:srgbClr val="AEB4BF"/>
-                </a:solidFill>
-                <a:latin typeface="Helvetica Neue"/>
-              </a:rPr>
-              <a:t>4</a:t>
-            </a:r>
-          </a:p>
-        </p:txBody>
-      </p:sp>
-      <p:sp>
-        <p:nvSpPr>
-          <p:cNvPr id="14" name="Rounded Rectangle 13"/>
-          <p:cNvSpPr/>
-          <p:nvPr/>
-        </p:nvSpPr>
-        <p:spPr>
-          <a:xfrm>
-            <a:off x="10122407" y="493776"/>
-            <a:ext cx="219456" cy="219456"/>
-          </a:xfrm>
-          <a:prstGeom prst="roundRect">
-            <a:avLst>
-              <a:gd name="adj" fmla="val 32000"/>
-            </a:avLst>
-          </a:prstGeom>
-          <a:solidFill>
-            <a:srgbClr val="E9EBF0"/>
-          </a:solidFill>
-          <a:ln>
-            <a:noFill/>
-          </a:ln>
-        </p:spPr>
-        <p:style>
-          <a:lnRef idx="1">
-            <a:schemeClr val="accent1"/>
-          </a:lnRef>
-          <a:fillRef idx="3">
-            <a:schemeClr val="accent1"/>
-          </a:fillRef>
-          <a:effectRef idx="2">
-            <a:schemeClr val="accent1"/>
-          </a:effectRef>
-          <a:fontRef idx="minor">
-            <a:schemeClr val="lt1"/>
-          </a:fontRef>
-        </p:style>
-        <p:txBody>
-          <a:bodyPr rtlCol="0" anchor="ctr"/>
-          <a:lstStyle/>
-          <a:p>
-            <a:pPr algn="ctr"/>
-          </a:p>
-        </p:txBody>
-      </p:sp>
-      <p:sp>
-        <p:nvSpPr>
-          <p:cNvPr id="15" name="TextBox 14"/>
-          <p:cNvSpPr txBox="1"/>
-          <p:nvPr/>
-        </p:nvSpPr>
-        <p:spPr>
-          <a:xfrm>
-            <a:off x="10067543" y="489204"/>
-            <a:ext cx="329184" cy="228600"/>
-          </a:xfrm>
-          <a:prstGeom prst="rect">
-            <a:avLst/>
-          </a:prstGeom>
-          <a:noFill/>
-        </p:spPr>
-        <p:txBody>
-          <a:bodyPr wrap="square" lIns="0" rIns="0" tIns="0" bIns="0">
-            <a:spAutoFit/>
-          </a:bodyPr>
-          <a:lstStyle/>
-          <a:p>
-            <a:pPr algn="ctr"/>
-            <a:r>
-              <a:rPr sz="950" b="1" i="0">
-                <a:solidFill>
-                  <a:srgbClr val="AEB4BF"/>
-                </a:solidFill>
-                <a:latin typeface="Helvetica Neue"/>
-              </a:rPr>
-              <a:t>5</a:t>
-            </a:r>
-          </a:p>
-        </p:txBody>
-      </p:sp>
-      <p:sp>
-        <p:nvSpPr>
-          <p:cNvPr id="16" name="Rounded Rectangle 15"/>
-          <p:cNvSpPr/>
-          <p:nvPr/>
-        </p:nvSpPr>
-        <p:spPr>
-          <a:xfrm>
-            <a:off x="10597895" y="493776"/>
-            <a:ext cx="219456" cy="219456"/>
-          </a:xfrm>
-          <a:prstGeom prst="roundRect">
-            <a:avLst>
-              <a:gd name="adj" fmla="val 32000"/>
-            </a:avLst>
-          </a:prstGeom>
-          <a:solidFill>
-            <a:srgbClr val="E9EBF0"/>
-          </a:solidFill>
-          <a:ln>
-            <a:noFill/>
-          </a:ln>
-        </p:spPr>
-        <p:style>
-          <a:lnRef idx="1">
-            <a:schemeClr val="accent1"/>
-          </a:lnRef>
-          <a:fillRef idx="3">
-            <a:schemeClr val="accent1"/>
-          </a:fillRef>
-          <a:effectRef idx="2">
-            <a:schemeClr val="accent1"/>
-          </a:effectRef>
-          <a:fontRef idx="minor">
-            <a:schemeClr val="lt1"/>
-          </a:fontRef>
-        </p:style>
-        <p:txBody>
-          <a:bodyPr rtlCol="0" anchor="ctr"/>
-          <a:lstStyle/>
-          <a:p>
-            <a:pPr algn="ctr"/>
-          </a:p>
-        </p:txBody>
-      </p:sp>
-      <p:sp>
-        <p:nvSpPr>
-          <p:cNvPr id="17" name="TextBox 16"/>
-          <p:cNvSpPr txBox="1"/>
-          <p:nvPr/>
-        </p:nvSpPr>
-        <p:spPr>
-          <a:xfrm>
-            <a:off x="10543031" y="489204"/>
-            <a:ext cx="329184" cy="228600"/>
-          </a:xfrm>
-          <a:prstGeom prst="rect">
-            <a:avLst/>
-          </a:prstGeom>
-          <a:noFill/>
-        </p:spPr>
-        <p:txBody>
-          <a:bodyPr wrap="square" lIns="0" rIns="0" tIns="0" bIns="0">
-            <a:spAutoFit/>
-          </a:bodyPr>
-          <a:lstStyle/>
-          <a:p>
-            <a:pPr algn="ctr"/>
-            <a:r>
-              <a:rPr sz="950" b="1" i="0">
-                <a:solidFill>
-                  <a:srgbClr val="AEB4BF"/>
-                </a:solidFill>
-                <a:latin typeface="Helvetica Neue"/>
-              </a:rPr>
-              <a:t>6</a:t>
-            </a:r>
-          </a:p>
-        </p:txBody>
-      </p:sp>
-      <p:sp>
-        <p:nvSpPr>
-          <p:cNvPr id="18" name="Rounded Rectangle 17"/>
-          <p:cNvSpPr/>
-          <p:nvPr/>
-        </p:nvSpPr>
-        <p:spPr>
-          <a:xfrm>
-            <a:off x="11073384" y="493776"/>
-            <a:ext cx="219456" cy="219456"/>
-          </a:xfrm>
-          <a:prstGeom prst="roundRect">
-            <a:avLst>
-              <a:gd name="adj" fmla="val 32000"/>
-            </a:avLst>
-          </a:prstGeom>
-          <a:solidFill>
-            <a:srgbClr val="E9EBF0"/>
-          </a:solidFill>
-          <a:ln>
-            <a:noFill/>
-          </a:ln>
-        </p:spPr>
-        <p:style>
-          <a:lnRef idx="1">
-            <a:schemeClr val="accent1"/>
-          </a:lnRef>
-          <a:fillRef idx="3">
-            <a:schemeClr val="accent1"/>
-          </a:fillRef>
-          <a:effectRef idx="2">
-            <a:schemeClr val="accent1"/>
-          </a:effectRef>
-          <a:fontRef idx="minor">
-            <a:schemeClr val="lt1"/>
-          </a:fontRef>
-        </p:style>
-        <p:txBody>
-          <a:bodyPr rtlCol="0" anchor="ctr"/>
-          <a:lstStyle/>
-          <a:p>
-            <a:pPr algn="ctr"/>
-          </a:p>
-        </p:txBody>
-      </p:sp>
-      <p:sp>
-        <p:nvSpPr>
-          <p:cNvPr id="19" name="TextBox 18"/>
-          <p:cNvSpPr txBox="1"/>
-          <p:nvPr/>
-        </p:nvSpPr>
-        <p:spPr>
-          <a:xfrm>
-            <a:off x="11018519" y="489204"/>
-            <a:ext cx="329184" cy="228600"/>
-          </a:xfrm>
-          <a:prstGeom prst="rect">
-            <a:avLst/>
-          </a:prstGeom>
-          <a:noFill/>
-        </p:spPr>
-        <p:txBody>
-          <a:bodyPr wrap="square" lIns="0" rIns="0" tIns="0" bIns="0">
-            <a:spAutoFit/>
-          </a:bodyPr>
-          <a:lstStyle/>
-          <a:p>
-            <a:pPr algn="ctr"/>
-            <a:r>
-              <a:rPr sz="950" b="1" i="0">
-                <a:solidFill>
-                  <a:srgbClr val="AEB4BF"/>
-                </a:solidFill>
-                <a:latin typeface="Helvetica Neue"/>
-              </a:rPr>
-              <a:t>7</a:t>
-            </a:r>
-          </a:p>
-        </p:txBody>
-      </p:sp>
-      <p:sp>
-        <p:nvSpPr>
-          <p:cNvPr id="20" name="TextBox 19"/>
+              <a:t>Read it bottom to top. Cost climbs steeply. The payoff flattens early.</a:t>
+            </a:r>
+          </a:p>
+        </p:txBody>
+      </p:sp>
+      <p:sp>
+        <p:nvSpPr>
+          <p:cNvPr id="5" name="TextBox 4"/>
           <p:cNvSpPr txBox="1"/>
           <p:nvPr/>
         </p:nvSpPr>
@@ -8140,7 +8553,7 @@
       </p:sp>
       <p:pic>
         <p:nvPicPr>
-          <p:cNvPr id="21" name="Picture 20" descr="d_mlm.png"/>
+          <p:cNvPr id="6" name="Picture 5" descr="fig_ladder.png"/>
           <p:cNvPicPr>
             <a:picLocks noChangeAspect="1"/>
           </p:cNvPicPr>
@@ -8154,209 +8567,14 @@
         </p:blipFill>
         <p:spPr>
           <a:xfrm>
-            <a:off x="518007" y="2173672"/>
-            <a:ext cx="11155680" cy="3836534"/>
+            <a:off x="1577949" y="1874519"/>
+            <a:ext cx="9035796" cy="4480560"/>
           </a:xfrm>
           <a:prstGeom prst="rect">
             <a:avLst/>
           </a:prstGeom>
         </p:spPr>
       </p:pic>
-      <p:sp>
-        <p:nvSpPr>
-          <p:cNvPr id="22" name="Rounded Rectangle 21"/>
-          <p:cNvSpPr/>
-          <p:nvPr/>
-        </p:nvSpPr>
-        <p:spPr>
-          <a:xfrm>
-            <a:off x="7906816" y="6345936"/>
-            <a:ext cx="3644798" cy="365760"/>
-          </a:xfrm>
-          <a:prstGeom prst="roundRect">
-            <a:avLst>
-              <a:gd name="adj" fmla="val 44000"/>
-            </a:avLst>
-          </a:prstGeom>
-          <a:solidFill>
-            <a:srgbClr val="059669"/>
-          </a:solidFill>
-          <a:ln>
-            <a:noFill/>
-          </a:ln>
-        </p:spPr>
-        <p:style>
-          <a:lnRef idx="1">
-            <a:schemeClr val="accent1"/>
-          </a:lnRef>
-          <a:fillRef idx="3">
-            <a:schemeClr val="accent1"/>
-          </a:fillRef>
-          <a:effectRef idx="2">
-            <a:schemeClr val="accent1"/>
-          </a:effectRef>
-          <a:fontRef idx="minor">
-            <a:schemeClr val="lt1"/>
-          </a:fontRef>
-        </p:style>
-        <p:txBody>
-          <a:bodyPr rtlCol="0" anchor="ctr"/>
-          <a:lstStyle/>
-          <a:p>
-            <a:pPr algn="ctr"/>
-          </a:p>
-        </p:txBody>
-      </p:sp>
-      <p:sp>
-        <p:nvSpPr>
-          <p:cNvPr id="23" name="Rounded Rectangle 22"/>
-          <p:cNvSpPr/>
-          <p:nvPr/>
-        </p:nvSpPr>
-        <p:spPr>
-          <a:xfrm>
-            <a:off x="8949232" y="6396228"/>
-            <a:ext cx="685800" cy="265176"/>
-          </a:xfrm>
-          <a:prstGeom prst="roundRect">
-            <a:avLst>
-              <a:gd name="adj" fmla="val 44000"/>
-            </a:avLst>
-          </a:prstGeom>
-          <a:solidFill>
-            <a:srgbClr val="064E3B"/>
-          </a:solidFill>
-          <a:ln>
-            <a:noFill/>
-          </a:ln>
-        </p:spPr>
-        <p:style>
-          <a:lnRef idx="1">
-            <a:schemeClr val="accent1"/>
-          </a:lnRef>
-          <a:fillRef idx="3">
-            <a:schemeClr val="accent1"/>
-          </a:fillRef>
-          <a:effectRef idx="2">
-            <a:schemeClr val="accent1"/>
-          </a:effectRef>
-          <a:fontRef idx="minor">
-            <a:schemeClr val="lt1"/>
-          </a:fontRef>
-        </p:style>
-        <p:txBody>
-          <a:bodyPr rtlCol="0" anchor="ctr"/>
-          <a:lstStyle/>
-          <a:p>
-            <a:pPr algn="ctr"/>
-          </a:p>
-        </p:txBody>
-      </p:sp>
-      <p:sp>
-        <p:nvSpPr>
-          <p:cNvPr id="24" name="TextBox 23"/>
-          <p:cNvSpPr txBox="1"/>
-          <p:nvPr/>
-        </p:nvSpPr>
-        <p:spPr>
-          <a:xfrm>
-            <a:off x="8062264" y="6460236"/>
-            <a:ext cx="914400" cy="219456"/>
-          </a:xfrm>
-          <a:prstGeom prst="rect">
-            <a:avLst/>
-          </a:prstGeom>
-          <a:noFill/>
-        </p:spPr>
-        <p:txBody>
-          <a:bodyPr wrap="none" lIns="0" rIns="0" tIns="0" bIns="0">
-            <a:spAutoFit/>
-          </a:bodyPr>
-          <a:lstStyle/>
-          <a:p>
-            <a:pPr algn="l"/>
-            <a:r>
-              <a:rPr sz="950" b="1" i="0">
-                <a:solidFill>
-                  <a:srgbClr val="A7F3D0"/>
-                </a:solidFill>
-                <a:latin typeface="Helvetica Neue"/>
-              </a:rPr>
-              <a:t>▶ NOTEBOOK</a:t>
-            </a:r>
-          </a:p>
-        </p:txBody>
-      </p:sp>
-      <p:sp>
-        <p:nvSpPr>
-          <p:cNvPr id="25" name="TextBox 24"/>
-          <p:cNvSpPr txBox="1"/>
-          <p:nvPr/>
-        </p:nvSpPr>
-        <p:spPr>
-          <a:xfrm>
-            <a:off x="8949232" y="6451092"/>
-            <a:ext cx="685800" cy="219456"/>
-          </a:xfrm>
-          <a:prstGeom prst="rect">
-            <a:avLst/>
-          </a:prstGeom>
-          <a:noFill/>
-        </p:spPr>
-        <p:txBody>
-          <a:bodyPr wrap="none" lIns="0" rIns="0" tIns="0" bIns="0">
-            <a:spAutoFit/>
-          </a:bodyPr>
-          <a:lstStyle/>
-          <a:p>
-            <a:pPr algn="ctr"/>
-            <a:r>
-              <a:rPr sz="1100" b="1" i="0">
-                <a:solidFill>
-                  <a:srgbClr val="FFFFFF"/>
-                </a:solidFill>
-                <a:latin typeface="Helvetica Neue"/>
-              </a:rPr>
-              <a:t>STEP 4</a:t>
-            </a:r>
-          </a:p>
-        </p:txBody>
-      </p:sp>
-      <p:sp>
-        <p:nvSpPr>
-          <p:cNvPr id="26" name="TextBox 25"/>
-          <p:cNvSpPr txBox="1"/>
-          <p:nvPr/>
-        </p:nvSpPr>
-        <p:spPr>
-          <a:xfrm>
-            <a:off x="9753904" y="6460236"/>
-            <a:ext cx="1697126" cy="219456"/>
-          </a:xfrm>
-          <a:prstGeom prst="rect">
-            <a:avLst/>
-          </a:prstGeom>
-          <a:noFill/>
-        </p:spPr>
-        <p:txBody>
-          <a:bodyPr wrap="none" lIns="0" rIns="0" tIns="0" bIns="0">
-            <a:spAutoFit/>
-          </a:bodyPr>
-          <a:lstStyle/>
-          <a:p>
-            <a:pPr algn="l"/>
-            <a:r>
-              <a:rPr sz="1000" b="1" i="0">
-                <a:solidFill>
-                  <a:srgbClr val="FFFFFF"/>
-                </a:solidFill>
-                <a:latin typeface="Helvetica Neue"/>
-              </a:rPr>
-              <a:t>Fill in the blank</a:t>
-            </a:r>
-          </a:p>
-        </p:txBody>
-      </p:sp>
     </p:spTree>
   </p:cSld>
   <p:clrMapOvr>
@@ -8440,7 +8658,7 @@
                 </a:solidFill>
                 <a:latin typeface="Helvetica Neue"/>
               </a:rPr>
-              <a:t>And here is exactly what it does not know.</a:t>
+              <a:t>Somebody already paid to teach it English.</a:t>
             </a:r>
           </a:p>
         </p:txBody>
@@ -8475,7 +8693,7 @@
                 </a:solidFill>
                 <a:latin typeface="Helvetica Neue"/>
               </a:rPr>
-              <a:t>The same fill-in-the-blank game, asked about our world instead of the general one.</a:t>
+              <a:t>This is the exercise they used. It needs no labelled data, which is why it could be done at scale.</a:t>
             </a:r>
           </a:p>
         </p:txBody>
@@ -9120,7 +9338,7 @@
       </p:sp>
       <p:pic>
         <p:nvPicPr>
-          <p:cNvPr id="21" name="Picture 20" descr="d_jargon14.png"/>
+          <p:cNvPr id="21" name="Picture 20" descr="d_mlm.png"/>
           <p:cNvPicPr>
             <a:picLocks noChangeAspect="1"/>
           </p:cNvPicPr>
@@ -9134,8 +9352,8 @@
         </p:blipFill>
         <p:spPr>
           <a:xfrm>
-            <a:off x="518007" y="2163061"/>
-            <a:ext cx="11155680" cy="3857757"/>
+            <a:off x="518007" y="2173672"/>
+            <a:ext cx="11155680" cy="3836534"/>
           </a:xfrm>
           <a:prstGeom prst="rect">
             <a:avLst/>
@@ -9150,8 +9368,8 @@
         </p:nvSpPr>
         <p:spPr>
           <a:xfrm>
-            <a:off x="6772046" y="6345936"/>
-            <a:ext cx="4779568" cy="365760"/>
+            <a:off x="7906816" y="6345936"/>
+            <a:ext cx="3644798" cy="365760"/>
           </a:xfrm>
           <a:prstGeom prst="roundRect">
             <a:avLst>
@@ -9195,7 +9413,7 @@
         </p:nvSpPr>
         <p:spPr>
           <a:xfrm>
-            <a:off x="7814462" y="6396228"/>
+            <a:off x="8949232" y="6396228"/>
             <a:ext cx="685800" cy="265176"/>
           </a:xfrm>
           <a:prstGeom prst="roundRect">
@@ -9240,7 +9458,7 @@
         </p:nvSpPr>
         <p:spPr>
           <a:xfrm>
-            <a:off x="6927494" y="6460236"/>
+            <a:off x="8062264" y="6460236"/>
             <a:ext cx="914400" cy="219456"/>
           </a:xfrm>
           <a:prstGeom prst="rect">
@@ -9275,7 +9493,7 @@
         </p:nvSpPr>
         <p:spPr>
           <a:xfrm>
-            <a:off x="7814462" y="6451092"/>
+            <a:off x="8949232" y="6451092"/>
             <a:ext cx="685800" cy="219456"/>
           </a:xfrm>
           <a:prstGeom prst="rect">
@@ -9297,7 +9515,7 @@
                 </a:solidFill>
                 <a:latin typeface="Helvetica Neue"/>
               </a:rPr>
-              <a:t>STEP 5</a:t>
+              <a:t>STEP 4</a:t>
             </a:r>
           </a:p>
         </p:txBody>
@@ -9310,8 +9528,8 @@
         </p:nvSpPr>
         <p:spPr>
           <a:xfrm>
-            <a:off x="8619134" y="6460236"/>
-            <a:ext cx="2831896" cy="219456"/>
+            <a:off x="9753904" y="6460236"/>
+            <a:ext cx="1697126" cy="219456"/>
           </a:xfrm>
           <a:prstGeom prst="rect">
             <a:avLst/>
@@ -9332,7 +9550,7 @@
                 </a:solidFill>
                 <a:latin typeface="Helvetica Neue"/>
               </a:rPr>
-              <a:t>Fill in the blank on Cobalt jargon</a:t>
+              <a:t>Fill in the blank</a:t>
             </a:r>
           </a:p>
         </p:txBody>
@@ -9385,7 +9603,7 @@
                 </a:solidFill>
                 <a:latin typeface="Helvetica Neue"/>
               </a:rPr>
-              <a:t>TWO SHAPES OF MODEL</a:t>
+              <a:t>WHY ANY OF THIS WORKS</a:t>
             </a:r>
           </a:p>
         </p:txBody>
@@ -9399,7 +9617,7 @@
         <p:spPr>
           <a:xfrm>
             <a:off x="640080" y="758952"/>
-            <a:ext cx="10972800" cy="704088"/>
+            <a:ext cx="7315200" cy="704088"/>
           </a:xfrm>
           <a:prstGeom prst="rect">
             <a:avLst/>
@@ -9414,13 +9632,13 @@
           <a:p>
             <a:pPr algn="l"/>
             <a:r>
-              <a:rPr sz="2900" b="1" i="0">
+              <a:rPr sz="2500" b="1" i="0">
                 <a:solidFill>
                   <a:srgbClr val="0F172A"/>
                 </a:solidFill>
                 <a:latin typeface="Helvetica Neue"/>
               </a:rPr>
-              <a:t>Why BERT reads and GPT writes.</a:t>
+              <a:t>And here is exactly what it does not know.</a:t>
             </a:r>
           </a:p>
         </p:txBody>
@@ -9455,14 +9673,617 @@
                 </a:solidFill>
                 <a:latin typeface="Helvetica Neue"/>
               </a:rPr>
-              <a:t>Same transformer block from last lecture. One difference: may a word look to its right?</a:t>
-            </a:r>
-          </a:p>
-        </p:txBody>
-      </p:sp>
-      <p:sp>
-        <p:nvSpPr>
-          <p:cNvPr id="5" name="TextBox 4"/>
+              <a:t>The same fill-in-the-blank game, asked about our world instead of the general one.</a:t>
+            </a:r>
+          </a:p>
+        </p:txBody>
+      </p:sp>
+      <p:sp>
+        <p:nvSpPr>
+          <p:cNvPr id="5" name="Rounded Rectangle 4"/>
+          <p:cNvSpPr/>
+          <p:nvPr/>
+        </p:nvSpPr>
+        <p:spPr>
+          <a:xfrm>
+            <a:off x="8302752" y="593445"/>
+            <a:ext cx="2852928" cy="20116"/>
+          </a:xfrm>
+          <a:prstGeom prst="roundRect">
+            <a:avLst/>
+          </a:prstGeom>
+          <a:solidFill>
+            <a:srgbClr val="E9EBF0"/>
+          </a:solidFill>
+          <a:ln>
+            <a:noFill/>
+          </a:ln>
+        </p:spPr>
+        <p:style>
+          <a:lnRef idx="1">
+            <a:schemeClr val="accent1"/>
+          </a:lnRef>
+          <a:fillRef idx="3">
+            <a:schemeClr val="accent1"/>
+          </a:fillRef>
+          <a:effectRef idx="2">
+            <a:schemeClr val="accent1"/>
+          </a:effectRef>
+          <a:fontRef idx="minor">
+            <a:schemeClr val="lt1"/>
+          </a:fontRef>
+        </p:style>
+        <p:txBody>
+          <a:bodyPr rtlCol="0" anchor="ctr"/>
+          <a:lstStyle/>
+          <a:p>
+            <a:pPr algn="ctr"/>
+          </a:p>
+        </p:txBody>
+      </p:sp>
+      <p:sp>
+        <p:nvSpPr>
+          <p:cNvPr id="6" name="Rounded Rectangle 5"/>
+          <p:cNvSpPr/>
+          <p:nvPr/>
+        </p:nvSpPr>
+        <p:spPr>
+          <a:xfrm>
+            <a:off x="8183879" y="457200"/>
+            <a:ext cx="292608" cy="292608"/>
+          </a:xfrm>
+          <a:prstGeom prst="roundRect">
+            <a:avLst>
+              <a:gd name="adj" fmla="val 32000"/>
+            </a:avLst>
+          </a:prstGeom>
+          <a:solidFill>
+            <a:srgbClr val="0EA5E9"/>
+          </a:solidFill>
+          <a:ln>
+            <a:noFill/>
+          </a:ln>
+        </p:spPr>
+        <p:style>
+          <a:lnRef idx="1">
+            <a:schemeClr val="accent1"/>
+          </a:lnRef>
+          <a:fillRef idx="3">
+            <a:schemeClr val="accent1"/>
+          </a:fillRef>
+          <a:effectRef idx="2">
+            <a:schemeClr val="accent1"/>
+          </a:effectRef>
+          <a:fontRef idx="minor">
+            <a:schemeClr val="lt1"/>
+          </a:fontRef>
+        </p:style>
+        <p:txBody>
+          <a:bodyPr rtlCol="0" anchor="ctr"/>
+          <a:lstStyle/>
+          <a:p>
+            <a:pPr algn="ctr"/>
+          </a:p>
+        </p:txBody>
+      </p:sp>
+      <p:sp>
+        <p:nvSpPr>
+          <p:cNvPr id="7" name="TextBox 6"/>
+          <p:cNvSpPr txBox="1"/>
+          <p:nvPr/>
+        </p:nvSpPr>
+        <p:spPr>
+          <a:xfrm>
+            <a:off x="8129015" y="489204"/>
+            <a:ext cx="402336" cy="228600"/>
+          </a:xfrm>
+          <a:prstGeom prst="rect">
+            <a:avLst/>
+          </a:prstGeom>
+          <a:noFill/>
+        </p:spPr>
+        <p:txBody>
+          <a:bodyPr wrap="square" lIns="0" rIns="0" tIns="0" bIns="0">
+            <a:spAutoFit/>
+          </a:bodyPr>
+          <a:lstStyle/>
+          <a:p>
+            <a:pPr algn="ctr"/>
+            <a:r>
+              <a:rPr sz="1200" b="1" i="0">
+                <a:solidFill>
+                  <a:srgbClr val="FFFFFF"/>
+                </a:solidFill>
+                <a:latin typeface="Helvetica Neue"/>
+              </a:rPr>
+              <a:t>1</a:t>
+            </a:r>
+          </a:p>
+        </p:txBody>
+      </p:sp>
+      <p:sp>
+        <p:nvSpPr>
+          <p:cNvPr id="8" name="Rounded Rectangle 7"/>
+          <p:cNvSpPr/>
+          <p:nvPr/>
+        </p:nvSpPr>
+        <p:spPr>
+          <a:xfrm>
+            <a:off x="8695943" y="493776"/>
+            <a:ext cx="219456" cy="219456"/>
+          </a:xfrm>
+          <a:prstGeom prst="roundRect">
+            <a:avLst>
+              <a:gd name="adj" fmla="val 32000"/>
+            </a:avLst>
+          </a:prstGeom>
+          <a:solidFill>
+            <a:srgbClr val="E9EBF0"/>
+          </a:solidFill>
+          <a:ln>
+            <a:noFill/>
+          </a:ln>
+        </p:spPr>
+        <p:style>
+          <a:lnRef idx="1">
+            <a:schemeClr val="accent1"/>
+          </a:lnRef>
+          <a:fillRef idx="3">
+            <a:schemeClr val="accent1"/>
+          </a:fillRef>
+          <a:effectRef idx="2">
+            <a:schemeClr val="accent1"/>
+          </a:effectRef>
+          <a:fontRef idx="minor">
+            <a:schemeClr val="lt1"/>
+          </a:fontRef>
+        </p:style>
+        <p:txBody>
+          <a:bodyPr rtlCol="0" anchor="ctr"/>
+          <a:lstStyle/>
+          <a:p>
+            <a:pPr algn="ctr"/>
+          </a:p>
+        </p:txBody>
+      </p:sp>
+      <p:sp>
+        <p:nvSpPr>
+          <p:cNvPr id="9" name="TextBox 8"/>
+          <p:cNvSpPr txBox="1"/>
+          <p:nvPr/>
+        </p:nvSpPr>
+        <p:spPr>
+          <a:xfrm>
+            <a:off x="8641079" y="489204"/>
+            <a:ext cx="329184" cy="228600"/>
+          </a:xfrm>
+          <a:prstGeom prst="rect">
+            <a:avLst/>
+          </a:prstGeom>
+          <a:noFill/>
+        </p:spPr>
+        <p:txBody>
+          <a:bodyPr wrap="square" lIns="0" rIns="0" tIns="0" bIns="0">
+            <a:spAutoFit/>
+          </a:bodyPr>
+          <a:lstStyle/>
+          <a:p>
+            <a:pPr algn="ctr"/>
+            <a:r>
+              <a:rPr sz="950" b="1" i="0">
+                <a:solidFill>
+                  <a:srgbClr val="AEB4BF"/>
+                </a:solidFill>
+                <a:latin typeface="Helvetica Neue"/>
+              </a:rPr>
+              <a:t>2</a:t>
+            </a:r>
+          </a:p>
+        </p:txBody>
+      </p:sp>
+      <p:sp>
+        <p:nvSpPr>
+          <p:cNvPr id="10" name="Rounded Rectangle 9"/>
+          <p:cNvSpPr/>
+          <p:nvPr/>
+        </p:nvSpPr>
+        <p:spPr>
+          <a:xfrm>
+            <a:off x="9171431" y="493776"/>
+            <a:ext cx="219456" cy="219456"/>
+          </a:xfrm>
+          <a:prstGeom prst="roundRect">
+            <a:avLst>
+              <a:gd name="adj" fmla="val 32000"/>
+            </a:avLst>
+          </a:prstGeom>
+          <a:solidFill>
+            <a:srgbClr val="E9EBF0"/>
+          </a:solidFill>
+          <a:ln>
+            <a:noFill/>
+          </a:ln>
+        </p:spPr>
+        <p:style>
+          <a:lnRef idx="1">
+            <a:schemeClr val="accent1"/>
+          </a:lnRef>
+          <a:fillRef idx="3">
+            <a:schemeClr val="accent1"/>
+          </a:fillRef>
+          <a:effectRef idx="2">
+            <a:schemeClr val="accent1"/>
+          </a:effectRef>
+          <a:fontRef idx="minor">
+            <a:schemeClr val="lt1"/>
+          </a:fontRef>
+        </p:style>
+        <p:txBody>
+          <a:bodyPr rtlCol="0" anchor="ctr"/>
+          <a:lstStyle/>
+          <a:p>
+            <a:pPr algn="ctr"/>
+          </a:p>
+        </p:txBody>
+      </p:sp>
+      <p:sp>
+        <p:nvSpPr>
+          <p:cNvPr id="11" name="TextBox 10"/>
+          <p:cNvSpPr txBox="1"/>
+          <p:nvPr/>
+        </p:nvSpPr>
+        <p:spPr>
+          <a:xfrm>
+            <a:off x="9116567" y="489204"/>
+            <a:ext cx="329184" cy="228600"/>
+          </a:xfrm>
+          <a:prstGeom prst="rect">
+            <a:avLst/>
+          </a:prstGeom>
+          <a:noFill/>
+        </p:spPr>
+        <p:txBody>
+          <a:bodyPr wrap="square" lIns="0" rIns="0" tIns="0" bIns="0">
+            <a:spAutoFit/>
+          </a:bodyPr>
+          <a:lstStyle/>
+          <a:p>
+            <a:pPr algn="ctr"/>
+            <a:r>
+              <a:rPr sz="950" b="1" i="0">
+                <a:solidFill>
+                  <a:srgbClr val="AEB4BF"/>
+                </a:solidFill>
+                <a:latin typeface="Helvetica Neue"/>
+              </a:rPr>
+              <a:t>3</a:t>
+            </a:r>
+          </a:p>
+        </p:txBody>
+      </p:sp>
+      <p:sp>
+        <p:nvSpPr>
+          <p:cNvPr id="12" name="Rounded Rectangle 11"/>
+          <p:cNvSpPr/>
+          <p:nvPr/>
+        </p:nvSpPr>
+        <p:spPr>
+          <a:xfrm>
+            <a:off x="9646919" y="493776"/>
+            <a:ext cx="219456" cy="219456"/>
+          </a:xfrm>
+          <a:prstGeom prst="roundRect">
+            <a:avLst>
+              <a:gd name="adj" fmla="val 32000"/>
+            </a:avLst>
+          </a:prstGeom>
+          <a:solidFill>
+            <a:srgbClr val="E9EBF0"/>
+          </a:solidFill>
+          <a:ln>
+            <a:noFill/>
+          </a:ln>
+        </p:spPr>
+        <p:style>
+          <a:lnRef idx="1">
+            <a:schemeClr val="accent1"/>
+          </a:lnRef>
+          <a:fillRef idx="3">
+            <a:schemeClr val="accent1"/>
+          </a:fillRef>
+          <a:effectRef idx="2">
+            <a:schemeClr val="accent1"/>
+          </a:effectRef>
+          <a:fontRef idx="minor">
+            <a:schemeClr val="lt1"/>
+          </a:fontRef>
+        </p:style>
+        <p:txBody>
+          <a:bodyPr rtlCol="0" anchor="ctr"/>
+          <a:lstStyle/>
+          <a:p>
+            <a:pPr algn="ctr"/>
+          </a:p>
+        </p:txBody>
+      </p:sp>
+      <p:sp>
+        <p:nvSpPr>
+          <p:cNvPr id="13" name="TextBox 12"/>
+          <p:cNvSpPr txBox="1"/>
+          <p:nvPr/>
+        </p:nvSpPr>
+        <p:spPr>
+          <a:xfrm>
+            <a:off x="9592055" y="489204"/>
+            <a:ext cx="329184" cy="228600"/>
+          </a:xfrm>
+          <a:prstGeom prst="rect">
+            <a:avLst/>
+          </a:prstGeom>
+          <a:noFill/>
+        </p:spPr>
+        <p:txBody>
+          <a:bodyPr wrap="square" lIns="0" rIns="0" tIns="0" bIns="0">
+            <a:spAutoFit/>
+          </a:bodyPr>
+          <a:lstStyle/>
+          <a:p>
+            <a:pPr algn="ctr"/>
+            <a:r>
+              <a:rPr sz="950" b="1" i="0">
+                <a:solidFill>
+                  <a:srgbClr val="AEB4BF"/>
+                </a:solidFill>
+                <a:latin typeface="Helvetica Neue"/>
+              </a:rPr>
+              <a:t>4</a:t>
+            </a:r>
+          </a:p>
+        </p:txBody>
+      </p:sp>
+      <p:sp>
+        <p:nvSpPr>
+          <p:cNvPr id="14" name="Rounded Rectangle 13"/>
+          <p:cNvSpPr/>
+          <p:nvPr/>
+        </p:nvSpPr>
+        <p:spPr>
+          <a:xfrm>
+            <a:off x="10122407" y="493776"/>
+            <a:ext cx="219456" cy="219456"/>
+          </a:xfrm>
+          <a:prstGeom prst="roundRect">
+            <a:avLst>
+              <a:gd name="adj" fmla="val 32000"/>
+            </a:avLst>
+          </a:prstGeom>
+          <a:solidFill>
+            <a:srgbClr val="E9EBF0"/>
+          </a:solidFill>
+          <a:ln>
+            <a:noFill/>
+          </a:ln>
+        </p:spPr>
+        <p:style>
+          <a:lnRef idx="1">
+            <a:schemeClr val="accent1"/>
+          </a:lnRef>
+          <a:fillRef idx="3">
+            <a:schemeClr val="accent1"/>
+          </a:fillRef>
+          <a:effectRef idx="2">
+            <a:schemeClr val="accent1"/>
+          </a:effectRef>
+          <a:fontRef idx="minor">
+            <a:schemeClr val="lt1"/>
+          </a:fontRef>
+        </p:style>
+        <p:txBody>
+          <a:bodyPr rtlCol="0" anchor="ctr"/>
+          <a:lstStyle/>
+          <a:p>
+            <a:pPr algn="ctr"/>
+          </a:p>
+        </p:txBody>
+      </p:sp>
+      <p:sp>
+        <p:nvSpPr>
+          <p:cNvPr id="15" name="TextBox 14"/>
+          <p:cNvSpPr txBox="1"/>
+          <p:nvPr/>
+        </p:nvSpPr>
+        <p:spPr>
+          <a:xfrm>
+            <a:off x="10067543" y="489204"/>
+            <a:ext cx="329184" cy="228600"/>
+          </a:xfrm>
+          <a:prstGeom prst="rect">
+            <a:avLst/>
+          </a:prstGeom>
+          <a:noFill/>
+        </p:spPr>
+        <p:txBody>
+          <a:bodyPr wrap="square" lIns="0" rIns="0" tIns="0" bIns="0">
+            <a:spAutoFit/>
+          </a:bodyPr>
+          <a:lstStyle/>
+          <a:p>
+            <a:pPr algn="ctr"/>
+            <a:r>
+              <a:rPr sz="950" b="1" i="0">
+                <a:solidFill>
+                  <a:srgbClr val="AEB4BF"/>
+                </a:solidFill>
+                <a:latin typeface="Helvetica Neue"/>
+              </a:rPr>
+              <a:t>5</a:t>
+            </a:r>
+          </a:p>
+        </p:txBody>
+      </p:sp>
+      <p:sp>
+        <p:nvSpPr>
+          <p:cNvPr id="16" name="Rounded Rectangle 15"/>
+          <p:cNvSpPr/>
+          <p:nvPr/>
+        </p:nvSpPr>
+        <p:spPr>
+          <a:xfrm>
+            <a:off x="10597895" y="493776"/>
+            <a:ext cx="219456" cy="219456"/>
+          </a:xfrm>
+          <a:prstGeom prst="roundRect">
+            <a:avLst>
+              <a:gd name="adj" fmla="val 32000"/>
+            </a:avLst>
+          </a:prstGeom>
+          <a:solidFill>
+            <a:srgbClr val="E9EBF0"/>
+          </a:solidFill>
+          <a:ln>
+            <a:noFill/>
+          </a:ln>
+        </p:spPr>
+        <p:style>
+          <a:lnRef idx="1">
+            <a:schemeClr val="accent1"/>
+          </a:lnRef>
+          <a:fillRef idx="3">
+            <a:schemeClr val="accent1"/>
+          </a:fillRef>
+          <a:effectRef idx="2">
+            <a:schemeClr val="accent1"/>
+          </a:effectRef>
+          <a:fontRef idx="minor">
+            <a:schemeClr val="lt1"/>
+          </a:fontRef>
+        </p:style>
+        <p:txBody>
+          <a:bodyPr rtlCol="0" anchor="ctr"/>
+          <a:lstStyle/>
+          <a:p>
+            <a:pPr algn="ctr"/>
+          </a:p>
+        </p:txBody>
+      </p:sp>
+      <p:sp>
+        <p:nvSpPr>
+          <p:cNvPr id="17" name="TextBox 16"/>
+          <p:cNvSpPr txBox="1"/>
+          <p:nvPr/>
+        </p:nvSpPr>
+        <p:spPr>
+          <a:xfrm>
+            <a:off x="10543031" y="489204"/>
+            <a:ext cx="329184" cy="228600"/>
+          </a:xfrm>
+          <a:prstGeom prst="rect">
+            <a:avLst/>
+          </a:prstGeom>
+          <a:noFill/>
+        </p:spPr>
+        <p:txBody>
+          <a:bodyPr wrap="square" lIns="0" rIns="0" tIns="0" bIns="0">
+            <a:spAutoFit/>
+          </a:bodyPr>
+          <a:lstStyle/>
+          <a:p>
+            <a:pPr algn="ctr"/>
+            <a:r>
+              <a:rPr sz="950" b="1" i="0">
+                <a:solidFill>
+                  <a:srgbClr val="AEB4BF"/>
+                </a:solidFill>
+                <a:latin typeface="Helvetica Neue"/>
+              </a:rPr>
+              <a:t>6</a:t>
+            </a:r>
+          </a:p>
+        </p:txBody>
+      </p:sp>
+      <p:sp>
+        <p:nvSpPr>
+          <p:cNvPr id="18" name="Rounded Rectangle 17"/>
+          <p:cNvSpPr/>
+          <p:nvPr/>
+        </p:nvSpPr>
+        <p:spPr>
+          <a:xfrm>
+            <a:off x="11073384" y="493776"/>
+            <a:ext cx="219456" cy="219456"/>
+          </a:xfrm>
+          <a:prstGeom prst="roundRect">
+            <a:avLst>
+              <a:gd name="adj" fmla="val 32000"/>
+            </a:avLst>
+          </a:prstGeom>
+          <a:solidFill>
+            <a:srgbClr val="E9EBF0"/>
+          </a:solidFill>
+          <a:ln>
+            <a:noFill/>
+          </a:ln>
+        </p:spPr>
+        <p:style>
+          <a:lnRef idx="1">
+            <a:schemeClr val="accent1"/>
+          </a:lnRef>
+          <a:fillRef idx="3">
+            <a:schemeClr val="accent1"/>
+          </a:fillRef>
+          <a:effectRef idx="2">
+            <a:schemeClr val="accent1"/>
+          </a:effectRef>
+          <a:fontRef idx="minor">
+            <a:schemeClr val="lt1"/>
+          </a:fontRef>
+        </p:style>
+        <p:txBody>
+          <a:bodyPr rtlCol="0" anchor="ctr"/>
+          <a:lstStyle/>
+          <a:p>
+            <a:pPr algn="ctr"/>
+          </a:p>
+        </p:txBody>
+      </p:sp>
+      <p:sp>
+        <p:nvSpPr>
+          <p:cNvPr id="19" name="TextBox 18"/>
+          <p:cNvSpPr txBox="1"/>
+          <p:nvPr/>
+        </p:nvSpPr>
+        <p:spPr>
+          <a:xfrm>
+            <a:off x="11018519" y="489204"/>
+            <a:ext cx="329184" cy="228600"/>
+          </a:xfrm>
+          <a:prstGeom prst="rect">
+            <a:avLst/>
+          </a:prstGeom>
+          <a:noFill/>
+        </p:spPr>
+        <p:txBody>
+          <a:bodyPr wrap="square" lIns="0" rIns="0" tIns="0" bIns="0">
+            <a:spAutoFit/>
+          </a:bodyPr>
+          <a:lstStyle/>
+          <a:p>
+            <a:pPr algn="ctr"/>
+            <a:r>
+              <a:rPr sz="950" b="1" i="0">
+                <a:solidFill>
+                  <a:srgbClr val="AEB4BF"/>
+                </a:solidFill>
+                <a:latin typeface="Helvetica Neue"/>
+              </a:rPr>
+              <a:t>7</a:t>
+            </a:r>
+          </a:p>
+        </p:txBody>
+      </p:sp>
+      <p:sp>
+        <p:nvSpPr>
+          <p:cNvPr id="20" name="TextBox 19"/>
           <p:cNvSpPr txBox="1"/>
           <p:nvPr/>
         </p:nvSpPr>
@@ -9497,7 +10318,7 @@
       </p:sp>
       <p:pic>
         <p:nvPicPr>
-          <p:cNvPr id="6" name="Picture 5" descr="d_encdec.png"/>
+          <p:cNvPr id="21" name="Picture 20" descr="d_jargon14.png"/>
           <p:cNvPicPr>
             <a:picLocks noChangeAspect="1"/>
           </p:cNvPicPr>
@@ -9511,8 +10332,8 @@
         </p:blipFill>
         <p:spPr>
           <a:xfrm>
-            <a:off x="518007" y="3077305"/>
-            <a:ext cx="11155680" cy="2166429"/>
+            <a:off x="518007" y="2163061"/>
+            <a:ext cx="11155680" cy="3857757"/>
           </a:xfrm>
           <a:prstGeom prst="rect">
             <a:avLst/>
@@ -9521,14 +10342,14 @@
       </p:pic>
       <p:sp>
         <p:nvSpPr>
-          <p:cNvPr id="7" name="Rounded Rectangle 6"/>
+          <p:cNvPr id="22" name="Rounded Rectangle 21"/>
           <p:cNvSpPr/>
           <p:nvPr/>
         </p:nvSpPr>
         <p:spPr>
           <a:xfrm>
-            <a:off x="7105802" y="6345936"/>
-            <a:ext cx="4445812" cy="365760"/>
+            <a:off x="6772046" y="6345936"/>
+            <a:ext cx="4779568" cy="365760"/>
           </a:xfrm>
           <a:prstGeom prst="roundRect">
             <a:avLst>
@@ -9566,13 +10387,13 @@
       </p:sp>
       <p:sp>
         <p:nvSpPr>
-          <p:cNvPr id="8" name="Rounded Rectangle 7"/>
+          <p:cNvPr id="23" name="Rounded Rectangle 22"/>
           <p:cNvSpPr/>
           <p:nvPr/>
         </p:nvSpPr>
         <p:spPr>
           <a:xfrm>
-            <a:off x="8148218" y="6396228"/>
+            <a:off x="7814462" y="6396228"/>
             <a:ext cx="685800" cy="265176"/>
           </a:xfrm>
           <a:prstGeom prst="roundRect">
@@ -9611,13 +10432,13 @@
       </p:sp>
       <p:sp>
         <p:nvSpPr>
-          <p:cNvPr id="9" name="TextBox 8"/>
-          <p:cNvSpPr txBox="1"/>
-          <p:nvPr/>
-        </p:nvSpPr>
-        <p:spPr>
-          <a:xfrm>
-            <a:off x="7261250" y="6460236"/>
+          <p:cNvPr id="24" name="TextBox 23"/>
+          <p:cNvSpPr txBox="1"/>
+          <p:nvPr/>
+        </p:nvSpPr>
+        <p:spPr>
+          <a:xfrm>
+            <a:off x="6927494" y="6460236"/>
             <a:ext cx="914400" cy="219456"/>
           </a:xfrm>
           <a:prstGeom prst="rect">
@@ -9646,13 +10467,13 @@
       </p:sp>
       <p:sp>
         <p:nvSpPr>
-          <p:cNvPr id="10" name="TextBox 9"/>
-          <p:cNvSpPr txBox="1"/>
-          <p:nvPr/>
-        </p:nvSpPr>
-        <p:spPr>
-          <a:xfrm>
-            <a:off x="8148218" y="6451092"/>
+          <p:cNvPr id="25" name="TextBox 24"/>
+          <p:cNvSpPr txBox="1"/>
+          <p:nvPr/>
+        </p:nvSpPr>
+        <p:spPr>
+          <a:xfrm>
+            <a:off x="7814462" y="6451092"/>
             <a:ext cx="685800" cy="219456"/>
           </a:xfrm>
           <a:prstGeom prst="rect">
@@ -9674,21 +10495,21 @@
                 </a:solidFill>
                 <a:latin typeface="Helvetica Neue"/>
               </a:rPr>
-              <a:t>STEP 6</a:t>
-            </a:r>
-          </a:p>
-        </p:txBody>
-      </p:sp>
-      <p:sp>
-        <p:nvSpPr>
-          <p:cNvPr id="11" name="TextBox 10"/>
-          <p:cNvSpPr txBox="1"/>
-          <p:nvPr/>
-        </p:nvSpPr>
-        <p:spPr>
-          <a:xfrm>
-            <a:off x="8952890" y="6460236"/>
-            <a:ext cx="2498140" cy="219456"/>
+              <a:t>STEP 5</a:t>
+            </a:r>
+          </a:p>
+        </p:txBody>
+      </p:sp>
+      <p:sp>
+        <p:nvSpPr>
+          <p:cNvPr id="26" name="TextBox 25"/>
+          <p:cNvSpPr txBox="1"/>
+          <p:nvPr/>
+        </p:nvSpPr>
+        <p:spPr>
+          <a:xfrm>
+            <a:off x="8619134" y="6460236"/>
+            <a:ext cx="2831896" cy="219456"/>
           </a:xfrm>
           <a:prstGeom prst="rect">
             <a:avLst/>
@@ -9709,7 +10530,7 @@
                 </a:solidFill>
                 <a:latin typeface="Helvetica Neue"/>
               </a:rPr>
-              <a:t>Why BERT reads and GPT writes</a:t>
+              <a:t>Fill in the blank on Cobalt jargon</a:t>
             </a:r>
           </a:p>
         </p:txBody>
@@ -9758,11 +10579,11 @@
             <a:r>
               <a:rPr sz="1250" b="1" i="0" spc="220">
                 <a:solidFill>
-                  <a:srgbClr val="059669"/>
-                </a:solidFill>
-                <a:latin typeface="Helvetica Neue"/>
-              </a:rPr>
-              <a:t>RUNG 4</a:t>
+                  <a:srgbClr val="D97706"/>
+                </a:solidFill>
+                <a:latin typeface="Helvetica Neue"/>
+              </a:rPr>
+              <a:t>TWO SHAPES OF MODEL</a:t>
             </a:r>
           </a:p>
         </p:txBody>
@@ -9776,7 +10597,7 @@
         <p:spPr>
           <a:xfrm>
             <a:off x="640080" y="758952"/>
-            <a:ext cx="7315200" cy="704088"/>
+            <a:ext cx="10972800" cy="704088"/>
           </a:xfrm>
           <a:prstGeom prst="rect">
             <a:avLst/>
@@ -9791,13 +10612,13 @@
           <a:p>
             <a:pPr algn="l"/>
             <a:r>
-              <a:rPr sz="2650" b="1" i="0">
+              <a:rPr sz="2900" b="1" i="0">
                 <a:solidFill>
                   <a:srgbClr val="0F172A"/>
                 </a:solidFill>
                 <a:latin typeface="Helvetica Neue"/>
               </a:rPr>
-              <a:t>Freeze the model. Learn one small rule.</a:t>
+              <a:t>Why BERT reads and GPT writes.</a:t>
             </a:r>
           </a:p>
         </p:txBody>
@@ -9832,617 +10653,14 @@
                 </a:solidFill>
                 <a:latin typeface="Helvetica Neue"/>
               </a:rPr>
-              <a:t>The cheapest thing you can do with labelled data, and the one almost nobody tries first.</a:t>
-            </a:r>
-          </a:p>
-        </p:txBody>
-      </p:sp>
-      <p:sp>
-        <p:nvSpPr>
-          <p:cNvPr id="5" name="Rounded Rectangle 4"/>
-          <p:cNvSpPr/>
-          <p:nvPr/>
-        </p:nvSpPr>
-        <p:spPr>
-          <a:xfrm>
-            <a:off x="8302752" y="593445"/>
-            <a:ext cx="2852928" cy="20116"/>
-          </a:xfrm>
-          <a:prstGeom prst="roundRect">
-            <a:avLst/>
-          </a:prstGeom>
-          <a:solidFill>
-            <a:srgbClr val="E9EBF0"/>
-          </a:solidFill>
-          <a:ln>
-            <a:noFill/>
-          </a:ln>
-        </p:spPr>
-        <p:style>
-          <a:lnRef idx="1">
-            <a:schemeClr val="accent1"/>
-          </a:lnRef>
-          <a:fillRef idx="3">
-            <a:schemeClr val="accent1"/>
-          </a:fillRef>
-          <a:effectRef idx="2">
-            <a:schemeClr val="accent1"/>
-          </a:effectRef>
-          <a:fontRef idx="minor">
-            <a:schemeClr val="lt1"/>
-          </a:fontRef>
-        </p:style>
-        <p:txBody>
-          <a:bodyPr rtlCol="0" anchor="ctr"/>
-          <a:lstStyle/>
-          <a:p>
-            <a:pPr algn="ctr"/>
-          </a:p>
-        </p:txBody>
-      </p:sp>
-      <p:sp>
-        <p:nvSpPr>
-          <p:cNvPr id="6" name="Rounded Rectangle 5"/>
-          <p:cNvSpPr/>
-          <p:nvPr/>
-        </p:nvSpPr>
-        <p:spPr>
-          <a:xfrm>
-            <a:off x="8220455" y="493776"/>
-            <a:ext cx="219456" cy="219456"/>
-          </a:xfrm>
-          <a:prstGeom prst="roundRect">
-            <a:avLst>
-              <a:gd name="adj" fmla="val 32000"/>
-            </a:avLst>
-          </a:prstGeom>
-          <a:solidFill>
-            <a:srgbClr val="0EA5E9"/>
-          </a:solidFill>
-          <a:ln>
-            <a:noFill/>
-          </a:ln>
-        </p:spPr>
-        <p:style>
-          <a:lnRef idx="1">
-            <a:schemeClr val="accent1"/>
-          </a:lnRef>
-          <a:fillRef idx="3">
-            <a:schemeClr val="accent1"/>
-          </a:fillRef>
-          <a:effectRef idx="2">
-            <a:schemeClr val="accent1"/>
-          </a:effectRef>
-          <a:fontRef idx="minor">
-            <a:schemeClr val="lt1"/>
-          </a:fontRef>
-        </p:style>
-        <p:txBody>
-          <a:bodyPr rtlCol="0" anchor="ctr"/>
-          <a:lstStyle/>
-          <a:p>
-            <a:pPr algn="ctr"/>
-          </a:p>
-        </p:txBody>
-      </p:sp>
-      <p:sp>
-        <p:nvSpPr>
-          <p:cNvPr id="7" name="TextBox 6"/>
-          <p:cNvSpPr txBox="1"/>
-          <p:nvPr/>
-        </p:nvSpPr>
-        <p:spPr>
-          <a:xfrm>
-            <a:off x="8165591" y="489204"/>
-            <a:ext cx="329184" cy="228600"/>
-          </a:xfrm>
-          <a:prstGeom prst="rect">
-            <a:avLst/>
-          </a:prstGeom>
-          <a:noFill/>
-        </p:spPr>
-        <p:txBody>
-          <a:bodyPr wrap="square" lIns="0" rIns="0" tIns="0" bIns="0">
-            <a:spAutoFit/>
-          </a:bodyPr>
-          <a:lstStyle/>
-          <a:p>
-            <a:pPr algn="ctr"/>
-            <a:r>
-              <a:rPr sz="950" b="1" i="0">
-                <a:solidFill>
-                  <a:srgbClr val="FFFFFF"/>
-                </a:solidFill>
-                <a:latin typeface="Helvetica Neue"/>
-              </a:rPr>
-              <a:t>1</a:t>
-            </a:r>
-          </a:p>
-        </p:txBody>
-      </p:sp>
-      <p:sp>
-        <p:nvSpPr>
-          <p:cNvPr id="8" name="Rounded Rectangle 7"/>
-          <p:cNvSpPr/>
-          <p:nvPr/>
-        </p:nvSpPr>
-        <p:spPr>
-          <a:xfrm>
-            <a:off x="8695943" y="493776"/>
-            <a:ext cx="219456" cy="219456"/>
-          </a:xfrm>
-          <a:prstGeom prst="roundRect">
-            <a:avLst>
-              <a:gd name="adj" fmla="val 32000"/>
-            </a:avLst>
-          </a:prstGeom>
-          <a:solidFill>
-            <a:srgbClr val="0EA5E9"/>
-          </a:solidFill>
-          <a:ln>
-            <a:noFill/>
-          </a:ln>
-        </p:spPr>
-        <p:style>
-          <a:lnRef idx="1">
-            <a:schemeClr val="accent1"/>
-          </a:lnRef>
-          <a:fillRef idx="3">
-            <a:schemeClr val="accent1"/>
-          </a:fillRef>
-          <a:effectRef idx="2">
-            <a:schemeClr val="accent1"/>
-          </a:effectRef>
-          <a:fontRef idx="minor">
-            <a:schemeClr val="lt1"/>
-          </a:fontRef>
-        </p:style>
-        <p:txBody>
-          <a:bodyPr rtlCol="0" anchor="ctr"/>
-          <a:lstStyle/>
-          <a:p>
-            <a:pPr algn="ctr"/>
-          </a:p>
-        </p:txBody>
-      </p:sp>
-      <p:sp>
-        <p:nvSpPr>
-          <p:cNvPr id="9" name="TextBox 8"/>
-          <p:cNvSpPr txBox="1"/>
-          <p:nvPr/>
-        </p:nvSpPr>
-        <p:spPr>
-          <a:xfrm>
-            <a:off x="8641079" y="489204"/>
-            <a:ext cx="329184" cy="228600"/>
-          </a:xfrm>
-          <a:prstGeom prst="rect">
-            <a:avLst/>
-          </a:prstGeom>
-          <a:noFill/>
-        </p:spPr>
-        <p:txBody>
-          <a:bodyPr wrap="square" lIns="0" rIns="0" tIns="0" bIns="0">
-            <a:spAutoFit/>
-          </a:bodyPr>
-          <a:lstStyle/>
-          <a:p>
-            <a:pPr algn="ctr"/>
-            <a:r>
-              <a:rPr sz="950" b="1" i="0">
-                <a:solidFill>
-                  <a:srgbClr val="FFFFFF"/>
-                </a:solidFill>
-                <a:latin typeface="Helvetica Neue"/>
-              </a:rPr>
-              <a:t>2</a:t>
-            </a:r>
-          </a:p>
-        </p:txBody>
-      </p:sp>
-      <p:sp>
-        <p:nvSpPr>
-          <p:cNvPr id="10" name="Rounded Rectangle 9"/>
-          <p:cNvSpPr/>
-          <p:nvPr/>
-        </p:nvSpPr>
-        <p:spPr>
-          <a:xfrm>
-            <a:off x="9171431" y="493776"/>
-            <a:ext cx="219456" cy="219456"/>
-          </a:xfrm>
-          <a:prstGeom prst="roundRect">
-            <a:avLst>
-              <a:gd name="adj" fmla="val 32000"/>
-            </a:avLst>
-          </a:prstGeom>
-          <a:solidFill>
-            <a:srgbClr val="D97706"/>
-          </a:solidFill>
-          <a:ln>
-            <a:noFill/>
-          </a:ln>
-        </p:spPr>
-        <p:style>
-          <a:lnRef idx="1">
-            <a:schemeClr val="accent1"/>
-          </a:lnRef>
-          <a:fillRef idx="3">
-            <a:schemeClr val="accent1"/>
-          </a:fillRef>
-          <a:effectRef idx="2">
-            <a:schemeClr val="accent1"/>
-          </a:effectRef>
-          <a:fontRef idx="minor">
-            <a:schemeClr val="lt1"/>
-          </a:fontRef>
-        </p:style>
-        <p:txBody>
-          <a:bodyPr rtlCol="0" anchor="ctr"/>
-          <a:lstStyle/>
-          <a:p>
-            <a:pPr algn="ctr"/>
-          </a:p>
-        </p:txBody>
-      </p:sp>
-      <p:sp>
-        <p:nvSpPr>
-          <p:cNvPr id="11" name="TextBox 10"/>
-          <p:cNvSpPr txBox="1"/>
-          <p:nvPr/>
-        </p:nvSpPr>
-        <p:spPr>
-          <a:xfrm>
-            <a:off x="9116567" y="489204"/>
-            <a:ext cx="329184" cy="228600"/>
-          </a:xfrm>
-          <a:prstGeom prst="rect">
-            <a:avLst/>
-          </a:prstGeom>
-          <a:noFill/>
-        </p:spPr>
-        <p:txBody>
-          <a:bodyPr wrap="square" lIns="0" rIns="0" tIns="0" bIns="0">
-            <a:spAutoFit/>
-          </a:bodyPr>
-          <a:lstStyle/>
-          <a:p>
-            <a:pPr algn="ctr"/>
-            <a:r>
-              <a:rPr sz="950" b="1" i="0">
-                <a:solidFill>
-                  <a:srgbClr val="FFFFFF"/>
-                </a:solidFill>
-                <a:latin typeface="Helvetica Neue"/>
-              </a:rPr>
-              <a:t>3</a:t>
-            </a:r>
-          </a:p>
-        </p:txBody>
-      </p:sp>
-      <p:sp>
-        <p:nvSpPr>
-          <p:cNvPr id="12" name="Rounded Rectangle 11"/>
-          <p:cNvSpPr/>
-          <p:nvPr/>
-        </p:nvSpPr>
-        <p:spPr>
-          <a:xfrm>
-            <a:off x="9610344" y="457200"/>
-            <a:ext cx="292608" cy="292608"/>
-          </a:xfrm>
-          <a:prstGeom prst="roundRect">
-            <a:avLst>
-              <a:gd name="adj" fmla="val 32000"/>
-            </a:avLst>
-          </a:prstGeom>
-          <a:solidFill>
-            <a:srgbClr val="059669"/>
-          </a:solidFill>
-          <a:ln>
-            <a:noFill/>
-          </a:ln>
-        </p:spPr>
-        <p:style>
-          <a:lnRef idx="1">
-            <a:schemeClr val="accent1"/>
-          </a:lnRef>
-          <a:fillRef idx="3">
-            <a:schemeClr val="accent1"/>
-          </a:fillRef>
-          <a:effectRef idx="2">
-            <a:schemeClr val="accent1"/>
-          </a:effectRef>
-          <a:fontRef idx="minor">
-            <a:schemeClr val="lt1"/>
-          </a:fontRef>
-        </p:style>
-        <p:txBody>
-          <a:bodyPr rtlCol="0" anchor="ctr"/>
-          <a:lstStyle/>
-          <a:p>
-            <a:pPr algn="ctr"/>
-          </a:p>
-        </p:txBody>
-      </p:sp>
-      <p:sp>
-        <p:nvSpPr>
-          <p:cNvPr id="13" name="TextBox 12"/>
-          <p:cNvSpPr txBox="1"/>
-          <p:nvPr/>
-        </p:nvSpPr>
-        <p:spPr>
-          <a:xfrm>
-            <a:off x="9555480" y="489204"/>
-            <a:ext cx="402336" cy="228600"/>
-          </a:xfrm>
-          <a:prstGeom prst="rect">
-            <a:avLst/>
-          </a:prstGeom>
-          <a:noFill/>
-        </p:spPr>
-        <p:txBody>
-          <a:bodyPr wrap="square" lIns="0" rIns="0" tIns="0" bIns="0">
-            <a:spAutoFit/>
-          </a:bodyPr>
-          <a:lstStyle/>
-          <a:p>
-            <a:pPr algn="ctr"/>
-            <a:r>
-              <a:rPr sz="1200" b="1" i="0">
-                <a:solidFill>
-                  <a:srgbClr val="FFFFFF"/>
-                </a:solidFill>
-                <a:latin typeface="Helvetica Neue"/>
-              </a:rPr>
-              <a:t>4</a:t>
-            </a:r>
-          </a:p>
-        </p:txBody>
-      </p:sp>
-      <p:sp>
-        <p:nvSpPr>
-          <p:cNvPr id="14" name="Rounded Rectangle 13"/>
-          <p:cNvSpPr/>
-          <p:nvPr/>
-        </p:nvSpPr>
-        <p:spPr>
-          <a:xfrm>
-            <a:off x="10122407" y="493776"/>
-            <a:ext cx="219456" cy="219456"/>
-          </a:xfrm>
-          <a:prstGeom prst="roundRect">
-            <a:avLst>
-              <a:gd name="adj" fmla="val 32000"/>
-            </a:avLst>
-          </a:prstGeom>
-          <a:solidFill>
-            <a:srgbClr val="E9EBF0"/>
-          </a:solidFill>
-          <a:ln>
-            <a:noFill/>
-          </a:ln>
-        </p:spPr>
-        <p:style>
-          <a:lnRef idx="1">
-            <a:schemeClr val="accent1"/>
-          </a:lnRef>
-          <a:fillRef idx="3">
-            <a:schemeClr val="accent1"/>
-          </a:fillRef>
-          <a:effectRef idx="2">
-            <a:schemeClr val="accent1"/>
-          </a:effectRef>
-          <a:fontRef idx="minor">
-            <a:schemeClr val="lt1"/>
-          </a:fontRef>
-        </p:style>
-        <p:txBody>
-          <a:bodyPr rtlCol="0" anchor="ctr"/>
-          <a:lstStyle/>
-          <a:p>
-            <a:pPr algn="ctr"/>
-          </a:p>
-        </p:txBody>
-      </p:sp>
-      <p:sp>
-        <p:nvSpPr>
-          <p:cNvPr id="15" name="TextBox 14"/>
-          <p:cNvSpPr txBox="1"/>
-          <p:nvPr/>
-        </p:nvSpPr>
-        <p:spPr>
-          <a:xfrm>
-            <a:off x="10067543" y="489204"/>
-            <a:ext cx="329184" cy="228600"/>
-          </a:xfrm>
-          <a:prstGeom prst="rect">
-            <a:avLst/>
-          </a:prstGeom>
-          <a:noFill/>
-        </p:spPr>
-        <p:txBody>
-          <a:bodyPr wrap="square" lIns="0" rIns="0" tIns="0" bIns="0">
-            <a:spAutoFit/>
-          </a:bodyPr>
-          <a:lstStyle/>
-          <a:p>
-            <a:pPr algn="ctr"/>
-            <a:r>
-              <a:rPr sz="950" b="1" i="0">
-                <a:solidFill>
-                  <a:srgbClr val="AEB4BF"/>
-                </a:solidFill>
-                <a:latin typeface="Helvetica Neue"/>
-              </a:rPr>
-              <a:t>5</a:t>
-            </a:r>
-          </a:p>
-        </p:txBody>
-      </p:sp>
-      <p:sp>
-        <p:nvSpPr>
-          <p:cNvPr id="16" name="Rounded Rectangle 15"/>
-          <p:cNvSpPr/>
-          <p:nvPr/>
-        </p:nvSpPr>
-        <p:spPr>
-          <a:xfrm>
-            <a:off x="10597895" y="493776"/>
-            <a:ext cx="219456" cy="219456"/>
-          </a:xfrm>
-          <a:prstGeom prst="roundRect">
-            <a:avLst>
-              <a:gd name="adj" fmla="val 32000"/>
-            </a:avLst>
-          </a:prstGeom>
-          <a:solidFill>
-            <a:srgbClr val="E9EBF0"/>
-          </a:solidFill>
-          <a:ln>
-            <a:noFill/>
-          </a:ln>
-        </p:spPr>
-        <p:style>
-          <a:lnRef idx="1">
-            <a:schemeClr val="accent1"/>
-          </a:lnRef>
-          <a:fillRef idx="3">
-            <a:schemeClr val="accent1"/>
-          </a:fillRef>
-          <a:effectRef idx="2">
-            <a:schemeClr val="accent1"/>
-          </a:effectRef>
-          <a:fontRef idx="minor">
-            <a:schemeClr val="lt1"/>
-          </a:fontRef>
-        </p:style>
-        <p:txBody>
-          <a:bodyPr rtlCol="0" anchor="ctr"/>
-          <a:lstStyle/>
-          <a:p>
-            <a:pPr algn="ctr"/>
-          </a:p>
-        </p:txBody>
-      </p:sp>
-      <p:sp>
-        <p:nvSpPr>
-          <p:cNvPr id="17" name="TextBox 16"/>
-          <p:cNvSpPr txBox="1"/>
-          <p:nvPr/>
-        </p:nvSpPr>
-        <p:spPr>
-          <a:xfrm>
-            <a:off x="10543031" y="489204"/>
-            <a:ext cx="329184" cy="228600"/>
-          </a:xfrm>
-          <a:prstGeom prst="rect">
-            <a:avLst/>
-          </a:prstGeom>
-          <a:noFill/>
-        </p:spPr>
-        <p:txBody>
-          <a:bodyPr wrap="square" lIns="0" rIns="0" tIns="0" bIns="0">
-            <a:spAutoFit/>
-          </a:bodyPr>
-          <a:lstStyle/>
-          <a:p>
-            <a:pPr algn="ctr"/>
-            <a:r>
-              <a:rPr sz="950" b="1" i="0">
-                <a:solidFill>
-                  <a:srgbClr val="AEB4BF"/>
-                </a:solidFill>
-                <a:latin typeface="Helvetica Neue"/>
-              </a:rPr>
-              <a:t>6</a:t>
-            </a:r>
-          </a:p>
-        </p:txBody>
-      </p:sp>
-      <p:sp>
-        <p:nvSpPr>
-          <p:cNvPr id="18" name="Rounded Rectangle 17"/>
-          <p:cNvSpPr/>
-          <p:nvPr/>
-        </p:nvSpPr>
-        <p:spPr>
-          <a:xfrm>
-            <a:off x="11073384" y="493776"/>
-            <a:ext cx="219456" cy="219456"/>
-          </a:xfrm>
-          <a:prstGeom prst="roundRect">
-            <a:avLst>
-              <a:gd name="adj" fmla="val 32000"/>
-            </a:avLst>
-          </a:prstGeom>
-          <a:solidFill>
-            <a:srgbClr val="E9EBF0"/>
-          </a:solidFill>
-          <a:ln>
-            <a:noFill/>
-          </a:ln>
-        </p:spPr>
-        <p:style>
-          <a:lnRef idx="1">
-            <a:schemeClr val="accent1"/>
-          </a:lnRef>
-          <a:fillRef idx="3">
-            <a:schemeClr val="accent1"/>
-          </a:fillRef>
-          <a:effectRef idx="2">
-            <a:schemeClr val="accent1"/>
-          </a:effectRef>
-          <a:fontRef idx="minor">
-            <a:schemeClr val="lt1"/>
-          </a:fontRef>
-        </p:style>
-        <p:txBody>
-          <a:bodyPr rtlCol="0" anchor="ctr"/>
-          <a:lstStyle/>
-          <a:p>
-            <a:pPr algn="ctr"/>
-          </a:p>
-        </p:txBody>
-      </p:sp>
-      <p:sp>
-        <p:nvSpPr>
-          <p:cNvPr id="19" name="TextBox 18"/>
-          <p:cNvSpPr txBox="1"/>
-          <p:nvPr/>
-        </p:nvSpPr>
-        <p:spPr>
-          <a:xfrm>
-            <a:off x="11018519" y="489204"/>
-            <a:ext cx="329184" cy="228600"/>
-          </a:xfrm>
-          <a:prstGeom prst="rect">
-            <a:avLst/>
-          </a:prstGeom>
-          <a:noFill/>
-        </p:spPr>
-        <p:txBody>
-          <a:bodyPr wrap="square" lIns="0" rIns="0" tIns="0" bIns="0">
-            <a:spAutoFit/>
-          </a:bodyPr>
-          <a:lstStyle/>
-          <a:p>
-            <a:pPr algn="ctr"/>
-            <a:r>
-              <a:rPr sz="950" b="1" i="0">
-                <a:solidFill>
-                  <a:srgbClr val="AEB4BF"/>
-                </a:solidFill>
-                <a:latin typeface="Helvetica Neue"/>
-              </a:rPr>
-              <a:t>7</a:t>
-            </a:r>
-          </a:p>
-        </p:txBody>
-      </p:sp>
-      <p:sp>
-        <p:nvSpPr>
-          <p:cNvPr id="20" name="TextBox 19"/>
+              <a:t>Same transformer block from last lecture. One difference: may a word look to its right?</a:t>
+            </a:r>
+          </a:p>
+        </p:txBody>
+      </p:sp>
+      <p:sp>
+        <p:nvSpPr>
+          <p:cNvPr id="5" name="TextBox 4"/>
           <p:cNvSpPr txBox="1"/>
           <p:nvPr/>
         </p:nvSpPr>
@@ -10477,7 +10695,7 @@
       </p:sp>
       <p:pic>
         <p:nvPicPr>
-          <p:cNvPr id="21" name="Picture 20" descr="d_rung4.png"/>
+          <p:cNvPr id="6" name="Picture 5" descr="d_encdec.png"/>
           <p:cNvPicPr>
             <a:picLocks noChangeAspect="1"/>
           </p:cNvPicPr>
@@ -10491,8 +10709,8 @@
         </p:blipFill>
         <p:spPr>
           <a:xfrm>
-            <a:off x="518007" y="2300822"/>
-            <a:ext cx="11155680" cy="3582234"/>
+            <a:off x="518007" y="3077305"/>
+            <a:ext cx="11155680" cy="2166429"/>
           </a:xfrm>
           <a:prstGeom prst="rect">
             <a:avLst/>
@@ -10501,14 +10719,14 @@
       </p:pic>
       <p:sp>
         <p:nvSpPr>
-          <p:cNvPr id="22" name="Rounded Rectangle 21"/>
+          <p:cNvPr id="7" name="Rounded Rectangle 6"/>
           <p:cNvSpPr/>
           <p:nvPr/>
         </p:nvSpPr>
         <p:spPr>
           <a:xfrm>
-            <a:off x="6772046" y="6345936"/>
-            <a:ext cx="4779568" cy="365760"/>
+            <a:off x="7105802" y="6345936"/>
+            <a:ext cx="4445812" cy="365760"/>
           </a:xfrm>
           <a:prstGeom prst="roundRect">
             <a:avLst>
@@ -10546,13 +10764,13 @@
       </p:sp>
       <p:sp>
         <p:nvSpPr>
-          <p:cNvPr id="23" name="Rounded Rectangle 22"/>
+          <p:cNvPr id="8" name="Rounded Rectangle 7"/>
           <p:cNvSpPr/>
           <p:nvPr/>
         </p:nvSpPr>
         <p:spPr>
           <a:xfrm>
-            <a:off x="7814462" y="6396228"/>
+            <a:off x="8148218" y="6396228"/>
             <a:ext cx="685800" cy="265176"/>
           </a:xfrm>
           <a:prstGeom prst="roundRect">
@@ -10591,13 +10809,13 @@
       </p:sp>
       <p:sp>
         <p:nvSpPr>
-          <p:cNvPr id="24" name="TextBox 23"/>
-          <p:cNvSpPr txBox="1"/>
-          <p:nvPr/>
-        </p:nvSpPr>
-        <p:spPr>
-          <a:xfrm>
-            <a:off x="6927494" y="6460236"/>
+          <p:cNvPr id="9" name="TextBox 8"/>
+          <p:cNvSpPr txBox="1"/>
+          <p:nvPr/>
+        </p:nvSpPr>
+        <p:spPr>
+          <a:xfrm>
+            <a:off x="7261250" y="6460236"/>
             <a:ext cx="914400" cy="219456"/>
           </a:xfrm>
           <a:prstGeom prst="rect">
@@ -10626,13 +10844,13 @@
       </p:sp>
       <p:sp>
         <p:nvSpPr>
-          <p:cNvPr id="25" name="TextBox 24"/>
-          <p:cNvSpPr txBox="1"/>
-          <p:nvPr/>
-        </p:nvSpPr>
-        <p:spPr>
-          <a:xfrm>
-            <a:off x="7814462" y="6451092"/>
+          <p:cNvPr id="10" name="TextBox 9"/>
+          <p:cNvSpPr txBox="1"/>
+          <p:nvPr/>
+        </p:nvSpPr>
+        <p:spPr>
+          <a:xfrm>
+            <a:off x="8148218" y="6451092"/>
             <a:ext cx="685800" cy="219456"/>
           </a:xfrm>
           <a:prstGeom prst="rect">
@@ -10654,21 +10872,21 @@
                 </a:solidFill>
                 <a:latin typeface="Helvetica Neue"/>
               </a:rPr>
-              <a:t>STEP 9</a:t>
-            </a:r>
-          </a:p>
-        </p:txBody>
-      </p:sp>
-      <p:sp>
-        <p:nvSpPr>
-          <p:cNvPr id="26" name="TextBox 25"/>
-          <p:cNvSpPr txBox="1"/>
-          <p:nvPr/>
-        </p:nvSpPr>
-        <p:spPr>
-          <a:xfrm>
-            <a:off x="8619134" y="6460236"/>
-            <a:ext cx="2831896" cy="219456"/>
+              <a:t>STEP 6</a:t>
+            </a:r>
+          </a:p>
+        </p:txBody>
+      </p:sp>
+      <p:sp>
+        <p:nvSpPr>
+          <p:cNvPr id="11" name="TextBox 10"/>
+          <p:cNvSpPr txBox="1"/>
+          <p:nvPr/>
+        </p:nvSpPr>
+        <p:spPr>
+          <a:xfrm>
+            <a:off x="8952890" y="6460236"/>
+            <a:ext cx="2498140" cy="219456"/>
           </a:xfrm>
           <a:prstGeom prst="rect">
             <a:avLst/>
@@ -10689,7 +10907,7 @@
                 </a:solidFill>
                 <a:latin typeface="Helvetica Neue"/>
               </a:rPr>
-              <a:t>RUNG 4: train a head on 320 labels</a:t>
+              <a:t>Why BERT reads and GPT writes</a:t>
             </a:r>
           </a:p>
         </p:txBody>
@@ -10742,7 +10960,7 @@
                 </a:solidFill>
                 <a:latin typeface="Helvetica Neue"/>
               </a:rPr>
-              <a:t>RUNG 5</a:t>
+              <a:t>RUNG 4</a:t>
             </a:r>
           </a:p>
         </p:txBody>
@@ -10771,13 +10989,13 @@
           <a:p>
             <a:pPr algn="l"/>
             <a:r>
-              <a:rPr sz="2800" b="1" i="0">
+              <a:rPr sz="2650" b="1" i="0">
                 <a:solidFill>
                   <a:srgbClr val="0F172A"/>
                 </a:solidFill>
                 <a:latin typeface="Helvetica Neue"/>
               </a:rPr>
-              <a:t>Now spend twenty thousand times more.</a:t>
+              <a:t>Freeze the model. Learn one small rule.</a:t>
             </a:r>
           </a:p>
         </p:txBody>
@@ -10812,7 +11030,7 @@
                 </a:solidFill>
                 <a:latin typeface="Helvetica Neue"/>
               </a:rPr>
-              <a:t>Same 320 tickets. Every weight in the model is free to move. Predict before you look.</a:t>
+              <a:t>The cheapest thing you can do with labelled data, and the one almost nobody tries first.</a:t>
             </a:r>
           </a:p>
         </p:txBody>
@@ -11108,8 +11326,8 @@
         </p:nvSpPr>
         <p:spPr>
           <a:xfrm>
-            <a:off x="9646919" y="493776"/>
-            <a:ext cx="219456" cy="219456"/>
+            <a:off x="9610344" y="457200"/>
+            <a:ext cx="292608" cy="292608"/>
           </a:xfrm>
           <a:prstGeom prst="roundRect">
             <a:avLst>
@@ -11153,8 +11371,8 @@
         </p:nvSpPr>
         <p:spPr>
           <a:xfrm>
-            <a:off x="9592055" y="489204"/>
-            <a:ext cx="329184" cy="228600"/>
+            <a:off x="9555480" y="489204"/>
+            <a:ext cx="402336" cy="228600"/>
           </a:xfrm>
           <a:prstGeom prst="rect">
             <a:avLst/>
@@ -11169,7 +11387,7 @@
           <a:p>
             <a:pPr algn="ctr"/>
             <a:r>
-              <a:rPr sz="950" b="1" i="0">
+              <a:rPr sz="1200" b="1" i="0">
                 <a:solidFill>
                   <a:srgbClr val="FFFFFF"/>
                 </a:solidFill>
@@ -11188,87 +11406,7 @@
         </p:nvSpPr>
         <p:spPr>
           <a:xfrm>
-            <a:off x="10085832" y="457200"/>
-            <a:ext cx="292608" cy="292608"/>
-          </a:xfrm>
-          <a:prstGeom prst="roundRect">
-            <a:avLst>
-              <a:gd name="adj" fmla="val 32000"/>
-            </a:avLst>
-          </a:prstGeom>
-          <a:solidFill>
-            <a:srgbClr val="059669"/>
-          </a:solidFill>
-          <a:ln>
-            <a:noFill/>
-          </a:ln>
-        </p:spPr>
-        <p:style>
-          <a:lnRef idx="1">
-            <a:schemeClr val="accent1"/>
-          </a:lnRef>
-          <a:fillRef idx="3">
-            <a:schemeClr val="accent1"/>
-          </a:fillRef>
-          <a:effectRef idx="2">
-            <a:schemeClr val="accent1"/>
-          </a:effectRef>
-          <a:fontRef idx="minor">
-            <a:schemeClr val="lt1"/>
-          </a:fontRef>
-        </p:style>
-        <p:txBody>
-          <a:bodyPr rtlCol="0" anchor="ctr"/>
-          <a:lstStyle/>
-          <a:p>
-            <a:pPr algn="ctr"/>
-          </a:p>
-        </p:txBody>
-      </p:sp>
-      <p:sp>
-        <p:nvSpPr>
-          <p:cNvPr id="15" name="TextBox 14"/>
-          <p:cNvSpPr txBox="1"/>
-          <p:nvPr/>
-        </p:nvSpPr>
-        <p:spPr>
-          <a:xfrm>
-            <a:off x="10030967" y="489204"/>
-            <a:ext cx="402336" cy="228600"/>
-          </a:xfrm>
-          <a:prstGeom prst="rect">
-            <a:avLst/>
-          </a:prstGeom>
-          <a:noFill/>
-        </p:spPr>
-        <p:txBody>
-          <a:bodyPr wrap="square" lIns="0" rIns="0" tIns="0" bIns="0">
-            <a:spAutoFit/>
-          </a:bodyPr>
-          <a:lstStyle/>
-          <a:p>
-            <a:pPr algn="ctr"/>
-            <a:r>
-              <a:rPr sz="1200" b="1" i="0">
-                <a:solidFill>
-                  <a:srgbClr val="FFFFFF"/>
-                </a:solidFill>
-                <a:latin typeface="Helvetica Neue"/>
-              </a:rPr>
-              <a:t>5</a:t>
-            </a:r>
-          </a:p>
-        </p:txBody>
-      </p:sp>
-      <p:sp>
-        <p:nvSpPr>
-          <p:cNvPr id="16" name="Rounded Rectangle 15"/>
-          <p:cNvSpPr/>
-          <p:nvPr/>
-        </p:nvSpPr>
-        <p:spPr>
-          <a:xfrm>
-            <a:off x="10597895" y="493776"/>
+            <a:off x="10122407" y="493776"/>
             <a:ext cx="219456" cy="219456"/>
           </a:xfrm>
           <a:prstGeom prst="roundRect">
@@ -11307,13 +11445,13 @@
       </p:sp>
       <p:sp>
         <p:nvSpPr>
-          <p:cNvPr id="17" name="TextBox 16"/>
-          <p:cNvSpPr txBox="1"/>
-          <p:nvPr/>
-        </p:nvSpPr>
-        <p:spPr>
-          <a:xfrm>
-            <a:off x="10543031" y="489204"/>
+          <p:cNvPr id="15" name="TextBox 14"/>
+          <p:cNvSpPr txBox="1"/>
+          <p:nvPr/>
+        </p:nvSpPr>
+        <p:spPr>
+          <a:xfrm>
+            <a:off x="10067543" y="489204"/>
             <a:ext cx="329184" cy="228600"/>
           </a:xfrm>
           <a:prstGeom prst="rect">
@@ -11335,20 +11473,20 @@
                 </a:solidFill>
                 <a:latin typeface="Helvetica Neue"/>
               </a:rPr>
-              <a:t>6</a:t>
-            </a:r>
-          </a:p>
-        </p:txBody>
-      </p:sp>
-      <p:sp>
-        <p:nvSpPr>
-          <p:cNvPr id="18" name="Rounded Rectangle 17"/>
+              <a:t>5</a:t>
+            </a:r>
+          </a:p>
+        </p:txBody>
+      </p:sp>
+      <p:sp>
+        <p:nvSpPr>
+          <p:cNvPr id="16" name="Rounded Rectangle 15"/>
           <p:cNvSpPr/>
           <p:nvPr/>
         </p:nvSpPr>
         <p:spPr>
           <a:xfrm>
-            <a:off x="11073384" y="493776"/>
+            <a:off x="10597895" y="493776"/>
             <a:ext cx="219456" cy="219456"/>
           </a:xfrm>
           <a:prstGeom prst="roundRect">
@@ -11387,6 +11525,86 @@
       </p:sp>
       <p:sp>
         <p:nvSpPr>
+          <p:cNvPr id="17" name="TextBox 16"/>
+          <p:cNvSpPr txBox="1"/>
+          <p:nvPr/>
+        </p:nvSpPr>
+        <p:spPr>
+          <a:xfrm>
+            <a:off x="10543031" y="489204"/>
+            <a:ext cx="329184" cy="228600"/>
+          </a:xfrm>
+          <a:prstGeom prst="rect">
+            <a:avLst/>
+          </a:prstGeom>
+          <a:noFill/>
+        </p:spPr>
+        <p:txBody>
+          <a:bodyPr wrap="square" lIns="0" rIns="0" tIns="0" bIns="0">
+            <a:spAutoFit/>
+          </a:bodyPr>
+          <a:lstStyle/>
+          <a:p>
+            <a:pPr algn="ctr"/>
+            <a:r>
+              <a:rPr sz="950" b="1" i="0">
+                <a:solidFill>
+                  <a:srgbClr val="AEB4BF"/>
+                </a:solidFill>
+                <a:latin typeface="Helvetica Neue"/>
+              </a:rPr>
+              <a:t>6</a:t>
+            </a:r>
+          </a:p>
+        </p:txBody>
+      </p:sp>
+      <p:sp>
+        <p:nvSpPr>
+          <p:cNvPr id="18" name="Rounded Rectangle 17"/>
+          <p:cNvSpPr/>
+          <p:nvPr/>
+        </p:nvSpPr>
+        <p:spPr>
+          <a:xfrm>
+            <a:off x="11073384" y="493776"/>
+            <a:ext cx="219456" cy="219456"/>
+          </a:xfrm>
+          <a:prstGeom prst="roundRect">
+            <a:avLst>
+              <a:gd name="adj" fmla="val 32000"/>
+            </a:avLst>
+          </a:prstGeom>
+          <a:solidFill>
+            <a:srgbClr val="E9EBF0"/>
+          </a:solidFill>
+          <a:ln>
+            <a:noFill/>
+          </a:ln>
+        </p:spPr>
+        <p:style>
+          <a:lnRef idx="1">
+            <a:schemeClr val="accent1"/>
+          </a:lnRef>
+          <a:fillRef idx="3">
+            <a:schemeClr val="accent1"/>
+          </a:fillRef>
+          <a:effectRef idx="2">
+            <a:schemeClr val="accent1"/>
+          </a:effectRef>
+          <a:fontRef idx="minor">
+            <a:schemeClr val="lt1"/>
+          </a:fontRef>
+        </p:style>
+        <p:txBody>
+          <a:bodyPr rtlCol="0" anchor="ctr"/>
+          <a:lstStyle/>
+          <a:p>
+            <a:pPr algn="ctr"/>
+          </a:p>
+        </p:txBody>
+      </p:sp>
+      <p:sp>
+        <p:nvSpPr>
           <p:cNvPr id="19" name="TextBox 18"/>
           <p:cNvSpPr txBox="1"/>
           <p:nvPr/>
@@ -11457,7 +11675,7 @@
       </p:sp>
       <p:pic>
         <p:nvPicPr>
-          <p:cNvPr id="21" name="Picture 20" descr="d_rung5.png"/>
+          <p:cNvPr id="21" name="Picture 20" descr="d_rung4.png"/>
           <p:cNvPicPr>
             <a:picLocks noChangeAspect="1"/>
           </p:cNvPicPr>
@@ -11471,8 +11689,8 @@
         </p:blipFill>
         <p:spPr>
           <a:xfrm>
-            <a:off x="518007" y="2416617"/>
-            <a:ext cx="11155680" cy="3350645"/>
+            <a:off x="518007" y="2300822"/>
+            <a:ext cx="11155680" cy="3582234"/>
           </a:xfrm>
           <a:prstGeom prst="rect">
             <a:avLst/>
@@ -11533,7 +11751,7 @@
         <p:spPr>
           <a:xfrm>
             <a:off x="7814462" y="6396228"/>
-            <a:ext cx="754380" cy="265176"/>
+            <a:ext cx="685800" cy="265176"/>
           </a:xfrm>
           <a:prstGeom prst="roundRect">
             <a:avLst>
@@ -11613,7 +11831,7 @@
         <p:spPr>
           <a:xfrm>
             <a:off x="7814462" y="6451092"/>
-            <a:ext cx="754380" cy="219456"/>
+            <a:ext cx="685800" cy="219456"/>
           </a:xfrm>
           <a:prstGeom prst="rect">
             <a:avLst/>
@@ -11634,7 +11852,7 @@
                 </a:solidFill>
                 <a:latin typeface="Helvetica Neue"/>
               </a:rPr>
-              <a:t>STEP 10</a:t>
+              <a:t>STEP 9</a:t>
             </a:r>
           </a:p>
         </p:txBody>
@@ -11647,8 +11865,8 @@
         </p:nvSpPr>
         <p:spPr>
           <a:xfrm>
-            <a:off x="8687714" y="6460236"/>
-            <a:ext cx="2763316" cy="219456"/>
+            <a:off x="8619134" y="6460236"/>
+            <a:ext cx="2831896" cy="219456"/>
           </a:xfrm>
           <a:prstGeom prst="rect">
             <a:avLst/>
@@ -11669,7 +11887,7 @@
                 </a:solidFill>
                 <a:latin typeface="Helvetica Neue"/>
               </a:rPr>
-              <a:t>RUNG 5: fine-tune the whole model</a:t>
+              <a:t>RUNG 4: train a head on 320 labels</a:t>
             </a:r>
           </a:p>
         </p:txBody>
@@ -11722,7 +11940,7 @@
                 </a:solidFill>
                 <a:latin typeface="Helvetica Neue"/>
               </a:rPr>
-              <a:t>HOW MANY LABELS?</a:t>
+              <a:t>RUNG 5</a:t>
             </a:r>
           </a:p>
         </p:txBody>
@@ -11751,13 +11969,13 @@
           <a:p>
             <a:pPr algn="l"/>
             <a:r>
-              <a:rPr sz="2900" b="1" i="0">
+              <a:rPr sz="2800" b="1" i="0">
                 <a:solidFill>
                   <a:srgbClr val="0F172A"/>
                 </a:solidFill>
                 <a:latin typeface="Helvetica Neue"/>
               </a:rPr>
-              <a:t>What your own data actually buys.</a:t>
+              <a:t>Now spend twenty thousand times more.</a:t>
             </a:r>
           </a:p>
         </p:txBody>
@@ -11792,7 +12010,7 @@
                 </a:solidFill>
                 <a:latin typeface="Helvetica Neue"/>
               </a:rPr>
-              <a:t>Both rungs, every budget, measured on tickets neither of them ever trained on.</a:t>
+              <a:t>Same 320 tickets. Every weight in the model is free to move. Predict before you look.</a:t>
             </a:r>
           </a:p>
         </p:txBody>
@@ -12088,8 +12306,8 @@
         </p:nvSpPr>
         <p:spPr>
           <a:xfrm>
-            <a:off x="9610344" y="457200"/>
-            <a:ext cx="292608" cy="292608"/>
+            <a:off x="9646919" y="493776"/>
+            <a:ext cx="219456" cy="219456"/>
           </a:xfrm>
           <a:prstGeom prst="roundRect">
             <a:avLst>
@@ -12133,8 +12351,8 @@
         </p:nvSpPr>
         <p:spPr>
           <a:xfrm>
-            <a:off x="9555480" y="489204"/>
-            <a:ext cx="402336" cy="228600"/>
+            <a:off x="9592055" y="489204"/>
+            <a:ext cx="329184" cy="228600"/>
           </a:xfrm>
           <a:prstGeom prst="rect">
             <a:avLst/>
@@ -12149,7 +12367,7 @@
           <a:p>
             <a:pPr algn="ctr"/>
             <a:r>
-              <a:rPr sz="1200" b="1" i="0">
+              <a:rPr sz="950" b="1" i="0">
                 <a:solidFill>
                   <a:srgbClr val="FFFFFF"/>
                 </a:solidFill>
@@ -12168,7 +12386,87 @@
         </p:nvSpPr>
         <p:spPr>
           <a:xfrm>
-            <a:off x="10122407" y="493776"/>
+            <a:off x="10085832" y="457200"/>
+            <a:ext cx="292608" cy="292608"/>
+          </a:xfrm>
+          <a:prstGeom prst="roundRect">
+            <a:avLst>
+              <a:gd name="adj" fmla="val 32000"/>
+            </a:avLst>
+          </a:prstGeom>
+          <a:solidFill>
+            <a:srgbClr val="059669"/>
+          </a:solidFill>
+          <a:ln>
+            <a:noFill/>
+          </a:ln>
+        </p:spPr>
+        <p:style>
+          <a:lnRef idx="1">
+            <a:schemeClr val="accent1"/>
+          </a:lnRef>
+          <a:fillRef idx="3">
+            <a:schemeClr val="accent1"/>
+          </a:fillRef>
+          <a:effectRef idx="2">
+            <a:schemeClr val="accent1"/>
+          </a:effectRef>
+          <a:fontRef idx="minor">
+            <a:schemeClr val="lt1"/>
+          </a:fontRef>
+        </p:style>
+        <p:txBody>
+          <a:bodyPr rtlCol="0" anchor="ctr"/>
+          <a:lstStyle/>
+          <a:p>
+            <a:pPr algn="ctr"/>
+          </a:p>
+        </p:txBody>
+      </p:sp>
+      <p:sp>
+        <p:nvSpPr>
+          <p:cNvPr id="15" name="TextBox 14"/>
+          <p:cNvSpPr txBox="1"/>
+          <p:nvPr/>
+        </p:nvSpPr>
+        <p:spPr>
+          <a:xfrm>
+            <a:off x="10030967" y="489204"/>
+            <a:ext cx="402336" cy="228600"/>
+          </a:xfrm>
+          <a:prstGeom prst="rect">
+            <a:avLst/>
+          </a:prstGeom>
+          <a:noFill/>
+        </p:spPr>
+        <p:txBody>
+          <a:bodyPr wrap="square" lIns="0" rIns="0" tIns="0" bIns="0">
+            <a:spAutoFit/>
+          </a:bodyPr>
+          <a:lstStyle/>
+          <a:p>
+            <a:pPr algn="ctr"/>
+            <a:r>
+              <a:rPr sz="1200" b="1" i="0">
+                <a:solidFill>
+                  <a:srgbClr val="FFFFFF"/>
+                </a:solidFill>
+                <a:latin typeface="Helvetica Neue"/>
+              </a:rPr>
+              <a:t>5</a:t>
+            </a:r>
+          </a:p>
+        </p:txBody>
+      </p:sp>
+      <p:sp>
+        <p:nvSpPr>
+          <p:cNvPr id="16" name="Rounded Rectangle 15"/>
+          <p:cNvSpPr/>
+          <p:nvPr/>
+        </p:nvSpPr>
+        <p:spPr>
+          <a:xfrm>
+            <a:off x="10597895" y="493776"/>
             <a:ext cx="219456" cy="219456"/>
           </a:xfrm>
           <a:prstGeom prst="roundRect">
@@ -12207,13 +12505,13 @@
       </p:sp>
       <p:sp>
         <p:nvSpPr>
-          <p:cNvPr id="15" name="TextBox 14"/>
-          <p:cNvSpPr txBox="1"/>
-          <p:nvPr/>
-        </p:nvSpPr>
-        <p:spPr>
-          <a:xfrm>
-            <a:off x="10067543" y="489204"/>
+          <p:cNvPr id="17" name="TextBox 16"/>
+          <p:cNvSpPr txBox="1"/>
+          <p:nvPr/>
+        </p:nvSpPr>
+        <p:spPr>
+          <a:xfrm>
+            <a:off x="10543031" y="489204"/>
             <a:ext cx="329184" cy="228600"/>
           </a:xfrm>
           <a:prstGeom prst="rect">
@@ -12235,20 +12533,20 @@
                 </a:solidFill>
                 <a:latin typeface="Helvetica Neue"/>
               </a:rPr>
-              <a:t>5</a:t>
-            </a:r>
-          </a:p>
-        </p:txBody>
-      </p:sp>
-      <p:sp>
-        <p:nvSpPr>
-          <p:cNvPr id="16" name="Rounded Rectangle 15"/>
+              <a:t>6</a:t>
+            </a:r>
+          </a:p>
+        </p:txBody>
+      </p:sp>
+      <p:sp>
+        <p:nvSpPr>
+          <p:cNvPr id="18" name="Rounded Rectangle 17"/>
           <p:cNvSpPr/>
           <p:nvPr/>
         </p:nvSpPr>
         <p:spPr>
           <a:xfrm>
-            <a:off x="10597895" y="493776"/>
+            <a:off x="11073384" y="493776"/>
             <a:ext cx="219456" cy="219456"/>
           </a:xfrm>
           <a:prstGeom prst="roundRect">
@@ -12287,86 +12585,6 @@
       </p:sp>
       <p:sp>
         <p:nvSpPr>
-          <p:cNvPr id="17" name="TextBox 16"/>
-          <p:cNvSpPr txBox="1"/>
-          <p:nvPr/>
-        </p:nvSpPr>
-        <p:spPr>
-          <a:xfrm>
-            <a:off x="10543031" y="489204"/>
-            <a:ext cx="329184" cy="228600"/>
-          </a:xfrm>
-          <a:prstGeom prst="rect">
-            <a:avLst/>
-          </a:prstGeom>
-          <a:noFill/>
-        </p:spPr>
-        <p:txBody>
-          <a:bodyPr wrap="square" lIns="0" rIns="0" tIns="0" bIns="0">
-            <a:spAutoFit/>
-          </a:bodyPr>
-          <a:lstStyle/>
-          <a:p>
-            <a:pPr algn="ctr"/>
-            <a:r>
-              <a:rPr sz="950" b="1" i="0">
-                <a:solidFill>
-                  <a:srgbClr val="AEB4BF"/>
-                </a:solidFill>
-                <a:latin typeface="Helvetica Neue"/>
-              </a:rPr>
-              <a:t>6</a:t>
-            </a:r>
-          </a:p>
-        </p:txBody>
-      </p:sp>
-      <p:sp>
-        <p:nvSpPr>
-          <p:cNvPr id="18" name="Rounded Rectangle 17"/>
-          <p:cNvSpPr/>
-          <p:nvPr/>
-        </p:nvSpPr>
-        <p:spPr>
-          <a:xfrm>
-            <a:off x="11073384" y="493776"/>
-            <a:ext cx="219456" cy="219456"/>
-          </a:xfrm>
-          <a:prstGeom prst="roundRect">
-            <a:avLst>
-              <a:gd name="adj" fmla="val 32000"/>
-            </a:avLst>
-          </a:prstGeom>
-          <a:solidFill>
-            <a:srgbClr val="E9EBF0"/>
-          </a:solidFill>
-          <a:ln>
-            <a:noFill/>
-          </a:ln>
-        </p:spPr>
-        <p:style>
-          <a:lnRef idx="1">
-            <a:schemeClr val="accent1"/>
-          </a:lnRef>
-          <a:fillRef idx="3">
-            <a:schemeClr val="accent1"/>
-          </a:fillRef>
-          <a:effectRef idx="2">
-            <a:schemeClr val="accent1"/>
-          </a:effectRef>
-          <a:fontRef idx="minor">
-            <a:schemeClr val="lt1"/>
-          </a:fontRef>
-        </p:style>
-        <p:txBody>
-          <a:bodyPr rtlCol="0" anchor="ctr"/>
-          <a:lstStyle/>
-          <a:p>
-            <a:pPr algn="ctr"/>
-          </a:p>
-        </p:txBody>
-      </p:sp>
-      <p:sp>
-        <p:nvSpPr>
           <p:cNvPr id="19" name="TextBox 18"/>
           <p:cNvSpPr txBox="1"/>
           <p:nvPr/>
@@ -12437,7 +12655,7 @@
       </p:sp>
       <p:pic>
         <p:nvPicPr>
-          <p:cNvPr id="21" name="Picture 20" descr="fig_curve.png"/>
+          <p:cNvPr id="21" name="Picture 20" descr="d_rung5.png"/>
           <p:cNvPicPr>
             <a:picLocks noChangeAspect="1"/>
           </p:cNvPicPr>
@@ -12451,8 +12669,8 @@
         </p:blipFill>
         <p:spPr>
           <a:xfrm>
-            <a:off x="2025496" y="1965960"/>
-            <a:ext cx="8140702" cy="4023360"/>
+            <a:off x="518007" y="2416617"/>
+            <a:ext cx="11155680" cy="3350645"/>
           </a:xfrm>
           <a:prstGeom prst="rect">
             <a:avLst/>
@@ -12467,8 +12685,8 @@
         </p:nvSpPr>
         <p:spPr>
           <a:xfrm>
-            <a:off x="7773314" y="6345936"/>
-            <a:ext cx="3778300" cy="365760"/>
+            <a:off x="6772046" y="6345936"/>
+            <a:ext cx="4779568" cy="365760"/>
           </a:xfrm>
           <a:prstGeom prst="roundRect">
             <a:avLst>
@@ -12512,7 +12730,7 @@
         </p:nvSpPr>
         <p:spPr>
           <a:xfrm>
-            <a:off x="8815730" y="6396228"/>
+            <a:off x="7814462" y="6396228"/>
             <a:ext cx="754380" cy="265176"/>
           </a:xfrm>
           <a:prstGeom prst="roundRect">
@@ -12557,7 +12775,7 @@
         </p:nvSpPr>
         <p:spPr>
           <a:xfrm>
-            <a:off x="7928762" y="6460236"/>
+            <a:off x="6927494" y="6460236"/>
             <a:ext cx="914400" cy="219456"/>
           </a:xfrm>
           <a:prstGeom prst="rect">
@@ -12592,7 +12810,7 @@
         </p:nvSpPr>
         <p:spPr>
           <a:xfrm>
-            <a:off x="8815730" y="6451092"/>
+            <a:off x="7814462" y="6451092"/>
             <a:ext cx="754380" cy="219456"/>
           </a:xfrm>
           <a:prstGeom prst="rect">
@@ -12614,7 +12832,7 @@
                 </a:solidFill>
                 <a:latin typeface="Helvetica Neue"/>
               </a:rPr>
-              <a:t>STEP 11</a:t>
+              <a:t>STEP 10</a:t>
             </a:r>
           </a:p>
         </p:txBody>
@@ -12627,8 +12845,8 @@
         </p:nvSpPr>
         <p:spPr>
           <a:xfrm>
-            <a:off x="9688982" y="6460236"/>
-            <a:ext cx="1762048" cy="219456"/>
+            <a:off x="8687714" y="6460236"/>
+            <a:ext cx="2763316" cy="219456"/>
           </a:xfrm>
           <a:prstGeom prst="rect">
             <a:avLst/>
@@ -12649,42 +12867,7 @@
                 </a:solidFill>
                 <a:latin typeface="Helvetica Neue"/>
               </a:rPr>
-              <a:t>The learning curve</a:t>
-            </a:r>
-          </a:p>
-        </p:txBody>
-      </p:sp>
-      <p:sp>
-        <p:nvSpPr>
-          <p:cNvPr id="27" name="TextBox 26"/>
-          <p:cNvSpPr txBox="1"/>
-          <p:nvPr/>
-        </p:nvSpPr>
-        <p:spPr>
-          <a:xfrm>
-            <a:off x="640080" y="6053328"/>
-            <a:ext cx="10881360" cy="365760"/>
-          </a:xfrm>
-          <a:prstGeom prst="rect">
-            <a:avLst/>
-          </a:prstGeom>
-          <a:noFill/>
-        </p:spPr>
-        <p:txBody>
-          <a:bodyPr wrap="square" lIns="0" rIns="0" tIns="0" bIns="0">
-            <a:spAutoFit/>
-          </a:bodyPr>
-          <a:lstStyle/>
-          <a:p>
-            <a:pPr algn="ctr"/>
-            <a:r>
-              <a:rPr sz="1500" b="0" i="1">
-                <a:solidFill>
-                  <a:srgbClr val="475569"/>
-                </a:solidFill>
-                <a:latin typeface="Helvetica Neue"/>
-              </a:rPr>
-              <a:t>The cheap rung is above the expensive one at every budget we can afford. And the curve bends: the next hundred labels is worth less than the last.</a:t>
+              <a:t>RUNG 5: fine-tune the whole model</a:t>
             </a:r>
           </a:p>
         </p:txBody>

--- a/Week 7/L14_Making_It_Yours.pptx
+++ b/Week 7/L14_Making_It_Yours.pptx
@@ -3558,7 +3558,7 @@
                 </a:solidFill>
                 <a:latin typeface="Helvetica Neue"/>
               </a:rPr>
-              <a:t>Part 2: the layer that learns</a:t>
+              <a:t>Part 2: adapting a pretrained model to your own data</a:t>
             </a:r>
           </a:p>
         </p:txBody>
@@ -3593,7 +3593,7 @@
                 </a:solidFill>
                 <a:latin typeface="Helvetica Neue"/>
               </a:rPr>
-              <a:t>We have our own data. What would it actually buy us,</a:t>
+              <a:t>How much of your own labelled data does each method need,</a:t>
             </a:r>
           </a:p>
         </p:txBody>
@@ -3628,7 +3628,7 @@
                 </a:solidFill>
                 <a:latin typeface="Helvetica Neue"/>
               </a:rPr>
-              <a:t>and what would it cost?</a:t>
+              <a:t>and what does each one cost?</a:t>
             </a:r>
           </a:p>
         </p:txBody>
@@ -3657,13 +3657,13 @@
           <a:p>
             <a:pPr algn="l"/>
             <a:r>
-              <a:rPr sz="1600" b="0" i="1">
+              <a:rPr sz="1600" b="0" i="0">
                 <a:solidFill>
                   <a:srgbClr val="475569"/>
                 </a:solidFill>
                 <a:latin typeface="Helvetica Neue"/>
               </a:rPr>
-              <a:t>Seven rungs. Tonight we climb four of them and find out where to stop.</a:t>
+              <a:t>Rungs 1 and 2 were Lecture 13. Rung 3 is Week 8. Tonight covers rungs 4 to 7.</a:t>
             </a:r>
           </a:p>
         </p:txBody>
@@ -3751,7 +3751,7 @@
                 </a:solidFill>
                 <a:latin typeface="Helvetica Neue"/>
               </a:rPr>
-              <a:t>PRETRAINING TO FINE-TUNING</a:t>
+              <a:t>PRETRAINING AND FINE-TUNING</a:t>
             </a:r>
           </a:p>
         </p:txBody>
@@ -3780,13 +3780,13 @@
           <a:p>
             <a:pPr algn="l"/>
             <a:r>
-              <a:rPr sz="2800" b="1" i="0">
+              <a:rPr sz="2900" b="1" i="0">
                 <a:solidFill>
                   <a:srgbClr val="0F172A"/>
                 </a:solidFill>
                 <a:latin typeface="Helvetica Neue"/>
               </a:rPr>
-              <a:t>You are bolting a small piece on top.</a:t>
+              <a:t>What fine-tuning actually changes</a:t>
             </a:r>
           </a:p>
         </p:txBody>
@@ -3821,7 +3821,7 @@
                 </a:solidFill>
                 <a:latin typeface="Helvetica Neue"/>
               </a:rPr>
-              <a:t>Not retraining the model. What the words actually describe, and what the book says the default should be.</a:t>
+              <a:t>A small classifier is added on top of the pretrained encoder. The textbook default is to leave the encoder frozen, or to change only its last few layers.</a:t>
             </a:r>
           </a:p>
         </p:txBody>
@@ -4571,7 +4571,7 @@
                 </a:solidFill>
                 <a:latin typeface="Helvetica Neue"/>
               </a:rPr>
-              <a:t>Freeze the model. Learn one small rule.</a:t>
+              <a:t>Freeze the encoder, train only the head</a:t>
             </a:r>
           </a:p>
         </p:txBody>
@@ -4606,7 +4606,7 @@
                 </a:solidFill>
                 <a:latin typeface="Helvetica Neue"/>
               </a:rPr>
-              <a:t>The cheapest thing you can do with labelled data, and the one almost nobody tries first.</a:t>
+              <a:t>320 labelled tickets. 3,072 new parameters are trained and 22.7 million are left unchanged. Macro-F1 goes from 0.635 to 0.727.</a:t>
             </a:r>
           </a:p>
         </p:txBody>
@@ -5545,13 +5545,13 @@
           <a:p>
             <a:pPr algn="l"/>
             <a:r>
-              <a:rPr sz="2800" b="1" i="0">
+              <a:rPr sz="2900" b="1" i="0">
                 <a:solidFill>
                   <a:srgbClr val="0F172A"/>
                 </a:solidFill>
                 <a:latin typeface="Helvetica Neue"/>
               </a:rPr>
-              <a:t>Now spend twenty thousand times more.</a:t>
+              <a:t>Fine-tune all 66 million parameters</a:t>
             </a:r>
           </a:p>
         </p:txBody>
@@ -5586,7 +5586,7 @@
                 </a:solidFill>
                 <a:latin typeface="Helvetica Neue"/>
               </a:rPr>
-              <a:t>Same 320 tickets. Every weight in the model is free to move. Predict before you look.</a:t>
+              <a:t>The same 320 tickets, but every weight in the model may change. Write down your prediction before the result is shown.</a:t>
             </a:r>
           </a:p>
         </p:txBody>
@@ -6496,7 +6496,7 @@
                 </a:solidFill>
                 <a:latin typeface="Helvetica Neue"/>
               </a:rPr>
-              <a:t>HOW MANY LABELS?</a:t>
+              <a:t>LABELLING BUDGET</a:t>
             </a:r>
           </a:p>
         </p:txBody>
@@ -6525,13 +6525,13 @@
           <a:p>
             <a:pPr algn="l"/>
             <a:r>
-              <a:rPr sz="2900" b="1" i="0">
+              <a:rPr sz="2400" b="1" i="0">
                 <a:solidFill>
                   <a:srgbClr val="0F172A"/>
                 </a:solidFill>
                 <a:latin typeface="Helvetica Neue"/>
               </a:rPr>
-              <a:t>What your own data actually buys.</a:t>
+              <a:t>Accuracy against number of labelled tickets</a:t>
             </a:r>
           </a:p>
         </p:txBody>
@@ -6566,7 +6566,7 @@
                 </a:solidFill>
                 <a:latin typeface="Helvetica Neue"/>
               </a:rPr>
-              <a:t>Both rungs, every budget, measured on tickets neither of them ever trained on.</a:t>
+              <a:t>Both rungs at six budgets, measured on the 160 held-out hand-written tickets. Averaged over several runs per point.</a:t>
             </a:r>
           </a:p>
         </p:txBody>
@@ -7452,13 +7452,13 @@
           <a:p>
             <a:pPr algn="ctr"/>
             <a:r>
-              <a:rPr sz="1500" b="0" i="1">
+              <a:rPr sz="1500" b="0" i="0">
                 <a:solidFill>
                   <a:srgbClr val="475569"/>
                 </a:solidFill>
                 <a:latin typeface="Helvetica Neue"/>
               </a:rPr>
-              <a:t>The cheap rung is above the expensive one at every budget we can afford. And the curve bends: the next hundred labels is worth less than the last.</a:t>
+              <a:t>Rung 4 scores higher than rung 5 at every budget shown. Both curves flatten: going from 640 to 1,400 labels adds only 0.035 macro-F1.</a:t>
             </a:r>
           </a:p>
         </p:txBody>
@@ -7511,7 +7511,7 @@
                 </a:solidFill>
                 <a:latin typeface="Helvetica Neue"/>
               </a:rPr>
-              <a:t>THE GAME</a:t>
+              <a:t>IN-CLASS EXERCISE</a:t>
             </a:r>
           </a:p>
         </p:txBody>
@@ -7546,7 +7546,7 @@
                 </a:solidFill>
                 <a:latin typeface="Helvetica Neue"/>
               </a:rPr>
-              <a:t>You have money for 240 labels. Choose.</a:t>
+              <a:t>Choose which 240 of 1,400 tickets to label</a:t>
             </a:r>
           </a:p>
         </p:txBody>
@@ -7581,7 +7581,7 @@
                 </a:solidFill>
                 <a:latin typeface="Helvetica Neue"/>
               </a:rPr>
-              <a:t>Thirty minutes. Same budget for every team. The results are not close.</a:t>
+              <a:t>Every team gets the same budget. You may use the ticket text, the copilot's guess and its confidence, but not the true category.</a:t>
             </a:r>
           </a:p>
         </p:txBody>
@@ -7637,8 +7637,8 @@
         </p:blipFill>
         <p:spPr>
           <a:xfrm>
-            <a:off x="518007" y="2936926"/>
-            <a:ext cx="11155680" cy="2447186"/>
+            <a:off x="518007" y="2857985"/>
+            <a:ext cx="11155680" cy="2605069"/>
           </a:xfrm>
           <a:prstGeom prst="rect">
             <a:avLst/>
@@ -7888,7 +7888,7 @@
                 </a:solidFill>
                 <a:latin typeface="Helvetica Neue"/>
               </a:rPr>
-              <a:t>THE REVEAL</a:t>
+              <a:t>RESULTS</a:t>
             </a:r>
           </a:p>
         </p:txBody>
@@ -7923,7 +7923,7 @@
                 </a:solidFill>
                 <a:latin typeface="Helvetica Neue"/>
               </a:rPr>
-              <a:t>Same budget. Same model. Same code.</a:t>
+              <a:t>Six selection strategies at the same 240-label budget</a:t>
             </a:r>
           </a:p>
         </p:txBody>
@@ -7958,7 +7958,7 @@
                 </a:solidFill>
                 <a:latin typeface="Helvetica Neue"/>
               </a:rPr>
-              <a:t>Only the choice of WHICH 240 tickets to pay for changed.</a:t>
+              <a:t>Same model and same training code throughout. Only the choice of which tickets to label changed.</a:t>
             </a:r>
           </a:p>
         </p:txBody>
@@ -8052,7 +8052,7 @@
                 </a:solidFill>
                 <a:latin typeface="Helvetica Neue"/>
               </a:rPr>
-              <a:t>0.247 macro-F1 points between best and worst, for exactly the same money. Only one strategy beat random, and every rule that ranked by a score lost to it.</a:t>
+              <a:t>A range of 0.247 macro-F1 at identical cost. Only 'cover the space' scored above random plus one standard deviation. Every strategy that ranked tickets by a score scored below random.</a:t>
             </a:r>
           </a:p>
         </p:txBody>
@@ -8105,7 +8105,7 @@
                 </a:solidFill>
                 <a:latin typeface="Helvetica Neue"/>
               </a:rPr>
-              <a:t>WHY THE WINNER WON</a:t>
+              <a:t>RESULTS</a:t>
             </a:r>
           </a:p>
         </p:txBody>
@@ -8140,7 +8140,7 @@
                 </a:solidFill>
                 <a:latin typeface="Helvetica Neue"/>
               </a:rPr>
-              <a:t>Cover the space, not the score.</a:t>
+              <a:t>How each strategy spent its 240 labels</a:t>
             </a:r>
           </a:p>
         </p:txBody>
@@ -8175,7 +8175,7 @@
                 </a:solidFill>
                 <a:latin typeface="Helvetica Neue"/>
               </a:rPr>
-              <a:t>What each strategy actually bought. Flat bars at the top, lopsided ones at the bottom.</a:t>
+              <a:t>One bar per strategy, split by category, sorted by score. An even bar means the strategy bought some of every category.</a:t>
             </a:r>
           </a:p>
         </p:txBody>
@@ -8458,13 +8458,13 @@
           <a:p>
             <a:pPr algn="ctr"/>
             <a:r>
-              <a:rPr sz="1500" b="0" i="1">
+              <a:rPr sz="1500" b="0" i="0">
                 <a:solidFill>
                   <a:srgbClr val="475569"/>
                 </a:solidFill>
                 <a:latin typeface="Helvetica Neue"/>
               </a:rPr>
-              <a:t>Nobody could balance on the true labels: that is what we were paying for. Covering the vector space bought an even spread anyway, for free.</a:t>
+              <a:t>No strategy was allowed to balance on the true categories, since those are what the budget buys. Clustering the ticket vectors produced an even spread without using any label.</a:t>
             </a:r>
           </a:p>
         </p:txBody>
@@ -8517,7 +8517,7 @@
                 </a:solidFill>
                 <a:latin typeface="Helvetica Neue"/>
               </a:rPr>
-              <a:t>WHY THE WINNER WON</a:t>
+              <a:t>RESULTS</a:t>
             </a:r>
           </a:p>
         </p:txBody>
@@ -8552,7 +8552,7 @@
                 </a:solidFill>
                 <a:latin typeface="Helvetica Neue"/>
               </a:rPr>
-              <a:t>And it is not a coincidence.</a:t>
+              <a:t>Lopsided purchases scored lower</a:t>
             </a:r>
           </a:p>
         </p:txBody>
@@ -8587,7 +8587,7 @@
                 </a:solidFill>
                 <a:latin typeface="Helvetica Neue"/>
               </a:rPr>
-              <a:t>Every strategy from the reveal, plotted by how lopsided its purchase turned out.</a:t>
+              <a:t>Horizontal axis is the largest category count minus the smallest. Correlation with macro-F1 across all six strategies is -0.72.</a:t>
             </a:r>
           </a:p>
         </p:txBody>
@@ -8675,13 +8675,13 @@
           <a:p>
             <a:pPr algn="ctr"/>
             <a:r>
-              <a:rPr sz="1500" b="0" i="1">
+              <a:rPr sz="1500" b="0" i="0">
                 <a:solidFill>
                   <a:srgbClr val="475569"/>
                 </a:solidFill>
                 <a:latin typeface="Helvetica Neue"/>
               </a:rPr>
-              <a:t>Your selection rule quietly chooses your training distribution. Any rule that sorts by a score will skew it, and nobody notices until the model has a hole in it.</a:t>
+              <a:t>The rule used to select training data also determines its class distribution. Any rule that sorts by a score will skew that distribution, so check the mix before training.</a:t>
             </a:r>
           </a:p>
         </p:txBody>
@@ -8763,13 +8763,13 @@
           <a:p>
             <a:pPr algn="l"/>
             <a:r>
-              <a:rPr sz="2900" b="1" i="0">
+              <a:rPr sz="2550" b="1" i="0">
                 <a:solidFill>
                   <a:srgbClr val="0F172A"/>
                 </a:solidFill>
                 <a:latin typeface="Helvetica Neue"/>
               </a:rPr>
-              <a:t>Same architecture. Better recipe.</a:t>
+              <a:t>What RoBERTa changed, and what it did not</a:t>
             </a:r>
           </a:p>
         </p:txBody>
@@ -8804,7 +8804,7 @@
                 </a:solidFill>
                 <a:latin typeface="Helvetica Neue"/>
               </a:rPr>
-              <a:t>What actually changed between BERT and the model that beat it.</a:t>
+              <a:t>The architecture is unchanged. The training recipe changed: one objective dropped, larger batches, more text, longer training.</a:t>
             </a:r>
           </a:p>
         </p:txBody>
@@ -9519,7 +9519,7 @@
                 </a:solidFill>
                 <a:latin typeface="Helvetica Neue"/>
               </a:rPr>
-              <a:t>THE TOP OF THE LADDER</a:t>
+              <a:t>RUNGS 6 AND 7</a:t>
             </a:r>
           </a:p>
         </p:txBody>
@@ -9554,7 +9554,7 @@
                 </a:solidFill>
                 <a:latin typeface="Helvetica Neue"/>
               </a:rPr>
-              <a:t>Should Cobalt train its own model?</a:t>
+              <a:t>What the top two rungs cost</a:t>
             </a:r>
           </a:p>
         </p:txBody>
@@ -9589,7 +9589,7 @@
                 </a:solidFill>
                 <a:latin typeface="Helvetica Neue"/>
               </a:rPr>
-              <a:t>Somebody in the room is thinking it, so let us price it honestly.</a:t>
+              <a:t>Continued pretraining and training from scratch: what each requires, when each is worth doing, and why the answer for Cobalt is neither.</a:t>
             </a:r>
           </a:p>
         </p:txBody>
@@ -10248,8 +10248,8 @@
         </p:blipFill>
         <p:spPr>
           <a:xfrm>
-            <a:off x="518007" y="3102514"/>
-            <a:ext cx="11155680" cy="2116011"/>
+            <a:off x="518007" y="3015360"/>
+            <a:ext cx="11155680" cy="2290319"/>
           </a:xfrm>
           <a:prstGeom prst="rect">
             <a:avLst/>
@@ -10569,7 +10569,7 @@
                 </a:solidFill>
                 <a:latin typeface="Helvetica Neue"/>
               </a:rPr>
-              <a:t>The same map as last lecture. Greyed out is what we have already done; tonight is the bottom four.</a:t>
+              <a:t>The eight concepts for Week 7 and the five models we run. Greyed out was covered in Lecture 13. The four in green are covered tonight.</a:t>
             </a:r>
           </a:p>
         </p:txBody>
@@ -10681,7 +10681,7 @@
                 </a:solidFill>
                 <a:latin typeface="Helvetica Neue"/>
               </a:rPr>
-              <a:t>FULL CIRCLE</a:t>
+              <a:t>SUMMARY</a:t>
             </a:r>
           </a:p>
         </p:txBody>
@@ -10716,7 +10716,7 @@
                 </a:solidFill>
                 <a:latin typeface="Helvetica Neue"/>
               </a:rPr>
-              <a:t>Everything from both lectures, on one axis.</a:t>
+              <a:t>Every result from both lectures on one axis</a:t>
             </a:r>
           </a:p>
         </p:txBody>
@@ -10751,7 +10751,7 @@
                 </a:solidFill>
                 <a:latin typeface="Helvetica Neue"/>
               </a:rPr>
-              <a:t>Two evenings, one afternoon of labelling, no GPU bill.</a:t>
+              <a:t>Macro-F1 with no labels, with 240 labels chosen badly, 240 chosen at random, 240 chosen well, and with all 1,400 labelled.</a:t>
             </a:r>
           </a:p>
         </p:txBody>
@@ -10845,7 +10845,7 @@
                 </a:solidFill>
                 <a:latin typeface="Helvetica Neue"/>
               </a:rPr>
-              <a:t>Adapting a model is mostly a purchasing decision, not an engineering one.</a:t>
+              <a:t>240 labels chosen well reached 93% of the score obtained by labelling all 1,400 tickets.</a:t>
             </a:r>
           </a:p>
         </p:txBody>
@@ -10898,7 +10898,7 @@
                 </a:solidFill>
                 <a:latin typeface="Helvetica Neue"/>
               </a:rPr>
-              <a:t>BEFORE YOU GO</a:t>
+              <a:t>SUMMARY</a:t>
             </a:r>
           </a:p>
         </p:txBody>
@@ -10933,7 +10933,7 @@
                 </a:solidFill>
                 <a:latin typeface="Helvetica Neue"/>
               </a:rPr>
-              <a:t>Four things you can do at work on Monday.</a:t>
+              <a:t>Four things you can apply at work</a:t>
             </a:r>
           </a:p>
         </p:txBody>
@@ -11126,7 +11126,7 @@
                 </a:solidFill>
                 <a:latin typeface="Helvetica Neue"/>
               </a:rPr>
-              <a:t>Plot the curve before you commit</a:t>
+              <a:t>Plot the learning curve before committing to a labelling project</a:t>
             </a:r>
           </a:p>
         </p:txBody>
@@ -11161,7 +11161,7 @@
                 </a:solidFill>
                 <a:latin typeface="Helvetica Neue"/>
               </a:rPr>
-              <a:t>Label a few hundred, plot accuracy against budget, and find where it flattens. Teams routinely label for months past the point it changed a decision.</a:t>
+              <a:t>Label a few hundred examples, plot the score against the number of labels, and find where the curve flattens. That point, not a fixed target, is where labelling should stop.</a:t>
             </a:r>
           </a:p>
         </p:txBody>
@@ -11319,7 +11319,7 @@
                 </a:solidFill>
                 <a:latin typeface="Helvetica Neue"/>
               </a:rPr>
-              <a:t>Try the cheap rung first</a:t>
+              <a:t>Test the frozen-encoder option before approving a fine-tune</a:t>
             </a:r>
           </a:p>
         </p:txBody>
@@ -11354,7 +11354,7 @@
                 </a:solidFill>
                 <a:latin typeface="Helvetica Neue"/>
               </a:rPr>
-              <a:t>Frozen embeddings and a simple classifier. Make the expensive option prove it is better before you approve it.</a:t>
+              <a:t>Frozen embeddings with a simple classifier is faster and cheaper, and at these data sizes it scored higher. Require the more expensive option to demonstrate an improvement.</a:t>
             </a:r>
           </a:p>
         </p:txBody>
@@ -11512,7 +11512,7 @@
                 </a:solidFill>
                 <a:latin typeface="Helvetica Neue"/>
               </a:rPr>
-              <a:t>Check the class mix you bought</a:t>
+              <a:t>Check the class distribution of the training data you selected</a:t>
             </a:r>
           </a:p>
         </p:txBody>
@@ -11547,7 +11547,7 @@
                 </a:solidFill>
                 <a:latin typeface="Helvetica Neue"/>
               </a:rPr>
-              <a:t>Whatever rule chose your training data also chose your blind spots. Look for the zeros.</a:t>
+              <a:t>The selection rule determines the class mix, and the class mix determines where the model will fail. Inspect the counts per category before training.</a:t>
             </a:r>
           </a:p>
         </p:txBody>
@@ -11705,7 +11705,7 @@
                 </a:solidFill>
                 <a:latin typeface="Helvetica Neue"/>
               </a:rPr>
-              <a:t>Ask what rung they tried</a:t>
+              <a:t>Ask which adaptation methods have already been tried</a:t>
             </a:r>
           </a:p>
         </p:txBody>
@@ -11740,7 +11740,7 @@
                 </a:solidFill>
                 <a:latin typeface="Helvetica Neue"/>
               </a:rPr>
-              <a:t>When somebody proposes training a model from scratch, that is the question that ends the meeting early.</a:t>
+              <a:t>When training a model from scratch is proposed, establish first what rungs 1 through 5 scored. Also ask what random selection scored before accepting any clever selection method.</a:t>
             </a:r>
           </a:p>
         </p:txBody>
@@ -11793,7 +11793,7 @@
                 </a:solidFill>
                 <a:latin typeface="Helvetica Neue"/>
               </a:rPr>
-              <a:t>WHERE WE LEFT OFF</a:t>
+              <a:t>LECTURE 13 RECAP</a:t>
             </a:r>
           </a:p>
         </p:txBody>
@@ -11828,7 +11828,7 @@
                 </a:solidFill>
                 <a:latin typeface="Helvetica Neue"/>
               </a:rPr>
-              <a:t>Last lecture, with no training data at all.</a:t>
+              <a:t>What the copilot achieved with no training data</a:t>
             </a:r>
           </a:p>
         </p:txBody>
@@ -11863,7 +11863,7 @@
                 </a:solidFill>
                 <a:latin typeface="Helvetica Neue"/>
               </a:rPr>
-              <a:t>Same company, same inbox, same copilot. Tonight we ask what our own data would add.</a:t>
+              <a:t>Accuracy 64% on the first guess and 80% within its top two, on the same 160 tickets. Two categories were caught less than half the time.</a:t>
             </a:r>
           </a:p>
         </p:txBody>
@@ -11919,8 +11919,8 @@
         </p:blipFill>
         <p:spPr>
           <a:xfrm>
-            <a:off x="518007" y="3255053"/>
-            <a:ext cx="11155680" cy="1810933"/>
+            <a:off x="518007" y="3078932"/>
+            <a:ext cx="11155680" cy="2163174"/>
           </a:xfrm>
           <a:prstGeom prst="rect">
             <a:avLst/>
@@ -11975,7 +11975,7 @@
                 </a:solidFill>
                 <a:latin typeface="Helvetica Neue"/>
               </a:rPr>
-              <a:t>TONIGHT</a:t>
+              <a:t>THE ADAPTATION LADDER</a:t>
             </a:r>
           </a:p>
         </p:txBody>
@@ -12010,7 +12010,7 @@
                 </a:solidFill>
                 <a:latin typeface="Helvetica Neue"/>
               </a:rPr>
-              <a:t>There are seven ways to make a model yours.</a:t>
+              <a:t>Seven ways to adapt a model to your own data</a:t>
             </a:r>
           </a:p>
         </p:txBody>
@@ -12045,7 +12045,7 @@
                 </a:solidFill>
                 <a:latin typeface="Helvetica Neue"/>
               </a:rPr>
-              <a:t>Read it bottom to top. Cost climbs steeply. The payoff flattens early.</a:t>
+              <a:t>Ordered bottom to top by how much of your own data each one requires, with what each costs. Rungs 1 and 2 were Lecture 13; rung 3 is Week 8; rungs 4 to 7 are tonight.</a:t>
             </a:r>
           </a:p>
         </p:txBody>
@@ -12157,7 +12157,7 @@
                 </a:solidFill>
                 <a:latin typeface="Helvetica Neue"/>
               </a:rPr>
-              <a:t>HOW THE READING ABILITY WAS LEARNED</a:t>
+              <a:t>MASKED LANGUAGE MODELLING</a:t>
             </a:r>
           </a:p>
         </p:txBody>
@@ -12186,13 +12186,13 @@
           <a:p>
             <a:pPr algn="l"/>
             <a:r>
-              <a:rPr sz="2400" b="1" i="0">
+              <a:rPr sz="2900" b="1" i="0">
                 <a:solidFill>
                   <a:srgbClr val="0F172A"/>
                 </a:solidFill>
                 <a:latin typeface="Helvetica Neue"/>
               </a:rPr>
-              <a:t>Hide some of the words. Make it guess them.</a:t>
+              <a:t>How BERT was trained to read</a:t>
             </a:r>
           </a:p>
         </p:txBody>
@@ -12227,7 +12227,7 @@
                 </a:solidFill>
                 <a:latin typeface="Helvetica Neue"/>
               </a:rPr>
-              <a:t>The exercise BERT was trained on, and the two odd details that make it work.</a:t>
+              <a:t>15% of the words are chosen. Of those, 80% are replaced with a blank, 10% with a wrong word, and 10% are left unchanged. The right-hand panel explains why.</a:t>
             </a:r>
           </a:p>
         </p:txBody>
@@ -12942,7 +12942,7 @@
                 </a:solidFill>
                 <a:latin typeface="Helvetica Neue"/>
               </a:rPr>
-              <a:t>WHY ANY OF THIS WORKS</a:t>
+              <a:t>MASKED LANGUAGE MODELLING</a:t>
             </a:r>
           </a:p>
         </p:txBody>
@@ -12971,13 +12971,13 @@
           <a:p>
             <a:pPr algn="l"/>
             <a:r>
-              <a:rPr sz="2500" b="1" i="0">
+              <a:rPr sz="2900" b="1" i="0">
                 <a:solidFill>
                   <a:srgbClr val="0F172A"/>
                 </a:solidFill>
                 <a:latin typeface="Helvetica Neue"/>
               </a:rPr>
-              <a:t>Somebody already paid to teach it English.</a:t>
+              <a:t>The fill-in-the-blank task, run live</a:t>
             </a:r>
           </a:p>
         </p:txBody>
@@ -13012,7 +13012,7 @@
                 </a:solidFill>
                 <a:latin typeface="Helvetica Neue"/>
               </a:rPr>
-              <a:t>This is the exercise they used. It needs no labelled data, which is why it could be done at scale.</a:t>
+              <a:t>bert-base-uncased predicting a hidden word from the words around it. No labelled data is needed for this, which is why it could be run on very large amounts of text.</a:t>
             </a:r>
           </a:p>
         </p:txBody>
@@ -13922,7 +13922,7 @@
                 </a:solidFill>
                 <a:latin typeface="Helvetica Neue"/>
               </a:rPr>
-              <a:t>WHY ANY OF THIS WORKS</a:t>
+              <a:t>MASKED LANGUAGE MODELLING</a:t>
             </a:r>
           </a:p>
         </p:txBody>
@@ -13951,13 +13951,13 @@
           <a:p>
             <a:pPr algn="l"/>
             <a:r>
-              <a:rPr sz="2500" b="1" i="0">
+              <a:rPr sz="2900" b="1" i="0">
                 <a:solidFill>
                   <a:srgbClr val="0F172A"/>
                 </a:solidFill>
                 <a:latin typeface="Helvetica Neue"/>
               </a:rPr>
-              <a:t>And here is exactly what it does not know.</a:t>
+              <a:t>The same task on product vocabulary</a:t>
             </a:r>
           </a:p>
         </p:txBody>
@@ -13992,7 +13992,7 @@
                 </a:solidFill>
                 <a:latin typeface="Helvetica Neue"/>
               </a:rPr>
-              <a:t>The same fill-in-the-blank game, asked about our world instead of the general one.</a:t>
+              <a:t>The same model and the same task, asked to fill a blank whose answer is a vendor name it rarely encountered during pretraining.</a:t>
             </a:r>
           </a:p>
         </p:txBody>
@@ -14902,7 +14902,7 @@
                 </a:solidFill>
                 <a:latin typeface="Helvetica Neue"/>
               </a:rPr>
-              <a:t>TWO SHAPES OF MODEL</a:t>
+              <a:t>ENCODER AND DECODER MODELS</a:t>
             </a:r>
           </a:p>
         </p:txBody>
@@ -14937,7 +14937,7 @@
                 </a:solidFill>
                 <a:latin typeface="Helvetica Neue"/>
               </a:rPr>
-              <a:t>The whole difference is one blacked-out triangle.</a:t>
+              <a:t>Which words each model is allowed to look at</a:t>
             </a:r>
           </a:p>
         </p:txBody>
@@ -14972,7 +14972,7 @@
                 </a:solidFill>
                 <a:latin typeface="Helvetica Neue"/>
               </a:rPr>
-              <a:t>Every row is a word doing the looking. Every column is a word it is allowed to look at.</a:t>
+              <a:t>Each row is a word doing the looking; each column is a word being looked at. Green is permitted, black is blocked.</a:t>
             </a:r>
           </a:p>
         </p:txBody>
@@ -15084,7 +15084,7 @@
                 </a:solidFill>
                 <a:latin typeface="Helvetica Neue"/>
               </a:rPr>
-              <a:t>TWO SHAPES OF MODEL</a:t>
+              <a:t>ENCODER AND DECODER MODELS</a:t>
             </a:r>
           </a:p>
         </p:txBody>
@@ -15119,7 +15119,7 @@
                 </a:solidFill>
                 <a:latin typeface="Helvetica Neue"/>
               </a:rPr>
-              <a:t>Why BERT reads and GPT writes.</a:t>
+              <a:t>What each of the two is used for</a:t>
             </a:r>
           </a:p>
         </p:txBody>
@@ -15154,7 +15154,7 @@
                 </a:solidFill>
                 <a:latin typeface="Helvetica Neue"/>
               </a:rPr>
-              <a:t>Same transformer block from last lecture. One difference: may a word look to its right?</a:t>
+              <a:t>Both use the transformer block from Lecture 13. The only difference is whether a word may look at the words to its right.</a:t>
             </a:r>
           </a:p>
         </p:txBody>

--- a/Week 7/L14_Making_It_Yours.pptx
+++ b/Week 7/L14_Making_It_Yours.pptx
@@ -7581,7 +7581,7 @@
                 </a:solidFill>
                 <a:latin typeface="Helvetica Neue"/>
               </a:rPr>
-              <a:t>Every team gets the same budget. You may use the ticket text, the copilot's guess and its confidence, but not the true category.</a:t>
+              <a:t>Final project teams. Same budget for every team. Scored on held-out tickets, averaged over 5 seeds.</a:t>
             </a:r>
           </a:p>
         </p:txBody>
@@ -7637,8 +7637,8 @@
         </p:blipFill>
         <p:spPr>
           <a:xfrm>
-            <a:off x="518007" y="2857985"/>
-            <a:ext cx="11155680" cy="2605069"/>
+            <a:off x="518007" y="2760703"/>
+            <a:ext cx="11155680" cy="2799632"/>
           </a:xfrm>
           <a:prstGeom prst="rect">
             <a:avLst/>

--- a/Week 7/L14_Making_It_Yours.pptx
+++ b/Week 7/L14_Making_It_Yours.pptx
@@ -26,6 +26,7 @@
     <p:sldId id="274" r:id="rId25"/>
     <p:sldId id="275" r:id="rId26"/>
     <p:sldId id="276" r:id="rId27"/>
+    <p:sldId id="277" r:id="rId28"/>
   </p:sldIdLst>
   <p:sldSz cx="12191695" cy="6858000" type="screen4x3"/>
   <p:notesSz cx="6858000" cy="9144000"/>
@@ -11745,6 +11746,188 @@
           </a:p>
         </p:txBody>
       </p:sp>
+    </p:spTree>
+  </p:cSld>
+  <p:clrMapOvr>
+    <a:masterClrMapping/>
+  </p:clrMapOvr>
+</p:sld>
+</file>
+
+<file path=ppt/slides/slide22.xml><?xml version="1.0" encoding="utf-8"?>
+<p:sld xmlns:a="http://schemas.openxmlformats.org/drawingml/2006/main" xmlns:p="http://schemas.openxmlformats.org/presentationml/2006/main" xmlns:r="http://schemas.openxmlformats.org/officeDocument/2006/relationships">
+  <p:cSld>
+    <p:spTree>
+      <p:nvGrpSpPr>
+        <p:cNvPr id="1" name=""/>
+        <p:cNvGrpSpPr/>
+        <p:nvPr/>
+      </p:nvGrpSpPr>
+      <p:grpSpPr/>
+      <p:sp>
+        <p:nvSpPr>
+          <p:cNvPr id="2" name="TextBox 1"/>
+          <p:cNvSpPr txBox="1"/>
+          <p:nvPr/>
+        </p:nvSpPr>
+        <p:spPr>
+          <a:xfrm>
+            <a:off x="640080" y="457200"/>
+            <a:ext cx="6766560" cy="274320"/>
+          </a:xfrm>
+          <a:prstGeom prst="rect">
+            <a:avLst/>
+          </a:prstGeom>
+          <a:noFill/>
+        </p:spPr>
+        <p:txBody>
+          <a:bodyPr wrap="square" lIns="0" rIns="0" tIns="0" bIns="0">
+            <a:spAutoFit/>
+          </a:bodyPr>
+          <a:lstStyle/>
+          <a:p>
+            <a:pPr algn="l"/>
+            <a:r>
+              <a:rPr sz="1250" b="1" i="0" spc="220">
+                <a:solidFill>
+                  <a:srgbClr val="E11D48"/>
+                </a:solidFill>
+                <a:latin typeface="Helvetica Neue"/>
+              </a:rPr>
+              <a:t>DISCUSSION</a:t>
+            </a:r>
+          </a:p>
+        </p:txBody>
+      </p:sp>
+      <p:sp>
+        <p:nvSpPr>
+          <p:cNvPr id="3" name="TextBox 2"/>
+          <p:cNvSpPr txBox="1"/>
+          <p:nvPr/>
+        </p:nvSpPr>
+        <p:spPr>
+          <a:xfrm>
+            <a:off x="640080" y="758952"/>
+            <a:ext cx="10972800" cy="704088"/>
+          </a:xfrm>
+          <a:prstGeom prst="rect">
+            <a:avLst/>
+          </a:prstGeom>
+          <a:noFill/>
+        </p:spPr>
+        <p:txBody>
+          <a:bodyPr wrap="square" lIns="0" rIns="0" tIns="0" bIns="0">
+            <a:spAutoFit/>
+          </a:bodyPr>
+          <a:lstStyle/>
+          <a:p>
+            <a:pPr algn="l"/>
+            <a:r>
+              <a:rPr sz="2900" b="1" i="0">
+                <a:solidFill>
+                  <a:srgbClr val="0F172A"/>
+                </a:solidFill>
+                <a:latin typeface="Helvetica Neue"/>
+              </a:rPr>
+              <a:t>Meta moved 6,500 engineers into data annotation</a:t>
+            </a:r>
+          </a:p>
+        </p:txBody>
+      </p:sp>
+      <p:sp>
+        <p:nvSpPr>
+          <p:cNvPr id="4" name="TextBox 3"/>
+          <p:cNvSpPr txBox="1"/>
+          <p:nvPr/>
+        </p:nvSpPr>
+        <p:spPr>
+          <a:xfrm>
+            <a:off x="640080" y="1417320"/>
+            <a:ext cx="10424160" cy="457200"/>
+          </a:xfrm>
+          <a:prstGeom prst="rect">
+            <a:avLst/>
+          </a:prstGeom>
+          <a:noFill/>
+        </p:spPr>
+        <p:txBody>
+          <a:bodyPr wrap="square" lIns="0" rIns="0" tIns="0" bIns="0">
+            <a:spAutoFit/>
+          </a:bodyPr>
+          <a:lstStyle/>
+          <a:p>
+            <a:pPr algn="l"/>
+            <a:r>
+              <a:rPr sz="1500" b="0" i="0">
+                <a:solidFill>
+                  <a:srgbClr val="475569"/>
+                </a:solidFill>
+                <a:latin typeface="Helvetica Neue"/>
+              </a:rPr>
+              <a:t>March to June 2026. The same bottleneck we priced tonight, at a scale where it reorganised a company.</a:t>
+            </a:r>
+          </a:p>
+        </p:txBody>
+      </p:sp>
+      <p:sp>
+        <p:nvSpPr>
+          <p:cNvPr id="5" name="TextBox 4"/>
+          <p:cNvSpPr txBox="1"/>
+          <p:nvPr/>
+        </p:nvSpPr>
+        <p:spPr>
+          <a:xfrm>
+            <a:off x="640080" y="6492240"/>
+            <a:ext cx="8229600" cy="274320"/>
+          </a:xfrm>
+          <a:prstGeom prst="rect">
+            <a:avLst/>
+          </a:prstGeom>
+          <a:noFill/>
+        </p:spPr>
+        <p:txBody>
+          <a:bodyPr wrap="square" lIns="0" rIns="0" tIns="0" bIns="0">
+            <a:spAutoFit/>
+          </a:bodyPr>
+          <a:lstStyle/>
+          <a:p>
+            <a:pPr algn="l"/>
+            <a:r>
+              <a:rPr sz="900" b="0" i="0">
+                <a:solidFill>
+                  <a:srgbClr val="BCC1CC"/>
+                </a:solidFill>
+                <a:latin typeface="Helvetica Neue"/>
+              </a:rPr>
+              <a:t>ISBA 2411 · Natural Language Processing &amp; AI · Summer 2026</a:t>
+            </a:r>
+          </a:p>
+        </p:txBody>
+      </p:sp>
+      <p:pic>
+        <p:nvPicPr>
+          <p:cNvPr id="6" name="Picture 5" descr="d_metaincident.png"/>
+          <p:cNvPicPr>
+            <a:picLocks noChangeAspect="1"/>
+          </p:cNvPicPr>
+          <p:nvPr/>
+        </p:nvPicPr>
+        <p:blipFill>
+          <a:blip r:embed="rId2"/>
+          <a:stretch>
+            <a:fillRect/>
+          </a:stretch>
+        </p:blipFill>
+        <p:spPr>
+          <a:xfrm>
+            <a:off x="335127" y="2612966"/>
+            <a:ext cx="11521440" cy="3186547"/>
+          </a:xfrm>
+          <a:prstGeom prst="rect">
+            <a:avLst/>
+          </a:prstGeom>
+        </p:spPr>
+      </p:pic>
     </p:spTree>
   </p:cSld>
   <p:clrMapOvr>

--- a/Week 7/L14_Making_It_Yours.pptx
+++ b/Week 7/L14_Making_It_Yours.pptx
@@ -3748,11 +3748,11 @@
             <a:r>
               <a:rPr sz="1250" b="1" i="0" spc="220">
                 <a:solidFill>
-                  <a:srgbClr val="059669"/>
-                </a:solidFill>
-                <a:latin typeface="Helvetica Neue"/>
-              </a:rPr>
-              <a:t>PRETRAINING AND FINE-TUNING</a:t>
+                  <a:srgbClr val="D97706"/>
+                </a:solidFill>
+                <a:latin typeface="Helvetica Neue"/>
+              </a:rPr>
+              <a:t>ENCODER AND DECODER MODELS</a:t>
             </a:r>
           </a:p>
         </p:txBody>
@@ -3766,7 +3766,7 @@
         <p:spPr>
           <a:xfrm>
             <a:off x="640080" y="758952"/>
-            <a:ext cx="7315200" cy="704088"/>
+            <a:ext cx="10972800" cy="704088"/>
           </a:xfrm>
           <a:prstGeom prst="rect">
             <a:avLst/>
@@ -3787,7 +3787,7 @@
                 </a:solidFill>
                 <a:latin typeface="Helvetica Neue"/>
               </a:rPr>
-              <a:t>What fine-tuning actually changes</a:t>
+              <a:t>What each of the two is used for</a:t>
             </a:r>
           </a:p>
         </p:txBody>
@@ -3822,617 +3822,14 @@
                 </a:solidFill>
                 <a:latin typeface="Helvetica Neue"/>
               </a:rPr>
-              <a:t>A small classifier is added on top of the pretrained encoder. The textbook default is to leave the encoder frozen, or to change only its last few layers.</a:t>
-            </a:r>
-          </a:p>
-        </p:txBody>
-      </p:sp>
-      <p:sp>
-        <p:nvSpPr>
-          <p:cNvPr id="5" name="Rounded Rectangle 4"/>
-          <p:cNvSpPr/>
-          <p:nvPr/>
-        </p:nvSpPr>
-        <p:spPr>
-          <a:xfrm>
-            <a:off x="8302752" y="593445"/>
-            <a:ext cx="2852928" cy="20116"/>
-          </a:xfrm>
-          <a:prstGeom prst="roundRect">
-            <a:avLst/>
-          </a:prstGeom>
-          <a:solidFill>
-            <a:srgbClr val="E9EBF0"/>
-          </a:solidFill>
-          <a:ln>
-            <a:noFill/>
-          </a:ln>
-        </p:spPr>
-        <p:style>
-          <a:lnRef idx="1">
-            <a:schemeClr val="accent1"/>
-          </a:lnRef>
-          <a:fillRef idx="3">
-            <a:schemeClr val="accent1"/>
-          </a:fillRef>
-          <a:effectRef idx="2">
-            <a:schemeClr val="accent1"/>
-          </a:effectRef>
-          <a:fontRef idx="minor">
-            <a:schemeClr val="lt1"/>
-          </a:fontRef>
-        </p:style>
-        <p:txBody>
-          <a:bodyPr rtlCol="0" anchor="ctr"/>
-          <a:lstStyle/>
-          <a:p>
-            <a:pPr algn="ctr"/>
-          </a:p>
-        </p:txBody>
-      </p:sp>
-      <p:sp>
-        <p:nvSpPr>
-          <p:cNvPr id="6" name="Rounded Rectangle 5"/>
-          <p:cNvSpPr/>
-          <p:nvPr/>
-        </p:nvSpPr>
-        <p:spPr>
-          <a:xfrm>
-            <a:off x="8220455" y="493776"/>
-            <a:ext cx="219456" cy="219456"/>
-          </a:xfrm>
-          <a:prstGeom prst="roundRect">
-            <a:avLst>
-              <a:gd name="adj" fmla="val 32000"/>
-            </a:avLst>
-          </a:prstGeom>
-          <a:solidFill>
-            <a:srgbClr val="0EA5E9"/>
-          </a:solidFill>
-          <a:ln>
-            <a:noFill/>
-          </a:ln>
-        </p:spPr>
-        <p:style>
-          <a:lnRef idx="1">
-            <a:schemeClr val="accent1"/>
-          </a:lnRef>
-          <a:fillRef idx="3">
-            <a:schemeClr val="accent1"/>
-          </a:fillRef>
-          <a:effectRef idx="2">
-            <a:schemeClr val="accent1"/>
-          </a:effectRef>
-          <a:fontRef idx="minor">
-            <a:schemeClr val="lt1"/>
-          </a:fontRef>
-        </p:style>
-        <p:txBody>
-          <a:bodyPr rtlCol="0" anchor="ctr"/>
-          <a:lstStyle/>
-          <a:p>
-            <a:pPr algn="ctr"/>
-          </a:p>
-        </p:txBody>
-      </p:sp>
-      <p:sp>
-        <p:nvSpPr>
-          <p:cNvPr id="7" name="TextBox 6"/>
-          <p:cNvSpPr txBox="1"/>
-          <p:nvPr/>
-        </p:nvSpPr>
-        <p:spPr>
-          <a:xfrm>
-            <a:off x="8165591" y="489204"/>
-            <a:ext cx="329184" cy="228600"/>
-          </a:xfrm>
-          <a:prstGeom prst="rect">
-            <a:avLst/>
-          </a:prstGeom>
-          <a:noFill/>
-        </p:spPr>
-        <p:txBody>
-          <a:bodyPr wrap="square" lIns="0" rIns="0" tIns="0" bIns="0">
-            <a:spAutoFit/>
-          </a:bodyPr>
-          <a:lstStyle/>
-          <a:p>
-            <a:pPr algn="ctr"/>
-            <a:r>
-              <a:rPr sz="950" b="1" i="0">
-                <a:solidFill>
-                  <a:srgbClr val="FFFFFF"/>
-                </a:solidFill>
-                <a:latin typeface="Helvetica Neue"/>
-              </a:rPr>
-              <a:t>1</a:t>
-            </a:r>
-          </a:p>
-        </p:txBody>
-      </p:sp>
-      <p:sp>
-        <p:nvSpPr>
-          <p:cNvPr id="8" name="Rounded Rectangle 7"/>
-          <p:cNvSpPr/>
-          <p:nvPr/>
-        </p:nvSpPr>
-        <p:spPr>
-          <a:xfrm>
-            <a:off x="8695943" y="493776"/>
-            <a:ext cx="219456" cy="219456"/>
-          </a:xfrm>
-          <a:prstGeom prst="roundRect">
-            <a:avLst>
-              <a:gd name="adj" fmla="val 32000"/>
-            </a:avLst>
-          </a:prstGeom>
-          <a:solidFill>
-            <a:srgbClr val="0EA5E9"/>
-          </a:solidFill>
-          <a:ln>
-            <a:noFill/>
-          </a:ln>
-        </p:spPr>
-        <p:style>
-          <a:lnRef idx="1">
-            <a:schemeClr val="accent1"/>
-          </a:lnRef>
-          <a:fillRef idx="3">
-            <a:schemeClr val="accent1"/>
-          </a:fillRef>
-          <a:effectRef idx="2">
-            <a:schemeClr val="accent1"/>
-          </a:effectRef>
-          <a:fontRef idx="minor">
-            <a:schemeClr val="lt1"/>
-          </a:fontRef>
-        </p:style>
-        <p:txBody>
-          <a:bodyPr rtlCol="0" anchor="ctr"/>
-          <a:lstStyle/>
-          <a:p>
-            <a:pPr algn="ctr"/>
-          </a:p>
-        </p:txBody>
-      </p:sp>
-      <p:sp>
-        <p:nvSpPr>
-          <p:cNvPr id="9" name="TextBox 8"/>
-          <p:cNvSpPr txBox="1"/>
-          <p:nvPr/>
-        </p:nvSpPr>
-        <p:spPr>
-          <a:xfrm>
-            <a:off x="8641079" y="489204"/>
-            <a:ext cx="329184" cy="228600"/>
-          </a:xfrm>
-          <a:prstGeom prst="rect">
-            <a:avLst/>
-          </a:prstGeom>
-          <a:noFill/>
-        </p:spPr>
-        <p:txBody>
-          <a:bodyPr wrap="square" lIns="0" rIns="0" tIns="0" bIns="0">
-            <a:spAutoFit/>
-          </a:bodyPr>
-          <a:lstStyle/>
-          <a:p>
-            <a:pPr algn="ctr"/>
-            <a:r>
-              <a:rPr sz="950" b="1" i="0">
-                <a:solidFill>
-                  <a:srgbClr val="FFFFFF"/>
-                </a:solidFill>
-                <a:latin typeface="Helvetica Neue"/>
-              </a:rPr>
-              <a:t>2</a:t>
-            </a:r>
-          </a:p>
-        </p:txBody>
-      </p:sp>
-      <p:sp>
-        <p:nvSpPr>
-          <p:cNvPr id="10" name="Rounded Rectangle 9"/>
-          <p:cNvSpPr/>
-          <p:nvPr/>
-        </p:nvSpPr>
-        <p:spPr>
-          <a:xfrm>
-            <a:off x="9171431" y="493776"/>
-            <a:ext cx="219456" cy="219456"/>
-          </a:xfrm>
-          <a:prstGeom prst="roundRect">
-            <a:avLst>
-              <a:gd name="adj" fmla="val 32000"/>
-            </a:avLst>
-          </a:prstGeom>
-          <a:solidFill>
-            <a:srgbClr val="D97706"/>
-          </a:solidFill>
-          <a:ln>
-            <a:noFill/>
-          </a:ln>
-        </p:spPr>
-        <p:style>
-          <a:lnRef idx="1">
-            <a:schemeClr val="accent1"/>
-          </a:lnRef>
-          <a:fillRef idx="3">
-            <a:schemeClr val="accent1"/>
-          </a:fillRef>
-          <a:effectRef idx="2">
-            <a:schemeClr val="accent1"/>
-          </a:effectRef>
-          <a:fontRef idx="minor">
-            <a:schemeClr val="lt1"/>
-          </a:fontRef>
-        </p:style>
-        <p:txBody>
-          <a:bodyPr rtlCol="0" anchor="ctr"/>
-          <a:lstStyle/>
-          <a:p>
-            <a:pPr algn="ctr"/>
-          </a:p>
-        </p:txBody>
-      </p:sp>
-      <p:sp>
-        <p:nvSpPr>
-          <p:cNvPr id="11" name="TextBox 10"/>
-          <p:cNvSpPr txBox="1"/>
-          <p:nvPr/>
-        </p:nvSpPr>
-        <p:spPr>
-          <a:xfrm>
-            <a:off x="9116567" y="489204"/>
-            <a:ext cx="329184" cy="228600"/>
-          </a:xfrm>
-          <a:prstGeom prst="rect">
-            <a:avLst/>
-          </a:prstGeom>
-          <a:noFill/>
-        </p:spPr>
-        <p:txBody>
-          <a:bodyPr wrap="square" lIns="0" rIns="0" tIns="0" bIns="0">
-            <a:spAutoFit/>
-          </a:bodyPr>
-          <a:lstStyle/>
-          <a:p>
-            <a:pPr algn="ctr"/>
-            <a:r>
-              <a:rPr sz="950" b="1" i="0">
-                <a:solidFill>
-                  <a:srgbClr val="FFFFFF"/>
-                </a:solidFill>
-                <a:latin typeface="Helvetica Neue"/>
-              </a:rPr>
-              <a:t>3</a:t>
-            </a:r>
-          </a:p>
-        </p:txBody>
-      </p:sp>
-      <p:sp>
-        <p:nvSpPr>
-          <p:cNvPr id="12" name="Rounded Rectangle 11"/>
-          <p:cNvSpPr/>
-          <p:nvPr/>
-        </p:nvSpPr>
-        <p:spPr>
-          <a:xfrm>
-            <a:off x="9610344" y="457200"/>
-            <a:ext cx="292608" cy="292608"/>
-          </a:xfrm>
-          <a:prstGeom prst="roundRect">
-            <a:avLst>
-              <a:gd name="adj" fmla="val 32000"/>
-            </a:avLst>
-          </a:prstGeom>
-          <a:solidFill>
-            <a:srgbClr val="059669"/>
-          </a:solidFill>
-          <a:ln>
-            <a:noFill/>
-          </a:ln>
-        </p:spPr>
-        <p:style>
-          <a:lnRef idx="1">
-            <a:schemeClr val="accent1"/>
-          </a:lnRef>
-          <a:fillRef idx="3">
-            <a:schemeClr val="accent1"/>
-          </a:fillRef>
-          <a:effectRef idx="2">
-            <a:schemeClr val="accent1"/>
-          </a:effectRef>
-          <a:fontRef idx="minor">
-            <a:schemeClr val="lt1"/>
-          </a:fontRef>
-        </p:style>
-        <p:txBody>
-          <a:bodyPr rtlCol="0" anchor="ctr"/>
-          <a:lstStyle/>
-          <a:p>
-            <a:pPr algn="ctr"/>
-          </a:p>
-        </p:txBody>
-      </p:sp>
-      <p:sp>
-        <p:nvSpPr>
-          <p:cNvPr id="13" name="TextBox 12"/>
-          <p:cNvSpPr txBox="1"/>
-          <p:nvPr/>
-        </p:nvSpPr>
-        <p:spPr>
-          <a:xfrm>
-            <a:off x="9555480" y="489204"/>
-            <a:ext cx="402336" cy="228600"/>
-          </a:xfrm>
-          <a:prstGeom prst="rect">
-            <a:avLst/>
-          </a:prstGeom>
-          <a:noFill/>
-        </p:spPr>
-        <p:txBody>
-          <a:bodyPr wrap="square" lIns="0" rIns="0" tIns="0" bIns="0">
-            <a:spAutoFit/>
-          </a:bodyPr>
-          <a:lstStyle/>
-          <a:p>
-            <a:pPr algn="ctr"/>
-            <a:r>
-              <a:rPr sz="1200" b="1" i="0">
-                <a:solidFill>
-                  <a:srgbClr val="FFFFFF"/>
-                </a:solidFill>
-                <a:latin typeface="Helvetica Neue"/>
-              </a:rPr>
-              <a:t>4</a:t>
-            </a:r>
-          </a:p>
-        </p:txBody>
-      </p:sp>
-      <p:sp>
-        <p:nvSpPr>
-          <p:cNvPr id="14" name="Rounded Rectangle 13"/>
-          <p:cNvSpPr/>
-          <p:nvPr/>
-        </p:nvSpPr>
-        <p:spPr>
-          <a:xfrm>
-            <a:off x="10122407" y="493776"/>
-            <a:ext cx="219456" cy="219456"/>
-          </a:xfrm>
-          <a:prstGeom prst="roundRect">
-            <a:avLst>
-              <a:gd name="adj" fmla="val 32000"/>
-            </a:avLst>
-          </a:prstGeom>
-          <a:solidFill>
-            <a:srgbClr val="E9EBF0"/>
-          </a:solidFill>
-          <a:ln>
-            <a:noFill/>
-          </a:ln>
-        </p:spPr>
-        <p:style>
-          <a:lnRef idx="1">
-            <a:schemeClr val="accent1"/>
-          </a:lnRef>
-          <a:fillRef idx="3">
-            <a:schemeClr val="accent1"/>
-          </a:fillRef>
-          <a:effectRef idx="2">
-            <a:schemeClr val="accent1"/>
-          </a:effectRef>
-          <a:fontRef idx="minor">
-            <a:schemeClr val="lt1"/>
-          </a:fontRef>
-        </p:style>
-        <p:txBody>
-          <a:bodyPr rtlCol="0" anchor="ctr"/>
-          <a:lstStyle/>
-          <a:p>
-            <a:pPr algn="ctr"/>
-          </a:p>
-        </p:txBody>
-      </p:sp>
-      <p:sp>
-        <p:nvSpPr>
-          <p:cNvPr id="15" name="TextBox 14"/>
-          <p:cNvSpPr txBox="1"/>
-          <p:nvPr/>
-        </p:nvSpPr>
-        <p:spPr>
-          <a:xfrm>
-            <a:off x="10067543" y="489204"/>
-            <a:ext cx="329184" cy="228600"/>
-          </a:xfrm>
-          <a:prstGeom prst="rect">
-            <a:avLst/>
-          </a:prstGeom>
-          <a:noFill/>
-        </p:spPr>
-        <p:txBody>
-          <a:bodyPr wrap="square" lIns="0" rIns="0" tIns="0" bIns="0">
-            <a:spAutoFit/>
-          </a:bodyPr>
-          <a:lstStyle/>
-          <a:p>
-            <a:pPr algn="ctr"/>
-            <a:r>
-              <a:rPr sz="950" b="1" i="0">
-                <a:solidFill>
-                  <a:srgbClr val="AEB4BF"/>
-                </a:solidFill>
-                <a:latin typeface="Helvetica Neue"/>
-              </a:rPr>
-              <a:t>5</a:t>
-            </a:r>
-          </a:p>
-        </p:txBody>
-      </p:sp>
-      <p:sp>
-        <p:nvSpPr>
-          <p:cNvPr id="16" name="Rounded Rectangle 15"/>
-          <p:cNvSpPr/>
-          <p:nvPr/>
-        </p:nvSpPr>
-        <p:spPr>
-          <a:xfrm>
-            <a:off x="10597895" y="493776"/>
-            <a:ext cx="219456" cy="219456"/>
-          </a:xfrm>
-          <a:prstGeom prst="roundRect">
-            <a:avLst>
-              <a:gd name="adj" fmla="val 32000"/>
-            </a:avLst>
-          </a:prstGeom>
-          <a:solidFill>
-            <a:srgbClr val="E9EBF0"/>
-          </a:solidFill>
-          <a:ln>
-            <a:noFill/>
-          </a:ln>
-        </p:spPr>
-        <p:style>
-          <a:lnRef idx="1">
-            <a:schemeClr val="accent1"/>
-          </a:lnRef>
-          <a:fillRef idx="3">
-            <a:schemeClr val="accent1"/>
-          </a:fillRef>
-          <a:effectRef idx="2">
-            <a:schemeClr val="accent1"/>
-          </a:effectRef>
-          <a:fontRef idx="minor">
-            <a:schemeClr val="lt1"/>
-          </a:fontRef>
-        </p:style>
-        <p:txBody>
-          <a:bodyPr rtlCol="0" anchor="ctr"/>
-          <a:lstStyle/>
-          <a:p>
-            <a:pPr algn="ctr"/>
-          </a:p>
-        </p:txBody>
-      </p:sp>
-      <p:sp>
-        <p:nvSpPr>
-          <p:cNvPr id="17" name="TextBox 16"/>
-          <p:cNvSpPr txBox="1"/>
-          <p:nvPr/>
-        </p:nvSpPr>
-        <p:spPr>
-          <a:xfrm>
-            <a:off x="10543031" y="489204"/>
-            <a:ext cx="329184" cy="228600"/>
-          </a:xfrm>
-          <a:prstGeom prst="rect">
-            <a:avLst/>
-          </a:prstGeom>
-          <a:noFill/>
-        </p:spPr>
-        <p:txBody>
-          <a:bodyPr wrap="square" lIns="0" rIns="0" tIns="0" bIns="0">
-            <a:spAutoFit/>
-          </a:bodyPr>
-          <a:lstStyle/>
-          <a:p>
-            <a:pPr algn="ctr"/>
-            <a:r>
-              <a:rPr sz="950" b="1" i="0">
-                <a:solidFill>
-                  <a:srgbClr val="AEB4BF"/>
-                </a:solidFill>
-                <a:latin typeface="Helvetica Neue"/>
-              </a:rPr>
-              <a:t>6</a:t>
-            </a:r>
-          </a:p>
-        </p:txBody>
-      </p:sp>
-      <p:sp>
-        <p:nvSpPr>
-          <p:cNvPr id="18" name="Rounded Rectangle 17"/>
-          <p:cNvSpPr/>
-          <p:nvPr/>
-        </p:nvSpPr>
-        <p:spPr>
-          <a:xfrm>
-            <a:off x="11073384" y="493776"/>
-            <a:ext cx="219456" cy="219456"/>
-          </a:xfrm>
-          <a:prstGeom prst="roundRect">
-            <a:avLst>
-              <a:gd name="adj" fmla="val 32000"/>
-            </a:avLst>
-          </a:prstGeom>
-          <a:solidFill>
-            <a:srgbClr val="E9EBF0"/>
-          </a:solidFill>
-          <a:ln>
-            <a:noFill/>
-          </a:ln>
-        </p:spPr>
-        <p:style>
-          <a:lnRef idx="1">
-            <a:schemeClr val="accent1"/>
-          </a:lnRef>
-          <a:fillRef idx="3">
-            <a:schemeClr val="accent1"/>
-          </a:fillRef>
-          <a:effectRef idx="2">
-            <a:schemeClr val="accent1"/>
-          </a:effectRef>
-          <a:fontRef idx="minor">
-            <a:schemeClr val="lt1"/>
-          </a:fontRef>
-        </p:style>
-        <p:txBody>
-          <a:bodyPr rtlCol="0" anchor="ctr"/>
-          <a:lstStyle/>
-          <a:p>
-            <a:pPr algn="ctr"/>
-          </a:p>
-        </p:txBody>
-      </p:sp>
-      <p:sp>
-        <p:nvSpPr>
-          <p:cNvPr id="19" name="TextBox 18"/>
-          <p:cNvSpPr txBox="1"/>
-          <p:nvPr/>
-        </p:nvSpPr>
-        <p:spPr>
-          <a:xfrm>
-            <a:off x="11018519" y="489204"/>
-            <a:ext cx="329184" cy="228600"/>
-          </a:xfrm>
-          <a:prstGeom prst="rect">
-            <a:avLst/>
-          </a:prstGeom>
-          <a:noFill/>
-        </p:spPr>
-        <p:txBody>
-          <a:bodyPr wrap="square" lIns="0" rIns="0" tIns="0" bIns="0">
-            <a:spAutoFit/>
-          </a:bodyPr>
-          <a:lstStyle/>
-          <a:p>
-            <a:pPr algn="ctr"/>
-            <a:r>
-              <a:rPr sz="950" b="1" i="0">
-                <a:solidFill>
-                  <a:srgbClr val="AEB4BF"/>
-                </a:solidFill>
-                <a:latin typeface="Helvetica Neue"/>
-              </a:rPr>
-              <a:t>7</a:t>
-            </a:r>
-          </a:p>
-        </p:txBody>
-      </p:sp>
-      <p:sp>
-        <p:nvSpPr>
-          <p:cNvPr id="20" name="TextBox 19"/>
+              <a:t>Both use the transformer block from Lecture 13. The only difference is whether a word may look at the words to its right.</a:t>
+            </a:r>
+          </a:p>
+        </p:txBody>
+      </p:sp>
+      <p:sp>
+        <p:nvSpPr>
+          <p:cNvPr id="5" name="TextBox 4"/>
           <p:cNvSpPr txBox="1"/>
           <p:nvPr/>
         </p:nvSpPr>
@@ -4467,7 +3864,7 @@
       </p:sp>
       <p:pic>
         <p:nvPicPr>
-          <p:cNvPr id="21" name="Picture 20" descr="d_ftbook.png"/>
+          <p:cNvPr id="6" name="Picture 5" descr="d_encdec.png"/>
           <p:cNvPicPr>
             <a:picLocks noChangeAspect="1"/>
           </p:cNvPicPr>
@@ -4481,14 +3878,209 @@
         </p:blipFill>
         <p:spPr>
           <a:xfrm>
-            <a:off x="472287" y="2035321"/>
-            <a:ext cx="11247120" cy="4204676"/>
+            <a:off x="518007" y="3077305"/>
+            <a:ext cx="11155680" cy="2166429"/>
           </a:xfrm>
           <a:prstGeom prst="rect">
             <a:avLst/>
           </a:prstGeom>
         </p:spPr>
       </p:pic>
+      <p:sp>
+        <p:nvSpPr>
+          <p:cNvPr id="7" name="Rounded Rectangle 6"/>
+          <p:cNvSpPr/>
+          <p:nvPr/>
+        </p:nvSpPr>
+        <p:spPr>
+          <a:xfrm>
+            <a:off x="7105802" y="6345936"/>
+            <a:ext cx="4445812" cy="365760"/>
+          </a:xfrm>
+          <a:prstGeom prst="roundRect">
+            <a:avLst>
+              <a:gd name="adj" fmla="val 44000"/>
+            </a:avLst>
+          </a:prstGeom>
+          <a:solidFill>
+            <a:srgbClr val="059669"/>
+          </a:solidFill>
+          <a:ln>
+            <a:noFill/>
+          </a:ln>
+        </p:spPr>
+        <p:style>
+          <a:lnRef idx="1">
+            <a:schemeClr val="accent1"/>
+          </a:lnRef>
+          <a:fillRef idx="3">
+            <a:schemeClr val="accent1"/>
+          </a:fillRef>
+          <a:effectRef idx="2">
+            <a:schemeClr val="accent1"/>
+          </a:effectRef>
+          <a:fontRef idx="minor">
+            <a:schemeClr val="lt1"/>
+          </a:fontRef>
+        </p:style>
+        <p:txBody>
+          <a:bodyPr rtlCol="0" anchor="ctr"/>
+          <a:lstStyle/>
+          <a:p>
+            <a:pPr algn="ctr"/>
+          </a:p>
+        </p:txBody>
+      </p:sp>
+      <p:sp>
+        <p:nvSpPr>
+          <p:cNvPr id="8" name="Rounded Rectangle 7"/>
+          <p:cNvSpPr/>
+          <p:nvPr/>
+        </p:nvSpPr>
+        <p:spPr>
+          <a:xfrm>
+            <a:off x="8148218" y="6396228"/>
+            <a:ext cx="685800" cy="265176"/>
+          </a:xfrm>
+          <a:prstGeom prst="roundRect">
+            <a:avLst>
+              <a:gd name="adj" fmla="val 44000"/>
+            </a:avLst>
+          </a:prstGeom>
+          <a:solidFill>
+            <a:srgbClr val="064E3B"/>
+          </a:solidFill>
+          <a:ln>
+            <a:noFill/>
+          </a:ln>
+        </p:spPr>
+        <p:style>
+          <a:lnRef idx="1">
+            <a:schemeClr val="accent1"/>
+          </a:lnRef>
+          <a:fillRef idx="3">
+            <a:schemeClr val="accent1"/>
+          </a:fillRef>
+          <a:effectRef idx="2">
+            <a:schemeClr val="accent1"/>
+          </a:effectRef>
+          <a:fontRef idx="minor">
+            <a:schemeClr val="lt1"/>
+          </a:fontRef>
+        </p:style>
+        <p:txBody>
+          <a:bodyPr rtlCol="0" anchor="ctr"/>
+          <a:lstStyle/>
+          <a:p>
+            <a:pPr algn="ctr"/>
+          </a:p>
+        </p:txBody>
+      </p:sp>
+      <p:sp>
+        <p:nvSpPr>
+          <p:cNvPr id="9" name="TextBox 8"/>
+          <p:cNvSpPr txBox="1"/>
+          <p:nvPr/>
+        </p:nvSpPr>
+        <p:spPr>
+          <a:xfrm>
+            <a:off x="7261250" y="6460236"/>
+            <a:ext cx="914400" cy="219456"/>
+          </a:xfrm>
+          <a:prstGeom prst="rect">
+            <a:avLst/>
+          </a:prstGeom>
+          <a:noFill/>
+        </p:spPr>
+        <p:txBody>
+          <a:bodyPr wrap="none" lIns="0" rIns="0" tIns="0" bIns="0">
+            <a:spAutoFit/>
+          </a:bodyPr>
+          <a:lstStyle/>
+          <a:p>
+            <a:pPr algn="l"/>
+            <a:r>
+              <a:rPr sz="950" b="1" i="0">
+                <a:solidFill>
+                  <a:srgbClr val="A7F3D0"/>
+                </a:solidFill>
+                <a:latin typeface="Helvetica Neue"/>
+              </a:rPr>
+              <a:t>▶ NOTEBOOK</a:t>
+            </a:r>
+          </a:p>
+        </p:txBody>
+      </p:sp>
+      <p:sp>
+        <p:nvSpPr>
+          <p:cNvPr id="10" name="TextBox 9"/>
+          <p:cNvSpPr txBox="1"/>
+          <p:nvPr/>
+        </p:nvSpPr>
+        <p:spPr>
+          <a:xfrm>
+            <a:off x="8148218" y="6451092"/>
+            <a:ext cx="685800" cy="219456"/>
+          </a:xfrm>
+          <a:prstGeom prst="rect">
+            <a:avLst/>
+          </a:prstGeom>
+          <a:noFill/>
+        </p:spPr>
+        <p:txBody>
+          <a:bodyPr wrap="none" lIns="0" rIns="0" tIns="0" bIns="0">
+            <a:spAutoFit/>
+          </a:bodyPr>
+          <a:lstStyle/>
+          <a:p>
+            <a:pPr algn="ctr"/>
+            <a:r>
+              <a:rPr sz="1100" b="1" i="0">
+                <a:solidFill>
+                  <a:srgbClr val="FFFFFF"/>
+                </a:solidFill>
+                <a:latin typeface="Helvetica Neue"/>
+              </a:rPr>
+              <a:t>STEP 6</a:t>
+            </a:r>
+          </a:p>
+        </p:txBody>
+      </p:sp>
+      <p:sp>
+        <p:nvSpPr>
+          <p:cNvPr id="11" name="TextBox 10"/>
+          <p:cNvSpPr txBox="1"/>
+          <p:nvPr/>
+        </p:nvSpPr>
+        <p:spPr>
+          <a:xfrm>
+            <a:off x="8952890" y="6460236"/>
+            <a:ext cx="2498140" cy="219456"/>
+          </a:xfrm>
+          <a:prstGeom prst="rect">
+            <a:avLst/>
+          </a:prstGeom>
+          <a:noFill/>
+        </p:spPr>
+        <p:txBody>
+          <a:bodyPr wrap="none" lIns="0" rIns="0" tIns="0" bIns="0">
+            <a:spAutoFit/>
+          </a:bodyPr>
+          <a:lstStyle/>
+          <a:p>
+            <a:pPr algn="l"/>
+            <a:r>
+              <a:rPr sz="1000" b="1" i="0">
+                <a:solidFill>
+                  <a:srgbClr val="FFFFFF"/>
+                </a:solidFill>
+                <a:latin typeface="Helvetica Neue"/>
+              </a:rPr>
+              <a:t>Why BERT reads and GPT writes</a:t>
+            </a:r>
+          </a:p>
+        </p:txBody>
+      </p:sp>
     </p:spTree>
   </p:cSld>
   <p:clrMapOvr>
@@ -4537,7 +4129,7 @@
                 </a:solidFill>
                 <a:latin typeface="Helvetica Neue"/>
               </a:rPr>
-              <a:t>RUNG 4</a:t>
+              <a:t>PRETRAINING AND FINE-TUNING</a:t>
             </a:r>
           </a:p>
         </p:txBody>
@@ -4566,13 +4158,13 @@
           <a:p>
             <a:pPr algn="l"/>
             <a:r>
-              <a:rPr sz="2650" b="1" i="0">
+              <a:rPr sz="2900" b="1" i="0">
                 <a:solidFill>
                   <a:srgbClr val="0F172A"/>
                 </a:solidFill>
                 <a:latin typeface="Helvetica Neue"/>
               </a:rPr>
-              <a:t>Freeze the encoder, train only the head</a:t>
+              <a:t>What fine-tuning actually changes</a:t>
             </a:r>
           </a:p>
         </p:txBody>
@@ -4607,7 +4199,7 @@
                 </a:solidFill>
                 <a:latin typeface="Helvetica Neue"/>
               </a:rPr>
-              <a:t>320 labelled tickets. 3,072 new parameters are trained and 22.7 million are left unchanged. Macro-F1 goes from 0.635 to 0.727.</a:t>
+              <a:t>A small classifier is added on top of the pretrained encoder. The textbook default is to leave the encoder frozen, or to change only its last few layers.</a:t>
             </a:r>
           </a:p>
         </p:txBody>
@@ -5252,7 +4844,7 @@
       </p:sp>
       <p:pic>
         <p:nvPicPr>
-          <p:cNvPr id="21" name="Picture 20" descr="d_rung4.png"/>
+          <p:cNvPr id="21" name="Picture 20" descr="d_ftbook.png"/>
           <p:cNvPicPr>
             <a:picLocks noChangeAspect="1"/>
           </p:cNvPicPr>
@@ -5266,209 +4858,14 @@
         </p:blipFill>
         <p:spPr>
           <a:xfrm>
-            <a:off x="518007" y="2300822"/>
-            <a:ext cx="11155680" cy="3582234"/>
+            <a:off x="472287" y="2035321"/>
+            <a:ext cx="11247120" cy="4204676"/>
           </a:xfrm>
           <a:prstGeom prst="rect">
             <a:avLst/>
           </a:prstGeom>
         </p:spPr>
       </p:pic>
-      <p:sp>
-        <p:nvSpPr>
-          <p:cNvPr id="22" name="Rounded Rectangle 21"/>
-          <p:cNvSpPr/>
-          <p:nvPr/>
-        </p:nvSpPr>
-        <p:spPr>
-          <a:xfrm>
-            <a:off x="6772046" y="6345936"/>
-            <a:ext cx="4779568" cy="365760"/>
-          </a:xfrm>
-          <a:prstGeom prst="roundRect">
-            <a:avLst>
-              <a:gd name="adj" fmla="val 44000"/>
-            </a:avLst>
-          </a:prstGeom>
-          <a:solidFill>
-            <a:srgbClr val="059669"/>
-          </a:solidFill>
-          <a:ln>
-            <a:noFill/>
-          </a:ln>
-        </p:spPr>
-        <p:style>
-          <a:lnRef idx="1">
-            <a:schemeClr val="accent1"/>
-          </a:lnRef>
-          <a:fillRef idx="3">
-            <a:schemeClr val="accent1"/>
-          </a:fillRef>
-          <a:effectRef idx="2">
-            <a:schemeClr val="accent1"/>
-          </a:effectRef>
-          <a:fontRef idx="minor">
-            <a:schemeClr val="lt1"/>
-          </a:fontRef>
-        </p:style>
-        <p:txBody>
-          <a:bodyPr rtlCol="0" anchor="ctr"/>
-          <a:lstStyle/>
-          <a:p>
-            <a:pPr algn="ctr"/>
-          </a:p>
-        </p:txBody>
-      </p:sp>
-      <p:sp>
-        <p:nvSpPr>
-          <p:cNvPr id="23" name="Rounded Rectangle 22"/>
-          <p:cNvSpPr/>
-          <p:nvPr/>
-        </p:nvSpPr>
-        <p:spPr>
-          <a:xfrm>
-            <a:off x="7814462" y="6396228"/>
-            <a:ext cx="685800" cy="265176"/>
-          </a:xfrm>
-          <a:prstGeom prst="roundRect">
-            <a:avLst>
-              <a:gd name="adj" fmla="val 44000"/>
-            </a:avLst>
-          </a:prstGeom>
-          <a:solidFill>
-            <a:srgbClr val="064E3B"/>
-          </a:solidFill>
-          <a:ln>
-            <a:noFill/>
-          </a:ln>
-        </p:spPr>
-        <p:style>
-          <a:lnRef idx="1">
-            <a:schemeClr val="accent1"/>
-          </a:lnRef>
-          <a:fillRef idx="3">
-            <a:schemeClr val="accent1"/>
-          </a:fillRef>
-          <a:effectRef idx="2">
-            <a:schemeClr val="accent1"/>
-          </a:effectRef>
-          <a:fontRef idx="minor">
-            <a:schemeClr val="lt1"/>
-          </a:fontRef>
-        </p:style>
-        <p:txBody>
-          <a:bodyPr rtlCol="0" anchor="ctr"/>
-          <a:lstStyle/>
-          <a:p>
-            <a:pPr algn="ctr"/>
-          </a:p>
-        </p:txBody>
-      </p:sp>
-      <p:sp>
-        <p:nvSpPr>
-          <p:cNvPr id="24" name="TextBox 23"/>
-          <p:cNvSpPr txBox="1"/>
-          <p:nvPr/>
-        </p:nvSpPr>
-        <p:spPr>
-          <a:xfrm>
-            <a:off x="6927494" y="6460236"/>
-            <a:ext cx="914400" cy="219456"/>
-          </a:xfrm>
-          <a:prstGeom prst="rect">
-            <a:avLst/>
-          </a:prstGeom>
-          <a:noFill/>
-        </p:spPr>
-        <p:txBody>
-          <a:bodyPr wrap="none" lIns="0" rIns="0" tIns="0" bIns="0">
-            <a:spAutoFit/>
-          </a:bodyPr>
-          <a:lstStyle/>
-          <a:p>
-            <a:pPr algn="l"/>
-            <a:r>
-              <a:rPr sz="950" b="1" i="0">
-                <a:solidFill>
-                  <a:srgbClr val="A7F3D0"/>
-                </a:solidFill>
-                <a:latin typeface="Helvetica Neue"/>
-              </a:rPr>
-              <a:t>▶ NOTEBOOK</a:t>
-            </a:r>
-          </a:p>
-        </p:txBody>
-      </p:sp>
-      <p:sp>
-        <p:nvSpPr>
-          <p:cNvPr id="25" name="TextBox 24"/>
-          <p:cNvSpPr txBox="1"/>
-          <p:nvPr/>
-        </p:nvSpPr>
-        <p:spPr>
-          <a:xfrm>
-            <a:off x="7814462" y="6451092"/>
-            <a:ext cx="685800" cy="219456"/>
-          </a:xfrm>
-          <a:prstGeom prst="rect">
-            <a:avLst/>
-          </a:prstGeom>
-          <a:noFill/>
-        </p:spPr>
-        <p:txBody>
-          <a:bodyPr wrap="none" lIns="0" rIns="0" tIns="0" bIns="0">
-            <a:spAutoFit/>
-          </a:bodyPr>
-          <a:lstStyle/>
-          <a:p>
-            <a:pPr algn="ctr"/>
-            <a:r>
-              <a:rPr sz="1100" b="1" i="0">
-                <a:solidFill>
-                  <a:srgbClr val="FFFFFF"/>
-                </a:solidFill>
-                <a:latin typeface="Helvetica Neue"/>
-              </a:rPr>
-              <a:t>STEP 9</a:t>
-            </a:r>
-          </a:p>
-        </p:txBody>
-      </p:sp>
-      <p:sp>
-        <p:nvSpPr>
-          <p:cNvPr id="26" name="TextBox 25"/>
-          <p:cNvSpPr txBox="1"/>
-          <p:nvPr/>
-        </p:nvSpPr>
-        <p:spPr>
-          <a:xfrm>
-            <a:off x="8619134" y="6460236"/>
-            <a:ext cx="2831896" cy="219456"/>
-          </a:xfrm>
-          <a:prstGeom prst="rect">
-            <a:avLst/>
-          </a:prstGeom>
-          <a:noFill/>
-        </p:spPr>
-        <p:txBody>
-          <a:bodyPr wrap="none" lIns="0" rIns="0" tIns="0" bIns="0">
-            <a:spAutoFit/>
-          </a:bodyPr>
-          <a:lstStyle/>
-          <a:p>
-            <a:pPr algn="l"/>
-            <a:r>
-              <a:rPr sz="1000" b="1" i="0">
-                <a:solidFill>
-                  <a:srgbClr val="FFFFFF"/>
-                </a:solidFill>
-                <a:latin typeface="Helvetica Neue"/>
-              </a:rPr>
-              <a:t>RUNG 4: train a head on 320 labels</a:t>
-            </a:r>
-          </a:p>
-        </p:txBody>
-      </p:sp>
     </p:spTree>
   </p:cSld>
   <p:clrMapOvr>
@@ -5517,7 +4914,7 @@
                 </a:solidFill>
                 <a:latin typeface="Helvetica Neue"/>
               </a:rPr>
-              <a:t>RUNG 5</a:t>
+              <a:t>RUNG 4</a:t>
             </a:r>
           </a:p>
         </p:txBody>
@@ -5546,13 +4943,13 @@
           <a:p>
             <a:pPr algn="l"/>
             <a:r>
-              <a:rPr sz="2900" b="1" i="0">
+              <a:rPr sz="2650" b="1" i="0">
                 <a:solidFill>
                   <a:srgbClr val="0F172A"/>
                 </a:solidFill>
                 <a:latin typeface="Helvetica Neue"/>
               </a:rPr>
-              <a:t>Fine-tune all 66 million parameters</a:t>
+              <a:t>Freeze the encoder, train only the head</a:t>
             </a:r>
           </a:p>
         </p:txBody>
@@ -5587,7 +4984,7 @@
                 </a:solidFill>
                 <a:latin typeface="Helvetica Neue"/>
               </a:rPr>
-              <a:t>The same 320 tickets, but every weight in the model may change. Write down your prediction before the result is shown.</a:t>
+              <a:t>320 labelled tickets. 3,072 new parameters are trained and 22.7 million are left unchanged. Macro-F1 goes from 0.635 to 0.727.</a:t>
             </a:r>
           </a:p>
         </p:txBody>
@@ -5883,8 +5280,8 @@
         </p:nvSpPr>
         <p:spPr>
           <a:xfrm>
-            <a:off x="9646919" y="493776"/>
-            <a:ext cx="219456" cy="219456"/>
+            <a:off x="9610344" y="457200"/>
+            <a:ext cx="292608" cy="292608"/>
           </a:xfrm>
           <a:prstGeom prst="roundRect">
             <a:avLst>
@@ -5928,23 +5325,23 @@
         </p:nvSpPr>
         <p:spPr>
           <a:xfrm>
-            <a:off x="9592055" y="489204"/>
-            <a:ext cx="329184" cy="228600"/>
-          </a:xfrm>
-          <a:prstGeom prst="rect">
-            <a:avLst/>
-          </a:prstGeom>
-          <a:noFill/>
-        </p:spPr>
-        <p:txBody>
-          <a:bodyPr wrap="square" lIns="0" rIns="0" tIns="0" bIns="0">
-            <a:spAutoFit/>
-          </a:bodyPr>
-          <a:lstStyle/>
-          <a:p>
-            <a:pPr algn="ctr"/>
-            <a:r>
-              <a:rPr sz="950" b="1" i="0">
+            <a:off x="9555480" y="489204"/>
+            <a:ext cx="402336" cy="228600"/>
+          </a:xfrm>
+          <a:prstGeom prst="rect">
+            <a:avLst/>
+          </a:prstGeom>
+          <a:noFill/>
+        </p:spPr>
+        <p:txBody>
+          <a:bodyPr wrap="square" lIns="0" rIns="0" tIns="0" bIns="0">
+            <a:spAutoFit/>
+          </a:bodyPr>
+          <a:lstStyle/>
+          <a:p>
+            <a:pPr algn="ctr"/>
+            <a:r>
+              <a:rPr sz="1200" b="1" i="0">
                 <a:solidFill>
                   <a:srgbClr val="FFFFFF"/>
                 </a:solidFill>
@@ -5963,87 +5360,7 @@
         </p:nvSpPr>
         <p:spPr>
           <a:xfrm>
-            <a:off x="10085832" y="457200"/>
-            <a:ext cx="292608" cy="292608"/>
-          </a:xfrm>
-          <a:prstGeom prst="roundRect">
-            <a:avLst>
-              <a:gd name="adj" fmla="val 32000"/>
-            </a:avLst>
-          </a:prstGeom>
-          <a:solidFill>
-            <a:srgbClr val="059669"/>
-          </a:solidFill>
-          <a:ln>
-            <a:noFill/>
-          </a:ln>
-        </p:spPr>
-        <p:style>
-          <a:lnRef idx="1">
-            <a:schemeClr val="accent1"/>
-          </a:lnRef>
-          <a:fillRef idx="3">
-            <a:schemeClr val="accent1"/>
-          </a:fillRef>
-          <a:effectRef idx="2">
-            <a:schemeClr val="accent1"/>
-          </a:effectRef>
-          <a:fontRef idx="minor">
-            <a:schemeClr val="lt1"/>
-          </a:fontRef>
-        </p:style>
-        <p:txBody>
-          <a:bodyPr rtlCol="0" anchor="ctr"/>
-          <a:lstStyle/>
-          <a:p>
-            <a:pPr algn="ctr"/>
-          </a:p>
-        </p:txBody>
-      </p:sp>
-      <p:sp>
-        <p:nvSpPr>
-          <p:cNvPr id="15" name="TextBox 14"/>
-          <p:cNvSpPr txBox="1"/>
-          <p:nvPr/>
-        </p:nvSpPr>
-        <p:spPr>
-          <a:xfrm>
-            <a:off x="10030967" y="489204"/>
-            <a:ext cx="402336" cy="228600"/>
-          </a:xfrm>
-          <a:prstGeom prst="rect">
-            <a:avLst/>
-          </a:prstGeom>
-          <a:noFill/>
-        </p:spPr>
-        <p:txBody>
-          <a:bodyPr wrap="square" lIns="0" rIns="0" tIns="0" bIns="0">
-            <a:spAutoFit/>
-          </a:bodyPr>
-          <a:lstStyle/>
-          <a:p>
-            <a:pPr algn="ctr"/>
-            <a:r>
-              <a:rPr sz="1200" b="1" i="0">
-                <a:solidFill>
-                  <a:srgbClr val="FFFFFF"/>
-                </a:solidFill>
-                <a:latin typeface="Helvetica Neue"/>
-              </a:rPr>
-              <a:t>5</a:t>
-            </a:r>
-          </a:p>
-        </p:txBody>
-      </p:sp>
-      <p:sp>
-        <p:nvSpPr>
-          <p:cNvPr id="16" name="Rounded Rectangle 15"/>
-          <p:cNvSpPr/>
-          <p:nvPr/>
-        </p:nvSpPr>
-        <p:spPr>
-          <a:xfrm>
-            <a:off x="10597895" y="493776"/>
+            <a:off x="10122407" y="493776"/>
             <a:ext cx="219456" cy="219456"/>
           </a:xfrm>
           <a:prstGeom prst="roundRect">
@@ -6082,13 +5399,13 @@
       </p:sp>
       <p:sp>
         <p:nvSpPr>
-          <p:cNvPr id="17" name="TextBox 16"/>
-          <p:cNvSpPr txBox="1"/>
-          <p:nvPr/>
-        </p:nvSpPr>
-        <p:spPr>
-          <a:xfrm>
-            <a:off x="10543031" y="489204"/>
+          <p:cNvPr id="15" name="TextBox 14"/>
+          <p:cNvSpPr txBox="1"/>
+          <p:nvPr/>
+        </p:nvSpPr>
+        <p:spPr>
+          <a:xfrm>
+            <a:off x="10067543" y="489204"/>
             <a:ext cx="329184" cy="228600"/>
           </a:xfrm>
           <a:prstGeom prst="rect">
@@ -6110,20 +5427,20 @@
                 </a:solidFill>
                 <a:latin typeface="Helvetica Neue"/>
               </a:rPr>
-              <a:t>6</a:t>
-            </a:r>
-          </a:p>
-        </p:txBody>
-      </p:sp>
-      <p:sp>
-        <p:nvSpPr>
-          <p:cNvPr id="18" name="Rounded Rectangle 17"/>
+              <a:t>5</a:t>
+            </a:r>
+          </a:p>
+        </p:txBody>
+      </p:sp>
+      <p:sp>
+        <p:nvSpPr>
+          <p:cNvPr id="16" name="Rounded Rectangle 15"/>
           <p:cNvSpPr/>
           <p:nvPr/>
         </p:nvSpPr>
         <p:spPr>
           <a:xfrm>
-            <a:off x="11073384" y="493776"/>
+            <a:off x="10597895" y="493776"/>
             <a:ext cx="219456" cy="219456"/>
           </a:xfrm>
           <a:prstGeom prst="roundRect">
@@ -6162,6 +5479,86 @@
       </p:sp>
       <p:sp>
         <p:nvSpPr>
+          <p:cNvPr id="17" name="TextBox 16"/>
+          <p:cNvSpPr txBox="1"/>
+          <p:nvPr/>
+        </p:nvSpPr>
+        <p:spPr>
+          <a:xfrm>
+            <a:off x="10543031" y="489204"/>
+            <a:ext cx="329184" cy="228600"/>
+          </a:xfrm>
+          <a:prstGeom prst="rect">
+            <a:avLst/>
+          </a:prstGeom>
+          <a:noFill/>
+        </p:spPr>
+        <p:txBody>
+          <a:bodyPr wrap="square" lIns="0" rIns="0" tIns="0" bIns="0">
+            <a:spAutoFit/>
+          </a:bodyPr>
+          <a:lstStyle/>
+          <a:p>
+            <a:pPr algn="ctr"/>
+            <a:r>
+              <a:rPr sz="950" b="1" i="0">
+                <a:solidFill>
+                  <a:srgbClr val="AEB4BF"/>
+                </a:solidFill>
+                <a:latin typeface="Helvetica Neue"/>
+              </a:rPr>
+              <a:t>6</a:t>
+            </a:r>
+          </a:p>
+        </p:txBody>
+      </p:sp>
+      <p:sp>
+        <p:nvSpPr>
+          <p:cNvPr id="18" name="Rounded Rectangle 17"/>
+          <p:cNvSpPr/>
+          <p:nvPr/>
+        </p:nvSpPr>
+        <p:spPr>
+          <a:xfrm>
+            <a:off x="11073384" y="493776"/>
+            <a:ext cx="219456" cy="219456"/>
+          </a:xfrm>
+          <a:prstGeom prst="roundRect">
+            <a:avLst>
+              <a:gd name="adj" fmla="val 32000"/>
+            </a:avLst>
+          </a:prstGeom>
+          <a:solidFill>
+            <a:srgbClr val="E9EBF0"/>
+          </a:solidFill>
+          <a:ln>
+            <a:noFill/>
+          </a:ln>
+        </p:spPr>
+        <p:style>
+          <a:lnRef idx="1">
+            <a:schemeClr val="accent1"/>
+          </a:lnRef>
+          <a:fillRef idx="3">
+            <a:schemeClr val="accent1"/>
+          </a:fillRef>
+          <a:effectRef idx="2">
+            <a:schemeClr val="accent1"/>
+          </a:effectRef>
+          <a:fontRef idx="minor">
+            <a:schemeClr val="lt1"/>
+          </a:fontRef>
+        </p:style>
+        <p:txBody>
+          <a:bodyPr rtlCol="0" anchor="ctr"/>
+          <a:lstStyle/>
+          <a:p>
+            <a:pPr algn="ctr"/>
+          </a:p>
+        </p:txBody>
+      </p:sp>
+      <p:sp>
+        <p:nvSpPr>
           <p:cNvPr id="19" name="TextBox 18"/>
           <p:cNvSpPr txBox="1"/>
           <p:nvPr/>
@@ -6232,7 +5629,7 @@
       </p:sp>
       <p:pic>
         <p:nvPicPr>
-          <p:cNvPr id="21" name="Picture 20" descr="d_rung5.png"/>
+          <p:cNvPr id="21" name="Picture 20" descr="d_rung4.png"/>
           <p:cNvPicPr>
             <a:picLocks noChangeAspect="1"/>
           </p:cNvPicPr>
@@ -6246,8 +5643,8 @@
         </p:blipFill>
         <p:spPr>
           <a:xfrm>
-            <a:off x="518007" y="2416617"/>
-            <a:ext cx="11155680" cy="3350645"/>
+            <a:off x="518007" y="2300822"/>
+            <a:ext cx="11155680" cy="3582234"/>
           </a:xfrm>
           <a:prstGeom prst="rect">
             <a:avLst/>
@@ -6308,7 +5705,7 @@
         <p:spPr>
           <a:xfrm>
             <a:off x="7814462" y="6396228"/>
-            <a:ext cx="754380" cy="265176"/>
+            <a:ext cx="685800" cy="265176"/>
           </a:xfrm>
           <a:prstGeom prst="roundRect">
             <a:avLst>
@@ -6388,7 +5785,7 @@
         <p:spPr>
           <a:xfrm>
             <a:off x="7814462" y="6451092"/>
-            <a:ext cx="754380" cy="219456"/>
+            <a:ext cx="685800" cy="219456"/>
           </a:xfrm>
           <a:prstGeom prst="rect">
             <a:avLst/>
@@ -6409,7 +5806,7 @@
                 </a:solidFill>
                 <a:latin typeface="Helvetica Neue"/>
               </a:rPr>
-              <a:t>STEP 10</a:t>
+              <a:t>STEP 9</a:t>
             </a:r>
           </a:p>
         </p:txBody>
@@ -6422,8 +5819,8 @@
         </p:nvSpPr>
         <p:spPr>
           <a:xfrm>
-            <a:off x="8687714" y="6460236"/>
-            <a:ext cx="2763316" cy="219456"/>
+            <a:off x="8619134" y="6460236"/>
+            <a:ext cx="2831896" cy="219456"/>
           </a:xfrm>
           <a:prstGeom prst="rect">
             <a:avLst/>
@@ -6444,7 +5841,7 @@
                 </a:solidFill>
                 <a:latin typeface="Helvetica Neue"/>
               </a:rPr>
-              <a:t>RUNG 5: fine-tune the whole model</a:t>
+              <a:t>RUNG 4: train a head on 320 labels</a:t>
             </a:r>
           </a:p>
         </p:txBody>
@@ -6497,7 +5894,7 @@
                 </a:solidFill>
                 <a:latin typeface="Helvetica Neue"/>
               </a:rPr>
-              <a:t>LABELLING BUDGET</a:t>
+              <a:t>RUNG 5</a:t>
             </a:r>
           </a:p>
         </p:txBody>
@@ -6526,13 +5923,13 @@
           <a:p>
             <a:pPr algn="l"/>
             <a:r>
-              <a:rPr sz="2400" b="1" i="0">
+              <a:rPr sz="2900" b="1" i="0">
                 <a:solidFill>
                   <a:srgbClr val="0F172A"/>
                 </a:solidFill>
                 <a:latin typeface="Helvetica Neue"/>
               </a:rPr>
-              <a:t>Accuracy against number of labelled tickets</a:t>
+              <a:t>Fine-tune all 66 million parameters</a:t>
             </a:r>
           </a:p>
         </p:txBody>
@@ -6567,7 +5964,7 @@
                 </a:solidFill>
                 <a:latin typeface="Helvetica Neue"/>
               </a:rPr>
-              <a:t>Both rungs at six budgets, measured on the 160 held-out hand-written tickets. Averaged over several runs per point.</a:t>
+              <a:t>The same 320 tickets, but every weight in the model may change. Write down your prediction before the result is shown.</a:t>
             </a:r>
           </a:p>
         </p:txBody>
@@ -6863,8 +6260,8 @@
         </p:nvSpPr>
         <p:spPr>
           <a:xfrm>
-            <a:off x="9610344" y="457200"/>
-            <a:ext cx="292608" cy="292608"/>
+            <a:off x="9646919" y="493776"/>
+            <a:ext cx="219456" cy="219456"/>
           </a:xfrm>
           <a:prstGeom prst="roundRect">
             <a:avLst>
@@ -6908,23 +6305,23 @@
         </p:nvSpPr>
         <p:spPr>
           <a:xfrm>
-            <a:off x="9555480" y="489204"/>
-            <a:ext cx="402336" cy="228600"/>
-          </a:xfrm>
-          <a:prstGeom prst="rect">
-            <a:avLst/>
-          </a:prstGeom>
-          <a:noFill/>
-        </p:spPr>
-        <p:txBody>
-          <a:bodyPr wrap="square" lIns="0" rIns="0" tIns="0" bIns="0">
-            <a:spAutoFit/>
-          </a:bodyPr>
-          <a:lstStyle/>
-          <a:p>
-            <a:pPr algn="ctr"/>
-            <a:r>
-              <a:rPr sz="1200" b="1" i="0">
+            <a:off x="9592055" y="489204"/>
+            <a:ext cx="329184" cy="228600"/>
+          </a:xfrm>
+          <a:prstGeom prst="rect">
+            <a:avLst/>
+          </a:prstGeom>
+          <a:noFill/>
+        </p:spPr>
+        <p:txBody>
+          <a:bodyPr wrap="square" lIns="0" rIns="0" tIns="0" bIns="0">
+            <a:spAutoFit/>
+          </a:bodyPr>
+          <a:lstStyle/>
+          <a:p>
+            <a:pPr algn="ctr"/>
+            <a:r>
+              <a:rPr sz="950" b="1" i="0">
                 <a:solidFill>
                   <a:srgbClr val="FFFFFF"/>
                 </a:solidFill>
@@ -6943,7 +6340,87 @@
         </p:nvSpPr>
         <p:spPr>
           <a:xfrm>
-            <a:off x="10122407" y="493776"/>
+            <a:off x="10085832" y="457200"/>
+            <a:ext cx="292608" cy="292608"/>
+          </a:xfrm>
+          <a:prstGeom prst="roundRect">
+            <a:avLst>
+              <a:gd name="adj" fmla="val 32000"/>
+            </a:avLst>
+          </a:prstGeom>
+          <a:solidFill>
+            <a:srgbClr val="059669"/>
+          </a:solidFill>
+          <a:ln>
+            <a:noFill/>
+          </a:ln>
+        </p:spPr>
+        <p:style>
+          <a:lnRef idx="1">
+            <a:schemeClr val="accent1"/>
+          </a:lnRef>
+          <a:fillRef idx="3">
+            <a:schemeClr val="accent1"/>
+          </a:fillRef>
+          <a:effectRef idx="2">
+            <a:schemeClr val="accent1"/>
+          </a:effectRef>
+          <a:fontRef idx="minor">
+            <a:schemeClr val="lt1"/>
+          </a:fontRef>
+        </p:style>
+        <p:txBody>
+          <a:bodyPr rtlCol="0" anchor="ctr"/>
+          <a:lstStyle/>
+          <a:p>
+            <a:pPr algn="ctr"/>
+          </a:p>
+        </p:txBody>
+      </p:sp>
+      <p:sp>
+        <p:nvSpPr>
+          <p:cNvPr id="15" name="TextBox 14"/>
+          <p:cNvSpPr txBox="1"/>
+          <p:nvPr/>
+        </p:nvSpPr>
+        <p:spPr>
+          <a:xfrm>
+            <a:off x="10030967" y="489204"/>
+            <a:ext cx="402336" cy="228600"/>
+          </a:xfrm>
+          <a:prstGeom prst="rect">
+            <a:avLst/>
+          </a:prstGeom>
+          <a:noFill/>
+        </p:spPr>
+        <p:txBody>
+          <a:bodyPr wrap="square" lIns="0" rIns="0" tIns="0" bIns="0">
+            <a:spAutoFit/>
+          </a:bodyPr>
+          <a:lstStyle/>
+          <a:p>
+            <a:pPr algn="ctr"/>
+            <a:r>
+              <a:rPr sz="1200" b="1" i="0">
+                <a:solidFill>
+                  <a:srgbClr val="FFFFFF"/>
+                </a:solidFill>
+                <a:latin typeface="Helvetica Neue"/>
+              </a:rPr>
+              <a:t>5</a:t>
+            </a:r>
+          </a:p>
+        </p:txBody>
+      </p:sp>
+      <p:sp>
+        <p:nvSpPr>
+          <p:cNvPr id="16" name="Rounded Rectangle 15"/>
+          <p:cNvSpPr/>
+          <p:nvPr/>
+        </p:nvSpPr>
+        <p:spPr>
+          <a:xfrm>
+            <a:off x="10597895" y="493776"/>
             <a:ext cx="219456" cy="219456"/>
           </a:xfrm>
           <a:prstGeom prst="roundRect">
@@ -6982,13 +6459,13 @@
       </p:sp>
       <p:sp>
         <p:nvSpPr>
-          <p:cNvPr id="15" name="TextBox 14"/>
-          <p:cNvSpPr txBox="1"/>
-          <p:nvPr/>
-        </p:nvSpPr>
-        <p:spPr>
-          <a:xfrm>
-            <a:off x="10067543" y="489204"/>
+          <p:cNvPr id="17" name="TextBox 16"/>
+          <p:cNvSpPr txBox="1"/>
+          <p:nvPr/>
+        </p:nvSpPr>
+        <p:spPr>
+          <a:xfrm>
+            <a:off x="10543031" y="489204"/>
             <a:ext cx="329184" cy="228600"/>
           </a:xfrm>
           <a:prstGeom prst="rect">
@@ -7010,20 +6487,20 @@
                 </a:solidFill>
                 <a:latin typeface="Helvetica Neue"/>
               </a:rPr>
-              <a:t>5</a:t>
-            </a:r>
-          </a:p>
-        </p:txBody>
-      </p:sp>
-      <p:sp>
-        <p:nvSpPr>
-          <p:cNvPr id="16" name="Rounded Rectangle 15"/>
+              <a:t>6</a:t>
+            </a:r>
+          </a:p>
+        </p:txBody>
+      </p:sp>
+      <p:sp>
+        <p:nvSpPr>
+          <p:cNvPr id="18" name="Rounded Rectangle 17"/>
           <p:cNvSpPr/>
           <p:nvPr/>
         </p:nvSpPr>
         <p:spPr>
           <a:xfrm>
-            <a:off x="10597895" y="493776"/>
+            <a:off x="11073384" y="493776"/>
             <a:ext cx="219456" cy="219456"/>
           </a:xfrm>
           <a:prstGeom prst="roundRect">
@@ -7062,86 +6539,6 @@
       </p:sp>
       <p:sp>
         <p:nvSpPr>
-          <p:cNvPr id="17" name="TextBox 16"/>
-          <p:cNvSpPr txBox="1"/>
-          <p:nvPr/>
-        </p:nvSpPr>
-        <p:spPr>
-          <a:xfrm>
-            <a:off x="10543031" y="489204"/>
-            <a:ext cx="329184" cy="228600"/>
-          </a:xfrm>
-          <a:prstGeom prst="rect">
-            <a:avLst/>
-          </a:prstGeom>
-          <a:noFill/>
-        </p:spPr>
-        <p:txBody>
-          <a:bodyPr wrap="square" lIns="0" rIns="0" tIns="0" bIns="0">
-            <a:spAutoFit/>
-          </a:bodyPr>
-          <a:lstStyle/>
-          <a:p>
-            <a:pPr algn="ctr"/>
-            <a:r>
-              <a:rPr sz="950" b="1" i="0">
-                <a:solidFill>
-                  <a:srgbClr val="AEB4BF"/>
-                </a:solidFill>
-                <a:latin typeface="Helvetica Neue"/>
-              </a:rPr>
-              <a:t>6</a:t>
-            </a:r>
-          </a:p>
-        </p:txBody>
-      </p:sp>
-      <p:sp>
-        <p:nvSpPr>
-          <p:cNvPr id="18" name="Rounded Rectangle 17"/>
-          <p:cNvSpPr/>
-          <p:nvPr/>
-        </p:nvSpPr>
-        <p:spPr>
-          <a:xfrm>
-            <a:off x="11073384" y="493776"/>
-            <a:ext cx="219456" cy="219456"/>
-          </a:xfrm>
-          <a:prstGeom prst="roundRect">
-            <a:avLst>
-              <a:gd name="adj" fmla="val 32000"/>
-            </a:avLst>
-          </a:prstGeom>
-          <a:solidFill>
-            <a:srgbClr val="E9EBF0"/>
-          </a:solidFill>
-          <a:ln>
-            <a:noFill/>
-          </a:ln>
-        </p:spPr>
-        <p:style>
-          <a:lnRef idx="1">
-            <a:schemeClr val="accent1"/>
-          </a:lnRef>
-          <a:fillRef idx="3">
-            <a:schemeClr val="accent1"/>
-          </a:fillRef>
-          <a:effectRef idx="2">
-            <a:schemeClr val="accent1"/>
-          </a:effectRef>
-          <a:fontRef idx="minor">
-            <a:schemeClr val="lt1"/>
-          </a:fontRef>
-        </p:style>
-        <p:txBody>
-          <a:bodyPr rtlCol="0" anchor="ctr"/>
-          <a:lstStyle/>
-          <a:p>
-            <a:pPr algn="ctr"/>
-          </a:p>
-        </p:txBody>
-      </p:sp>
-      <p:sp>
-        <p:nvSpPr>
           <p:cNvPr id="19" name="TextBox 18"/>
           <p:cNvSpPr txBox="1"/>
           <p:nvPr/>
@@ -7212,7 +6609,7 @@
       </p:sp>
       <p:pic>
         <p:nvPicPr>
-          <p:cNvPr id="21" name="Picture 20" descr="fig_curve.png"/>
+          <p:cNvPr id="21" name="Picture 20" descr="d_rung5.png"/>
           <p:cNvPicPr>
             <a:picLocks noChangeAspect="1"/>
           </p:cNvPicPr>
@@ -7226,8 +6623,8 @@
         </p:blipFill>
         <p:spPr>
           <a:xfrm>
-            <a:off x="2025496" y="1965960"/>
-            <a:ext cx="8140702" cy="4023360"/>
+            <a:off x="518007" y="2416617"/>
+            <a:ext cx="11155680" cy="3350645"/>
           </a:xfrm>
           <a:prstGeom prst="rect">
             <a:avLst/>
@@ -7242,8 +6639,8 @@
         </p:nvSpPr>
         <p:spPr>
           <a:xfrm>
-            <a:off x="7773314" y="6345936"/>
-            <a:ext cx="3778300" cy="365760"/>
+            <a:off x="6772046" y="6345936"/>
+            <a:ext cx="4779568" cy="365760"/>
           </a:xfrm>
           <a:prstGeom prst="roundRect">
             <a:avLst>
@@ -7287,7 +6684,7 @@
         </p:nvSpPr>
         <p:spPr>
           <a:xfrm>
-            <a:off x="8815730" y="6396228"/>
+            <a:off x="7814462" y="6396228"/>
             <a:ext cx="754380" cy="265176"/>
           </a:xfrm>
           <a:prstGeom prst="roundRect">
@@ -7332,7 +6729,7 @@
         </p:nvSpPr>
         <p:spPr>
           <a:xfrm>
-            <a:off x="7928762" y="6460236"/>
+            <a:off x="6927494" y="6460236"/>
             <a:ext cx="914400" cy="219456"/>
           </a:xfrm>
           <a:prstGeom prst="rect">
@@ -7367,7 +6764,7 @@
         </p:nvSpPr>
         <p:spPr>
           <a:xfrm>
-            <a:off x="8815730" y="6451092"/>
+            <a:off x="7814462" y="6451092"/>
             <a:ext cx="754380" cy="219456"/>
           </a:xfrm>
           <a:prstGeom prst="rect">
@@ -7389,7 +6786,7 @@
                 </a:solidFill>
                 <a:latin typeface="Helvetica Neue"/>
               </a:rPr>
-              <a:t>STEP 11</a:t>
+              <a:t>STEP 10</a:t>
             </a:r>
           </a:p>
         </p:txBody>
@@ -7402,8 +6799,8 @@
         </p:nvSpPr>
         <p:spPr>
           <a:xfrm>
-            <a:off x="9688982" y="6460236"/>
-            <a:ext cx="1762048" cy="219456"/>
+            <a:off x="8687714" y="6460236"/>
+            <a:ext cx="2763316" cy="219456"/>
           </a:xfrm>
           <a:prstGeom prst="rect">
             <a:avLst/>
@@ -7424,42 +6821,7 @@
                 </a:solidFill>
                 <a:latin typeface="Helvetica Neue"/>
               </a:rPr>
-              <a:t>The learning curve</a:t>
-            </a:r>
-          </a:p>
-        </p:txBody>
-      </p:sp>
-      <p:sp>
-        <p:nvSpPr>
-          <p:cNvPr id="27" name="TextBox 26"/>
-          <p:cNvSpPr txBox="1"/>
-          <p:nvPr/>
-        </p:nvSpPr>
-        <p:spPr>
-          <a:xfrm>
-            <a:off x="640080" y="6053328"/>
-            <a:ext cx="10881360" cy="365760"/>
-          </a:xfrm>
-          <a:prstGeom prst="rect">
-            <a:avLst/>
-          </a:prstGeom>
-          <a:noFill/>
-        </p:spPr>
-        <p:txBody>
-          <a:bodyPr wrap="square" lIns="0" rIns="0" tIns="0" bIns="0">
-            <a:spAutoFit/>
-          </a:bodyPr>
-          <a:lstStyle/>
-          <a:p>
-            <a:pPr algn="ctr"/>
-            <a:r>
-              <a:rPr sz="1500" b="0" i="0">
-                <a:solidFill>
-                  <a:srgbClr val="475569"/>
-                </a:solidFill>
-                <a:latin typeface="Helvetica Neue"/>
-              </a:rPr>
-              <a:t>Rung 4 scores higher than rung 5 at every budget shown. Both curves flatten: going from 640 to 1,400 labels adds only 0.035 macro-F1.</a:t>
+              <a:t>RUNG 5: fine-tune the whole model</a:t>
             </a:r>
           </a:p>
         </p:txBody>
@@ -7508,11 +6870,11 @@
             <a:r>
               <a:rPr sz="1250" b="1" i="0" spc="220">
                 <a:solidFill>
-                  <a:srgbClr val="7C3AED"/>
-                </a:solidFill>
-                <a:latin typeface="Helvetica Neue"/>
-              </a:rPr>
-              <a:t>IN-CLASS EXERCISE</a:t>
+                  <a:srgbClr val="059669"/>
+                </a:solidFill>
+                <a:latin typeface="Helvetica Neue"/>
+              </a:rPr>
+              <a:t>LABELLING BUDGET</a:t>
             </a:r>
           </a:p>
         </p:txBody>
@@ -7526,7 +6888,7 @@
         <p:spPr>
           <a:xfrm>
             <a:off x="640080" y="758952"/>
-            <a:ext cx="10972800" cy="704088"/>
+            <a:ext cx="7315200" cy="704088"/>
           </a:xfrm>
           <a:prstGeom prst="rect">
             <a:avLst/>
@@ -7541,13 +6903,13 @@
           <a:p>
             <a:pPr algn="l"/>
             <a:r>
-              <a:rPr sz="2900" b="1" i="0">
+              <a:rPr sz="2400" b="1" i="0">
                 <a:solidFill>
                   <a:srgbClr val="0F172A"/>
                 </a:solidFill>
                 <a:latin typeface="Helvetica Neue"/>
               </a:rPr>
-              <a:t>Choose which 240 of 1,400 tickets to label</a:t>
+              <a:t>Accuracy against number of labelled tickets</a:t>
             </a:r>
           </a:p>
         </p:txBody>
@@ -7582,14 +6944,617 @@
                 </a:solidFill>
                 <a:latin typeface="Helvetica Neue"/>
               </a:rPr>
-              <a:t>Final project teams. Same budget for every team. Scored on held-out tickets, averaged over 5 seeds.</a:t>
-            </a:r>
-          </a:p>
-        </p:txBody>
-      </p:sp>
-      <p:sp>
-        <p:nvSpPr>
-          <p:cNvPr id="5" name="TextBox 4"/>
+              <a:t>Both rungs at six budgets, measured on the 160 held-out hand-written tickets. Averaged over several runs per point.</a:t>
+            </a:r>
+          </a:p>
+        </p:txBody>
+      </p:sp>
+      <p:sp>
+        <p:nvSpPr>
+          <p:cNvPr id="5" name="Rounded Rectangle 4"/>
+          <p:cNvSpPr/>
+          <p:nvPr/>
+        </p:nvSpPr>
+        <p:spPr>
+          <a:xfrm>
+            <a:off x="8302752" y="593445"/>
+            <a:ext cx="2852928" cy="20116"/>
+          </a:xfrm>
+          <a:prstGeom prst="roundRect">
+            <a:avLst/>
+          </a:prstGeom>
+          <a:solidFill>
+            <a:srgbClr val="E9EBF0"/>
+          </a:solidFill>
+          <a:ln>
+            <a:noFill/>
+          </a:ln>
+        </p:spPr>
+        <p:style>
+          <a:lnRef idx="1">
+            <a:schemeClr val="accent1"/>
+          </a:lnRef>
+          <a:fillRef idx="3">
+            <a:schemeClr val="accent1"/>
+          </a:fillRef>
+          <a:effectRef idx="2">
+            <a:schemeClr val="accent1"/>
+          </a:effectRef>
+          <a:fontRef idx="minor">
+            <a:schemeClr val="lt1"/>
+          </a:fontRef>
+        </p:style>
+        <p:txBody>
+          <a:bodyPr rtlCol="0" anchor="ctr"/>
+          <a:lstStyle/>
+          <a:p>
+            <a:pPr algn="ctr"/>
+          </a:p>
+        </p:txBody>
+      </p:sp>
+      <p:sp>
+        <p:nvSpPr>
+          <p:cNvPr id="6" name="Rounded Rectangle 5"/>
+          <p:cNvSpPr/>
+          <p:nvPr/>
+        </p:nvSpPr>
+        <p:spPr>
+          <a:xfrm>
+            <a:off x="8220455" y="493776"/>
+            <a:ext cx="219456" cy="219456"/>
+          </a:xfrm>
+          <a:prstGeom prst="roundRect">
+            <a:avLst>
+              <a:gd name="adj" fmla="val 32000"/>
+            </a:avLst>
+          </a:prstGeom>
+          <a:solidFill>
+            <a:srgbClr val="0EA5E9"/>
+          </a:solidFill>
+          <a:ln>
+            <a:noFill/>
+          </a:ln>
+        </p:spPr>
+        <p:style>
+          <a:lnRef idx="1">
+            <a:schemeClr val="accent1"/>
+          </a:lnRef>
+          <a:fillRef idx="3">
+            <a:schemeClr val="accent1"/>
+          </a:fillRef>
+          <a:effectRef idx="2">
+            <a:schemeClr val="accent1"/>
+          </a:effectRef>
+          <a:fontRef idx="minor">
+            <a:schemeClr val="lt1"/>
+          </a:fontRef>
+        </p:style>
+        <p:txBody>
+          <a:bodyPr rtlCol="0" anchor="ctr"/>
+          <a:lstStyle/>
+          <a:p>
+            <a:pPr algn="ctr"/>
+          </a:p>
+        </p:txBody>
+      </p:sp>
+      <p:sp>
+        <p:nvSpPr>
+          <p:cNvPr id="7" name="TextBox 6"/>
+          <p:cNvSpPr txBox="1"/>
+          <p:nvPr/>
+        </p:nvSpPr>
+        <p:spPr>
+          <a:xfrm>
+            <a:off x="8165591" y="489204"/>
+            <a:ext cx="329184" cy="228600"/>
+          </a:xfrm>
+          <a:prstGeom prst="rect">
+            <a:avLst/>
+          </a:prstGeom>
+          <a:noFill/>
+        </p:spPr>
+        <p:txBody>
+          <a:bodyPr wrap="square" lIns="0" rIns="0" tIns="0" bIns="0">
+            <a:spAutoFit/>
+          </a:bodyPr>
+          <a:lstStyle/>
+          <a:p>
+            <a:pPr algn="ctr"/>
+            <a:r>
+              <a:rPr sz="950" b="1" i="0">
+                <a:solidFill>
+                  <a:srgbClr val="FFFFFF"/>
+                </a:solidFill>
+                <a:latin typeface="Helvetica Neue"/>
+              </a:rPr>
+              <a:t>1</a:t>
+            </a:r>
+          </a:p>
+        </p:txBody>
+      </p:sp>
+      <p:sp>
+        <p:nvSpPr>
+          <p:cNvPr id="8" name="Rounded Rectangle 7"/>
+          <p:cNvSpPr/>
+          <p:nvPr/>
+        </p:nvSpPr>
+        <p:spPr>
+          <a:xfrm>
+            <a:off x="8695943" y="493776"/>
+            <a:ext cx="219456" cy="219456"/>
+          </a:xfrm>
+          <a:prstGeom prst="roundRect">
+            <a:avLst>
+              <a:gd name="adj" fmla="val 32000"/>
+            </a:avLst>
+          </a:prstGeom>
+          <a:solidFill>
+            <a:srgbClr val="0EA5E9"/>
+          </a:solidFill>
+          <a:ln>
+            <a:noFill/>
+          </a:ln>
+        </p:spPr>
+        <p:style>
+          <a:lnRef idx="1">
+            <a:schemeClr val="accent1"/>
+          </a:lnRef>
+          <a:fillRef idx="3">
+            <a:schemeClr val="accent1"/>
+          </a:fillRef>
+          <a:effectRef idx="2">
+            <a:schemeClr val="accent1"/>
+          </a:effectRef>
+          <a:fontRef idx="minor">
+            <a:schemeClr val="lt1"/>
+          </a:fontRef>
+        </p:style>
+        <p:txBody>
+          <a:bodyPr rtlCol="0" anchor="ctr"/>
+          <a:lstStyle/>
+          <a:p>
+            <a:pPr algn="ctr"/>
+          </a:p>
+        </p:txBody>
+      </p:sp>
+      <p:sp>
+        <p:nvSpPr>
+          <p:cNvPr id="9" name="TextBox 8"/>
+          <p:cNvSpPr txBox="1"/>
+          <p:nvPr/>
+        </p:nvSpPr>
+        <p:spPr>
+          <a:xfrm>
+            <a:off x="8641079" y="489204"/>
+            <a:ext cx="329184" cy="228600"/>
+          </a:xfrm>
+          <a:prstGeom prst="rect">
+            <a:avLst/>
+          </a:prstGeom>
+          <a:noFill/>
+        </p:spPr>
+        <p:txBody>
+          <a:bodyPr wrap="square" lIns="0" rIns="0" tIns="0" bIns="0">
+            <a:spAutoFit/>
+          </a:bodyPr>
+          <a:lstStyle/>
+          <a:p>
+            <a:pPr algn="ctr"/>
+            <a:r>
+              <a:rPr sz="950" b="1" i="0">
+                <a:solidFill>
+                  <a:srgbClr val="FFFFFF"/>
+                </a:solidFill>
+                <a:latin typeface="Helvetica Neue"/>
+              </a:rPr>
+              <a:t>2</a:t>
+            </a:r>
+          </a:p>
+        </p:txBody>
+      </p:sp>
+      <p:sp>
+        <p:nvSpPr>
+          <p:cNvPr id="10" name="Rounded Rectangle 9"/>
+          <p:cNvSpPr/>
+          <p:nvPr/>
+        </p:nvSpPr>
+        <p:spPr>
+          <a:xfrm>
+            <a:off x="9171431" y="493776"/>
+            <a:ext cx="219456" cy="219456"/>
+          </a:xfrm>
+          <a:prstGeom prst="roundRect">
+            <a:avLst>
+              <a:gd name="adj" fmla="val 32000"/>
+            </a:avLst>
+          </a:prstGeom>
+          <a:solidFill>
+            <a:srgbClr val="D97706"/>
+          </a:solidFill>
+          <a:ln>
+            <a:noFill/>
+          </a:ln>
+        </p:spPr>
+        <p:style>
+          <a:lnRef idx="1">
+            <a:schemeClr val="accent1"/>
+          </a:lnRef>
+          <a:fillRef idx="3">
+            <a:schemeClr val="accent1"/>
+          </a:fillRef>
+          <a:effectRef idx="2">
+            <a:schemeClr val="accent1"/>
+          </a:effectRef>
+          <a:fontRef idx="minor">
+            <a:schemeClr val="lt1"/>
+          </a:fontRef>
+        </p:style>
+        <p:txBody>
+          <a:bodyPr rtlCol="0" anchor="ctr"/>
+          <a:lstStyle/>
+          <a:p>
+            <a:pPr algn="ctr"/>
+          </a:p>
+        </p:txBody>
+      </p:sp>
+      <p:sp>
+        <p:nvSpPr>
+          <p:cNvPr id="11" name="TextBox 10"/>
+          <p:cNvSpPr txBox="1"/>
+          <p:nvPr/>
+        </p:nvSpPr>
+        <p:spPr>
+          <a:xfrm>
+            <a:off x="9116567" y="489204"/>
+            <a:ext cx="329184" cy="228600"/>
+          </a:xfrm>
+          <a:prstGeom prst="rect">
+            <a:avLst/>
+          </a:prstGeom>
+          <a:noFill/>
+        </p:spPr>
+        <p:txBody>
+          <a:bodyPr wrap="square" lIns="0" rIns="0" tIns="0" bIns="0">
+            <a:spAutoFit/>
+          </a:bodyPr>
+          <a:lstStyle/>
+          <a:p>
+            <a:pPr algn="ctr"/>
+            <a:r>
+              <a:rPr sz="950" b="1" i="0">
+                <a:solidFill>
+                  <a:srgbClr val="FFFFFF"/>
+                </a:solidFill>
+                <a:latin typeface="Helvetica Neue"/>
+              </a:rPr>
+              <a:t>3</a:t>
+            </a:r>
+          </a:p>
+        </p:txBody>
+      </p:sp>
+      <p:sp>
+        <p:nvSpPr>
+          <p:cNvPr id="12" name="Rounded Rectangle 11"/>
+          <p:cNvSpPr/>
+          <p:nvPr/>
+        </p:nvSpPr>
+        <p:spPr>
+          <a:xfrm>
+            <a:off x="9610344" y="457200"/>
+            <a:ext cx="292608" cy="292608"/>
+          </a:xfrm>
+          <a:prstGeom prst="roundRect">
+            <a:avLst>
+              <a:gd name="adj" fmla="val 32000"/>
+            </a:avLst>
+          </a:prstGeom>
+          <a:solidFill>
+            <a:srgbClr val="059669"/>
+          </a:solidFill>
+          <a:ln>
+            <a:noFill/>
+          </a:ln>
+        </p:spPr>
+        <p:style>
+          <a:lnRef idx="1">
+            <a:schemeClr val="accent1"/>
+          </a:lnRef>
+          <a:fillRef idx="3">
+            <a:schemeClr val="accent1"/>
+          </a:fillRef>
+          <a:effectRef idx="2">
+            <a:schemeClr val="accent1"/>
+          </a:effectRef>
+          <a:fontRef idx="minor">
+            <a:schemeClr val="lt1"/>
+          </a:fontRef>
+        </p:style>
+        <p:txBody>
+          <a:bodyPr rtlCol="0" anchor="ctr"/>
+          <a:lstStyle/>
+          <a:p>
+            <a:pPr algn="ctr"/>
+          </a:p>
+        </p:txBody>
+      </p:sp>
+      <p:sp>
+        <p:nvSpPr>
+          <p:cNvPr id="13" name="TextBox 12"/>
+          <p:cNvSpPr txBox="1"/>
+          <p:nvPr/>
+        </p:nvSpPr>
+        <p:spPr>
+          <a:xfrm>
+            <a:off x="9555480" y="489204"/>
+            <a:ext cx="402336" cy="228600"/>
+          </a:xfrm>
+          <a:prstGeom prst="rect">
+            <a:avLst/>
+          </a:prstGeom>
+          <a:noFill/>
+        </p:spPr>
+        <p:txBody>
+          <a:bodyPr wrap="square" lIns="0" rIns="0" tIns="0" bIns="0">
+            <a:spAutoFit/>
+          </a:bodyPr>
+          <a:lstStyle/>
+          <a:p>
+            <a:pPr algn="ctr"/>
+            <a:r>
+              <a:rPr sz="1200" b="1" i="0">
+                <a:solidFill>
+                  <a:srgbClr val="FFFFFF"/>
+                </a:solidFill>
+                <a:latin typeface="Helvetica Neue"/>
+              </a:rPr>
+              <a:t>4</a:t>
+            </a:r>
+          </a:p>
+        </p:txBody>
+      </p:sp>
+      <p:sp>
+        <p:nvSpPr>
+          <p:cNvPr id="14" name="Rounded Rectangle 13"/>
+          <p:cNvSpPr/>
+          <p:nvPr/>
+        </p:nvSpPr>
+        <p:spPr>
+          <a:xfrm>
+            <a:off x="10122407" y="493776"/>
+            <a:ext cx="219456" cy="219456"/>
+          </a:xfrm>
+          <a:prstGeom prst="roundRect">
+            <a:avLst>
+              <a:gd name="adj" fmla="val 32000"/>
+            </a:avLst>
+          </a:prstGeom>
+          <a:solidFill>
+            <a:srgbClr val="E9EBF0"/>
+          </a:solidFill>
+          <a:ln>
+            <a:noFill/>
+          </a:ln>
+        </p:spPr>
+        <p:style>
+          <a:lnRef idx="1">
+            <a:schemeClr val="accent1"/>
+          </a:lnRef>
+          <a:fillRef idx="3">
+            <a:schemeClr val="accent1"/>
+          </a:fillRef>
+          <a:effectRef idx="2">
+            <a:schemeClr val="accent1"/>
+          </a:effectRef>
+          <a:fontRef idx="minor">
+            <a:schemeClr val="lt1"/>
+          </a:fontRef>
+        </p:style>
+        <p:txBody>
+          <a:bodyPr rtlCol="0" anchor="ctr"/>
+          <a:lstStyle/>
+          <a:p>
+            <a:pPr algn="ctr"/>
+          </a:p>
+        </p:txBody>
+      </p:sp>
+      <p:sp>
+        <p:nvSpPr>
+          <p:cNvPr id="15" name="TextBox 14"/>
+          <p:cNvSpPr txBox="1"/>
+          <p:nvPr/>
+        </p:nvSpPr>
+        <p:spPr>
+          <a:xfrm>
+            <a:off x="10067543" y="489204"/>
+            <a:ext cx="329184" cy="228600"/>
+          </a:xfrm>
+          <a:prstGeom prst="rect">
+            <a:avLst/>
+          </a:prstGeom>
+          <a:noFill/>
+        </p:spPr>
+        <p:txBody>
+          <a:bodyPr wrap="square" lIns="0" rIns="0" tIns="0" bIns="0">
+            <a:spAutoFit/>
+          </a:bodyPr>
+          <a:lstStyle/>
+          <a:p>
+            <a:pPr algn="ctr"/>
+            <a:r>
+              <a:rPr sz="950" b="1" i="0">
+                <a:solidFill>
+                  <a:srgbClr val="AEB4BF"/>
+                </a:solidFill>
+                <a:latin typeface="Helvetica Neue"/>
+              </a:rPr>
+              <a:t>5</a:t>
+            </a:r>
+          </a:p>
+        </p:txBody>
+      </p:sp>
+      <p:sp>
+        <p:nvSpPr>
+          <p:cNvPr id="16" name="Rounded Rectangle 15"/>
+          <p:cNvSpPr/>
+          <p:nvPr/>
+        </p:nvSpPr>
+        <p:spPr>
+          <a:xfrm>
+            <a:off x="10597895" y="493776"/>
+            <a:ext cx="219456" cy="219456"/>
+          </a:xfrm>
+          <a:prstGeom prst="roundRect">
+            <a:avLst>
+              <a:gd name="adj" fmla="val 32000"/>
+            </a:avLst>
+          </a:prstGeom>
+          <a:solidFill>
+            <a:srgbClr val="E9EBF0"/>
+          </a:solidFill>
+          <a:ln>
+            <a:noFill/>
+          </a:ln>
+        </p:spPr>
+        <p:style>
+          <a:lnRef idx="1">
+            <a:schemeClr val="accent1"/>
+          </a:lnRef>
+          <a:fillRef idx="3">
+            <a:schemeClr val="accent1"/>
+          </a:fillRef>
+          <a:effectRef idx="2">
+            <a:schemeClr val="accent1"/>
+          </a:effectRef>
+          <a:fontRef idx="minor">
+            <a:schemeClr val="lt1"/>
+          </a:fontRef>
+        </p:style>
+        <p:txBody>
+          <a:bodyPr rtlCol="0" anchor="ctr"/>
+          <a:lstStyle/>
+          <a:p>
+            <a:pPr algn="ctr"/>
+          </a:p>
+        </p:txBody>
+      </p:sp>
+      <p:sp>
+        <p:nvSpPr>
+          <p:cNvPr id="17" name="TextBox 16"/>
+          <p:cNvSpPr txBox="1"/>
+          <p:nvPr/>
+        </p:nvSpPr>
+        <p:spPr>
+          <a:xfrm>
+            <a:off x="10543031" y="489204"/>
+            <a:ext cx="329184" cy="228600"/>
+          </a:xfrm>
+          <a:prstGeom prst="rect">
+            <a:avLst/>
+          </a:prstGeom>
+          <a:noFill/>
+        </p:spPr>
+        <p:txBody>
+          <a:bodyPr wrap="square" lIns="0" rIns="0" tIns="0" bIns="0">
+            <a:spAutoFit/>
+          </a:bodyPr>
+          <a:lstStyle/>
+          <a:p>
+            <a:pPr algn="ctr"/>
+            <a:r>
+              <a:rPr sz="950" b="1" i="0">
+                <a:solidFill>
+                  <a:srgbClr val="AEB4BF"/>
+                </a:solidFill>
+                <a:latin typeface="Helvetica Neue"/>
+              </a:rPr>
+              <a:t>6</a:t>
+            </a:r>
+          </a:p>
+        </p:txBody>
+      </p:sp>
+      <p:sp>
+        <p:nvSpPr>
+          <p:cNvPr id="18" name="Rounded Rectangle 17"/>
+          <p:cNvSpPr/>
+          <p:nvPr/>
+        </p:nvSpPr>
+        <p:spPr>
+          <a:xfrm>
+            <a:off x="11073384" y="493776"/>
+            <a:ext cx="219456" cy="219456"/>
+          </a:xfrm>
+          <a:prstGeom prst="roundRect">
+            <a:avLst>
+              <a:gd name="adj" fmla="val 32000"/>
+            </a:avLst>
+          </a:prstGeom>
+          <a:solidFill>
+            <a:srgbClr val="E9EBF0"/>
+          </a:solidFill>
+          <a:ln>
+            <a:noFill/>
+          </a:ln>
+        </p:spPr>
+        <p:style>
+          <a:lnRef idx="1">
+            <a:schemeClr val="accent1"/>
+          </a:lnRef>
+          <a:fillRef idx="3">
+            <a:schemeClr val="accent1"/>
+          </a:fillRef>
+          <a:effectRef idx="2">
+            <a:schemeClr val="accent1"/>
+          </a:effectRef>
+          <a:fontRef idx="minor">
+            <a:schemeClr val="lt1"/>
+          </a:fontRef>
+        </p:style>
+        <p:txBody>
+          <a:bodyPr rtlCol="0" anchor="ctr"/>
+          <a:lstStyle/>
+          <a:p>
+            <a:pPr algn="ctr"/>
+          </a:p>
+        </p:txBody>
+      </p:sp>
+      <p:sp>
+        <p:nvSpPr>
+          <p:cNvPr id="19" name="TextBox 18"/>
+          <p:cNvSpPr txBox="1"/>
+          <p:nvPr/>
+        </p:nvSpPr>
+        <p:spPr>
+          <a:xfrm>
+            <a:off x="11018519" y="489204"/>
+            <a:ext cx="329184" cy="228600"/>
+          </a:xfrm>
+          <a:prstGeom prst="rect">
+            <a:avLst/>
+          </a:prstGeom>
+          <a:noFill/>
+        </p:spPr>
+        <p:txBody>
+          <a:bodyPr wrap="square" lIns="0" rIns="0" tIns="0" bIns="0">
+            <a:spAutoFit/>
+          </a:bodyPr>
+          <a:lstStyle/>
+          <a:p>
+            <a:pPr algn="ctr"/>
+            <a:r>
+              <a:rPr sz="950" b="1" i="0">
+                <a:solidFill>
+                  <a:srgbClr val="AEB4BF"/>
+                </a:solidFill>
+                <a:latin typeface="Helvetica Neue"/>
+              </a:rPr>
+              <a:t>7</a:t>
+            </a:r>
+          </a:p>
+        </p:txBody>
+      </p:sp>
+      <p:sp>
+        <p:nvSpPr>
+          <p:cNvPr id="20" name="TextBox 19"/>
           <p:cNvSpPr txBox="1"/>
           <p:nvPr/>
         </p:nvSpPr>
@@ -7624,7 +7589,7 @@
       </p:sp>
       <p:pic>
         <p:nvPicPr>
-          <p:cNvPr id="6" name="Picture 5" descr="d_gamebrief.png"/>
+          <p:cNvPr id="21" name="Picture 20" descr="fig_curve.png"/>
           <p:cNvPicPr>
             <a:picLocks noChangeAspect="1"/>
           </p:cNvPicPr>
@@ -7638,8 +7603,8 @@
         </p:blipFill>
         <p:spPr>
           <a:xfrm>
-            <a:off x="518007" y="2760703"/>
-            <a:ext cx="11155680" cy="2799632"/>
+            <a:off x="2025496" y="1965960"/>
+            <a:ext cx="8140702" cy="4023360"/>
           </a:xfrm>
           <a:prstGeom prst="rect">
             <a:avLst/>
@@ -7648,14 +7613,14 @@
       </p:pic>
       <p:sp>
         <p:nvSpPr>
-          <p:cNvPr id="7" name="Rounded Rectangle 6"/>
+          <p:cNvPr id="22" name="Rounded Rectangle 21"/>
           <p:cNvSpPr/>
           <p:nvPr/>
         </p:nvSpPr>
         <p:spPr>
           <a:xfrm>
-            <a:off x="6905548" y="6345936"/>
-            <a:ext cx="4646066" cy="365760"/>
+            <a:off x="7773314" y="6345936"/>
+            <a:ext cx="3778300" cy="365760"/>
           </a:xfrm>
           <a:prstGeom prst="roundRect">
             <a:avLst>
@@ -7693,13 +7658,13 @@
       </p:sp>
       <p:sp>
         <p:nvSpPr>
-          <p:cNvPr id="8" name="Rounded Rectangle 7"/>
+          <p:cNvPr id="23" name="Rounded Rectangle 22"/>
           <p:cNvSpPr/>
           <p:nvPr/>
         </p:nvSpPr>
         <p:spPr>
           <a:xfrm>
-            <a:off x="7947964" y="6396228"/>
+            <a:off x="8815730" y="6396228"/>
             <a:ext cx="754380" cy="265176"/>
           </a:xfrm>
           <a:prstGeom prst="roundRect">
@@ -7738,13 +7703,13 @@
       </p:sp>
       <p:sp>
         <p:nvSpPr>
-          <p:cNvPr id="9" name="TextBox 8"/>
-          <p:cNvSpPr txBox="1"/>
-          <p:nvPr/>
-        </p:nvSpPr>
-        <p:spPr>
-          <a:xfrm>
-            <a:off x="7060996" y="6460236"/>
+          <p:cNvPr id="24" name="TextBox 23"/>
+          <p:cNvSpPr txBox="1"/>
+          <p:nvPr/>
+        </p:nvSpPr>
+        <p:spPr>
+          <a:xfrm>
+            <a:off x="7928762" y="6460236"/>
             <a:ext cx="914400" cy="219456"/>
           </a:xfrm>
           <a:prstGeom prst="rect">
@@ -7773,13 +7738,13 @@
       </p:sp>
       <p:sp>
         <p:nvSpPr>
-          <p:cNvPr id="10" name="TextBox 9"/>
-          <p:cNvSpPr txBox="1"/>
-          <p:nvPr/>
-        </p:nvSpPr>
-        <p:spPr>
-          <a:xfrm>
-            <a:off x="7947964" y="6451092"/>
+          <p:cNvPr id="25" name="TextBox 24"/>
+          <p:cNvSpPr txBox="1"/>
+          <p:nvPr/>
+        </p:nvSpPr>
+        <p:spPr>
+          <a:xfrm>
+            <a:off x="8815730" y="6451092"/>
             <a:ext cx="754380" cy="219456"/>
           </a:xfrm>
           <a:prstGeom prst="rect">
@@ -7801,21 +7766,21 @@
                 </a:solidFill>
                 <a:latin typeface="Helvetica Neue"/>
               </a:rPr>
-              <a:t>STEP 13</a:t>
-            </a:r>
-          </a:p>
-        </p:txBody>
-      </p:sp>
-      <p:sp>
-        <p:nvSpPr>
-          <p:cNvPr id="11" name="TextBox 10"/>
-          <p:cNvSpPr txBox="1"/>
-          <p:nvPr/>
-        </p:nvSpPr>
-        <p:spPr>
-          <a:xfrm>
-            <a:off x="8821216" y="6460236"/>
-            <a:ext cx="2629814" cy="219456"/>
+              <a:t>STEP 11</a:t>
+            </a:r>
+          </a:p>
+        </p:txBody>
+      </p:sp>
+      <p:sp>
+        <p:nvSpPr>
+          <p:cNvPr id="26" name="TextBox 25"/>
+          <p:cNvSpPr txBox="1"/>
+          <p:nvPr/>
+        </p:nvSpPr>
+        <p:spPr>
+          <a:xfrm>
+            <a:off x="9688982" y="6460236"/>
+            <a:ext cx="1762048" cy="219456"/>
           </a:xfrm>
           <a:prstGeom prst="rect">
             <a:avLst/>
@@ -7836,7 +7801,42 @@
                 </a:solidFill>
                 <a:latin typeface="Helvetica Neue"/>
               </a:rPr>
-              <a:t>THE GAME: your labelling budget</a:t>
+              <a:t>The learning curve</a:t>
+            </a:r>
+          </a:p>
+        </p:txBody>
+      </p:sp>
+      <p:sp>
+        <p:nvSpPr>
+          <p:cNvPr id="27" name="TextBox 26"/>
+          <p:cNvSpPr txBox="1"/>
+          <p:nvPr/>
+        </p:nvSpPr>
+        <p:spPr>
+          <a:xfrm>
+            <a:off x="640080" y="6053328"/>
+            <a:ext cx="10881360" cy="365760"/>
+          </a:xfrm>
+          <a:prstGeom prst="rect">
+            <a:avLst/>
+          </a:prstGeom>
+          <a:noFill/>
+        </p:spPr>
+        <p:txBody>
+          <a:bodyPr wrap="square" lIns="0" rIns="0" tIns="0" bIns="0">
+            <a:spAutoFit/>
+          </a:bodyPr>
+          <a:lstStyle/>
+          <a:p>
+            <a:pPr algn="ctr"/>
+            <a:r>
+              <a:rPr sz="1500" b="0" i="0">
+                <a:solidFill>
+                  <a:srgbClr val="475569"/>
+                </a:solidFill>
+                <a:latin typeface="Helvetica Neue"/>
+              </a:rPr>
+              <a:t>Rung 4 scores higher than rung 5 at every budget shown. Both curves flatten: going from 640 to 1,400 labels adds only 0.035 macro-F1.</a:t>
             </a:r>
           </a:p>
         </p:txBody>
@@ -7889,7 +7889,7 @@
                 </a:solidFill>
                 <a:latin typeface="Helvetica Neue"/>
               </a:rPr>
-              <a:t>RESULTS</a:t>
+              <a:t>IN-CLASS EXERCISE</a:t>
             </a:r>
           </a:p>
         </p:txBody>
@@ -7924,7 +7924,7 @@
                 </a:solidFill>
                 <a:latin typeface="Helvetica Neue"/>
               </a:rPr>
-              <a:t>Six selection strategies at the same 240-label budget</a:t>
+              <a:t>Choose which 240 of 1,400 tickets to label</a:t>
             </a:r>
           </a:p>
         </p:txBody>
@@ -7959,7 +7959,7 @@
                 </a:solidFill>
                 <a:latin typeface="Helvetica Neue"/>
               </a:rPr>
-              <a:t>Same model and same training code throughout. Only the choice of which tickets to label changed.</a:t>
+              <a:t>Final project teams. Same budget for every team. Scored on held-out tickets, averaged over 5 seeds.</a:t>
             </a:r>
           </a:p>
         </p:txBody>
@@ -8001,7 +8001,7 @@
       </p:sp>
       <p:pic>
         <p:nvPicPr>
-          <p:cNvPr id="6" name="Picture 5" descr="d_reveal.png"/>
+          <p:cNvPr id="6" name="Picture 5" descr="d_gamebrief.png"/>
           <p:cNvPicPr>
             <a:picLocks noChangeAspect="1"/>
           </p:cNvPicPr>
@@ -8015,8 +8015,8 @@
         </p:blipFill>
         <p:spPr>
           <a:xfrm>
-            <a:off x="883767" y="2620080"/>
-            <a:ext cx="10424160" cy="2623678"/>
+            <a:off x="518007" y="2760703"/>
+            <a:ext cx="11155680" cy="2799632"/>
           </a:xfrm>
           <a:prstGeom prst="rect">
             <a:avLst/>
@@ -8025,35 +8025,195 @@
       </p:pic>
       <p:sp>
         <p:nvSpPr>
-          <p:cNvPr id="7" name="TextBox 6"/>
-          <p:cNvSpPr txBox="1"/>
-          <p:nvPr/>
-        </p:nvSpPr>
-        <p:spPr>
-          <a:xfrm>
-            <a:off x="640080" y="5897880"/>
-            <a:ext cx="10881360" cy="457200"/>
-          </a:xfrm>
-          <a:prstGeom prst="rect">
-            <a:avLst/>
-          </a:prstGeom>
-          <a:noFill/>
-        </p:spPr>
-        <p:txBody>
-          <a:bodyPr wrap="square" lIns="0" rIns="0" tIns="0" bIns="0">
-            <a:spAutoFit/>
-          </a:bodyPr>
-          <a:lstStyle/>
-          <a:p>
-            <a:pPr algn="ctr"/>
-            <a:r>
-              <a:rPr sz="1600" b="1" i="0">
-                <a:solidFill>
-                  <a:srgbClr val="0F172A"/>
-                </a:solidFill>
-                <a:latin typeface="Helvetica Neue"/>
-              </a:rPr>
-              <a:t>A range of 0.247 macro-F1 at identical cost. Only 'cover the space' scored above random plus one standard deviation. Every strategy that ranked tickets by a score scored below random.</a:t>
+          <p:cNvPr id="7" name="Rounded Rectangle 6"/>
+          <p:cNvSpPr/>
+          <p:nvPr/>
+        </p:nvSpPr>
+        <p:spPr>
+          <a:xfrm>
+            <a:off x="6905548" y="6345936"/>
+            <a:ext cx="4646066" cy="365760"/>
+          </a:xfrm>
+          <a:prstGeom prst="roundRect">
+            <a:avLst>
+              <a:gd name="adj" fmla="val 44000"/>
+            </a:avLst>
+          </a:prstGeom>
+          <a:solidFill>
+            <a:srgbClr val="059669"/>
+          </a:solidFill>
+          <a:ln>
+            <a:noFill/>
+          </a:ln>
+        </p:spPr>
+        <p:style>
+          <a:lnRef idx="1">
+            <a:schemeClr val="accent1"/>
+          </a:lnRef>
+          <a:fillRef idx="3">
+            <a:schemeClr val="accent1"/>
+          </a:fillRef>
+          <a:effectRef idx="2">
+            <a:schemeClr val="accent1"/>
+          </a:effectRef>
+          <a:fontRef idx="minor">
+            <a:schemeClr val="lt1"/>
+          </a:fontRef>
+        </p:style>
+        <p:txBody>
+          <a:bodyPr rtlCol="0" anchor="ctr"/>
+          <a:lstStyle/>
+          <a:p>
+            <a:pPr algn="ctr"/>
+          </a:p>
+        </p:txBody>
+      </p:sp>
+      <p:sp>
+        <p:nvSpPr>
+          <p:cNvPr id="8" name="Rounded Rectangle 7"/>
+          <p:cNvSpPr/>
+          <p:nvPr/>
+        </p:nvSpPr>
+        <p:spPr>
+          <a:xfrm>
+            <a:off x="7947964" y="6396228"/>
+            <a:ext cx="754380" cy="265176"/>
+          </a:xfrm>
+          <a:prstGeom prst="roundRect">
+            <a:avLst>
+              <a:gd name="adj" fmla="val 44000"/>
+            </a:avLst>
+          </a:prstGeom>
+          <a:solidFill>
+            <a:srgbClr val="064E3B"/>
+          </a:solidFill>
+          <a:ln>
+            <a:noFill/>
+          </a:ln>
+        </p:spPr>
+        <p:style>
+          <a:lnRef idx="1">
+            <a:schemeClr val="accent1"/>
+          </a:lnRef>
+          <a:fillRef idx="3">
+            <a:schemeClr val="accent1"/>
+          </a:fillRef>
+          <a:effectRef idx="2">
+            <a:schemeClr val="accent1"/>
+          </a:effectRef>
+          <a:fontRef idx="minor">
+            <a:schemeClr val="lt1"/>
+          </a:fontRef>
+        </p:style>
+        <p:txBody>
+          <a:bodyPr rtlCol="0" anchor="ctr"/>
+          <a:lstStyle/>
+          <a:p>
+            <a:pPr algn="ctr"/>
+          </a:p>
+        </p:txBody>
+      </p:sp>
+      <p:sp>
+        <p:nvSpPr>
+          <p:cNvPr id="9" name="TextBox 8"/>
+          <p:cNvSpPr txBox="1"/>
+          <p:nvPr/>
+        </p:nvSpPr>
+        <p:spPr>
+          <a:xfrm>
+            <a:off x="7060996" y="6460236"/>
+            <a:ext cx="914400" cy="219456"/>
+          </a:xfrm>
+          <a:prstGeom prst="rect">
+            <a:avLst/>
+          </a:prstGeom>
+          <a:noFill/>
+        </p:spPr>
+        <p:txBody>
+          <a:bodyPr wrap="none" lIns="0" rIns="0" tIns="0" bIns="0">
+            <a:spAutoFit/>
+          </a:bodyPr>
+          <a:lstStyle/>
+          <a:p>
+            <a:pPr algn="l"/>
+            <a:r>
+              <a:rPr sz="950" b="1" i="0">
+                <a:solidFill>
+                  <a:srgbClr val="A7F3D0"/>
+                </a:solidFill>
+                <a:latin typeface="Helvetica Neue"/>
+              </a:rPr>
+              <a:t>▶ NOTEBOOK</a:t>
+            </a:r>
+          </a:p>
+        </p:txBody>
+      </p:sp>
+      <p:sp>
+        <p:nvSpPr>
+          <p:cNvPr id="10" name="TextBox 9"/>
+          <p:cNvSpPr txBox="1"/>
+          <p:nvPr/>
+        </p:nvSpPr>
+        <p:spPr>
+          <a:xfrm>
+            <a:off x="7947964" y="6451092"/>
+            <a:ext cx="754380" cy="219456"/>
+          </a:xfrm>
+          <a:prstGeom prst="rect">
+            <a:avLst/>
+          </a:prstGeom>
+          <a:noFill/>
+        </p:spPr>
+        <p:txBody>
+          <a:bodyPr wrap="none" lIns="0" rIns="0" tIns="0" bIns="0">
+            <a:spAutoFit/>
+          </a:bodyPr>
+          <a:lstStyle/>
+          <a:p>
+            <a:pPr algn="ctr"/>
+            <a:r>
+              <a:rPr sz="1100" b="1" i="0">
+                <a:solidFill>
+                  <a:srgbClr val="FFFFFF"/>
+                </a:solidFill>
+                <a:latin typeface="Helvetica Neue"/>
+              </a:rPr>
+              <a:t>STEP 13</a:t>
+            </a:r>
+          </a:p>
+        </p:txBody>
+      </p:sp>
+      <p:sp>
+        <p:nvSpPr>
+          <p:cNvPr id="11" name="TextBox 10"/>
+          <p:cNvSpPr txBox="1"/>
+          <p:nvPr/>
+        </p:nvSpPr>
+        <p:spPr>
+          <a:xfrm>
+            <a:off x="8821216" y="6460236"/>
+            <a:ext cx="2629814" cy="219456"/>
+          </a:xfrm>
+          <a:prstGeom prst="rect">
+            <a:avLst/>
+          </a:prstGeom>
+          <a:noFill/>
+        </p:spPr>
+        <p:txBody>
+          <a:bodyPr wrap="none" lIns="0" rIns="0" tIns="0" bIns="0">
+            <a:spAutoFit/>
+          </a:bodyPr>
+          <a:lstStyle/>
+          <a:p>
+            <a:pPr algn="l"/>
+            <a:r>
+              <a:rPr sz="1000" b="1" i="0">
+                <a:solidFill>
+                  <a:srgbClr val="FFFFFF"/>
+                </a:solidFill>
+                <a:latin typeface="Helvetica Neue"/>
+              </a:rPr>
+              <a:t>THE GAME: your labelling budget</a:t>
             </a:r>
           </a:p>
         </p:txBody>
@@ -8141,7 +8301,7 @@
                 </a:solidFill>
                 <a:latin typeface="Helvetica Neue"/>
               </a:rPr>
-              <a:t>How each strategy spent its 240 labels</a:t>
+              <a:t>Six selection strategies at the same 240-label budget</a:t>
             </a:r>
           </a:p>
         </p:txBody>
@@ -8176,7 +8336,7 @@
                 </a:solidFill>
                 <a:latin typeface="Helvetica Neue"/>
               </a:rPr>
-              <a:t>One bar per strategy, split by category, sorted by score. An even bar means the strategy bought some of every category.</a:t>
+              <a:t>Same model and same training code throughout. Only the choice of which tickets to label changed.</a:t>
             </a:r>
           </a:p>
         </p:txBody>
@@ -8218,7 +8378,7 @@
       </p:sp>
       <p:pic>
         <p:nvPicPr>
-          <p:cNvPr id="6" name="Picture 5" descr="fig_mix.png"/>
+          <p:cNvPr id="6" name="Picture 5" descr="d_reveal.png"/>
           <p:cNvPicPr>
             <a:picLocks noChangeAspect="1"/>
           </p:cNvPicPr>
@@ -8232,8 +8392,8 @@
         </p:blipFill>
         <p:spPr>
           <a:xfrm>
-            <a:off x="1261658" y="1965960"/>
-            <a:ext cx="9668377" cy="3977639"/>
+            <a:off x="883767" y="2620080"/>
+            <a:ext cx="10424160" cy="2623678"/>
           </a:xfrm>
           <a:prstGeom prst="rect">
             <a:avLst/>
@@ -8242,230 +8402,35 @@
       </p:pic>
       <p:sp>
         <p:nvSpPr>
-          <p:cNvPr id="7" name="Rounded Rectangle 6"/>
-          <p:cNvSpPr/>
-          <p:nvPr/>
-        </p:nvSpPr>
-        <p:spPr>
-          <a:xfrm>
-            <a:off x="7773314" y="6345936"/>
-            <a:ext cx="3778300" cy="365760"/>
-          </a:xfrm>
-          <a:prstGeom prst="roundRect">
-            <a:avLst>
-              <a:gd name="adj" fmla="val 44000"/>
-            </a:avLst>
-          </a:prstGeom>
-          <a:solidFill>
-            <a:srgbClr val="059669"/>
-          </a:solidFill>
-          <a:ln>
-            <a:noFill/>
-          </a:ln>
-        </p:spPr>
-        <p:style>
-          <a:lnRef idx="1">
-            <a:schemeClr val="accent1"/>
-          </a:lnRef>
-          <a:fillRef idx="3">
-            <a:schemeClr val="accent1"/>
-          </a:fillRef>
-          <a:effectRef idx="2">
-            <a:schemeClr val="accent1"/>
-          </a:effectRef>
-          <a:fontRef idx="minor">
-            <a:schemeClr val="lt1"/>
-          </a:fontRef>
-        </p:style>
-        <p:txBody>
-          <a:bodyPr rtlCol="0" anchor="ctr"/>
-          <a:lstStyle/>
-          <a:p>
-            <a:pPr algn="ctr"/>
-          </a:p>
-        </p:txBody>
-      </p:sp>
-      <p:sp>
-        <p:nvSpPr>
-          <p:cNvPr id="8" name="Rounded Rectangle 7"/>
-          <p:cNvSpPr/>
-          <p:nvPr/>
-        </p:nvSpPr>
-        <p:spPr>
-          <a:xfrm>
-            <a:off x="8815730" y="6396228"/>
-            <a:ext cx="754380" cy="265176"/>
-          </a:xfrm>
-          <a:prstGeom prst="roundRect">
-            <a:avLst>
-              <a:gd name="adj" fmla="val 44000"/>
-            </a:avLst>
-          </a:prstGeom>
-          <a:solidFill>
-            <a:srgbClr val="064E3B"/>
-          </a:solidFill>
-          <a:ln>
-            <a:noFill/>
-          </a:ln>
-        </p:spPr>
-        <p:style>
-          <a:lnRef idx="1">
-            <a:schemeClr val="accent1"/>
-          </a:lnRef>
-          <a:fillRef idx="3">
-            <a:schemeClr val="accent1"/>
-          </a:fillRef>
-          <a:effectRef idx="2">
-            <a:schemeClr val="accent1"/>
-          </a:effectRef>
-          <a:fontRef idx="minor">
-            <a:schemeClr val="lt1"/>
-          </a:fontRef>
-        </p:style>
-        <p:txBody>
-          <a:bodyPr rtlCol="0" anchor="ctr"/>
-          <a:lstStyle/>
-          <a:p>
-            <a:pPr algn="ctr"/>
-          </a:p>
-        </p:txBody>
-      </p:sp>
-      <p:sp>
-        <p:nvSpPr>
-          <p:cNvPr id="9" name="TextBox 8"/>
-          <p:cNvSpPr txBox="1"/>
-          <p:nvPr/>
-        </p:nvSpPr>
-        <p:spPr>
-          <a:xfrm>
-            <a:off x="7928762" y="6460236"/>
-            <a:ext cx="914400" cy="219456"/>
-          </a:xfrm>
-          <a:prstGeom prst="rect">
-            <a:avLst/>
-          </a:prstGeom>
-          <a:noFill/>
-        </p:spPr>
-        <p:txBody>
-          <a:bodyPr wrap="none" lIns="0" rIns="0" tIns="0" bIns="0">
-            <a:spAutoFit/>
-          </a:bodyPr>
-          <a:lstStyle/>
-          <a:p>
-            <a:pPr algn="l"/>
-            <a:r>
-              <a:rPr sz="950" b="1" i="0">
-                <a:solidFill>
-                  <a:srgbClr val="A7F3D0"/>
-                </a:solidFill>
-                <a:latin typeface="Helvetica Neue"/>
-              </a:rPr>
-              <a:t>▶ NOTEBOOK</a:t>
-            </a:r>
-          </a:p>
-        </p:txBody>
-      </p:sp>
-      <p:sp>
-        <p:nvSpPr>
-          <p:cNvPr id="10" name="TextBox 9"/>
-          <p:cNvSpPr txBox="1"/>
-          <p:nvPr/>
-        </p:nvSpPr>
-        <p:spPr>
-          <a:xfrm>
-            <a:off x="8815730" y="6451092"/>
-            <a:ext cx="754380" cy="219456"/>
-          </a:xfrm>
-          <a:prstGeom prst="rect">
-            <a:avLst/>
-          </a:prstGeom>
-          <a:noFill/>
-        </p:spPr>
-        <p:txBody>
-          <a:bodyPr wrap="none" lIns="0" rIns="0" tIns="0" bIns="0">
-            <a:spAutoFit/>
-          </a:bodyPr>
-          <a:lstStyle/>
-          <a:p>
-            <a:pPr algn="ctr"/>
-            <a:r>
-              <a:rPr sz="1100" b="1" i="0">
-                <a:solidFill>
-                  <a:srgbClr val="FFFFFF"/>
-                </a:solidFill>
-                <a:latin typeface="Helvetica Neue"/>
-              </a:rPr>
-              <a:t>STEP 19</a:t>
-            </a:r>
-          </a:p>
-        </p:txBody>
-      </p:sp>
-      <p:sp>
-        <p:nvSpPr>
-          <p:cNvPr id="11" name="TextBox 10"/>
-          <p:cNvSpPr txBox="1"/>
-          <p:nvPr/>
-        </p:nvSpPr>
-        <p:spPr>
-          <a:xfrm>
-            <a:off x="9688982" y="6460236"/>
-            <a:ext cx="1762048" cy="219456"/>
-          </a:xfrm>
-          <a:prstGeom prst="rect">
-            <a:avLst/>
-          </a:prstGeom>
-          <a:noFill/>
-        </p:spPr>
-        <p:txBody>
-          <a:bodyPr wrap="none" lIns="0" rIns="0" tIns="0" bIns="0">
-            <a:spAutoFit/>
-          </a:bodyPr>
-          <a:lstStyle/>
-          <a:p>
-            <a:pPr algn="l"/>
-            <a:r>
-              <a:rPr sz="1000" b="1" i="0">
-                <a:solidFill>
-                  <a:srgbClr val="FFFFFF"/>
-                </a:solidFill>
-                <a:latin typeface="Helvetica Neue"/>
-              </a:rPr>
-              <a:t>Why the winner won</a:t>
-            </a:r>
-          </a:p>
-        </p:txBody>
-      </p:sp>
-      <p:sp>
-        <p:nvSpPr>
-          <p:cNvPr id="12" name="TextBox 11"/>
-          <p:cNvSpPr txBox="1"/>
-          <p:nvPr/>
-        </p:nvSpPr>
-        <p:spPr>
-          <a:xfrm>
-            <a:off x="640080" y="6016752"/>
-            <a:ext cx="10881360" cy="365760"/>
-          </a:xfrm>
-          <a:prstGeom prst="rect">
-            <a:avLst/>
-          </a:prstGeom>
-          <a:noFill/>
-        </p:spPr>
-        <p:txBody>
-          <a:bodyPr wrap="square" lIns="0" rIns="0" tIns="0" bIns="0">
-            <a:spAutoFit/>
-          </a:bodyPr>
-          <a:lstStyle/>
-          <a:p>
-            <a:pPr algn="ctr"/>
-            <a:r>
-              <a:rPr sz="1500" b="0" i="0">
-                <a:solidFill>
-                  <a:srgbClr val="475569"/>
-                </a:solidFill>
-                <a:latin typeface="Helvetica Neue"/>
-              </a:rPr>
-              <a:t>No strategy was allowed to balance on the true categories, since those are what the budget buys. Clustering the ticket vectors produced an even spread without using any label.</a:t>
+          <p:cNvPr id="7" name="TextBox 6"/>
+          <p:cNvSpPr txBox="1"/>
+          <p:nvPr/>
+        </p:nvSpPr>
+        <p:spPr>
+          <a:xfrm>
+            <a:off x="640080" y="5897880"/>
+            <a:ext cx="10881360" cy="457200"/>
+          </a:xfrm>
+          <a:prstGeom prst="rect">
+            <a:avLst/>
+          </a:prstGeom>
+          <a:noFill/>
+        </p:spPr>
+        <p:txBody>
+          <a:bodyPr wrap="square" lIns="0" rIns="0" tIns="0" bIns="0">
+            <a:spAutoFit/>
+          </a:bodyPr>
+          <a:lstStyle/>
+          <a:p>
+            <a:pPr algn="ctr"/>
+            <a:r>
+              <a:rPr sz="1600" b="1" i="0">
+                <a:solidFill>
+                  <a:srgbClr val="0F172A"/>
+                </a:solidFill>
+                <a:latin typeface="Helvetica Neue"/>
+              </a:rPr>
+              <a:t>A range of 0.247 macro-F1 at identical cost. Only 'cover the space' scored above random plus one standard deviation. Every strategy that ranked tickets by a score scored below random.</a:t>
             </a:r>
           </a:p>
         </p:txBody>
@@ -8553,7 +8518,7 @@
                 </a:solidFill>
                 <a:latin typeface="Helvetica Neue"/>
               </a:rPr>
-              <a:t>Lopsided purchases scored lower</a:t>
+              <a:t>How each strategy spent its 240 labels</a:t>
             </a:r>
           </a:p>
         </p:txBody>
@@ -8588,7 +8553,7 @@
                 </a:solidFill>
                 <a:latin typeface="Helvetica Neue"/>
               </a:rPr>
-              <a:t>Horizontal axis is the largest category count minus the smallest. Correlation with macro-F1 across all six strategies is -0.72.</a:t>
+              <a:t>One bar per strategy, split by category, sorted by score. An even bar means the strategy bought some of every category.</a:t>
             </a:r>
           </a:p>
         </p:txBody>
@@ -8630,7 +8595,7 @@
       </p:sp>
       <p:pic>
         <p:nvPicPr>
-          <p:cNvPr id="6" name="Picture 5" descr="fig_imbal.png"/>
+          <p:cNvPr id="6" name="Picture 5" descr="fig_mix.png"/>
           <p:cNvPicPr>
             <a:picLocks noChangeAspect="1"/>
           </p:cNvPicPr>
@@ -8644,8 +8609,8 @@
         </p:blipFill>
         <p:spPr>
           <a:xfrm>
-            <a:off x="2300333" y="2011680"/>
-            <a:ext cx="7591027" cy="3977639"/>
+            <a:off x="1261658" y="1965960"/>
+            <a:ext cx="9668377" cy="3977639"/>
           </a:xfrm>
           <a:prstGeom prst="rect">
             <a:avLst/>
@@ -8654,13 +8619,208 @@
       </p:pic>
       <p:sp>
         <p:nvSpPr>
-          <p:cNvPr id="7" name="TextBox 6"/>
-          <p:cNvSpPr txBox="1"/>
-          <p:nvPr/>
-        </p:nvSpPr>
-        <p:spPr>
-          <a:xfrm>
-            <a:off x="640080" y="6053328"/>
+          <p:cNvPr id="7" name="Rounded Rectangle 6"/>
+          <p:cNvSpPr/>
+          <p:nvPr/>
+        </p:nvSpPr>
+        <p:spPr>
+          <a:xfrm>
+            <a:off x="7773314" y="6345936"/>
+            <a:ext cx="3778300" cy="365760"/>
+          </a:xfrm>
+          <a:prstGeom prst="roundRect">
+            <a:avLst>
+              <a:gd name="adj" fmla="val 44000"/>
+            </a:avLst>
+          </a:prstGeom>
+          <a:solidFill>
+            <a:srgbClr val="059669"/>
+          </a:solidFill>
+          <a:ln>
+            <a:noFill/>
+          </a:ln>
+        </p:spPr>
+        <p:style>
+          <a:lnRef idx="1">
+            <a:schemeClr val="accent1"/>
+          </a:lnRef>
+          <a:fillRef idx="3">
+            <a:schemeClr val="accent1"/>
+          </a:fillRef>
+          <a:effectRef idx="2">
+            <a:schemeClr val="accent1"/>
+          </a:effectRef>
+          <a:fontRef idx="minor">
+            <a:schemeClr val="lt1"/>
+          </a:fontRef>
+        </p:style>
+        <p:txBody>
+          <a:bodyPr rtlCol="0" anchor="ctr"/>
+          <a:lstStyle/>
+          <a:p>
+            <a:pPr algn="ctr"/>
+          </a:p>
+        </p:txBody>
+      </p:sp>
+      <p:sp>
+        <p:nvSpPr>
+          <p:cNvPr id="8" name="Rounded Rectangle 7"/>
+          <p:cNvSpPr/>
+          <p:nvPr/>
+        </p:nvSpPr>
+        <p:spPr>
+          <a:xfrm>
+            <a:off x="8815730" y="6396228"/>
+            <a:ext cx="754380" cy="265176"/>
+          </a:xfrm>
+          <a:prstGeom prst="roundRect">
+            <a:avLst>
+              <a:gd name="adj" fmla="val 44000"/>
+            </a:avLst>
+          </a:prstGeom>
+          <a:solidFill>
+            <a:srgbClr val="064E3B"/>
+          </a:solidFill>
+          <a:ln>
+            <a:noFill/>
+          </a:ln>
+        </p:spPr>
+        <p:style>
+          <a:lnRef idx="1">
+            <a:schemeClr val="accent1"/>
+          </a:lnRef>
+          <a:fillRef idx="3">
+            <a:schemeClr val="accent1"/>
+          </a:fillRef>
+          <a:effectRef idx="2">
+            <a:schemeClr val="accent1"/>
+          </a:effectRef>
+          <a:fontRef idx="minor">
+            <a:schemeClr val="lt1"/>
+          </a:fontRef>
+        </p:style>
+        <p:txBody>
+          <a:bodyPr rtlCol="0" anchor="ctr"/>
+          <a:lstStyle/>
+          <a:p>
+            <a:pPr algn="ctr"/>
+          </a:p>
+        </p:txBody>
+      </p:sp>
+      <p:sp>
+        <p:nvSpPr>
+          <p:cNvPr id="9" name="TextBox 8"/>
+          <p:cNvSpPr txBox="1"/>
+          <p:nvPr/>
+        </p:nvSpPr>
+        <p:spPr>
+          <a:xfrm>
+            <a:off x="7928762" y="6460236"/>
+            <a:ext cx="914400" cy="219456"/>
+          </a:xfrm>
+          <a:prstGeom prst="rect">
+            <a:avLst/>
+          </a:prstGeom>
+          <a:noFill/>
+        </p:spPr>
+        <p:txBody>
+          <a:bodyPr wrap="none" lIns="0" rIns="0" tIns="0" bIns="0">
+            <a:spAutoFit/>
+          </a:bodyPr>
+          <a:lstStyle/>
+          <a:p>
+            <a:pPr algn="l"/>
+            <a:r>
+              <a:rPr sz="950" b="1" i="0">
+                <a:solidFill>
+                  <a:srgbClr val="A7F3D0"/>
+                </a:solidFill>
+                <a:latin typeface="Helvetica Neue"/>
+              </a:rPr>
+              <a:t>▶ NOTEBOOK</a:t>
+            </a:r>
+          </a:p>
+        </p:txBody>
+      </p:sp>
+      <p:sp>
+        <p:nvSpPr>
+          <p:cNvPr id="10" name="TextBox 9"/>
+          <p:cNvSpPr txBox="1"/>
+          <p:nvPr/>
+        </p:nvSpPr>
+        <p:spPr>
+          <a:xfrm>
+            <a:off x="8815730" y="6451092"/>
+            <a:ext cx="754380" cy="219456"/>
+          </a:xfrm>
+          <a:prstGeom prst="rect">
+            <a:avLst/>
+          </a:prstGeom>
+          <a:noFill/>
+        </p:spPr>
+        <p:txBody>
+          <a:bodyPr wrap="none" lIns="0" rIns="0" tIns="0" bIns="0">
+            <a:spAutoFit/>
+          </a:bodyPr>
+          <a:lstStyle/>
+          <a:p>
+            <a:pPr algn="ctr"/>
+            <a:r>
+              <a:rPr sz="1100" b="1" i="0">
+                <a:solidFill>
+                  <a:srgbClr val="FFFFFF"/>
+                </a:solidFill>
+                <a:latin typeface="Helvetica Neue"/>
+              </a:rPr>
+              <a:t>STEP 19</a:t>
+            </a:r>
+          </a:p>
+        </p:txBody>
+      </p:sp>
+      <p:sp>
+        <p:nvSpPr>
+          <p:cNvPr id="11" name="TextBox 10"/>
+          <p:cNvSpPr txBox="1"/>
+          <p:nvPr/>
+        </p:nvSpPr>
+        <p:spPr>
+          <a:xfrm>
+            <a:off x="9688982" y="6460236"/>
+            <a:ext cx="1762048" cy="219456"/>
+          </a:xfrm>
+          <a:prstGeom prst="rect">
+            <a:avLst/>
+          </a:prstGeom>
+          <a:noFill/>
+        </p:spPr>
+        <p:txBody>
+          <a:bodyPr wrap="none" lIns="0" rIns="0" tIns="0" bIns="0">
+            <a:spAutoFit/>
+          </a:bodyPr>
+          <a:lstStyle/>
+          <a:p>
+            <a:pPr algn="l"/>
+            <a:r>
+              <a:rPr sz="1000" b="1" i="0">
+                <a:solidFill>
+                  <a:srgbClr val="FFFFFF"/>
+                </a:solidFill>
+                <a:latin typeface="Helvetica Neue"/>
+              </a:rPr>
+              <a:t>Why the winner won</a:t>
+            </a:r>
+          </a:p>
+        </p:txBody>
+      </p:sp>
+      <p:sp>
+        <p:nvSpPr>
+          <p:cNvPr id="12" name="TextBox 11"/>
+          <p:cNvSpPr txBox="1"/>
+          <p:nvPr/>
+        </p:nvSpPr>
+        <p:spPr>
+          <a:xfrm>
+            <a:off x="640080" y="6016752"/>
             <a:ext cx="10881360" cy="365760"/>
           </a:xfrm>
           <a:prstGeom prst="rect">
@@ -8682,7 +8842,7 @@
                 </a:solidFill>
                 <a:latin typeface="Helvetica Neue"/>
               </a:rPr>
-              <a:t>The rule used to select training data also determines its class distribution. Any rule that sorts by a score will skew that distribution, so check the mix before training.</a:t>
+              <a:t>No strategy was allowed to balance on the true categories, since those are what the budget buys. Clustering the ticket vectors produced an even spread without using any label.</a:t>
             </a:r>
           </a:p>
         </p:txBody>
@@ -8731,11 +8891,11 @@
             <a:r>
               <a:rPr sz="1250" b="1" i="0" spc="220">
                 <a:solidFill>
-                  <a:srgbClr val="E11D48"/>
-                </a:solidFill>
-                <a:latin typeface="Helvetica Neue"/>
-              </a:rPr>
-              <a:t>ROBERTA</a:t>
+                  <a:srgbClr val="7C3AED"/>
+                </a:solidFill>
+                <a:latin typeface="Helvetica Neue"/>
+              </a:rPr>
+              <a:t>RESULTS</a:t>
             </a:r>
           </a:p>
         </p:txBody>
@@ -8749,7 +8909,7 @@
         <p:spPr>
           <a:xfrm>
             <a:off x="640080" y="758952"/>
-            <a:ext cx="7315200" cy="704088"/>
+            <a:ext cx="10972800" cy="704088"/>
           </a:xfrm>
           <a:prstGeom prst="rect">
             <a:avLst/>
@@ -8764,13 +8924,13 @@
           <a:p>
             <a:pPr algn="l"/>
             <a:r>
-              <a:rPr sz="2550" b="1" i="0">
+              <a:rPr sz="2900" b="1" i="0">
                 <a:solidFill>
                   <a:srgbClr val="0F172A"/>
                 </a:solidFill>
                 <a:latin typeface="Helvetica Neue"/>
               </a:rPr>
-              <a:t>What RoBERTa changed, and what it did not</a:t>
+              <a:t>Lopsided purchases scored lower</a:t>
             </a:r>
           </a:p>
         </p:txBody>
@@ -8805,617 +8965,14 @@
                 </a:solidFill>
                 <a:latin typeface="Helvetica Neue"/>
               </a:rPr>
-              <a:t>The architecture is unchanged. The training recipe changed: one objective dropped, larger batches, more text, longer training.</a:t>
-            </a:r>
-          </a:p>
-        </p:txBody>
-      </p:sp>
-      <p:sp>
-        <p:nvSpPr>
-          <p:cNvPr id="5" name="Rounded Rectangle 4"/>
-          <p:cNvSpPr/>
-          <p:nvPr/>
-        </p:nvSpPr>
-        <p:spPr>
-          <a:xfrm>
-            <a:off x="8302752" y="593445"/>
-            <a:ext cx="2852928" cy="20116"/>
-          </a:xfrm>
-          <a:prstGeom prst="roundRect">
-            <a:avLst/>
-          </a:prstGeom>
-          <a:solidFill>
-            <a:srgbClr val="E9EBF0"/>
-          </a:solidFill>
-          <a:ln>
-            <a:noFill/>
-          </a:ln>
-        </p:spPr>
-        <p:style>
-          <a:lnRef idx="1">
-            <a:schemeClr val="accent1"/>
-          </a:lnRef>
-          <a:fillRef idx="3">
-            <a:schemeClr val="accent1"/>
-          </a:fillRef>
-          <a:effectRef idx="2">
-            <a:schemeClr val="accent1"/>
-          </a:effectRef>
-          <a:fontRef idx="minor">
-            <a:schemeClr val="lt1"/>
-          </a:fontRef>
-        </p:style>
-        <p:txBody>
-          <a:bodyPr rtlCol="0" anchor="ctr"/>
-          <a:lstStyle/>
-          <a:p>
-            <a:pPr algn="ctr"/>
-          </a:p>
-        </p:txBody>
-      </p:sp>
-      <p:sp>
-        <p:nvSpPr>
-          <p:cNvPr id="6" name="Rounded Rectangle 5"/>
-          <p:cNvSpPr/>
-          <p:nvPr/>
-        </p:nvSpPr>
-        <p:spPr>
-          <a:xfrm>
-            <a:off x="8220455" y="493776"/>
-            <a:ext cx="219456" cy="219456"/>
-          </a:xfrm>
-          <a:prstGeom prst="roundRect">
-            <a:avLst>
-              <a:gd name="adj" fmla="val 32000"/>
-            </a:avLst>
-          </a:prstGeom>
-          <a:solidFill>
-            <a:srgbClr val="0EA5E9"/>
-          </a:solidFill>
-          <a:ln>
-            <a:noFill/>
-          </a:ln>
-        </p:spPr>
-        <p:style>
-          <a:lnRef idx="1">
-            <a:schemeClr val="accent1"/>
-          </a:lnRef>
-          <a:fillRef idx="3">
-            <a:schemeClr val="accent1"/>
-          </a:fillRef>
-          <a:effectRef idx="2">
-            <a:schemeClr val="accent1"/>
-          </a:effectRef>
-          <a:fontRef idx="minor">
-            <a:schemeClr val="lt1"/>
-          </a:fontRef>
-        </p:style>
-        <p:txBody>
-          <a:bodyPr rtlCol="0" anchor="ctr"/>
-          <a:lstStyle/>
-          <a:p>
-            <a:pPr algn="ctr"/>
-          </a:p>
-        </p:txBody>
-      </p:sp>
-      <p:sp>
-        <p:nvSpPr>
-          <p:cNvPr id="7" name="TextBox 6"/>
-          <p:cNvSpPr txBox="1"/>
-          <p:nvPr/>
-        </p:nvSpPr>
-        <p:spPr>
-          <a:xfrm>
-            <a:off x="8165591" y="489204"/>
-            <a:ext cx="329184" cy="228600"/>
-          </a:xfrm>
-          <a:prstGeom prst="rect">
-            <a:avLst/>
-          </a:prstGeom>
-          <a:noFill/>
-        </p:spPr>
-        <p:txBody>
-          <a:bodyPr wrap="square" lIns="0" rIns="0" tIns="0" bIns="0">
-            <a:spAutoFit/>
-          </a:bodyPr>
-          <a:lstStyle/>
-          <a:p>
-            <a:pPr algn="ctr"/>
-            <a:r>
-              <a:rPr sz="950" b="1" i="0">
-                <a:solidFill>
-                  <a:srgbClr val="FFFFFF"/>
-                </a:solidFill>
-                <a:latin typeface="Helvetica Neue"/>
-              </a:rPr>
-              <a:t>1</a:t>
-            </a:r>
-          </a:p>
-        </p:txBody>
-      </p:sp>
-      <p:sp>
-        <p:nvSpPr>
-          <p:cNvPr id="8" name="Rounded Rectangle 7"/>
-          <p:cNvSpPr/>
-          <p:nvPr/>
-        </p:nvSpPr>
-        <p:spPr>
-          <a:xfrm>
-            <a:off x="8695943" y="493776"/>
-            <a:ext cx="219456" cy="219456"/>
-          </a:xfrm>
-          <a:prstGeom prst="roundRect">
-            <a:avLst>
-              <a:gd name="adj" fmla="val 32000"/>
-            </a:avLst>
-          </a:prstGeom>
-          <a:solidFill>
-            <a:srgbClr val="0EA5E9"/>
-          </a:solidFill>
-          <a:ln>
-            <a:noFill/>
-          </a:ln>
-        </p:spPr>
-        <p:style>
-          <a:lnRef idx="1">
-            <a:schemeClr val="accent1"/>
-          </a:lnRef>
-          <a:fillRef idx="3">
-            <a:schemeClr val="accent1"/>
-          </a:fillRef>
-          <a:effectRef idx="2">
-            <a:schemeClr val="accent1"/>
-          </a:effectRef>
-          <a:fontRef idx="minor">
-            <a:schemeClr val="lt1"/>
-          </a:fontRef>
-        </p:style>
-        <p:txBody>
-          <a:bodyPr rtlCol="0" anchor="ctr"/>
-          <a:lstStyle/>
-          <a:p>
-            <a:pPr algn="ctr"/>
-          </a:p>
-        </p:txBody>
-      </p:sp>
-      <p:sp>
-        <p:nvSpPr>
-          <p:cNvPr id="9" name="TextBox 8"/>
-          <p:cNvSpPr txBox="1"/>
-          <p:nvPr/>
-        </p:nvSpPr>
-        <p:spPr>
-          <a:xfrm>
-            <a:off x="8641079" y="489204"/>
-            <a:ext cx="329184" cy="228600"/>
-          </a:xfrm>
-          <a:prstGeom prst="rect">
-            <a:avLst/>
-          </a:prstGeom>
-          <a:noFill/>
-        </p:spPr>
-        <p:txBody>
-          <a:bodyPr wrap="square" lIns="0" rIns="0" tIns="0" bIns="0">
-            <a:spAutoFit/>
-          </a:bodyPr>
-          <a:lstStyle/>
-          <a:p>
-            <a:pPr algn="ctr"/>
-            <a:r>
-              <a:rPr sz="950" b="1" i="0">
-                <a:solidFill>
-                  <a:srgbClr val="FFFFFF"/>
-                </a:solidFill>
-                <a:latin typeface="Helvetica Neue"/>
-              </a:rPr>
-              <a:t>2</a:t>
-            </a:r>
-          </a:p>
-        </p:txBody>
-      </p:sp>
-      <p:sp>
-        <p:nvSpPr>
-          <p:cNvPr id="10" name="Rounded Rectangle 9"/>
-          <p:cNvSpPr/>
-          <p:nvPr/>
-        </p:nvSpPr>
-        <p:spPr>
-          <a:xfrm>
-            <a:off x="9171431" y="493776"/>
-            <a:ext cx="219456" cy="219456"/>
-          </a:xfrm>
-          <a:prstGeom prst="roundRect">
-            <a:avLst>
-              <a:gd name="adj" fmla="val 32000"/>
-            </a:avLst>
-          </a:prstGeom>
-          <a:solidFill>
-            <a:srgbClr val="D97706"/>
-          </a:solidFill>
-          <a:ln>
-            <a:noFill/>
-          </a:ln>
-        </p:spPr>
-        <p:style>
-          <a:lnRef idx="1">
-            <a:schemeClr val="accent1"/>
-          </a:lnRef>
-          <a:fillRef idx="3">
-            <a:schemeClr val="accent1"/>
-          </a:fillRef>
-          <a:effectRef idx="2">
-            <a:schemeClr val="accent1"/>
-          </a:effectRef>
-          <a:fontRef idx="minor">
-            <a:schemeClr val="lt1"/>
-          </a:fontRef>
-        </p:style>
-        <p:txBody>
-          <a:bodyPr rtlCol="0" anchor="ctr"/>
-          <a:lstStyle/>
-          <a:p>
-            <a:pPr algn="ctr"/>
-          </a:p>
-        </p:txBody>
-      </p:sp>
-      <p:sp>
-        <p:nvSpPr>
-          <p:cNvPr id="11" name="TextBox 10"/>
-          <p:cNvSpPr txBox="1"/>
-          <p:nvPr/>
-        </p:nvSpPr>
-        <p:spPr>
-          <a:xfrm>
-            <a:off x="9116567" y="489204"/>
-            <a:ext cx="329184" cy="228600"/>
-          </a:xfrm>
-          <a:prstGeom prst="rect">
-            <a:avLst/>
-          </a:prstGeom>
-          <a:noFill/>
-        </p:spPr>
-        <p:txBody>
-          <a:bodyPr wrap="square" lIns="0" rIns="0" tIns="0" bIns="0">
-            <a:spAutoFit/>
-          </a:bodyPr>
-          <a:lstStyle/>
-          <a:p>
-            <a:pPr algn="ctr"/>
-            <a:r>
-              <a:rPr sz="950" b="1" i="0">
-                <a:solidFill>
-                  <a:srgbClr val="FFFFFF"/>
-                </a:solidFill>
-                <a:latin typeface="Helvetica Neue"/>
-              </a:rPr>
-              <a:t>3</a:t>
-            </a:r>
-          </a:p>
-        </p:txBody>
-      </p:sp>
-      <p:sp>
-        <p:nvSpPr>
-          <p:cNvPr id="12" name="Rounded Rectangle 11"/>
-          <p:cNvSpPr/>
-          <p:nvPr/>
-        </p:nvSpPr>
-        <p:spPr>
-          <a:xfrm>
-            <a:off x="9646919" y="493776"/>
-            <a:ext cx="219456" cy="219456"/>
-          </a:xfrm>
-          <a:prstGeom prst="roundRect">
-            <a:avLst>
-              <a:gd name="adj" fmla="val 32000"/>
-            </a:avLst>
-          </a:prstGeom>
-          <a:solidFill>
-            <a:srgbClr val="059669"/>
-          </a:solidFill>
-          <a:ln>
-            <a:noFill/>
-          </a:ln>
-        </p:spPr>
-        <p:style>
-          <a:lnRef idx="1">
-            <a:schemeClr val="accent1"/>
-          </a:lnRef>
-          <a:fillRef idx="3">
-            <a:schemeClr val="accent1"/>
-          </a:fillRef>
-          <a:effectRef idx="2">
-            <a:schemeClr val="accent1"/>
-          </a:effectRef>
-          <a:fontRef idx="minor">
-            <a:schemeClr val="lt1"/>
-          </a:fontRef>
-        </p:style>
-        <p:txBody>
-          <a:bodyPr rtlCol="0" anchor="ctr"/>
-          <a:lstStyle/>
-          <a:p>
-            <a:pPr algn="ctr"/>
-          </a:p>
-        </p:txBody>
-      </p:sp>
-      <p:sp>
-        <p:nvSpPr>
-          <p:cNvPr id="13" name="TextBox 12"/>
-          <p:cNvSpPr txBox="1"/>
-          <p:nvPr/>
-        </p:nvSpPr>
-        <p:spPr>
-          <a:xfrm>
-            <a:off x="9592055" y="489204"/>
-            <a:ext cx="329184" cy="228600"/>
-          </a:xfrm>
-          <a:prstGeom prst="rect">
-            <a:avLst/>
-          </a:prstGeom>
-          <a:noFill/>
-        </p:spPr>
-        <p:txBody>
-          <a:bodyPr wrap="square" lIns="0" rIns="0" tIns="0" bIns="0">
-            <a:spAutoFit/>
-          </a:bodyPr>
-          <a:lstStyle/>
-          <a:p>
-            <a:pPr algn="ctr"/>
-            <a:r>
-              <a:rPr sz="950" b="1" i="0">
-                <a:solidFill>
-                  <a:srgbClr val="FFFFFF"/>
-                </a:solidFill>
-                <a:latin typeface="Helvetica Neue"/>
-              </a:rPr>
-              <a:t>4</a:t>
-            </a:r>
-          </a:p>
-        </p:txBody>
-      </p:sp>
-      <p:sp>
-        <p:nvSpPr>
-          <p:cNvPr id="14" name="Rounded Rectangle 13"/>
-          <p:cNvSpPr/>
-          <p:nvPr/>
-        </p:nvSpPr>
-        <p:spPr>
-          <a:xfrm>
-            <a:off x="10122407" y="493776"/>
-            <a:ext cx="219456" cy="219456"/>
-          </a:xfrm>
-          <a:prstGeom prst="roundRect">
-            <a:avLst>
-              <a:gd name="adj" fmla="val 32000"/>
-            </a:avLst>
-          </a:prstGeom>
-          <a:solidFill>
-            <a:srgbClr val="059669"/>
-          </a:solidFill>
-          <a:ln>
-            <a:noFill/>
-          </a:ln>
-        </p:spPr>
-        <p:style>
-          <a:lnRef idx="1">
-            <a:schemeClr val="accent1"/>
-          </a:lnRef>
-          <a:fillRef idx="3">
-            <a:schemeClr val="accent1"/>
-          </a:fillRef>
-          <a:effectRef idx="2">
-            <a:schemeClr val="accent1"/>
-          </a:effectRef>
-          <a:fontRef idx="minor">
-            <a:schemeClr val="lt1"/>
-          </a:fontRef>
-        </p:style>
-        <p:txBody>
-          <a:bodyPr rtlCol="0" anchor="ctr"/>
-          <a:lstStyle/>
-          <a:p>
-            <a:pPr algn="ctr"/>
-          </a:p>
-        </p:txBody>
-      </p:sp>
-      <p:sp>
-        <p:nvSpPr>
-          <p:cNvPr id="15" name="TextBox 14"/>
-          <p:cNvSpPr txBox="1"/>
-          <p:nvPr/>
-        </p:nvSpPr>
-        <p:spPr>
-          <a:xfrm>
-            <a:off x="10067543" y="489204"/>
-            <a:ext cx="329184" cy="228600"/>
-          </a:xfrm>
-          <a:prstGeom prst="rect">
-            <a:avLst/>
-          </a:prstGeom>
-          <a:noFill/>
-        </p:spPr>
-        <p:txBody>
-          <a:bodyPr wrap="square" lIns="0" rIns="0" tIns="0" bIns="0">
-            <a:spAutoFit/>
-          </a:bodyPr>
-          <a:lstStyle/>
-          <a:p>
-            <a:pPr algn="ctr"/>
-            <a:r>
-              <a:rPr sz="950" b="1" i="0">
-                <a:solidFill>
-                  <a:srgbClr val="FFFFFF"/>
-                </a:solidFill>
-                <a:latin typeface="Helvetica Neue"/>
-              </a:rPr>
-              <a:t>5</a:t>
-            </a:r>
-          </a:p>
-        </p:txBody>
-      </p:sp>
-      <p:sp>
-        <p:nvSpPr>
-          <p:cNvPr id="16" name="Rounded Rectangle 15"/>
-          <p:cNvSpPr/>
-          <p:nvPr/>
-        </p:nvSpPr>
-        <p:spPr>
-          <a:xfrm>
-            <a:off x="10597895" y="493776"/>
-            <a:ext cx="219456" cy="219456"/>
-          </a:xfrm>
-          <a:prstGeom prst="roundRect">
-            <a:avLst>
-              <a:gd name="adj" fmla="val 32000"/>
-            </a:avLst>
-          </a:prstGeom>
-          <a:solidFill>
-            <a:srgbClr val="7C3AED"/>
-          </a:solidFill>
-          <a:ln>
-            <a:noFill/>
-          </a:ln>
-        </p:spPr>
-        <p:style>
-          <a:lnRef idx="1">
-            <a:schemeClr val="accent1"/>
-          </a:lnRef>
-          <a:fillRef idx="3">
-            <a:schemeClr val="accent1"/>
-          </a:fillRef>
-          <a:effectRef idx="2">
-            <a:schemeClr val="accent1"/>
-          </a:effectRef>
-          <a:fontRef idx="minor">
-            <a:schemeClr val="lt1"/>
-          </a:fontRef>
-        </p:style>
-        <p:txBody>
-          <a:bodyPr rtlCol="0" anchor="ctr"/>
-          <a:lstStyle/>
-          <a:p>
-            <a:pPr algn="ctr"/>
-          </a:p>
-        </p:txBody>
-      </p:sp>
-      <p:sp>
-        <p:nvSpPr>
-          <p:cNvPr id="17" name="TextBox 16"/>
-          <p:cNvSpPr txBox="1"/>
-          <p:nvPr/>
-        </p:nvSpPr>
-        <p:spPr>
-          <a:xfrm>
-            <a:off x="10543031" y="489204"/>
-            <a:ext cx="329184" cy="228600"/>
-          </a:xfrm>
-          <a:prstGeom prst="rect">
-            <a:avLst/>
-          </a:prstGeom>
-          <a:noFill/>
-        </p:spPr>
-        <p:txBody>
-          <a:bodyPr wrap="square" lIns="0" rIns="0" tIns="0" bIns="0">
-            <a:spAutoFit/>
-          </a:bodyPr>
-          <a:lstStyle/>
-          <a:p>
-            <a:pPr algn="ctr"/>
-            <a:r>
-              <a:rPr sz="950" b="1" i="0">
-                <a:solidFill>
-                  <a:srgbClr val="FFFFFF"/>
-                </a:solidFill>
-                <a:latin typeface="Helvetica Neue"/>
-              </a:rPr>
-              <a:t>6</a:t>
-            </a:r>
-          </a:p>
-        </p:txBody>
-      </p:sp>
-      <p:sp>
-        <p:nvSpPr>
-          <p:cNvPr id="18" name="Rounded Rectangle 17"/>
-          <p:cNvSpPr/>
-          <p:nvPr/>
-        </p:nvSpPr>
-        <p:spPr>
-          <a:xfrm>
-            <a:off x="11036808" y="457200"/>
-            <a:ext cx="292608" cy="292608"/>
-          </a:xfrm>
-          <a:prstGeom prst="roundRect">
-            <a:avLst>
-              <a:gd name="adj" fmla="val 32000"/>
-            </a:avLst>
-          </a:prstGeom>
-          <a:solidFill>
-            <a:srgbClr val="E11D48"/>
-          </a:solidFill>
-          <a:ln>
-            <a:noFill/>
-          </a:ln>
-        </p:spPr>
-        <p:style>
-          <a:lnRef idx="1">
-            <a:schemeClr val="accent1"/>
-          </a:lnRef>
-          <a:fillRef idx="3">
-            <a:schemeClr val="accent1"/>
-          </a:fillRef>
-          <a:effectRef idx="2">
-            <a:schemeClr val="accent1"/>
-          </a:effectRef>
-          <a:fontRef idx="minor">
-            <a:schemeClr val="lt1"/>
-          </a:fontRef>
-        </p:style>
-        <p:txBody>
-          <a:bodyPr rtlCol="0" anchor="ctr"/>
-          <a:lstStyle/>
-          <a:p>
-            <a:pPr algn="ctr"/>
-          </a:p>
-        </p:txBody>
-      </p:sp>
-      <p:sp>
-        <p:nvSpPr>
-          <p:cNvPr id="19" name="TextBox 18"/>
-          <p:cNvSpPr txBox="1"/>
-          <p:nvPr/>
-        </p:nvSpPr>
-        <p:spPr>
-          <a:xfrm>
-            <a:off x="10981944" y="489204"/>
-            <a:ext cx="402336" cy="228600"/>
-          </a:xfrm>
-          <a:prstGeom prst="rect">
-            <a:avLst/>
-          </a:prstGeom>
-          <a:noFill/>
-        </p:spPr>
-        <p:txBody>
-          <a:bodyPr wrap="square" lIns="0" rIns="0" tIns="0" bIns="0">
-            <a:spAutoFit/>
-          </a:bodyPr>
-          <a:lstStyle/>
-          <a:p>
-            <a:pPr algn="ctr"/>
-            <a:r>
-              <a:rPr sz="1200" b="1" i="0">
-                <a:solidFill>
-                  <a:srgbClr val="FFFFFF"/>
-                </a:solidFill>
-                <a:latin typeface="Helvetica Neue"/>
-              </a:rPr>
-              <a:t>7</a:t>
-            </a:r>
-          </a:p>
-        </p:txBody>
-      </p:sp>
-      <p:sp>
-        <p:nvSpPr>
-          <p:cNvPr id="20" name="TextBox 19"/>
+              <a:t>Horizontal axis is the largest category count minus the smallest. Correlation with macro-F1 across all six strategies is -0.72.</a:t>
+            </a:r>
+          </a:p>
+        </p:txBody>
+      </p:sp>
+      <p:sp>
+        <p:nvSpPr>
+          <p:cNvPr id="5" name="TextBox 4"/>
           <p:cNvSpPr txBox="1"/>
           <p:nvPr/>
         </p:nvSpPr>
@@ -9450,7 +9007,7 @@
       </p:sp>
       <p:pic>
         <p:nvPicPr>
-          <p:cNvPr id="21" name="Picture 20" descr="d_roberta.png"/>
+          <p:cNvPr id="6" name="Picture 5" descr="fig_imbal.png"/>
           <p:cNvPicPr>
             <a:picLocks noChangeAspect="1"/>
           </p:cNvPicPr>
@@ -9464,14 +9021,49 @@
         </p:blipFill>
         <p:spPr>
           <a:xfrm>
-            <a:off x="1372672" y="1965960"/>
-            <a:ext cx="9446349" cy="4343400"/>
+            <a:off x="2300333" y="2011680"/>
+            <a:ext cx="7591027" cy="3977639"/>
           </a:xfrm>
           <a:prstGeom prst="rect">
             <a:avLst/>
           </a:prstGeom>
         </p:spPr>
       </p:pic>
+      <p:sp>
+        <p:nvSpPr>
+          <p:cNvPr id="7" name="TextBox 6"/>
+          <p:cNvSpPr txBox="1"/>
+          <p:nvPr/>
+        </p:nvSpPr>
+        <p:spPr>
+          <a:xfrm>
+            <a:off x="640080" y="6053328"/>
+            <a:ext cx="10881360" cy="365760"/>
+          </a:xfrm>
+          <a:prstGeom prst="rect">
+            <a:avLst/>
+          </a:prstGeom>
+          <a:noFill/>
+        </p:spPr>
+        <p:txBody>
+          <a:bodyPr wrap="square" lIns="0" rIns="0" tIns="0" bIns="0">
+            <a:spAutoFit/>
+          </a:bodyPr>
+          <a:lstStyle/>
+          <a:p>
+            <a:pPr algn="ctr"/>
+            <a:r>
+              <a:rPr sz="1500" b="0" i="0">
+                <a:solidFill>
+                  <a:srgbClr val="475569"/>
+                </a:solidFill>
+                <a:latin typeface="Helvetica Neue"/>
+              </a:rPr>
+              <a:t>The rule used to select training data also determines its class distribution. Any rule that sorts by a score will skew that distribution, so check the mix before training.</a:t>
+            </a:r>
+          </a:p>
+        </p:txBody>
+      </p:sp>
     </p:spTree>
   </p:cSld>
   <p:clrMapOvr>
@@ -9520,7 +9112,7 @@
                 </a:solidFill>
                 <a:latin typeface="Helvetica Neue"/>
               </a:rPr>
-              <a:t>RUNGS 6 AND 7</a:t>
+              <a:t>ROBERTA</a:t>
             </a:r>
           </a:p>
         </p:txBody>
@@ -9549,13 +9141,13 @@
           <a:p>
             <a:pPr algn="l"/>
             <a:r>
-              <a:rPr sz="2900" b="1" i="0">
+              <a:rPr sz="2550" b="1" i="0">
                 <a:solidFill>
                   <a:srgbClr val="0F172A"/>
                 </a:solidFill>
                 <a:latin typeface="Helvetica Neue"/>
               </a:rPr>
-              <a:t>What the top two rungs cost</a:t>
+              <a:t>What RoBERTa changed, and what it did not</a:t>
             </a:r>
           </a:p>
         </p:txBody>
@@ -9590,7 +9182,7 @@
                 </a:solidFill>
                 <a:latin typeface="Helvetica Neue"/>
               </a:rPr>
-              <a:t>Continued pretraining and training from scratch: what each requires, when each is worth doing, and why the answer for Cobalt is neither.</a:t>
+              <a:t>The architecture is unchanged. The training recipe changed: one objective dropped, larger batches, more text, longer training.</a:t>
             </a:r>
           </a:p>
         </p:txBody>
@@ -10046,8 +9638,8 @@
         </p:nvSpPr>
         <p:spPr>
           <a:xfrm>
-            <a:off x="10561319" y="457200"/>
-            <a:ext cx="292608" cy="292608"/>
+            <a:off x="10597895" y="493776"/>
+            <a:ext cx="219456" cy="219456"/>
           </a:xfrm>
           <a:prstGeom prst="roundRect">
             <a:avLst>
@@ -10091,23 +9683,23 @@
         </p:nvSpPr>
         <p:spPr>
           <a:xfrm>
-            <a:off x="10506455" y="489204"/>
-            <a:ext cx="402336" cy="228600"/>
-          </a:xfrm>
-          <a:prstGeom prst="rect">
-            <a:avLst/>
-          </a:prstGeom>
-          <a:noFill/>
-        </p:spPr>
-        <p:txBody>
-          <a:bodyPr wrap="square" lIns="0" rIns="0" tIns="0" bIns="0">
-            <a:spAutoFit/>
-          </a:bodyPr>
-          <a:lstStyle/>
-          <a:p>
-            <a:pPr algn="ctr"/>
-            <a:r>
-              <a:rPr sz="1200" b="1" i="0">
+            <a:off x="10543031" y="489204"/>
+            <a:ext cx="329184" cy="228600"/>
+          </a:xfrm>
+          <a:prstGeom prst="rect">
+            <a:avLst/>
+          </a:prstGeom>
+          <a:noFill/>
+        </p:spPr>
+        <p:txBody>
+          <a:bodyPr wrap="square" lIns="0" rIns="0" tIns="0" bIns="0">
+            <a:spAutoFit/>
+          </a:bodyPr>
+          <a:lstStyle/>
+          <a:p>
+            <a:pPr algn="ctr"/>
+            <a:r>
+              <a:rPr sz="950" b="1" i="0">
                 <a:solidFill>
                   <a:srgbClr val="FFFFFF"/>
                 </a:solidFill>
@@ -10126,8 +9718,8 @@
         </p:nvSpPr>
         <p:spPr>
           <a:xfrm>
-            <a:off x="11073384" y="493776"/>
-            <a:ext cx="219456" cy="219456"/>
+            <a:off x="11036808" y="457200"/>
+            <a:ext cx="292608" cy="292608"/>
           </a:xfrm>
           <a:prstGeom prst="roundRect">
             <a:avLst>
@@ -10135,7 +9727,7 @@
             </a:avLst>
           </a:prstGeom>
           <a:solidFill>
-            <a:srgbClr val="E9EBF0"/>
+            <a:srgbClr val="E11D48"/>
           </a:solidFill>
           <a:ln>
             <a:noFill/>
@@ -10171,25 +9763,25 @@
         </p:nvSpPr>
         <p:spPr>
           <a:xfrm>
-            <a:off x="11018519" y="489204"/>
-            <a:ext cx="329184" cy="228600"/>
-          </a:xfrm>
-          <a:prstGeom prst="rect">
-            <a:avLst/>
-          </a:prstGeom>
-          <a:noFill/>
-        </p:spPr>
-        <p:txBody>
-          <a:bodyPr wrap="square" lIns="0" rIns="0" tIns="0" bIns="0">
-            <a:spAutoFit/>
-          </a:bodyPr>
-          <a:lstStyle/>
-          <a:p>
-            <a:pPr algn="ctr"/>
-            <a:r>
-              <a:rPr sz="950" b="1" i="0">
-                <a:solidFill>
-                  <a:srgbClr val="AEB4BF"/>
+            <a:off x="10981944" y="489204"/>
+            <a:ext cx="402336" cy="228600"/>
+          </a:xfrm>
+          <a:prstGeom prst="rect">
+            <a:avLst/>
+          </a:prstGeom>
+          <a:noFill/>
+        </p:spPr>
+        <p:txBody>
+          <a:bodyPr wrap="square" lIns="0" rIns="0" tIns="0" bIns="0">
+            <a:spAutoFit/>
+          </a:bodyPr>
+          <a:lstStyle/>
+          <a:p>
+            <a:pPr algn="ctr"/>
+            <a:r>
+              <a:rPr sz="1200" b="1" i="0">
+                <a:solidFill>
+                  <a:srgbClr val="FFFFFF"/>
                 </a:solidFill>
                 <a:latin typeface="Helvetica Neue"/>
               </a:rPr>
@@ -10235,7 +9827,7 @@
       </p:sp>
       <p:pic>
         <p:nvPicPr>
-          <p:cNvPr id="21" name="Picture 20" descr="d_top.png"/>
+          <p:cNvPr id="21" name="Picture 20" descr="d_roberta.png"/>
           <p:cNvPicPr>
             <a:picLocks noChangeAspect="1"/>
           </p:cNvPicPr>
@@ -10249,209 +9841,14 @@
         </p:blipFill>
         <p:spPr>
           <a:xfrm>
-            <a:off x="518007" y="3015360"/>
-            <a:ext cx="11155680" cy="2290319"/>
+            <a:off x="1372672" y="1965960"/>
+            <a:ext cx="9446349" cy="4343400"/>
           </a:xfrm>
           <a:prstGeom prst="rect">
             <a:avLst/>
           </a:prstGeom>
         </p:spPr>
       </p:pic>
-      <p:sp>
-        <p:nvSpPr>
-          <p:cNvPr id="22" name="Rounded Rectangle 21"/>
-          <p:cNvSpPr/>
-          <p:nvPr/>
-        </p:nvSpPr>
-        <p:spPr>
-          <a:xfrm>
-            <a:off x="6104534" y="6345936"/>
-            <a:ext cx="5447080" cy="365760"/>
-          </a:xfrm>
-          <a:prstGeom prst="roundRect">
-            <a:avLst>
-              <a:gd name="adj" fmla="val 44000"/>
-            </a:avLst>
-          </a:prstGeom>
-          <a:solidFill>
-            <a:srgbClr val="059669"/>
-          </a:solidFill>
-          <a:ln>
-            <a:noFill/>
-          </a:ln>
-        </p:spPr>
-        <p:style>
-          <a:lnRef idx="1">
-            <a:schemeClr val="accent1"/>
-          </a:lnRef>
-          <a:fillRef idx="3">
-            <a:schemeClr val="accent1"/>
-          </a:fillRef>
-          <a:effectRef idx="2">
-            <a:schemeClr val="accent1"/>
-          </a:effectRef>
-          <a:fontRef idx="minor">
-            <a:schemeClr val="lt1"/>
-          </a:fontRef>
-        </p:style>
-        <p:txBody>
-          <a:bodyPr rtlCol="0" anchor="ctr"/>
-          <a:lstStyle/>
-          <a:p>
-            <a:pPr algn="ctr"/>
-          </a:p>
-        </p:txBody>
-      </p:sp>
-      <p:sp>
-        <p:nvSpPr>
-          <p:cNvPr id="23" name="Rounded Rectangle 22"/>
-          <p:cNvSpPr/>
-          <p:nvPr/>
-        </p:nvSpPr>
-        <p:spPr>
-          <a:xfrm>
-            <a:off x="7146950" y="6396228"/>
-            <a:ext cx="754380" cy="265176"/>
-          </a:xfrm>
-          <a:prstGeom prst="roundRect">
-            <a:avLst>
-              <a:gd name="adj" fmla="val 44000"/>
-            </a:avLst>
-          </a:prstGeom>
-          <a:solidFill>
-            <a:srgbClr val="064E3B"/>
-          </a:solidFill>
-          <a:ln>
-            <a:noFill/>
-          </a:ln>
-        </p:spPr>
-        <p:style>
-          <a:lnRef idx="1">
-            <a:schemeClr val="accent1"/>
-          </a:lnRef>
-          <a:fillRef idx="3">
-            <a:schemeClr val="accent1"/>
-          </a:fillRef>
-          <a:effectRef idx="2">
-            <a:schemeClr val="accent1"/>
-          </a:effectRef>
-          <a:fontRef idx="minor">
-            <a:schemeClr val="lt1"/>
-          </a:fontRef>
-        </p:style>
-        <p:txBody>
-          <a:bodyPr rtlCol="0" anchor="ctr"/>
-          <a:lstStyle/>
-          <a:p>
-            <a:pPr algn="ctr"/>
-          </a:p>
-        </p:txBody>
-      </p:sp>
-      <p:sp>
-        <p:nvSpPr>
-          <p:cNvPr id="24" name="TextBox 23"/>
-          <p:cNvSpPr txBox="1"/>
-          <p:nvPr/>
-        </p:nvSpPr>
-        <p:spPr>
-          <a:xfrm>
-            <a:off x="6259982" y="6460236"/>
-            <a:ext cx="914400" cy="219456"/>
-          </a:xfrm>
-          <a:prstGeom prst="rect">
-            <a:avLst/>
-          </a:prstGeom>
-          <a:noFill/>
-        </p:spPr>
-        <p:txBody>
-          <a:bodyPr wrap="none" lIns="0" rIns="0" tIns="0" bIns="0">
-            <a:spAutoFit/>
-          </a:bodyPr>
-          <a:lstStyle/>
-          <a:p>
-            <a:pPr algn="l"/>
-            <a:r>
-              <a:rPr sz="950" b="1" i="0">
-                <a:solidFill>
-                  <a:srgbClr val="A7F3D0"/>
-                </a:solidFill>
-                <a:latin typeface="Helvetica Neue"/>
-              </a:rPr>
-              <a:t>▶ NOTEBOOK</a:t>
-            </a:r>
-          </a:p>
-        </p:txBody>
-      </p:sp>
-      <p:sp>
-        <p:nvSpPr>
-          <p:cNvPr id="25" name="TextBox 24"/>
-          <p:cNvSpPr txBox="1"/>
-          <p:nvPr/>
-        </p:nvSpPr>
-        <p:spPr>
-          <a:xfrm>
-            <a:off x="7146950" y="6451092"/>
-            <a:ext cx="754380" cy="219456"/>
-          </a:xfrm>
-          <a:prstGeom prst="rect">
-            <a:avLst/>
-          </a:prstGeom>
-          <a:noFill/>
-        </p:spPr>
-        <p:txBody>
-          <a:bodyPr wrap="none" lIns="0" rIns="0" tIns="0" bIns="0">
-            <a:spAutoFit/>
-          </a:bodyPr>
-          <a:lstStyle/>
-          <a:p>
-            <a:pPr algn="ctr"/>
-            <a:r>
-              <a:rPr sz="1100" b="1" i="0">
-                <a:solidFill>
-                  <a:srgbClr val="FFFFFF"/>
-                </a:solidFill>
-                <a:latin typeface="Helvetica Neue"/>
-              </a:rPr>
-              <a:t>STEP 20</a:t>
-            </a:r>
-          </a:p>
-        </p:txBody>
-      </p:sp>
-      <p:sp>
-        <p:nvSpPr>
-          <p:cNvPr id="26" name="TextBox 25"/>
-          <p:cNvSpPr txBox="1"/>
-          <p:nvPr/>
-        </p:nvSpPr>
-        <p:spPr>
-          <a:xfrm>
-            <a:off x="8020202" y="6460236"/>
-            <a:ext cx="3430828" cy="219456"/>
-          </a:xfrm>
-          <a:prstGeom prst="rect">
-            <a:avLst/>
-          </a:prstGeom>
-          <a:noFill/>
-        </p:spPr>
-        <p:txBody>
-          <a:bodyPr wrap="none" lIns="0" rIns="0" tIns="0" bIns="0">
-            <a:spAutoFit/>
-          </a:bodyPr>
-          <a:lstStyle/>
-          <a:p>
-            <a:pPr algn="l"/>
-            <a:r>
-              <a:rPr sz="1000" b="1" i="0">
-                <a:solidFill>
-                  <a:srgbClr val="FFFFFF"/>
-                </a:solidFill>
-                <a:latin typeface="Helvetica Neue"/>
-              </a:rPr>
-              <a:t>RUNGS 6 and 7: should Cobalt train its own?</a:t>
-            </a:r>
-          </a:p>
-        </p:txBody>
-      </p:sp>
     </p:spTree>
   </p:cSld>
   <p:clrMapOvr>
@@ -10496,11 +9893,11 @@
             <a:r>
               <a:rPr sz="1250" b="1" i="0" spc="220">
                 <a:solidFill>
-                  <a:srgbClr val="4F46E5"/>
-                </a:solidFill>
-                <a:latin typeface="Helvetica Neue"/>
-              </a:rPr>
-              <a:t>WEEK 7 · AT A GLANCE</a:t>
+                  <a:srgbClr val="E11D48"/>
+                </a:solidFill>
+                <a:latin typeface="Helvetica Neue"/>
+              </a:rPr>
+              <a:t>DISCUSSION · BEFORE WE START</a:t>
             </a:r>
           </a:p>
         </p:txBody>
@@ -10535,7 +9932,7 @@
                 </a:solidFill>
                 <a:latin typeface="Helvetica Neue"/>
               </a:rPr>
-              <a:t>Language Models &amp; Transformers</a:t>
+              <a:t>Meta moved 6,500 engineers into data annotation</a:t>
             </a:r>
           </a:p>
         </p:txBody>
@@ -10570,7 +9967,7 @@
                 </a:solidFill>
                 <a:latin typeface="Helvetica Neue"/>
               </a:rPr>
-              <a:t>The eight concepts for Week 7 and the five models we run. Greyed out was covered in Lecture 13. The four in green are covered tonight.</a:t>
+              <a:t>March to June 2026. Tonight is about what labelled data costs. This is that cost at the scale of a company.</a:t>
             </a:r>
           </a:p>
         </p:txBody>
@@ -10612,7 +10009,7 @@
       </p:sp>
       <p:pic>
         <p:nvPicPr>
-          <p:cNvPr id="6" name="Picture 5" descr="d_week.png"/>
+          <p:cNvPr id="6" name="Picture 5" descr="d_metaincident.png"/>
           <p:cNvPicPr>
             <a:picLocks noChangeAspect="1"/>
           </p:cNvPicPr>
@@ -10626,8 +10023,8 @@
         </p:blipFill>
         <p:spPr>
           <a:xfrm>
-            <a:off x="380847" y="2025280"/>
-            <a:ext cx="11430000" cy="4316199"/>
+            <a:off x="335127" y="2601965"/>
+            <a:ext cx="11521440" cy="3208548"/>
           </a:xfrm>
           <a:prstGeom prst="rect">
             <a:avLst/>
@@ -10678,11 +10075,11 @@
             <a:r>
               <a:rPr sz="1250" b="1" i="0" spc="220">
                 <a:solidFill>
-                  <a:srgbClr val="4F46E5"/>
-                </a:solidFill>
-                <a:latin typeface="Helvetica Neue"/>
-              </a:rPr>
-              <a:t>SUMMARY</a:t>
+                  <a:srgbClr val="E11D48"/>
+                </a:solidFill>
+                <a:latin typeface="Helvetica Neue"/>
+              </a:rPr>
+              <a:t>RUNGS 6 AND 7</a:t>
             </a:r>
           </a:p>
         </p:txBody>
@@ -10696,7 +10093,7 @@
         <p:spPr>
           <a:xfrm>
             <a:off x="640080" y="758952"/>
-            <a:ext cx="10972800" cy="704088"/>
+            <a:ext cx="7315200" cy="704088"/>
           </a:xfrm>
           <a:prstGeom prst="rect">
             <a:avLst/>
@@ -10717,7 +10114,7 @@
                 </a:solidFill>
                 <a:latin typeface="Helvetica Neue"/>
               </a:rPr>
-              <a:t>Every result from both lectures on one axis</a:t>
+              <a:t>What the top two rungs cost</a:t>
             </a:r>
           </a:p>
         </p:txBody>
@@ -10752,14 +10149,617 @@
                 </a:solidFill>
                 <a:latin typeface="Helvetica Neue"/>
               </a:rPr>
-              <a:t>Macro-F1 with no labels, with 240 labels chosen badly, 240 chosen at random, 240 chosen well, and with all 1,400 labelled.</a:t>
-            </a:r>
-          </a:p>
-        </p:txBody>
-      </p:sp>
-      <p:sp>
-        <p:nvSpPr>
-          <p:cNvPr id="5" name="TextBox 4"/>
+              <a:t>Continued pretraining and training from scratch: what each requires, when each is worth doing, and why the answer for Cobalt is neither.</a:t>
+            </a:r>
+          </a:p>
+        </p:txBody>
+      </p:sp>
+      <p:sp>
+        <p:nvSpPr>
+          <p:cNvPr id="5" name="Rounded Rectangle 4"/>
+          <p:cNvSpPr/>
+          <p:nvPr/>
+        </p:nvSpPr>
+        <p:spPr>
+          <a:xfrm>
+            <a:off x="8302752" y="593445"/>
+            <a:ext cx="2852928" cy="20116"/>
+          </a:xfrm>
+          <a:prstGeom prst="roundRect">
+            <a:avLst/>
+          </a:prstGeom>
+          <a:solidFill>
+            <a:srgbClr val="E9EBF0"/>
+          </a:solidFill>
+          <a:ln>
+            <a:noFill/>
+          </a:ln>
+        </p:spPr>
+        <p:style>
+          <a:lnRef idx="1">
+            <a:schemeClr val="accent1"/>
+          </a:lnRef>
+          <a:fillRef idx="3">
+            <a:schemeClr val="accent1"/>
+          </a:fillRef>
+          <a:effectRef idx="2">
+            <a:schemeClr val="accent1"/>
+          </a:effectRef>
+          <a:fontRef idx="minor">
+            <a:schemeClr val="lt1"/>
+          </a:fontRef>
+        </p:style>
+        <p:txBody>
+          <a:bodyPr rtlCol="0" anchor="ctr"/>
+          <a:lstStyle/>
+          <a:p>
+            <a:pPr algn="ctr"/>
+          </a:p>
+        </p:txBody>
+      </p:sp>
+      <p:sp>
+        <p:nvSpPr>
+          <p:cNvPr id="6" name="Rounded Rectangle 5"/>
+          <p:cNvSpPr/>
+          <p:nvPr/>
+        </p:nvSpPr>
+        <p:spPr>
+          <a:xfrm>
+            <a:off x="8220455" y="493776"/>
+            <a:ext cx="219456" cy="219456"/>
+          </a:xfrm>
+          <a:prstGeom prst="roundRect">
+            <a:avLst>
+              <a:gd name="adj" fmla="val 32000"/>
+            </a:avLst>
+          </a:prstGeom>
+          <a:solidFill>
+            <a:srgbClr val="0EA5E9"/>
+          </a:solidFill>
+          <a:ln>
+            <a:noFill/>
+          </a:ln>
+        </p:spPr>
+        <p:style>
+          <a:lnRef idx="1">
+            <a:schemeClr val="accent1"/>
+          </a:lnRef>
+          <a:fillRef idx="3">
+            <a:schemeClr val="accent1"/>
+          </a:fillRef>
+          <a:effectRef idx="2">
+            <a:schemeClr val="accent1"/>
+          </a:effectRef>
+          <a:fontRef idx="minor">
+            <a:schemeClr val="lt1"/>
+          </a:fontRef>
+        </p:style>
+        <p:txBody>
+          <a:bodyPr rtlCol="0" anchor="ctr"/>
+          <a:lstStyle/>
+          <a:p>
+            <a:pPr algn="ctr"/>
+          </a:p>
+        </p:txBody>
+      </p:sp>
+      <p:sp>
+        <p:nvSpPr>
+          <p:cNvPr id="7" name="TextBox 6"/>
+          <p:cNvSpPr txBox="1"/>
+          <p:nvPr/>
+        </p:nvSpPr>
+        <p:spPr>
+          <a:xfrm>
+            <a:off x="8165591" y="489204"/>
+            <a:ext cx="329184" cy="228600"/>
+          </a:xfrm>
+          <a:prstGeom prst="rect">
+            <a:avLst/>
+          </a:prstGeom>
+          <a:noFill/>
+        </p:spPr>
+        <p:txBody>
+          <a:bodyPr wrap="square" lIns="0" rIns="0" tIns="0" bIns="0">
+            <a:spAutoFit/>
+          </a:bodyPr>
+          <a:lstStyle/>
+          <a:p>
+            <a:pPr algn="ctr"/>
+            <a:r>
+              <a:rPr sz="950" b="1" i="0">
+                <a:solidFill>
+                  <a:srgbClr val="FFFFFF"/>
+                </a:solidFill>
+                <a:latin typeface="Helvetica Neue"/>
+              </a:rPr>
+              <a:t>1</a:t>
+            </a:r>
+          </a:p>
+        </p:txBody>
+      </p:sp>
+      <p:sp>
+        <p:nvSpPr>
+          <p:cNvPr id="8" name="Rounded Rectangle 7"/>
+          <p:cNvSpPr/>
+          <p:nvPr/>
+        </p:nvSpPr>
+        <p:spPr>
+          <a:xfrm>
+            <a:off x="8695943" y="493776"/>
+            <a:ext cx="219456" cy="219456"/>
+          </a:xfrm>
+          <a:prstGeom prst="roundRect">
+            <a:avLst>
+              <a:gd name="adj" fmla="val 32000"/>
+            </a:avLst>
+          </a:prstGeom>
+          <a:solidFill>
+            <a:srgbClr val="0EA5E9"/>
+          </a:solidFill>
+          <a:ln>
+            <a:noFill/>
+          </a:ln>
+        </p:spPr>
+        <p:style>
+          <a:lnRef idx="1">
+            <a:schemeClr val="accent1"/>
+          </a:lnRef>
+          <a:fillRef idx="3">
+            <a:schemeClr val="accent1"/>
+          </a:fillRef>
+          <a:effectRef idx="2">
+            <a:schemeClr val="accent1"/>
+          </a:effectRef>
+          <a:fontRef idx="minor">
+            <a:schemeClr val="lt1"/>
+          </a:fontRef>
+        </p:style>
+        <p:txBody>
+          <a:bodyPr rtlCol="0" anchor="ctr"/>
+          <a:lstStyle/>
+          <a:p>
+            <a:pPr algn="ctr"/>
+          </a:p>
+        </p:txBody>
+      </p:sp>
+      <p:sp>
+        <p:nvSpPr>
+          <p:cNvPr id="9" name="TextBox 8"/>
+          <p:cNvSpPr txBox="1"/>
+          <p:nvPr/>
+        </p:nvSpPr>
+        <p:spPr>
+          <a:xfrm>
+            <a:off x="8641079" y="489204"/>
+            <a:ext cx="329184" cy="228600"/>
+          </a:xfrm>
+          <a:prstGeom prst="rect">
+            <a:avLst/>
+          </a:prstGeom>
+          <a:noFill/>
+        </p:spPr>
+        <p:txBody>
+          <a:bodyPr wrap="square" lIns="0" rIns="0" tIns="0" bIns="0">
+            <a:spAutoFit/>
+          </a:bodyPr>
+          <a:lstStyle/>
+          <a:p>
+            <a:pPr algn="ctr"/>
+            <a:r>
+              <a:rPr sz="950" b="1" i="0">
+                <a:solidFill>
+                  <a:srgbClr val="FFFFFF"/>
+                </a:solidFill>
+                <a:latin typeface="Helvetica Neue"/>
+              </a:rPr>
+              <a:t>2</a:t>
+            </a:r>
+          </a:p>
+        </p:txBody>
+      </p:sp>
+      <p:sp>
+        <p:nvSpPr>
+          <p:cNvPr id="10" name="Rounded Rectangle 9"/>
+          <p:cNvSpPr/>
+          <p:nvPr/>
+        </p:nvSpPr>
+        <p:spPr>
+          <a:xfrm>
+            <a:off x="9171431" y="493776"/>
+            <a:ext cx="219456" cy="219456"/>
+          </a:xfrm>
+          <a:prstGeom prst="roundRect">
+            <a:avLst>
+              <a:gd name="adj" fmla="val 32000"/>
+            </a:avLst>
+          </a:prstGeom>
+          <a:solidFill>
+            <a:srgbClr val="D97706"/>
+          </a:solidFill>
+          <a:ln>
+            <a:noFill/>
+          </a:ln>
+        </p:spPr>
+        <p:style>
+          <a:lnRef idx="1">
+            <a:schemeClr val="accent1"/>
+          </a:lnRef>
+          <a:fillRef idx="3">
+            <a:schemeClr val="accent1"/>
+          </a:fillRef>
+          <a:effectRef idx="2">
+            <a:schemeClr val="accent1"/>
+          </a:effectRef>
+          <a:fontRef idx="minor">
+            <a:schemeClr val="lt1"/>
+          </a:fontRef>
+        </p:style>
+        <p:txBody>
+          <a:bodyPr rtlCol="0" anchor="ctr"/>
+          <a:lstStyle/>
+          <a:p>
+            <a:pPr algn="ctr"/>
+          </a:p>
+        </p:txBody>
+      </p:sp>
+      <p:sp>
+        <p:nvSpPr>
+          <p:cNvPr id="11" name="TextBox 10"/>
+          <p:cNvSpPr txBox="1"/>
+          <p:nvPr/>
+        </p:nvSpPr>
+        <p:spPr>
+          <a:xfrm>
+            <a:off x="9116567" y="489204"/>
+            <a:ext cx="329184" cy="228600"/>
+          </a:xfrm>
+          <a:prstGeom prst="rect">
+            <a:avLst/>
+          </a:prstGeom>
+          <a:noFill/>
+        </p:spPr>
+        <p:txBody>
+          <a:bodyPr wrap="square" lIns="0" rIns="0" tIns="0" bIns="0">
+            <a:spAutoFit/>
+          </a:bodyPr>
+          <a:lstStyle/>
+          <a:p>
+            <a:pPr algn="ctr"/>
+            <a:r>
+              <a:rPr sz="950" b="1" i="0">
+                <a:solidFill>
+                  <a:srgbClr val="FFFFFF"/>
+                </a:solidFill>
+                <a:latin typeface="Helvetica Neue"/>
+              </a:rPr>
+              <a:t>3</a:t>
+            </a:r>
+          </a:p>
+        </p:txBody>
+      </p:sp>
+      <p:sp>
+        <p:nvSpPr>
+          <p:cNvPr id="12" name="Rounded Rectangle 11"/>
+          <p:cNvSpPr/>
+          <p:nvPr/>
+        </p:nvSpPr>
+        <p:spPr>
+          <a:xfrm>
+            <a:off x="9646919" y="493776"/>
+            <a:ext cx="219456" cy="219456"/>
+          </a:xfrm>
+          <a:prstGeom prst="roundRect">
+            <a:avLst>
+              <a:gd name="adj" fmla="val 32000"/>
+            </a:avLst>
+          </a:prstGeom>
+          <a:solidFill>
+            <a:srgbClr val="059669"/>
+          </a:solidFill>
+          <a:ln>
+            <a:noFill/>
+          </a:ln>
+        </p:spPr>
+        <p:style>
+          <a:lnRef idx="1">
+            <a:schemeClr val="accent1"/>
+          </a:lnRef>
+          <a:fillRef idx="3">
+            <a:schemeClr val="accent1"/>
+          </a:fillRef>
+          <a:effectRef idx="2">
+            <a:schemeClr val="accent1"/>
+          </a:effectRef>
+          <a:fontRef idx="minor">
+            <a:schemeClr val="lt1"/>
+          </a:fontRef>
+        </p:style>
+        <p:txBody>
+          <a:bodyPr rtlCol="0" anchor="ctr"/>
+          <a:lstStyle/>
+          <a:p>
+            <a:pPr algn="ctr"/>
+          </a:p>
+        </p:txBody>
+      </p:sp>
+      <p:sp>
+        <p:nvSpPr>
+          <p:cNvPr id="13" name="TextBox 12"/>
+          <p:cNvSpPr txBox="1"/>
+          <p:nvPr/>
+        </p:nvSpPr>
+        <p:spPr>
+          <a:xfrm>
+            <a:off x="9592055" y="489204"/>
+            <a:ext cx="329184" cy="228600"/>
+          </a:xfrm>
+          <a:prstGeom prst="rect">
+            <a:avLst/>
+          </a:prstGeom>
+          <a:noFill/>
+        </p:spPr>
+        <p:txBody>
+          <a:bodyPr wrap="square" lIns="0" rIns="0" tIns="0" bIns="0">
+            <a:spAutoFit/>
+          </a:bodyPr>
+          <a:lstStyle/>
+          <a:p>
+            <a:pPr algn="ctr"/>
+            <a:r>
+              <a:rPr sz="950" b="1" i="0">
+                <a:solidFill>
+                  <a:srgbClr val="FFFFFF"/>
+                </a:solidFill>
+                <a:latin typeface="Helvetica Neue"/>
+              </a:rPr>
+              <a:t>4</a:t>
+            </a:r>
+          </a:p>
+        </p:txBody>
+      </p:sp>
+      <p:sp>
+        <p:nvSpPr>
+          <p:cNvPr id="14" name="Rounded Rectangle 13"/>
+          <p:cNvSpPr/>
+          <p:nvPr/>
+        </p:nvSpPr>
+        <p:spPr>
+          <a:xfrm>
+            <a:off x="10122407" y="493776"/>
+            <a:ext cx="219456" cy="219456"/>
+          </a:xfrm>
+          <a:prstGeom prst="roundRect">
+            <a:avLst>
+              <a:gd name="adj" fmla="val 32000"/>
+            </a:avLst>
+          </a:prstGeom>
+          <a:solidFill>
+            <a:srgbClr val="059669"/>
+          </a:solidFill>
+          <a:ln>
+            <a:noFill/>
+          </a:ln>
+        </p:spPr>
+        <p:style>
+          <a:lnRef idx="1">
+            <a:schemeClr val="accent1"/>
+          </a:lnRef>
+          <a:fillRef idx="3">
+            <a:schemeClr val="accent1"/>
+          </a:fillRef>
+          <a:effectRef idx="2">
+            <a:schemeClr val="accent1"/>
+          </a:effectRef>
+          <a:fontRef idx="minor">
+            <a:schemeClr val="lt1"/>
+          </a:fontRef>
+        </p:style>
+        <p:txBody>
+          <a:bodyPr rtlCol="0" anchor="ctr"/>
+          <a:lstStyle/>
+          <a:p>
+            <a:pPr algn="ctr"/>
+          </a:p>
+        </p:txBody>
+      </p:sp>
+      <p:sp>
+        <p:nvSpPr>
+          <p:cNvPr id="15" name="TextBox 14"/>
+          <p:cNvSpPr txBox="1"/>
+          <p:nvPr/>
+        </p:nvSpPr>
+        <p:spPr>
+          <a:xfrm>
+            <a:off x="10067543" y="489204"/>
+            <a:ext cx="329184" cy="228600"/>
+          </a:xfrm>
+          <a:prstGeom prst="rect">
+            <a:avLst/>
+          </a:prstGeom>
+          <a:noFill/>
+        </p:spPr>
+        <p:txBody>
+          <a:bodyPr wrap="square" lIns="0" rIns="0" tIns="0" bIns="0">
+            <a:spAutoFit/>
+          </a:bodyPr>
+          <a:lstStyle/>
+          <a:p>
+            <a:pPr algn="ctr"/>
+            <a:r>
+              <a:rPr sz="950" b="1" i="0">
+                <a:solidFill>
+                  <a:srgbClr val="FFFFFF"/>
+                </a:solidFill>
+                <a:latin typeface="Helvetica Neue"/>
+              </a:rPr>
+              <a:t>5</a:t>
+            </a:r>
+          </a:p>
+        </p:txBody>
+      </p:sp>
+      <p:sp>
+        <p:nvSpPr>
+          <p:cNvPr id="16" name="Rounded Rectangle 15"/>
+          <p:cNvSpPr/>
+          <p:nvPr/>
+        </p:nvSpPr>
+        <p:spPr>
+          <a:xfrm>
+            <a:off x="10561319" y="457200"/>
+            <a:ext cx="292608" cy="292608"/>
+          </a:xfrm>
+          <a:prstGeom prst="roundRect">
+            <a:avLst>
+              <a:gd name="adj" fmla="val 32000"/>
+            </a:avLst>
+          </a:prstGeom>
+          <a:solidFill>
+            <a:srgbClr val="7C3AED"/>
+          </a:solidFill>
+          <a:ln>
+            <a:noFill/>
+          </a:ln>
+        </p:spPr>
+        <p:style>
+          <a:lnRef idx="1">
+            <a:schemeClr val="accent1"/>
+          </a:lnRef>
+          <a:fillRef idx="3">
+            <a:schemeClr val="accent1"/>
+          </a:fillRef>
+          <a:effectRef idx="2">
+            <a:schemeClr val="accent1"/>
+          </a:effectRef>
+          <a:fontRef idx="minor">
+            <a:schemeClr val="lt1"/>
+          </a:fontRef>
+        </p:style>
+        <p:txBody>
+          <a:bodyPr rtlCol="0" anchor="ctr"/>
+          <a:lstStyle/>
+          <a:p>
+            <a:pPr algn="ctr"/>
+          </a:p>
+        </p:txBody>
+      </p:sp>
+      <p:sp>
+        <p:nvSpPr>
+          <p:cNvPr id="17" name="TextBox 16"/>
+          <p:cNvSpPr txBox="1"/>
+          <p:nvPr/>
+        </p:nvSpPr>
+        <p:spPr>
+          <a:xfrm>
+            <a:off x="10506455" y="489204"/>
+            <a:ext cx="402336" cy="228600"/>
+          </a:xfrm>
+          <a:prstGeom prst="rect">
+            <a:avLst/>
+          </a:prstGeom>
+          <a:noFill/>
+        </p:spPr>
+        <p:txBody>
+          <a:bodyPr wrap="square" lIns="0" rIns="0" tIns="0" bIns="0">
+            <a:spAutoFit/>
+          </a:bodyPr>
+          <a:lstStyle/>
+          <a:p>
+            <a:pPr algn="ctr"/>
+            <a:r>
+              <a:rPr sz="1200" b="1" i="0">
+                <a:solidFill>
+                  <a:srgbClr val="FFFFFF"/>
+                </a:solidFill>
+                <a:latin typeface="Helvetica Neue"/>
+              </a:rPr>
+              <a:t>6</a:t>
+            </a:r>
+          </a:p>
+        </p:txBody>
+      </p:sp>
+      <p:sp>
+        <p:nvSpPr>
+          <p:cNvPr id="18" name="Rounded Rectangle 17"/>
+          <p:cNvSpPr/>
+          <p:nvPr/>
+        </p:nvSpPr>
+        <p:spPr>
+          <a:xfrm>
+            <a:off x="11073384" y="493776"/>
+            <a:ext cx="219456" cy="219456"/>
+          </a:xfrm>
+          <a:prstGeom prst="roundRect">
+            <a:avLst>
+              <a:gd name="adj" fmla="val 32000"/>
+            </a:avLst>
+          </a:prstGeom>
+          <a:solidFill>
+            <a:srgbClr val="E9EBF0"/>
+          </a:solidFill>
+          <a:ln>
+            <a:noFill/>
+          </a:ln>
+        </p:spPr>
+        <p:style>
+          <a:lnRef idx="1">
+            <a:schemeClr val="accent1"/>
+          </a:lnRef>
+          <a:fillRef idx="3">
+            <a:schemeClr val="accent1"/>
+          </a:fillRef>
+          <a:effectRef idx="2">
+            <a:schemeClr val="accent1"/>
+          </a:effectRef>
+          <a:fontRef idx="minor">
+            <a:schemeClr val="lt1"/>
+          </a:fontRef>
+        </p:style>
+        <p:txBody>
+          <a:bodyPr rtlCol="0" anchor="ctr"/>
+          <a:lstStyle/>
+          <a:p>
+            <a:pPr algn="ctr"/>
+          </a:p>
+        </p:txBody>
+      </p:sp>
+      <p:sp>
+        <p:nvSpPr>
+          <p:cNvPr id="19" name="TextBox 18"/>
+          <p:cNvSpPr txBox="1"/>
+          <p:nvPr/>
+        </p:nvSpPr>
+        <p:spPr>
+          <a:xfrm>
+            <a:off x="11018519" y="489204"/>
+            <a:ext cx="329184" cy="228600"/>
+          </a:xfrm>
+          <a:prstGeom prst="rect">
+            <a:avLst/>
+          </a:prstGeom>
+          <a:noFill/>
+        </p:spPr>
+        <p:txBody>
+          <a:bodyPr wrap="square" lIns="0" rIns="0" tIns="0" bIns="0">
+            <a:spAutoFit/>
+          </a:bodyPr>
+          <a:lstStyle/>
+          <a:p>
+            <a:pPr algn="ctr"/>
+            <a:r>
+              <a:rPr sz="950" b="1" i="0">
+                <a:solidFill>
+                  <a:srgbClr val="AEB4BF"/>
+                </a:solidFill>
+                <a:latin typeface="Helvetica Neue"/>
+              </a:rPr>
+              <a:t>7</a:t>
+            </a:r>
+          </a:p>
+        </p:txBody>
+      </p:sp>
+      <p:sp>
+        <p:nvSpPr>
+          <p:cNvPr id="20" name="TextBox 19"/>
           <p:cNvSpPr txBox="1"/>
           <p:nvPr/>
         </p:nvSpPr>
@@ -10794,7 +10794,7 @@
       </p:sp>
       <p:pic>
         <p:nvPicPr>
-          <p:cNvPr id="6" name="Picture 5" descr="fig_circle.png"/>
+          <p:cNvPr id="21" name="Picture 20" descr="d_top.png"/>
           <p:cNvPicPr>
             <a:picLocks noChangeAspect="1"/>
           </p:cNvPicPr>
@@ -10808,8 +10808,8 @@
         </p:blipFill>
         <p:spPr>
           <a:xfrm>
-            <a:off x="1804154" y="2011680"/>
-            <a:ext cx="8583385" cy="3794759"/>
+            <a:off x="518007" y="3015360"/>
+            <a:ext cx="11155680" cy="2290319"/>
           </a:xfrm>
           <a:prstGeom prst="rect">
             <a:avLst/>
@@ -10818,35 +10818,195 @@
       </p:pic>
       <p:sp>
         <p:nvSpPr>
-          <p:cNvPr id="7" name="TextBox 6"/>
-          <p:cNvSpPr txBox="1"/>
-          <p:nvPr/>
-        </p:nvSpPr>
-        <p:spPr>
-          <a:xfrm>
-            <a:off x="640080" y="5943600"/>
-            <a:ext cx="10881360" cy="457200"/>
-          </a:xfrm>
-          <a:prstGeom prst="rect">
-            <a:avLst/>
-          </a:prstGeom>
-          <a:noFill/>
-        </p:spPr>
-        <p:txBody>
-          <a:bodyPr wrap="square" lIns="0" rIns="0" tIns="0" bIns="0">
-            <a:spAutoFit/>
-          </a:bodyPr>
-          <a:lstStyle/>
-          <a:p>
-            <a:pPr algn="ctr"/>
-            <a:r>
-              <a:rPr sz="1800" b="1" i="0">
-                <a:solidFill>
-                  <a:srgbClr val="0F172A"/>
-                </a:solidFill>
-                <a:latin typeface="Helvetica Neue"/>
-              </a:rPr>
-              <a:t>240 labels chosen well reached 93% of the score obtained by labelling all 1,400 tickets.</a:t>
+          <p:cNvPr id="22" name="Rounded Rectangle 21"/>
+          <p:cNvSpPr/>
+          <p:nvPr/>
+        </p:nvSpPr>
+        <p:spPr>
+          <a:xfrm>
+            <a:off x="6104534" y="6345936"/>
+            <a:ext cx="5447080" cy="365760"/>
+          </a:xfrm>
+          <a:prstGeom prst="roundRect">
+            <a:avLst>
+              <a:gd name="adj" fmla="val 44000"/>
+            </a:avLst>
+          </a:prstGeom>
+          <a:solidFill>
+            <a:srgbClr val="059669"/>
+          </a:solidFill>
+          <a:ln>
+            <a:noFill/>
+          </a:ln>
+        </p:spPr>
+        <p:style>
+          <a:lnRef idx="1">
+            <a:schemeClr val="accent1"/>
+          </a:lnRef>
+          <a:fillRef idx="3">
+            <a:schemeClr val="accent1"/>
+          </a:fillRef>
+          <a:effectRef idx="2">
+            <a:schemeClr val="accent1"/>
+          </a:effectRef>
+          <a:fontRef idx="minor">
+            <a:schemeClr val="lt1"/>
+          </a:fontRef>
+        </p:style>
+        <p:txBody>
+          <a:bodyPr rtlCol="0" anchor="ctr"/>
+          <a:lstStyle/>
+          <a:p>
+            <a:pPr algn="ctr"/>
+          </a:p>
+        </p:txBody>
+      </p:sp>
+      <p:sp>
+        <p:nvSpPr>
+          <p:cNvPr id="23" name="Rounded Rectangle 22"/>
+          <p:cNvSpPr/>
+          <p:nvPr/>
+        </p:nvSpPr>
+        <p:spPr>
+          <a:xfrm>
+            <a:off x="7146950" y="6396228"/>
+            <a:ext cx="754380" cy="265176"/>
+          </a:xfrm>
+          <a:prstGeom prst="roundRect">
+            <a:avLst>
+              <a:gd name="adj" fmla="val 44000"/>
+            </a:avLst>
+          </a:prstGeom>
+          <a:solidFill>
+            <a:srgbClr val="064E3B"/>
+          </a:solidFill>
+          <a:ln>
+            <a:noFill/>
+          </a:ln>
+        </p:spPr>
+        <p:style>
+          <a:lnRef idx="1">
+            <a:schemeClr val="accent1"/>
+          </a:lnRef>
+          <a:fillRef idx="3">
+            <a:schemeClr val="accent1"/>
+          </a:fillRef>
+          <a:effectRef idx="2">
+            <a:schemeClr val="accent1"/>
+          </a:effectRef>
+          <a:fontRef idx="minor">
+            <a:schemeClr val="lt1"/>
+          </a:fontRef>
+        </p:style>
+        <p:txBody>
+          <a:bodyPr rtlCol="0" anchor="ctr"/>
+          <a:lstStyle/>
+          <a:p>
+            <a:pPr algn="ctr"/>
+          </a:p>
+        </p:txBody>
+      </p:sp>
+      <p:sp>
+        <p:nvSpPr>
+          <p:cNvPr id="24" name="TextBox 23"/>
+          <p:cNvSpPr txBox="1"/>
+          <p:nvPr/>
+        </p:nvSpPr>
+        <p:spPr>
+          <a:xfrm>
+            <a:off x="6259982" y="6460236"/>
+            <a:ext cx="914400" cy="219456"/>
+          </a:xfrm>
+          <a:prstGeom prst="rect">
+            <a:avLst/>
+          </a:prstGeom>
+          <a:noFill/>
+        </p:spPr>
+        <p:txBody>
+          <a:bodyPr wrap="none" lIns="0" rIns="0" tIns="0" bIns="0">
+            <a:spAutoFit/>
+          </a:bodyPr>
+          <a:lstStyle/>
+          <a:p>
+            <a:pPr algn="l"/>
+            <a:r>
+              <a:rPr sz="950" b="1" i="0">
+                <a:solidFill>
+                  <a:srgbClr val="A7F3D0"/>
+                </a:solidFill>
+                <a:latin typeface="Helvetica Neue"/>
+              </a:rPr>
+              <a:t>▶ NOTEBOOK</a:t>
+            </a:r>
+          </a:p>
+        </p:txBody>
+      </p:sp>
+      <p:sp>
+        <p:nvSpPr>
+          <p:cNvPr id="25" name="TextBox 24"/>
+          <p:cNvSpPr txBox="1"/>
+          <p:nvPr/>
+        </p:nvSpPr>
+        <p:spPr>
+          <a:xfrm>
+            <a:off x="7146950" y="6451092"/>
+            <a:ext cx="754380" cy="219456"/>
+          </a:xfrm>
+          <a:prstGeom prst="rect">
+            <a:avLst/>
+          </a:prstGeom>
+          <a:noFill/>
+        </p:spPr>
+        <p:txBody>
+          <a:bodyPr wrap="none" lIns="0" rIns="0" tIns="0" bIns="0">
+            <a:spAutoFit/>
+          </a:bodyPr>
+          <a:lstStyle/>
+          <a:p>
+            <a:pPr algn="ctr"/>
+            <a:r>
+              <a:rPr sz="1100" b="1" i="0">
+                <a:solidFill>
+                  <a:srgbClr val="FFFFFF"/>
+                </a:solidFill>
+                <a:latin typeface="Helvetica Neue"/>
+              </a:rPr>
+              <a:t>STEP 20</a:t>
+            </a:r>
+          </a:p>
+        </p:txBody>
+      </p:sp>
+      <p:sp>
+        <p:nvSpPr>
+          <p:cNvPr id="26" name="TextBox 25"/>
+          <p:cNvSpPr txBox="1"/>
+          <p:nvPr/>
+        </p:nvSpPr>
+        <p:spPr>
+          <a:xfrm>
+            <a:off x="8020202" y="6460236"/>
+            <a:ext cx="3430828" cy="219456"/>
+          </a:xfrm>
+          <a:prstGeom prst="rect">
+            <a:avLst/>
+          </a:prstGeom>
+          <a:noFill/>
+        </p:spPr>
+        <p:txBody>
+          <a:bodyPr wrap="none" lIns="0" rIns="0" tIns="0" bIns="0">
+            <a:spAutoFit/>
+          </a:bodyPr>
+          <a:lstStyle/>
+          <a:p>
+            <a:pPr algn="l"/>
+            <a:r>
+              <a:rPr sz="1000" b="1" i="0">
+                <a:solidFill>
+                  <a:srgbClr val="FFFFFF"/>
+                </a:solidFill>
+                <a:latin typeface="Helvetica Neue"/>
+              </a:rPr>
+              <a:t>RUNGS 6 and 7: should Cobalt train its own?</a:t>
             </a:r>
           </a:p>
         </p:txBody>
@@ -10934,7 +11094,7 @@
                 </a:solidFill>
                 <a:latin typeface="Helvetica Neue"/>
               </a:rPr>
-              <a:t>Four things you can apply at work</a:t>
+              <a:t>Every result from both lectures on one axis</a:t>
             </a:r>
           </a:p>
         </p:txBody>
@@ -10942,6 +11102,41 @@
       <p:sp>
         <p:nvSpPr>
           <p:cNvPr id="4" name="TextBox 3"/>
+          <p:cNvSpPr txBox="1"/>
+          <p:nvPr/>
+        </p:nvSpPr>
+        <p:spPr>
+          <a:xfrm>
+            <a:off x="640080" y="1417320"/>
+            <a:ext cx="10424160" cy="457200"/>
+          </a:xfrm>
+          <a:prstGeom prst="rect">
+            <a:avLst/>
+          </a:prstGeom>
+          <a:noFill/>
+        </p:spPr>
+        <p:txBody>
+          <a:bodyPr wrap="square" lIns="0" rIns="0" tIns="0" bIns="0">
+            <a:spAutoFit/>
+          </a:bodyPr>
+          <a:lstStyle/>
+          <a:p>
+            <a:pPr algn="l"/>
+            <a:r>
+              <a:rPr sz="1500" b="0" i="0">
+                <a:solidFill>
+                  <a:srgbClr val="475569"/>
+                </a:solidFill>
+                <a:latin typeface="Helvetica Neue"/>
+              </a:rPr>
+              <a:t>Macro-F1 with no labels, with 240 labels chosen badly, 240 chosen at random, 240 chosen well, and with all 1,400 labelled.</a:t>
+            </a:r>
+          </a:p>
+        </p:txBody>
+      </p:sp>
+      <p:sp>
+        <p:nvSpPr>
+          <p:cNvPr id="5" name="TextBox 4"/>
           <p:cNvSpPr txBox="1"/>
           <p:nvPr/>
         </p:nvSpPr>
@@ -10974,94 +11169,30 @@
           </a:p>
         </p:txBody>
       </p:sp>
-      <p:sp>
-        <p:nvSpPr>
-          <p:cNvPr id="5" name="Rounded Rectangle 4"/>
-          <p:cNvSpPr/>
-          <p:nvPr/>
-        </p:nvSpPr>
-        <p:spPr>
-          <a:xfrm>
-            <a:off x="640080" y="2057400"/>
-            <a:ext cx="10908792" cy="914400"/>
-          </a:xfrm>
-          <a:prstGeom prst="roundRect">
-            <a:avLst/>
-          </a:prstGeom>
-          <a:solidFill>
-            <a:srgbClr val="FFFFFF"/>
-          </a:solidFill>
-          <a:ln>
-            <a:solidFill>
-              <a:srgbClr val="EEF1F6"/>
-            </a:solidFill>
-          </a:ln>
-        </p:spPr>
-        <p:style>
-          <a:lnRef idx="1">
-            <a:schemeClr val="accent1"/>
-          </a:lnRef>
-          <a:fillRef idx="3">
-            <a:schemeClr val="accent1"/>
-          </a:fillRef>
-          <a:effectRef idx="2">
-            <a:schemeClr val="accent1"/>
-          </a:effectRef>
-          <a:fontRef idx="minor">
-            <a:schemeClr val="lt1"/>
-          </a:fontRef>
-        </p:style>
-        <p:txBody>
-          <a:bodyPr rtlCol="0" anchor="ctr"/>
-          <a:lstStyle/>
-          <a:p>
-            <a:pPr algn="ctr"/>
-          </a:p>
-        </p:txBody>
-      </p:sp>
-      <p:sp>
-        <p:nvSpPr>
-          <p:cNvPr id="6" name="Rounded Rectangle 5"/>
-          <p:cNvSpPr/>
-          <p:nvPr/>
-        </p:nvSpPr>
-        <p:spPr>
-          <a:xfrm>
-            <a:off x="841247" y="2295144"/>
-            <a:ext cx="402336" cy="402336"/>
-          </a:xfrm>
-          <a:prstGeom prst="roundRect">
-            <a:avLst/>
-          </a:prstGeom>
-          <a:solidFill>
-            <a:srgbClr val="4F46E5"/>
-          </a:solidFill>
-          <a:ln>
-            <a:noFill/>
-          </a:ln>
-        </p:spPr>
-        <p:style>
-          <a:lnRef idx="1">
-            <a:schemeClr val="accent1"/>
-          </a:lnRef>
-          <a:fillRef idx="3">
-            <a:schemeClr val="accent1"/>
-          </a:fillRef>
-          <a:effectRef idx="2">
-            <a:schemeClr val="accent1"/>
-          </a:effectRef>
-          <a:fontRef idx="minor">
-            <a:schemeClr val="lt1"/>
-          </a:fontRef>
-        </p:style>
-        <p:txBody>
-          <a:bodyPr rtlCol="0" anchor="ctr"/>
-          <a:lstStyle/>
-          <a:p>
-            <a:pPr algn="ctr"/>
-          </a:p>
-        </p:txBody>
-      </p:sp>
+      <p:pic>
+        <p:nvPicPr>
+          <p:cNvPr id="6" name="Picture 5" descr="fig_circle.png"/>
+          <p:cNvPicPr>
+            <a:picLocks noChangeAspect="1"/>
+          </p:cNvPicPr>
+          <p:nvPr/>
+        </p:nvPicPr>
+        <p:blipFill>
+          <a:blip r:embed="rId2"/>
+          <a:stretch>
+            <a:fillRect/>
+          </a:stretch>
+        </p:blipFill>
+        <p:spPr>
+          <a:xfrm>
+            <a:off x="1804154" y="2011680"/>
+            <a:ext cx="8583385" cy="3794759"/>
+          </a:xfrm>
+          <a:prstGeom prst="rect">
+            <a:avLst/>
+          </a:prstGeom>
+        </p:spPr>
+      </p:pic>
       <p:sp>
         <p:nvSpPr>
           <p:cNvPr id="7" name="TextBox 6"/>
@@ -11070,56 +11201,21 @@
         </p:nvSpPr>
         <p:spPr>
           <a:xfrm>
-            <a:off x="841247" y="2368296"/>
-            <a:ext cx="402336" cy="274320"/>
-          </a:xfrm>
-          <a:prstGeom prst="rect">
-            <a:avLst/>
-          </a:prstGeom>
-          <a:noFill/>
-        </p:spPr>
-        <p:txBody>
-          <a:bodyPr wrap="square" lIns="0" rIns="0" tIns="0" bIns="0">
-            <a:spAutoFit/>
-          </a:bodyPr>
-          <a:lstStyle/>
-          <a:p>
-            <a:pPr algn="ctr"/>
-            <a:r>
-              <a:rPr sz="1500" b="1" i="0">
-                <a:solidFill>
-                  <a:srgbClr val="FFFFFF"/>
-                </a:solidFill>
-                <a:latin typeface="Helvetica Neue"/>
-              </a:rPr>
-              <a:t>1</a:t>
-            </a:r>
-          </a:p>
-        </p:txBody>
-      </p:sp>
-      <p:sp>
-        <p:nvSpPr>
-          <p:cNvPr id="8" name="TextBox 7"/>
-          <p:cNvSpPr txBox="1"/>
-          <p:nvPr/>
-        </p:nvSpPr>
-        <p:spPr>
-          <a:xfrm>
-            <a:off x="1417319" y="2231136"/>
-            <a:ext cx="9875520" cy="274320"/>
-          </a:xfrm>
-          <a:prstGeom prst="rect">
-            <a:avLst/>
-          </a:prstGeom>
-          <a:noFill/>
-        </p:spPr>
-        <p:txBody>
-          <a:bodyPr wrap="square" lIns="0" rIns="0" tIns="0" bIns="0">
-            <a:spAutoFit/>
-          </a:bodyPr>
-          <a:lstStyle/>
-          <a:p>
-            <a:pPr algn="l"/>
+            <a:off x="640080" y="5943600"/>
+            <a:ext cx="10881360" cy="457200"/>
+          </a:xfrm>
+          <a:prstGeom prst="rect">
+            <a:avLst/>
+          </a:prstGeom>
+          <a:noFill/>
+        </p:spPr>
+        <p:txBody>
+          <a:bodyPr wrap="square" lIns="0" rIns="0" tIns="0" bIns="0">
+            <a:spAutoFit/>
+          </a:bodyPr>
+          <a:lstStyle/>
+          <a:p>
+            <a:pPr algn="ctr"/>
             <a:r>
               <a:rPr sz="1800" b="1" i="0">
                 <a:solidFill>
@@ -11127,621 +11223,7 @@
                 </a:solidFill>
                 <a:latin typeface="Helvetica Neue"/>
               </a:rPr>
-              <a:t>Plot the learning curve before committing to a labelling project</a:t>
-            </a:r>
-          </a:p>
-        </p:txBody>
-      </p:sp>
-      <p:sp>
-        <p:nvSpPr>
-          <p:cNvPr id="9" name="TextBox 8"/>
-          <p:cNvSpPr txBox="1"/>
-          <p:nvPr/>
-        </p:nvSpPr>
-        <p:spPr>
-          <a:xfrm>
-            <a:off x="1417319" y="2532888"/>
-            <a:ext cx="9875520" cy="384048"/>
-          </a:xfrm>
-          <a:prstGeom prst="rect">
-            <a:avLst/>
-          </a:prstGeom>
-          <a:noFill/>
-        </p:spPr>
-        <p:txBody>
-          <a:bodyPr wrap="square" lIns="0" rIns="0" tIns="0" bIns="0">
-            <a:spAutoFit/>
-          </a:bodyPr>
-          <a:lstStyle/>
-          <a:p>
-            <a:pPr algn="l"/>
-            <a:r>
-              <a:rPr sz="1350" b="0" i="0">
-                <a:solidFill>
-                  <a:srgbClr val="475569"/>
-                </a:solidFill>
-                <a:latin typeface="Helvetica Neue"/>
-              </a:rPr>
-              <a:t>Label a few hundred examples, plot the score against the number of labels, and find where the curve flattens. That point, not a fixed target, is where labelling should stop.</a:t>
-            </a:r>
-          </a:p>
-        </p:txBody>
-      </p:sp>
-      <p:sp>
-        <p:nvSpPr>
-          <p:cNvPr id="10" name="Rounded Rectangle 9"/>
-          <p:cNvSpPr/>
-          <p:nvPr/>
-        </p:nvSpPr>
-        <p:spPr>
-          <a:xfrm>
-            <a:off x="640080" y="3099815"/>
-            <a:ext cx="10908792" cy="914400"/>
-          </a:xfrm>
-          <a:prstGeom prst="roundRect">
-            <a:avLst/>
-          </a:prstGeom>
-          <a:solidFill>
-            <a:srgbClr val="FFFFFF"/>
-          </a:solidFill>
-          <a:ln>
-            <a:solidFill>
-              <a:srgbClr val="EEF1F6"/>
-            </a:solidFill>
-          </a:ln>
-        </p:spPr>
-        <p:style>
-          <a:lnRef idx="1">
-            <a:schemeClr val="accent1"/>
-          </a:lnRef>
-          <a:fillRef idx="3">
-            <a:schemeClr val="accent1"/>
-          </a:fillRef>
-          <a:effectRef idx="2">
-            <a:schemeClr val="accent1"/>
-          </a:effectRef>
-          <a:fontRef idx="minor">
-            <a:schemeClr val="lt1"/>
-          </a:fontRef>
-        </p:style>
-        <p:txBody>
-          <a:bodyPr rtlCol="0" anchor="ctr"/>
-          <a:lstStyle/>
-          <a:p>
-            <a:pPr algn="ctr"/>
-          </a:p>
-        </p:txBody>
-      </p:sp>
-      <p:sp>
-        <p:nvSpPr>
-          <p:cNvPr id="11" name="Rounded Rectangle 10"/>
-          <p:cNvSpPr/>
-          <p:nvPr/>
-        </p:nvSpPr>
-        <p:spPr>
-          <a:xfrm>
-            <a:off x="841247" y="3337559"/>
-            <a:ext cx="402336" cy="402336"/>
-          </a:xfrm>
-          <a:prstGeom prst="roundRect">
-            <a:avLst/>
-          </a:prstGeom>
-          <a:solidFill>
-            <a:srgbClr val="4F46E5"/>
-          </a:solidFill>
-          <a:ln>
-            <a:noFill/>
-          </a:ln>
-        </p:spPr>
-        <p:style>
-          <a:lnRef idx="1">
-            <a:schemeClr val="accent1"/>
-          </a:lnRef>
-          <a:fillRef idx="3">
-            <a:schemeClr val="accent1"/>
-          </a:fillRef>
-          <a:effectRef idx="2">
-            <a:schemeClr val="accent1"/>
-          </a:effectRef>
-          <a:fontRef idx="minor">
-            <a:schemeClr val="lt1"/>
-          </a:fontRef>
-        </p:style>
-        <p:txBody>
-          <a:bodyPr rtlCol="0" anchor="ctr"/>
-          <a:lstStyle/>
-          <a:p>
-            <a:pPr algn="ctr"/>
-          </a:p>
-        </p:txBody>
-      </p:sp>
-      <p:sp>
-        <p:nvSpPr>
-          <p:cNvPr id="12" name="TextBox 11"/>
-          <p:cNvSpPr txBox="1"/>
-          <p:nvPr/>
-        </p:nvSpPr>
-        <p:spPr>
-          <a:xfrm>
-            <a:off x="841247" y="3410711"/>
-            <a:ext cx="402336" cy="274320"/>
-          </a:xfrm>
-          <a:prstGeom prst="rect">
-            <a:avLst/>
-          </a:prstGeom>
-          <a:noFill/>
-        </p:spPr>
-        <p:txBody>
-          <a:bodyPr wrap="square" lIns="0" rIns="0" tIns="0" bIns="0">
-            <a:spAutoFit/>
-          </a:bodyPr>
-          <a:lstStyle/>
-          <a:p>
-            <a:pPr algn="ctr"/>
-            <a:r>
-              <a:rPr sz="1500" b="1" i="0">
-                <a:solidFill>
-                  <a:srgbClr val="FFFFFF"/>
-                </a:solidFill>
-                <a:latin typeface="Helvetica Neue"/>
-              </a:rPr>
-              <a:t>2</a:t>
-            </a:r>
-          </a:p>
-        </p:txBody>
-      </p:sp>
-      <p:sp>
-        <p:nvSpPr>
-          <p:cNvPr id="13" name="TextBox 12"/>
-          <p:cNvSpPr txBox="1"/>
-          <p:nvPr/>
-        </p:nvSpPr>
-        <p:spPr>
-          <a:xfrm>
-            <a:off x="1417319" y="3273551"/>
-            <a:ext cx="9875520" cy="274320"/>
-          </a:xfrm>
-          <a:prstGeom prst="rect">
-            <a:avLst/>
-          </a:prstGeom>
-          <a:noFill/>
-        </p:spPr>
-        <p:txBody>
-          <a:bodyPr wrap="square" lIns="0" rIns="0" tIns="0" bIns="0">
-            <a:spAutoFit/>
-          </a:bodyPr>
-          <a:lstStyle/>
-          <a:p>
-            <a:pPr algn="l"/>
-            <a:r>
-              <a:rPr sz="1800" b="1" i="0">
-                <a:solidFill>
-                  <a:srgbClr val="0F172A"/>
-                </a:solidFill>
-                <a:latin typeface="Helvetica Neue"/>
-              </a:rPr>
-              <a:t>Test the frozen-encoder option before approving a fine-tune</a:t>
-            </a:r>
-          </a:p>
-        </p:txBody>
-      </p:sp>
-      <p:sp>
-        <p:nvSpPr>
-          <p:cNvPr id="14" name="TextBox 13"/>
-          <p:cNvSpPr txBox="1"/>
-          <p:nvPr/>
-        </p:nvSpPr>
-        <p:spPr>
-          <a:xfrm>
-            <a:off x="1417319" y="3575303"/>
-            <a:ext cx="9875520" cy="384048"/>
-          </a:xfrm>
-          <a:prstGeom prst="rect">
-            <a:avLst/>
-          </a:prstGeom>
-          <a:noFill/>
-        </p:spPr>
-        <p:txBody>
-          <a:bodyPr wrap="square" lIns="0" rIns="0" tIns="0" bIns="0">
-            <a:spAutoFit/>
-          </a:bodyPr>
-          <a:lstStyle/>
-          <a:p>
-            <a:pPr algn="l"/>
-            <a:r>
-              <a:rPr sz="1350" b="0" i="0">
-                <a:solidFill>
-                  <a:srgbClr val="475569"/>
-                </a:solidFill>
-                <a:latin typeface="Helvetica Neue"/>
-              </a:rPr>
-              <a:t>Frozen embeddings with a simple classifier is faster and cheaper, and at these data sizes it scored higher. Require the more expensive option to demonstrate an improvement.</a:t>
-            </a:r>
-          </a:p>
-        </p:txBody>
-      </p:sp>
-      <p:sp>
-        <p:nvSpPr>
-          <p:cNvPr id="15" name="Rounded Rectangle 14"/>
-          <p:cNvSpPr/>
-          <p:nvPr/>
-        </p:nvSpPr>
-        <p:spPr>
-          <a:xfrm>
-            <a:off x="640080" y="4142231"/>
-            <a:ext cx="10908792" cy="914400"/>
-          </a:xfrm>
-          <a:prstGeom prst="roundRect">
-            <a:avLst/>
-          </a:prstGeom>
-          <a:solidFill>
-            <a:srgbClr val="FFFFFF"/>
-          </a:solidFill>
-          <a:ln>
-            <a:solidFill>
-              <a:srgbClr val="EEF1F6"/>
-            </a:solidFill>
-          </a:ln>
-        </p:spPr>
-        <p:style>
-          <a:lnRef idx="1">
-            <a:schemeClr val="accent1"/>
-          </a:lnRef>
-          <a:fillRef idx="3">
-            <a:schemeClr val="accent1"/>
-          </a:fillRef>
-          <a:effectRef idx="2">
-            <a:schemeClr val="accent1"/>
-          </a:effectRef>
-          <a:fontRef idx="minor">
-            <a:schemeClr val="lt1"/>
-          </a:fontRef>
-        </p:style>
-        <p:txBody>
-          <a:bodyPr rtlCol="0" anchor="ctr"/>
-          <a:lstStyle/>
-          <a:p>
-            <a:pPr algn="ctr"/>
-          </a:p>
-        </p:txBody>
-      </p:sp>
-      <p:sp>
-        <p:nvSpPr>
-          <p:cNvPr id="16" name="Rounded Rectangle 15"/>
-          <p:cNvSpPr/>
-          <p:nvPr/>
-        </p:nvSpPr>
-        <p:spPr>
-          <a:xfrm>
-            <a:off x="841247" y="4379975"/>
-            <a:ext cx="402336" cy="402336"/>
-          </a:xfrm>
-          <a:prstGeom prst="roundRect">
-            <a:avLst/>
-          </a:prstGeom>
-          <a:solidFill>
-            <a:srgbClr val="4F46E5"/>
-          </a:solidFill>
-          <a:ln>
-            <a:noFill/>
-          </a:ln>
-        </p:spPr>
-        <p:style>
-          <a:lnRef idx="1">
-            <a:schemeClr val="accent1"/>
-          </a:lnRef>
-          <a:fillRef idx="3">
-            <a:schemeClr val="accent1"/>
-          </a:fillRef>
-          <a:effectRef idx="2">
-            <a:schemeClr val="accent1"/>
-          </a:effectRef>
-          <a:fontRef idx="minor">
-            <a:schemeClr val="lt1"/>
-          </a:fontRef>
-        </p:style>
-        <p:txBody>
-          <a:bodyPr rtlCol="0" anchor="ctr"/>
-          <a:lstStyle/>
-          <a:p>
-            <a:pPr algn="ctr"/>
-          </a:p>
-        </p:txBody>
-      </p:sp>
-      <p:sp>
-        <p:nvSpPr>
-          <p:cNvPr id="17" name="TextBox 16"/>
-          <p:cNvSpPr txBox="1"/>
-          <p:nvPr/>
-        </p:nvSpPr>
-        <p:spPr>
-          <a:xfrm>
-            <a:off x="841247" y="4453127"/>
-            <a:ext cx="402336" cy="274320"/>
-          </a:xfrm>
-          <a:prstGeom prst="rect">
-            <a:avLst/>
-          </a:prstGeom>
-          <a:noFill/>
-        </p:spPr>
-        <p:txBody>
-          <a:bodyPr wrap="square" lIns="0" rIns="0" tIns="0" bIns="0">
-            <a:spAutoFit/>
-          </a:bodyPr>
-          <a:lstStyle/>
-          <a:p>
-            <a:pPr algn="ctr"/>
-            <a:r>
-              <a:rPr sz="1500" b="1" i="0">
-                <a:solidFill>
-                  <a:srgbClr val="FFFFFF"/>
-                </a:solidFill>
-                <a:latin typeface="Helvetica Neue"/>
-              </a:rPr>
-              <a:t>3</a:t>
-            </a:r>
-          </a:p>
-        </p:txBody>
-      </p:sp>
-      <p:sp>
-        <p:nvSpPr>
-          <p:cNvPr id="18" name="TextBox 17"/>
-          <p:cNvSpPr txBox="1"/>
-          <p:nvPr/>
-        </p:nvSpPr>
-        <p:spPr>
-          <a:xfrm>
-            <a:off x="1417319" y="4315968"/>
-            <a:ext cx="9875520" cy="274320"/>
-          </a:xfrm>
-          <a:prstGeom prst="rect">
-            <a:avLst/>
-          </a:prstGeom>
-          <a:noFill/>
-        </p:spPr>
-        <p:txBody>
-          <a:bodyPr wrap="square" lIns="0" rIns="0" tIns="0" bIns="0">
-            <a:spAutoFit/>
-          </a:bodyPr>
-          <a:lstStyle/>
-          <a:p>
-            <a:pPr algn="l"/>
-            <a:r>
-              <a:rPr sz="1800" b="1" i="0">
-                <a:solidFill>
-                  <a:srgbClr val="0F172A"/>
-                </a:solidFill>
-                <a:latin typeface="Helvetica Neue"/>
-              </a:rPr>
-              <a:t>Check the class distribution of the training data you selected</a:t>
-            </a:r>
-          </a:p>
-        </p:txBody>
-      </p:sp>
-      <p:sp>
-        <p:nvSpPr>
-          <p:cNvPr id="19" name="TextBox 18"/>
-          <p:cNvSpPr txBox="1"/>
-          <p:nvPr/>
-        </p:nvSpPr>
-        <p:spPr>
-          <a:xfrm>
-            <a:off x="1417319" y="4617719"/>
-            <a:ext cx="9875520" cy="384048"/>
-          </a:xfrm>
-          <a:prstGeom prst="rect">
-            <a:avLst/>
-          </a:prstGeom>
-          <a:noFill/>
-        </p:spPr>
-        <p:txBody>
-          <a:bodyPr wrap="square" lIns="0" rIns="0" tIns="0" bIns="0">
-            <a:spAutoFit/>
-          </a:bodyPr>
-          <a:lstStyle/>
-          <a:p>
-            <a:pPr algn="l"/>
-            <a:r>
-              <a:rPr sz="1350" b="0" i="0">
-                <a:solidFill>
-                  <a:srgbClr val="475569"/>
-                </a:solidFill>
-                <a:latin typeface="Helvetica Neue"/>
-              </a:rPr>
-              <a:t>The selection rule determines the class mix, and the class mix determines where the model will fail. Inspect the counts per category before training.</a:t>
-            </a:r>
-          </a:p>
-        </p:txBody>
-      </p:sp>
-      <p:sp>
-        <p:nvSpPr>
-          <p:cNvPr id="20" name="Rounded Rectangle 19"/>
-          <p:cNvSpPr/>
-          <p:nvPr/>
-        </p:nvSpPr>
-        <p:spPr>
-          <a:xfrm>
-            <a:off x="640080" y="5184648"/>
-            <a:ext cx="10908792" cy="914400"/>
-          </a:xfrm>
-          <a:prstGeom prst="roundRect">
-            <a:avLst/>
-          </a:prstGeom>
-          <a:solidFill>
-            <a:srgbClr val="FFFFFF"/>
-          </a:solidFill>
-          <a:ln>
-            <a:solidFill>
-              <a:srgbClr val="EEF1F6"/>
-            </a:solidFill>
-          </a:ln>
-        </p:spPr>
-        <p:style>
-          <a:lnRef idx="1">
-            <a:schemeClr val="accent1"/>
-          </a:lnRef>
-          <a:fillRef idx="3">
-            <a:schemeClr val="accent1"/>
-          </a:fillRef>
-          <a:effectRef idx="2">
-            <a:schemeClr val="accent1"/>
-          </a:effectRef>
-          <a:fontRef idx="minor">
-            <a:schemeClr val="lt1"/>
-          </a:fontRef>
-        </p:style>
-        <p:txBody>
-          <a:bodyPr rtlCol="0" anchor="ctr"/>
-          <a:lstStyle/>
-          <a:p>
-            <a:pPr algn="ctr"/>
-          </a:p>
-        </p:txBody>
-      </p:sp>
-      <p:sp>
-        <p:nvSpPr>
-          <p:cNvPr id="21" name="Rounded Rectangle 20"/>
-          <p:cNvSpPr/>
-          <p:nvPr/>
-        </p:nvSpPr>
-        <p:spPr>
-          <a:xfrm>
-            <a:off x="841247" y="5422392"/>
-            <a:ext cx="402336" cy="402336"/>
-          </a:xfrm>
-          <a:prstGeom prst="roundRect">
-            <a:avLst/>
-          </a:prstGeom>
-          <a:solidFill>
-            <a:srgbClr val="4F46E5"/>
-          </a:solidFill>
-          <a:ln>
-            <a:noFill/>
-          </a:ln>
-        </p:spPr>
-        <p:style>
-          <a:lnRef idx="1">
-            <a:schemeClr val="accent1"/>
-          </a:lnRef>
-          <a:fillRef idx="3">
-            <a:schemeClr val="accent1"/>
-          </a:fillRef>
-          <a:effectRef idx="2">
-            <a:schemeClr val="accent1"/>
-          </a:effectRef>
-          <a:fontRef idx="minor">
-            <a:schemeClr val="lt1"/>
-          </a:fontRef>
-        </p:style>
-        <p:txBody>
-          <a:bodyPr rtlCol="0" anchor="ctr"/>
-          <a:lstStyle/>
-          <a:p>
-            <a:pPr algn="ctr"/>
-          </a:p>
-        </p:txBody>
-      </p:sp>
-      <p:sp>
-        <p:nvSpPr>
-          <p:cNvPr id="22" name="TextBox 21"/>
-          <p:cNvSpPr txBox="1"/>
-          <p:nvPr/>
-        </p:nvSpPr>
-        <p:spPr>
-          <a:xfrm>
-            <a:off x="841247" y="5495544"/>
-            <a:ext cx="402336" cy="274320"/>
-          </a:xfrm>
-          <a:prstGeom prst="rect">
-            <a:avLst/>
-          </a:prstGeom>
-          <a:noFill/>
-        </p:spPr>
-        <p:txBody>
-          <a:bodyPr wrap="square" lIns="0" rIns="0" tIns="0" bIns="0">
-            <a:spAutoFit/>
-          </a:bodyPr>
-          <a:lstStyle/>
-          <a:p>
-            <a:pPr algn="ctr"/>
-            <a:r>
-              <a:rPr sz="1500" b="1" i="0">
-                <a:solidFill>
-                  <a:srgbClr val="FFFFFF"/>
-                </a:solidFill>
-                <a:latin typeface="Helvetica Neue"/>
-              </a:rPr>
-              <a:t>4</a:t>
-            </a:r>
-          </a:p>
-        </p:txBody>
-      </p:sp>
-      <p:sp>
-        <p:nvSpPr>
-          <p:cNvPr id="23" name="TextBox 22"/>
-          <p:cNvSpPr txBox="1"/>
-          <p:nvPr/>
-        </p:nvSpPr>
-        <p:spPr>
-          <a:xfrm>
-            <a:off x="1417319" y="5358384"/>
-            <a:ext cx="9875520" cy="274320"/>
-          </a:xfrm>
-          <a:prstGeom prst="rect">
-            <a:avLst/>
-          </a:prstGeom>
-          <a:noFill/>
-        </p:spPr>
-        <p:txBody>
-          <a:bodyPr wrap="square" lIns="0" rIns="0" tIns="0" bIns="0">
-            <a:spAutoFit/>
-          </a:bodyPr>
-          <a:lstStyle/>
-          <a:p>
-            <a:pPr algn="l"/>
-            <a:r>
-              <a:rPr sz="1800" b="1" i="0">
-                <a:solidFill>
-                  <a:srgbClr val="0F172A"/>
-                </a:solidFill>
-                <a:latin typeface="Helvetica Neue"/>
-              </a:rPr>
-              <a:t>Ask which adaptation methods have already been tried</a:t>
-            </a:r>
-          </a:p>
-        </p:txBody>
-      </p:sp>
-      <p:sp>
-        <p:nvSpPr>
-          <p:cNvPr id="24" name="TextBox 23"/>
-          <p:cNvSpPr txBox="1"/>
-          <p:nvPr/>
-        </p:nvSpPr>
-        <p:spPr>
-          <a:xfrm>
-            <a:off x="1417319" y="5660136"/>
-            <a:ext cx="9875520" cy="384048"/>
-          </a:xfrm>
-          <a:prstGeom prst="rect">
-            <a:avLst/>
-          </a:prstGeom>
-          <a:noFill/>
-        </p:spPr>
-        <p:txBody>
-          <a:bodyPr wrap="square" lIns="0" rIns="0" tIns="0" bIns="0">
-            <a:spAutoFit/>
-          </a:bodyPr>
-          <a:lstStyle/>
-          <a:p>
-            <a:pPr algn="l"/>
-            <a:r>
-              <a:rPr sz="1350" b="0" i="0">
-                <a:solidFill>
-                  <a:srgbClr val="475569"/>
-                </a:solidFill>
-                <a:latin typeface="Helvetica Neue"/>
-              </a:rPr>
-              <a:t>When training a model from scratch is proposed, establish first what rungs 1 through 5 scored. Also ask what random selection scored before accepting any clever selection method.</a:t>
+              <a:t>240 labels chosen well reached 93% of the score obtained by labelling all 1,400 tickets.</a:t>
             </a:r>
           </a:p>
         </p:txBody>
@@ -11790,11 +11272,11 @@
             <a:r>
               <a:rPr sz="1250" b="1" i="0" spc="220">
                 <a:solidFill>
-                  <a:srgbClr val="E11D48"/>
-                </a:solidFill>
-                <a:latin typeface="Helvetica Neue"/>
-              </a:rPr>
-              <a:t>DISCUSSION</a:t>
+                  <a:srgbClr val="4F46E5"/>
+                </a:solidFill>
+                <a:latin typeface="Helvetica Neue"/>
+              </a:rPr>
+              <a:t>SUMMARY</a:t>
             </a:r>
           </a:p>
         </p:txBody>
@@ -11829,7 +11311,7 @@
                 </a:solidFill>
                 <a:latin typeface="Helvetica Neue"/>
               </a:rPr>
-              <a:t>Meta moved 6,500 engineers into data annotation</a:t>
+              <a:t>Four things you can apply at work</a:t>
             </a:r>
           </a:p>
         </p:txBody>
@@ -11837,41 +11319,6 @@
       <p:sp>
         <p:nvSpPr>
           <p:cNvPr id="4" name="TextBox 3"/>
-          <p:cNvSpPr txBox="1"/>
-          <p:nvPr/>
-        </p:nvSpPr>
-        <p:spPr>
-          <a:xfrm>
-            <a:off x="640080" y="1417320"/>
-            <a:ext cx="10424160" cy="457200"/>
-          </a:xfrm>
-          <a:prstGeom prst="rect">
-            <a:avLst/>
-          </a:prstGeom>
-          <a:noFill/>
-        </p:spPr>
-        <p:txBody>
-          <a:bodyPr wrap="square" lIns="0" rIns="0" tIns="0" bIns="0">
-            <a:spAutoFit/>
-          </a:bodyPr>
-          <a:lstStyle/>
-          <a:p>
-            <a:pPr algn="l"/>
-            <a:r>
-              <a:rPr sz="1500" b="0" i="0">
-                <a:solidFill>
-                  <a:srgbClr val="475569"/>
-                </a:solidFill>
-                <a:latin typeface="Helvetica Neue"/>
-              </a:rPr>
-              <a:t>March to June 2026. The same bottleneck we priced tonight, at a scale where it reorganised a company.</a:t>
-            </a:r>
-          </a:p>
-        </p:txBody>
-      </p:sp>
-      <p:sp>
-        <p:nvSpPr>
-          <p:cNvPr id="5" name="TextBox 4"/>
           <p:cNvSpPr txBox="1"/>
           <p:nvPr/>
         </p:nvSpPr>
@@ -11904,30 +11351,778 @@
           </a:p>
         </p:txBody>
       </p:sp>
-      <p:pic>
-        <p:nvPicPr>
-          <p:cNvPr id="6" name="Picture 5" descr="d_metaincident.png"/>
-          <p:cNvPicPr>
-            <a:picLocks noChangeAspect="1"/>
-          </p:cNvPicPr>
-          <p:nvPr/>
-        </p:nvPicPr>
-        <p:blipFill>
-          <a:blip r:embed="rId2"/>
-          <a:stretch>
-            <a:fillRect/>
-          </a:stretch>
-        </p:blipFill>
-        <p:spPr>
-          <a:xfrm>
-            <a:off x="335127" y="2612966"/>
-            <a:ext cx="11521440" cy="3186547"/>
-          </a:xfrm>
-          <a:prstGeom prst="rect">
-            <a:avLst/>
-          </a:prstGeom>
-        </p:spPr>
-      </p:pic>
+      <p:sp>
+        <p:nvSpPr>
+          <p:cNvPr id="5" name="Rounded Rectangle 4"/>
+          <p:cNvSpPr/>
+          <p:nvPr/>
+        </p:nvSpPr>
+        <p:spPr>
+          <a:xfrm>
+            <a:off x="640080" y="2057400"/>
+            <a:ext cx="10908792" cy="914400"/>
+          </a:xfrm>
+          <a:prstGeom prst="roundRect">
+            <a:avLst/>
+          </a:prstGeom>
+          <a:solidFill>
+            <a:srgbClr val="FFFFFF"/>
+          </a:solidFill>
+          <a:ln>
+            <a:solidFill>
+              <a:srgbClr val="EEF1F6"/>
+            </a:solidFill>
+          </a:ln>
+        </p:spPr>
+        <p:style>
+          <a:lnRef idx="1">
+            <a:schemeClr val="accent1"/>
+          </a:lnRef>
+          <a:fillRef idx="3">
+            <a:schemeClr val="accent1"/>
+          </a:fillRef>
+          <a:effectRef idx="2">
+            <a:schemeClr val="accent1"/>
+          </a:effectRef>
+          <a:fontRef idx="minor">
+            <a:schemeClr val="lt1"/>
+          </a:fontRef>
+        </p:style>
+        <p:txBody>
+          <a:bodyPr rtlCol="0" anchor="ctr"/>
+          <a:lstStyle/>
+          <a:p>
+            <a:pPr algn="ctr"/>
+          </a:p>
+        </p:txBody>
+      </p:sp>
+      <p:sp>
+        <p:nvSpPr>
+          <p:cNvPr id="6" name="Rounded Rectangle 5"/>
+          <p:cNvSpPr/>
+          <p:nvPr/>
+        </p:nvSpPr>
+        <p:spPr>
+          <a:xfrm>
+            <a:off x="841247" y="2295144"/>
+            <a:ext cx="402336" cy="402336"/>
+          </a:xfrm>
+          <a:prstGeom prst="roundRect">
+            <a:avLst/>
+          </a:prstGeom>
+          <a:solidFill>
+            <a:srgbClr val="4F46E5"/>
+          </a:solidFill>
+          <a:ln>
+            <a:noFill/>
+          </a:ln>
+        </p:spPr>
+        <p:style>
+          <a:lnRef idx="1">
+            <a:schemeClr val="accent1"/>
+          </a:lnRef>
+          <a:fillRef idx="3">
+            <a:schemeClr val="accent1"/>
+          </a:fillRef>
+          <a:effectRef idx="2">
+            <a:schemeClr val="accent1"/>
+          </a:effectRef>
+          <a:fontRef idx="minor">
+            <a:schemeClr val="lt1"/>
+          </a:fontRef>
+        </p:style>
+        <p:txBody>
+          <a:bodyPr rtlCol="0" anchor="ctr"/>
+          <a:lstStyle/>
+          <a:p>
+            <a:pPr algn="ctr"/>
+          </a:p>
+        </p:txBody>
+      </p:sp>
+      <p:sp>
+        <p:nvSpPr>
+          <p:cNvPr id="7" name="TextBox 6"/>
+          <p:cNvSpPr txBox="1"/>
+          <p:nvPr/>
+        </p:nvSpPr>
+        <p:spPr>
+          <a:xfrm>
+            <a:off x="841247" y="2368296"/>
+            <a:ext cx="402336" cy="274320"/>
+          </a:xfrm>
+          <a:prstGeom prst="rect">
+            <a:avLst/>
+          </a:prstGeom>
+          <a:noFill/>
+        </p:spPr>
+        <p:txBody>
+          <a:bodyPr wrap="square" lIns="0" rIns="0" tIns="0" bIns="0">
+            <a:spAutoFit/>
+          </a:bodyPr>
+          <a:lstStyle/>
+          <a:p>
+            <a:pPr algn="ctr"/>
+            <a:r>
+              <a:rPr sz="1500" b="1" i="0">
+                <a:solidFill>
+                  <a:srgbClr val="FFFFFF"/>
+                </a:solidFill>
+                <a:latin typeface="Helvetica Neue"/>
+              </a:rPr>
+              <a:t>1</a:t>
+            </a:r>
+          </a:p>
+        </p:txBody>
+      </p:sp>
+      <p:sp>
+        <p:nvSpPr>
+          <p:cNvPr id="8" name="TextBox 7"/>
+          <p:cNvSpPr txBox="1"/>
+          <p:nvPr/>
+        </p:nvSpPr>
+        <p:spPr>
+          <a:xfrm>
+            <a:off x="1417319" y="2231136"/>
+            <a:ext cx="9875520" cy="274320"/>
+          </a:xfrm>
+          <a:prstGeom prst="rect">
+            <a:avLst/>
+          </a:prstGeom>
+          <a:noFill/>
+        </p:spPr>
+        <p:txBody>
+          <a:bodyPr wrap="square" lIns="0" rIns="0" tIns="0" bIns="0">
+            <a:spAutoFit/>
+          </a:bodyPr>
+          <a:lstStyle/>
+          <a:p>
+            <a:pPr algn="l"/>
+            <a:r>
+              <a:rPr sz="1800" b="1" i="0">
+                <a:solidFill>
+                  <a:srgbClr val="0F172A"/>
+                </a:solidFill>
+                <a:latin typeface="Helvetica Neue"/>
+              </a:rPr>
+              <a:t>Plot the learning curve before committing to a labelling project</a:t>
+            </a:r>
+          </a:p>
+        </p:txBody>
+      </p:sp>
+      <p:sp>
+        <p:nvSpPr>
+          <p:cNvPr id="9" name="TextBox 8"/>
+          <p:cNvSpPr txBox="1"/>
+          <p:nvPr/>
+        </p:nvSpPr>
+        <p:spPr>
+          <a:xfrm>
+            <a:off x="1417319" y="2532888"/>
+            <a:ext cx="9875520" cy="384048"/>
+          </a:xfrm>
+          <a:prstGeom prst="rect">
+            <a:avLst/>
+          </a:prstGeom>
+          <a:noFill/>
+        </p:spPr>
+        <p:txBody>
+          <a:bodyPr wrap="square" lIns="0" rIns="0" tIns="0" bIns="0">
+            <a:spAutoFit/>
+          </a:bodyPr>
+          <a:lstStyle/>
+          <a:p>
+            <a:pPr algn="l"/>
+            <a:r>
+              <a:rPr sz="1350" b="0" i="0">
+                <a:solidFill>
+                  <a:srgbClr val="475569"/>
+                </a:solidFill>
+                <a:latin typeface="Helvetica Neue"/>
+              </a:rPr>
+              <a:t>Label a few hundred examples, plot the score against the number of labels, and find where the curve flattens. That point, not a fixed target, is where labelling should stop.</a:t>
+            </a:r>
+          </a:p>
+        </p:txBody>
+      </p:sp>
+      <p:sp>
+        <p:nvSpPr>
+          <p:cNvPr id="10" name="Rounded Rectangle 9"/>
+          <p:cNvSpPr/>
+          <p:nvPr/>
+        </p:nvSpPr>
+        <p:spPr>
+          <a:xfrm>
+            <a:off x="640080" y="3099815"/>
+            <a:ext cx="10908792" cy="914400"/>
+          </a:xfrm>
+          <a:prstGeom prst="roundRect">
+            <a:avLst/>
+          </a:prstGeom>
+          <a:solidFill>
+            <a:srgbClr val="FFFFFF"/>
+          </a:solidFill>
+          <a:ln>
+            <a:solidFill>
+              <a:srgbClr val="EEF1F6"/>
+            </a:solidFill>
+          </a:ln>
+        </p:spPr>
+        <p:style>
+          <a:lnRef idx="1">
+            <a:schemeClr val="accent1"/>
+          </a:lnRef>
+          <a:fillRef idx="3">
+            <a:schemeClr val="accent1"/>
+          </a:fillRef>
+          <a:effectRef idx="2">
+            <a:schemeClr val="accent1"/>
+          </a:effectRef>
+          <a:fontRef idx="minor">
+            <a:schemeClr val="lt1"/>
+          </a:fontRef>
+        </p:style>
+        <p:txBody>
+          <a:bodyPr rtlCol="0" anchor="ctr"/>
+          <a:lstStyle/>
+          <a:p>
+            <a:pPr algn="ctr"/>
+          </a:p>
+        </p:txBody>
+      </p:sp>
+      <p:sp>
+        <p:nvSpPr>
+          <p:cNvPr id="11" name="Rounded Rectangle 10"/>
+          <p:cNvSpPr/>
+          <p:nvPr/>
+        </p:nvSpPr>
+        <p:spPr>
+          <a:xfrm>
+            <a:off x="841247" y="3337559"/>
+            <a:ext cx="402336" cy="402336"/>
+          </a:xfrm>
+          <a:prstGeom prst="roundRect">
+            <a:avLst/>
+          </a:prstGeom>
+          <a:solidFill>
+            <a:srgbClr val="4F46E5"/>
+          </a:solidFill>
+          <a:ln>
+            <a:noFill/>
+          </a:ln>
+        </p:spPr>
+        <p:style>
+          <a:lnRef idx="1">
+            <a:schemeClr val="accent1"/>
+          </a:lnRef>
+          <a:fillRef idx="3">
+            <a:schemeClr val="accent1"/>
+          </a:fillRef>
+          <a:effectRef idx="2">
+            <a:schemeClr val="accent1"/>
+          </a:effectRef>
+          <a:fontRef idx="minor">
+            <a:schemeClr val="lt1"/>
+          </a:fontRef>
+        </p:style>
+        <p:txBody>
+          <a:bodyPr rtlCol="0" anchor="ctr"/>
+          <a:lstStyle/>
+          <a:p>
+            <a:pPr algn="ctr"/>
+          </a:p>
+        </p:txBody>
+      </p:sp>
+      <p:sp>
+        <p:nvSpPr>
+          <p:cNvPr id="12" name="TextBox 11"/>
+          <p:cNvSpPr txBox="1"/>
+          <p:nvPr/>
+        </p:nvSpPr>
+        <p:spPr>
+          <a:xfrm>
+            <a:off x="841247" y="3410711"/>
+            <a:ext cx="402336" cy="274320"/>
+          </a:xfrm>
+          <a:prstGeom prst="rect">
+            <a:avLst/>
+          </a:prstGeom>
+          <a:noFill/>
+        </p:spPr>
+        <p:txBody>
+          <a:bodyPr wrap="square" lIns="0" rIns="0" tIns="0" bIns="0">
+            <a:spAutoFit/>
+          </a:bodyPr>
+          <a:lstStyle/>
+          <a:p>
+            <a:pPr algn="ctr"/>
+            <a:r>
+              <a:rPr sz="1500" b="1" i="0">
+                <a:solidFill>
+                  <a:srgbClr val="FFFFFF"/>
+                </a:solidFill>
+                <a:latin typeface="Helvetica Neue"/>
+              </a:rPr>
+              <a:t>2</a:t>
+            </a:r>
+          </a:p>
+        </p:txBody>
+      </p:sp>
+      <p:sp>
+        <p:nvSpPr>
+          <p:cNvPr id="13" name="TextBox 12"/>
+          <p:cNvSpPr txBox="1"/>
+          <p:nvPr/>
+        </p:nvSpPr>
+        <p:spPr>
+          <a:xfrm>
+            <a:off x="1417319" y="3273551"/>
+            <a:ext cx="9875520" cy="274320"/>
+          </a:xfrm>
+          <a:prstGeom prst="rect">
+            <a:avLst/>
+          </a:prstGeom>
+          <a:noFill/>
+        </p:spPr>
+        <p:txBody>
+          <a:bodyPr wrap="square" lIns="0" rIns="0" tIns="0" bIns="0">
+            <a:spAutoFit/>
+          </a:bodyPr>
+          <a:lstStyle/>
+          <a:p>
+            <a:pPr algn="l"/>
+            <a:r>
+              <a:rPr sz="1800" b="1" i="0">
+                <a:solidFill>
+                  <a:srgbClr val="0F172A"/>
+                </a:solidFill>
+                <a:latin typeface="Helvetica Neue"/>
+              </a:rPr>
+              <a:t>Test the frozen-encoder option before approving a fine-tune</a:t>
+            </a:r>
+          </a:p>
+        </p:txBody>
+      </p:sp>
+      <p:sp>
+        <p:nvSpPr>
+          <p:cNvPr id="14" name="TextBox 13"/>
+          <p:cNvSpPr txBox="1"/>
+          <p:nvPr/>
+        </p:nvSpPr>
+        <p:spPr>
+          <a:xfrm>
+            <a:off x="1417319" y="3575303"/>
+            <a:ext cx="9875520" cy="384048"/>
+          </a:xfrm>
+          <a:prstGeom prst="rect">
+            <a:avLst/>
+          </a:prstGeom>
+          <a:noFill/>
+        </p:spPr>
+        <p:txBody>
+          <a:bodyPr wrap="square" lIns="0" rIns="0" tIns="0" bIns="0">
+            <a:spAutoFit/>
+          </a:bodyPr>
+          <a:lstStyle/>
+          <a:p>
+            <a:pPr algn="l"/>
+            <a:r>
+              <a:rPr sz="1350" b="0" i="0">
+                <a:solidFill>
+                  <a:srgbClr val="475569"/>
+                </a:solidFill>
+                <a:latin typeface="Helvetica Neue"/>
+              </a:rPr>
+              <a:t>Frozen embeddings with a simple classifier is faster and cheaper, and at these data sizes it scored higher. Require the more expensive option to demonstrate an improvement.</a:t>
+            </a:r>
+          </a:p>
+        </p:txBody>
+      </p:sp>
+      <p:sp>
+        <p:nvSpPr>
+          <p:cNvPr id="15" name="Rounded Rectangle 14"/>
+          <p:cNvSpPr/>
+          <p:nvPr/>
+        </p:nvSpPr>
+        <p:spPr>
+          <a:xfrm>
+            <a:off x="640080" y="4142231"/>
+            <a:ext cx="10908792" cy="914400"/>
+          </a:xfrm>
+          <a:prstGeom prst="roundRect">
+            <a:avLst/>
+          </a:prstGeom>
+          <a:solidFill>
+            <a:srgbClr val="FFFFFF"/>
+          </a:solidFill>
+          <a:ln>
+            <a:solidFill>
+              <a:srgbClr val="EEF1F6"/>
+            </a:solidFill>
+          </a:ln>
+        </p:spPr>
+        <p:style>
+          <a:lnRef idx="1">
+            <a:schemeClr val="accent1"/>
+          </a:lnRef>
+          <a:fillRef idx="3">
+            <a:schemeClr val="accent1"/>
+          </a:fillRef>
+          <a:effectRef idx="2">
+            <a:schemeClr val="accent1"/>
+          </a:effectRef>
+          <a:fontRef idx="minor">
+            <a:schemeClr val="lt1"/>
+          </a:fontRef>
+        </p:style>
+        <p:txBody>
+          <a:bodyPr rtlCol="0" anchor="ctr"/>
+          <a:lstStyle/>
+          <a:p>
+            <a:pPr algn="ctr"/>
+          </a:p>
+        </p:txBody>
+      </p:sp>
+      <p:sp>
+        <p:nvSpPr>
+          <p:cNvPr id="16" name="Rounded Rectangle 15"/>
+          <p:cNvSpPr/>
+          <p:nvPr/>
+        </p:nvSpPr>
+        <p:spPr>
+          <a:xfrm>
+            <a:off x="841247" y="4379975"/>
+            <a:ext cx="402336" cy="402336"/>
+          </a:xfrm>
+          <a:prstGeom prst="roundRect">
+            <a:avLst/>
+          </a:prstGeom>
+          <a:solidFill>
+            <a:srgbClr val="4F46E5"/>
+          </a:solidFill>
+          <a:ln>
+            <a:noFill/>
+          </a:ln>
+        </p:spPr>
+        <p:style>
+          <a:lnRef idx="1">
+            <a:schemeClr val="accent1"/>
+          </a:lnRef>
+          <a:fillRef idx="3">
+            <a:schemeClr val="accent1"/>
+          </a:fillRef>
+          <a:effectRef idx="2">
+            <a:schemeClr val="accent1"/>
+          </a:effectRef>
+          <a:fontRef idx="minor">
+            <a:schemeClr val="lt1"/>
+          </a:fontRef>
+        </p:style>
+        <p:txBody>
+          <a:bodyPr rtlCol="0" anchor="ctr"/>
+          <a:lstStyle/>
+          <a:p>
+            <a:pPr algn="ctr"/>
+          </a:p>
+        </p:txBody>
+      </p:sp>
+      <p:sp>
+        <p:nvSpPr>
+          <p:cNvPr id="17" name="TextBox 16"/>
+          <p:cNvSpPr txBox="1"/>
+          <p:nvPr/>
+        </p:nvSpPr>
+        <p:spPr>
+          <a:xfrm>
+            <a:off x="841247" y="4453127"/>
+            <a:ext cx="402336" cy="274320"/>
+          </a:xfrm>
+          <a:prstGeom prst="rect">
+            <a:avLst/>
+          </a:prstGeom>
+          <a:noFill/>
+        </p:spPr>
+        <p:txBody>
+          <a:bodyPr wrap="square" lIns="0" rIns="0" tIns="0" bIns="0">
+            <a:spAutoFit/>
+          </a:bodyPr>
+          <a:lstStyle/>
+          <a:p>
+            <a:pPr algn="ctr"/>
+            <a:r>
+              <a:rPr sz="1500" b="1" i="0">
+                <a:solidFill>
+                  <a:srgbClr val="FFFFFF"/>
+                </a:solidFill>
+                <a:latin typeface="Helvetica Neue"/>
+              </a:rPr>
+              <a:t>3</a:t>
+            </a:r>
+          </a:p>
+        </p:txBody>
+      </p:sp>
+      <p:sp>
+        <p:nvSpPr>
+          <p:cNvPr id="18" name="TextBox 17"/>
+          <p:cNvSpPr txBox="1"/>
+          <p:nvPr/>
+        </p:nvSpPr>
+        <p:spPr>
+          <a:xfrm>
+            <a:off x="1417319" y="4315968"/>
+            <a:ext cx="9875520" cy="274320"/>
+          </a:xfrm>
+          <a:prstGeom prst="rect">
+            <a:avLst/>
+          </a:prstGeom>
+          <a:noFill/>
+        </p:spPr>
+        <p:txBody>
+          <a:bodyPr wrap="square" lIns="0" rIns="0" tIns="0" bIns="0">
+            <a:spAutoFit/>
+          </a:bodyPr>
+          <a:lstStyle/>
+          <a:p>
+            <a:pPr algn="l"/>
+            <a:r>
+              <a:rPr sz="1800" b="1" i="0">
+                <a:solidFill>
+                  <a:srgbClr val="0F172A"/>
+                </a:solidFill>
+                <a:latin typeface="Helvetica Neue"/>
+              </a:rPr>
+              <a:t>Check the class distribution of the training data you selected</a:t>
+            </a:r>
+          </a:p>
+        </p:txBody>
+      </p:sp>
+      <p:sp>
+        <p:nvSpPr>
+          <p:cNvPr id="19" name="TextBox 18"/>
+          <p:cNvSpPr txBox="1"/>
+          <p:nvPr/>
+        </p:nvSpPr>
+        <p:spPr>
+          <a:xfrm>
+            <a:off x="1417319" y="4617719"/>
+            <a:ext cx="9875520" cy="384048"/>
+          </a:xfrm>
+          <a:prstGeom prst="rect">
+            <a:avLst/>
+          </a:prstGeom>
+          <a:noFill/>
+        </p:spPr>
+        <p:txBody>
+          <a:bodyPr wrap="square" lIns="0" rIns="0" tIns="0" bIns="0">
+            <a:spAutoFit/>
+          </a:bodyPr>
+          <a:lstStyle/>
+          <a:p>
+            <a:pPr algn="l"/>
+            <a:r>
+              <a:rPr sz="1350" b="0" i="0">
+                <a:solidFill>
+                  <a:srgbClr val="475569"/>
+                </a:solidFill>
+                <a:latin typeface="Helvetica Neue"/>
+              </a:rPr>
+              <a:t>The selection rule determines the class mix, and the class mix determines where the model will fail. Inspect the counts per category before training.</a:t>
+            </a:r>
+          </a:p>
+        </p:txBody>
+      </p:sp>
+      <p:sp>
+        <p:nvSpPr>
+          <p:cNvPr id="20" name="Rounded Rectangle 19"/>
+          <p:cNvSpPr/>
+          <p:nvPr/>
+        </p:nvSpPr>
+        <p:spPr>
+          <a:xfrm>
+            <a:off x="640080" y="5184648"/>
+            <a:ext cx="10908792" cy="914400"/>
+          </a:xfrm>
+          <a:prstGeom prst="roundRect">
+            <a:avLst/>
+          </a:prstGeom>
+          <a:solidFill>
+            <a:srgbClr val="FFFFFF"/>
+          </a:solidFill>
+          <a:ln>
+            <a:solidFill>
+              <a:srgbClr val="EEF1F6"/>
+            </a:solidFill>
+          </a:ln>
+        </p:spPr>
+        <p:style>
+          <a:lnRef idx="1">
+            <a:schemeClr val="accent1"/>
+          </a:lnRef>
+          <a:fillRef idx="3">
+            <a:schemeClr val="accent1"/>
+          </a:fillRef>
+          <a:effectRef idx="2">
+            <a:schemeClr val="accent1"/>
+          </a:effectRef>
+          <a:fontRef idx="minor">
+            <a:schemeClr val="lt1"/>
+          </a:fontRef>
+        </p:style>
+        <p:txBody>
+          <a:bodyPr rtlCol="0" anchor="ctr"/>
+          <a:lstStyle/>
+          <a:p>
+            <a:pPr algn="ctr"/>
+          </a:p>
+        </p:txBody>
+      </p:sp>
+      <p:sp>
+        <p:nvSpPr>
+          <p:cNvPr id="21" name="Rounded Rectangle 20"/>
+          <p:cNvSpPr/>
+          <p:nvPr/>
+        </p:nvSpPr>
+        <p:spPr>
+          <a:xfrm>
+            <a:off x="841247" y="5422392"/>
+            <a:ext cx="402336" cy="402336"/>
+          </a:xfrm>
+          <a:prstGeom prst="roundRect">
+            <a:avLst/>
+          </a:prstGeom>
+          <a:solidFill>
+            <a:srgbClr val="4F46E5"/>
+          </a:solidFill>
+          <a:ln>
+            <a:noFill/>
+          </a:ln>
+        </p:spPr>
+        <p:style>
+          <a:lnRef idx="1">
+            <a:schemeClr val="accent1"/>
+          </a:lnRef>
+          <a:fillRef idx="3">
+            <a:schemeClr val="accent1"/>
+          </a:fillRef>
+          <a:effectRef idx="2">
+            <a:schemeClr val="accent1"/>
+          </a:effectRef>
+          <a:fontRef idx="minor">
+            <a:schemeClr val="lt1"/>
+          </a:fontRef>
+        </p:style>
+        <p:txBody>
+          <a:bodyPr rtlCol="0" anchor="ctr"/>
+          <a:lstStyle/>
+          <a:p>
+            <a:pPr algn="ctr"/>
+          </a:p>
+        </p:txBody>
+      </p:sp>
+      <p:sp>
+        <p:nvSpPr>
+          <p:cNvPr id="22" name="TextBox 21"/>
+          <p:cNvSpPr txBox="1"/>
+          <p:nvPr/>
+        </p:nvSpPr>
+        <p:spPr>
+          <a:xfrm>
+            <a:off x="841247" y="5495544"/>
+            <a:ext cx="402336" cy="274320"/>
+          </a:xfrm>
+          <a:prstGeom prst="rect">
+            <a:avLst/>
+          </a:prstGeom>
+          <a:noFill/>
+        </p:spPr>
+        <p:txBody>
+          <a:bodyPr wrap="square" lIns="0" rIns="0" tIns="0" bIns="0">
+            <a:spAutoFit/>
+          </a:bodyPr>
+          <a:lstStyle/>
+          <a:p>
+            <a:pPr algn="ctr"/>
+            <a:r>
+              <a:rPr sz="1500" b="1" i="0">
+                <a:solidFill>
+                  <a:srgbClr val="FFFFFF"/>
+                </a:solidFill>
+                <a:latin typeface="Helvetica Neue"/>
+              </a:rPr>
+              <a:t>4</a:t>
+            </a:r>
+          </a:p>
+        </p:txBody>
+      </p:sp>
+      <p:sp>
+        <p:nvSpPr>
+          <p:cNvPr id="23" name="TextBox 22"/>
+          <p:cNvSpPr txBox="1"/>
+          <p:nvPr/>
+        </p:nvSpPr>
+        <p:spPr>
+          <a:xfrm>
+            <a:off x="1417319" y="5358384"/>
+            <a:ext cx="9875520" cy="274320"/>
+          </a:xfrm>
+          <a:prstGeom prst="rect">
+            <a:avLst/>
+          </a:prstGeom>
+          <a:noFill/>
+        </p:spPr>
+        <p:txBody>
+          <a:bodyPr wrap="square" lIns="0" rIns="0" tIns="0" bIns="0">
+            <a:spAutoFit/>
+          </a:bodyPr>
+          <a:lstStyle/>
+          <a:p>
+            <a:pPr algn="l"/>
+            <a:r>
+              <a:rPr sz="1800" b="1" i="0">
+                <a:solidFill>
+                  <a:srgbClr val="0F172A"/>
+                </a:solidFill>
+                <a:latin typeface="Helvetica Neue"/>
+              </a:rPr>
+              <a:t>Ask which adaptation methods have already been tried</a:t>
+            </a:r>
+          </a:p>
+        </p:txBody>
+      </p:sp>
+      <p:sp>
+        <p:nvSpPr>
+          <p:cNvPr id="24" name="TextBox 23"/>
+          <p:cNvSpPr txBox="1"/>
+          <p:nvPr/>
+        </p:nvSpPr>
+        <p:spPr>
+          <a:xfrm>
+            <a:off x="1417319" y="5660136"/>
+            <a:ext cx="9875520" cy="384048"/>
+          </a:xfrm>
+          <a:prstGeom prst="rect">
+            <a:avLst/>
+          </a:prstGeom>
+          <a:noFill/>
+        </p:spPr>
+        <p:txBody>
+          <a:bodyPr wrap="square" lIns="0" rIns="0" tIns="0" bIns="0">
+            <a:spAutoFit/>
+          </a:bodyPr>
+          <a:lstStyle/>
+          <a:p>
+            <a:pPr algn="l"/>
+            <a:r>
+              <a:rPr sz="1350" b="0" i="0">
+                <a:solidFill>
+                  <a:srgbClr val="475569"/>
+                </a:solidFill>
+                <a:latin typeface="Helvetica Neue"/>
+              </a:rPr>
+              <a:t>When training a model from scratch is proposed, establish first what rungs 1 through 5 scored. Also ask what random selection scored before accepting any clever selection method.</a:t>
+            </a:r>
+          </a:p>
+        </p:txBody>
+      </p:sp>
     </p:spTree>
   </p:cSld>
   <p:clrMapOvr>
@@ -11976,7 +12171,7 @@
                 </a:solidFill>
                 <a:latin typeface="Helvetica Neue"/>
               </a:rPr>
-              <a:t>LECTURE 13 RECAP</a:t>
+              <a:t>WEEK 7 · AT A GLANCE</a:t>
             </a:r>
           </a:p>
         </p:txBody>
@@ -12011,7 +12206,7 @@
                 </a:solidFill>
                 <a:latin typeface="Helvetica Neue"/>
               </a:rPr>
-              <a:t>What the copilot achieved with no training data</a:t>
+              <a:t>Language Models &amp; Transformers</a:t>
             </a:r>
           </a:p>
         </p:txBody>
@@ -12046,7 +12241,7 @@
                 </a:solidFill>
                 <a:latin typeface="Helvetica Neue"/>
               </a:rPr>
-              <a:t>Accuracy 64% on the first guess and 80% within its top two, on the same 160 tickets. Two categories were caught less than half the time.</a:t>
+              <a:t>The eight concepts for Week 7 and the five models we run. Greyed out was covered in Lecture 13. The four in green are covered tonight.</a:t>
             </a:r>
           </a:p>
         </p:txBody>
@@ -12088,7 +12283,7 @@
       </p:sp>
       <p:pic>
         <p:nvPicPr>
-          <p:cNvPr id="6" name="Picture 5" descr="d_recap.png"/>
+          <p:cNvPr id="6" name="Picture 5" descr="d_week.png"/>
           <p:cNvPicPr>
             <a:picLocks noChangeAspect="1"/>
           </p:cNvPicPr>
@@ -12102,8 +12297,8 @@
         </p:blipFill>
         <p:spPr>
           <a:xfrm>
-            <a:off x="518007" y="3078932"/>
-            <a:ext cx="11155680" cy="2163174"/>
+            <a:off x="380847" y="2025280"/>
+            <a:ext cx="11430000" cy="4316199"/>
           </a:xfrm>
           <a:prstGeom prst="rect">
             <a:avLst/>
@@ -12158,7 +12353,7 @@
                 </a:solidFill>
                 <a:latin typeface="Helvetica Neue"/>
               </a:rPr>
-              <a:t>THE ADAPTATION LADDER</a:t>
+              <a:t>LECTURE 13 RECAP</a:t>
             </a:r>
           </a:p>
         </p:txBody>
@@ -12193,7 +12388,7 @@
                 </a:solidFill>
                 <a:latin typeface="Helvetica Neue"/>
               </a:rPr>
-              <a:t>Seven ways to adapt a model to your own data</a:t>
+              <a:t>What the copilot achieved with no training data</a:t>
             </a:r>
           </a:p>
         </p:txBody>
@@ -12228,7 +12423,7 @@
                 </a:solidFill>
                 <a:latin typeface="Helvetica Neue"/>
               </a:rPr>
-              <a:t>Ordered bottom to top by how much of your own data each one requires, with what each costs. Rungs 1 and 2 were Lecture 13; rung 3 is Week 8; rungs 4 to 7 are tonight.</a:t>
+              <a:t>Accuracy 64% on the first guess and 80% within its top two, on the same 160 tickets. Two categories were caught less than half the time.</a:t>
             </a:r>
           </a:p>
         </p:txBody>
@@ -12270,7 +12465,7 @@
       </p:sp>
       <p:pic>
         <p:nvPicPr>
-          <p:cNvPr id="6" name="Picture 5" descr="fig_ladder.png"/>
+          <p:cNvPr id="6" name="Picture 5" descr="d_recap.png"/>
           <p:cNvPicPr>
             <a:picLocks noChangeAspect="1"/>
           </p:cNvPicPr>
@@ -12284,8 +12479,8 @@
         </p:blipFill>
         <p:spPr>
           <a:xfrm>
-            <a:off x="1577949" y="1874519"/>
-            <a:ext cx="9035796" cy="4480560"/>
+            <a:off x="518007" y="3078932"/>
+            <a:ext cx="11155680" cy="2163174"/>
           </a:xfrm>
           <a:prstGeom prst="rect">
             <a:avLst/>
@@ -12336,11 +12531,11 @@
             <a:r>
               <a:rPr sz="1250" b="1" i="0" spc="220">
                 <a:solidFill>
-                  <a:srgbClr val="D97706"/>
-                </a:solidFill>
-                <a:latin typeface="Helvetica Neue"/>
-              </a:rPr>
-              <a:t>MASKED LANGUAGE MODELLING</a:t>
+                  <a:srgbClr val="4F46E5"/>
+                </a:solidFill>
+                <a:latin typeface="Helvetica Neue"/>
+              </a:rPr>
+              <a:t>THE ADAPTATION LADDER</a:t>
             </a:r>
           </a:p>
         </p:txBody>
@@ -12354,7 +12549,7 @@
         <p:spPr>
           <a:xfrm>
             <a:off x="640080" y="758952"/>
-            <a:ext cx="7315200" cy="704088"/>
+            <a:ext cx="10972800" cy="704088"/>
           </a:xfrm>
           <a:prstGeom prst="rect">
             <a:avLst/>
@@ -12375,7 +12570,7 @@
                 </a:solidFill>
                 <a:latin typeface="Helvetica Neue"/>
               </a:rPr>
-              <a:t>How BERT was trained to read</a:t>
+              <a:t>Seven ways to adapt a model to your own data</a:t>
             </a:r>
           </a:p>
         </p:txBody>
@@ -12410,617 +12605,14 @@
                 </a:solidFill>
                 <a:latin typeface="Helvetica Neue"/>
               </a:rPr>
-              <a:t>15% of the words are chosen. Of those, 80% are replaced with a blank, 10% with a wrong word, and 10% are left unchanged. The right-hand panel explains why.</a:t>
-            </a:r>
-          </a:p>
-        </p:txBody>
-      </p:sp>
-      <p:sp>
-        <p:nvSpPr>
-          <p:cNvPr id="5" name="Rounded Rectangle 4"/>
-          <p:cNvSpPr/>
-          <p:nvPr/>
-        </p:nvSpPr>
-        <p:spPr>
-          <a:xfrm>
-            <a:off x="8302752" y="593445"/>
-            <a:ext cx="2852928" cy="20116"/>
-          </a:xfrm>
-          <a:prstGeom prst="roundRect">
-            <a:avLst/>
-          </a:prstGeom>
-          <a:solidFill>
-            <a:srgbClr val="E9EBF0"/>
-          </a:solidFill>
-          <a:ln>
-            <a:noFill/>
-          </a:ln>
-        </p:spPr>
-        <p:style>
-          <a:lnRef idx="1">
-            <a:schemeClr val="accent1"/>
-          </a:lnRef>
-          <a:fillRef idx="3">
-            <a:schemeClr val="accent1"/>
-          </a:fillRef>
-          <a:effectRef idx="2">
-            <a:schemeClr val="accent1"/>
-          </a:effectRef>
-          <a:fontRef idx="minor">
-            <a:schemeClr val="lt1"/>
-          </a:fontRef>
-        </p:style>
-        <p:txBody>
-          <a:bodyPr rtlCol="0" anchor="ctr"/>
-          <a:lstStyle/>
-          <a:p>
-            <a:pPr algn="ctr"/>
-          </a:p>
-        </p:txBody>
-      </p:sp>
-      <p:sp>
-        <p:nvSpPr>
-          <p:cNvPr id="6" name="Rounded Rectangle 5"/>
-          <p:cNvSpPr/>
-          <p:nvPr/>
-        </p:nvSpPr>
-        <p:spPr>
-          <a:xfrm>
-            <a:off x="8183879" y="457200"/>
-            <a:ext cx="292608" cy="292608"/>
-          </a:xfrm>
-          <a:prstGeom prst="roundRect">
-            <a:avLst>
-              <a:gd name="adj" fmla="val 32000"/>
-            </a:avLst>
-          </a:prstGeom>
-          <a:solidFill>
-            <a:srgbClr val="0EA5E9"/>
-          </a:solidFill>
-          <a:ln>
-            <a:noFill/>
-          </a:ln>
-        </p:spPr>
-        <p:style>
-          <a:lnRef idx="1">
-            <a:schemeClr val="accent1"/>
-          </a:lnRef>
-          <a:fillRef idx="3">
-            <a:schemeClr val="accent1"/>
-          </a:fillRef>
-          <a:effectRef idx="2">
-            <a:schemeClr val="accent1"/>
-          </a:effectRef>
-          <a:fontRef idx="minor">
-            <a:schemeClr val="lt1"/>
-          </a:fontRef>
-        </p:style>
-        <p:txBody>
-          <a:bodyPr rtlCol="0" anchor="ctr"/>
-          <a:lstStyle/>
-          <a:p>
-            <a:pPr algn="ctr"/>
-          </a:p>
-        </p:txBody>
-      </p:sp>
-      <p:sp>
-        <p:nvSpPr>
-          <p:cNvPr id="7" name="TextBox 6"/>
-          <p:cNvSpPr txBox="1"/>
-          <p:nvPr/>
-        </p:nvSpPr>
-        <p:spPr>
-          <a:xfrm>
-            <a:off x="8129015" y="489204"/>
-            <a:ext cx="402336" cy="228600"/>
-          </a:xfrm>
-          <a:prstGeom prst="rect">
-            <a:avLst/>
-          </a:prstGeom>
-          <a:noFill/>
-        </p:spPr>
-        <p:txBody>
-          <a:bodyPr wrap="square" lIns="0" rIns="0" tIns="0" bIns="0">
-            <a:spAutoFit/>
-          </a:bodyPr>
-          <a:lstStyle/>
-          <a:p>
-            <a:pPr algn="ctr"/>
-            <a:r>
-              <a:rPr sz="1200" b="1" i="0">
-                <a:solidFill>
-                  <a:srgbClr val="FFFFFF"/>
-                </a:solidFill>
-                <a:latin typeface="Helvetica Neue"/>
-              </a:rPr>
-              <a:t>1</a:t>
-            </a:r>
-          </a:p>
-        </p:txBody>
-      </p:sp>
-      <p:sp>
-        <p:nvSpPr>
-          <p:cNvPr id="8" name="Rounded Rectangle 7"/>
-          <p:cNvSpPr/>
-          <p:nvPr/>
-        </p:nvSpPr>
-        <p:spPr>
-          <a:xfrm>
-            <a:off x="8695943" y="493776"/>
-            <a:ext cx="219456" cy="219456"/>
-          </a:xfrm>
-          <a:prstGeom prst="roundRect">
-            <a:avLst>
-              <a:gd name="adj" fmla="val 32000"/>
-            </a:avLst>
-          </a:prstGeom>
-          <a:solidFill>
-            <a:srgbClr val="E9EBF0"/>
-          </a:solidFill>
-          <a:ln>
-            <a:noFill/>
-          </a:ln>
-        </p:spPr>
-        <p:style>
-          <a:lnRef idx="1">
-            <a:schemeClr val="accent1"/>
-          </a:lnRef>
-          <a:fillRef idx="3">
-            <a:schemeClr val="accent1"/>
-          </a:fillRef>
-          <a:effectRef idx="2">
-            <a:schemeClr val="accent1"/>
-          </a:effectRef>
-          <a:fontRef idx="minor">
-            <a:schemeClr val="lt1"/>
-          </a:fontRef>
-        </p:style>
-        <p:txBody>
-          <a:bodyPr rtlCol="0" anchor="ctr"/>
-          <a:lstStyle/>
-          <a:p>
-            <a:pPr algn="ctr"/>
-          </a:p>
-        </p:txBody>
-      </p:sp>
-      <p:sp>
-        <p:nvSpPr>
-          <p:cNvPr id="9" name="TextBox 8"/>
-          <p:cNvSpPr txBox="1"/>
-          <p:nvPr/>
-        </p:nvSpPr>
-        <p:spPr>
-          <a:xfrm>
-            <a:off x="8641079" y="489204"/>
-            <a:ext cx="329184" cy="228600"/>
-          </a:xfrm>
-          <a:prstGeom prst="rect">
-            <a:avLst/>
-          </a:prstGeom>
-          <a:noFill/>
-        </p:spPr>
-        <p:txBody>
-          <a:bodyPr wrap="square" lIns="0" rIns="0" tIns="0" bIns="0">
-            <a:spAutoFit/>
-          </a:bodyPr>
-          <a:lstStyle/>
-          <a:p>
-            <a:pPr algn="ctr"/>
-            <a:r>
-              <a:rPr sz="950" b="1" i="0">
-                <a:solidFill>
-                  <a:srgbClr val="AEB4BF"/>
-                </a:solidFill>
-                <a:latin typeface="Helvetica Neue"/>
-              </a:rPr>
-              <a:t>2</a:t>
-            </a:r>
-          </a:p>
-        </p:txBody>
-      </p:sp>
-      <p:sp>
-        <p:nvSpPr>
-          <p:cNvPr id="10" name="Rounded Rectangle 9"/>
-          <p:cNvSpPr/>
-          <p:nvPr/>
-        </p:nvSpPr>
-        <p:spPr>
-          <a:xfrm>
-            <a:off x="9171431" y="493776"/>
-            <a:ext cx="219456" cy="219456"/>
-          </a:xfrm>
-          <a:prstGeom prst="roundRect">
-            <a:avLst>
-              <a:gd name="adj" fmla="val 32000"/>
-            </a:avLst>
-          </a:prstGeom>
-          <a:solidFill>
-            <a:srgbClr val="E9EBF0"/>
-          </a:solidFill>
-          <a:ln>
-            <a:noFill/>
-          </a:ln>
-        </p:spPr>
-        <p:style>
-          <a:lnRef idx="1">
-            <a:schemeClr val="accent1"/>
-          </a:lnRef>
-          <a:fillRef idx="3">
-            <a:schemeClr val="accent1"/>
-          </a:fillRef>
-          <a:effectRef idx="2">
-            <a:schemeClr val="accent1"/>
-          </a:effectRef>
-          <a:fontRef idx="minor">
-            <a:schemeClr val="lt1"/>
-          </a:fontRef>
-        </p:style>
-        <p:txBody>
-          <a:bodyPr rtlCol="0" anchor="ctr"/>
-          <a:lstStyle/>
-          <a:p>
-            <a:pPr algn="ctr"/>
-          </a:p>
-        </p:txBody>
-      </p:sp>
-      <p:sp>
-        <p:nvSpPr>
-          <p:cNvPr id="11" name="TextBox 10"/>
-          <p:cNvSpPr txBox="1"/>
-          <p:nvPr/>
-        </p:nvSpPr>
-        <p:spPr>
-          <a:xfrm>
-            <a:off x="9116567" y="489204"/>
-            <a:ext cx="329184" cy="228600"/>
-          </a:xfrm>
-          <a:prstGeom prst="rect">
-            <a:avLst/>
-          </a:prstGeom>
-          <a:noFill/>
-        </p:spPr>
-        <p:txBody>
-          <a:bodyPr wrap="square" lIns="0" rIns="0" tIns="0" bIns="0">
-            <a:spAutoFit/>
-          </a:bodyPr>
-          <a:lstStyle/>
-          <a:p>
-            <a:pPr algn="ctr"/>
-            <a:r>
-              <a:rPr sz="950" b="1" i="0">
-                <a:solidFill>
-                  <a:srgbClr val="AEB4BF"/>
-                </a:solidFill>
-                <a:latin typeface="Helvetica Neue"/>
-              </a:rPr>
-              <a:t>3</a:t>
-            </a:r>
-          </a:p>
-        </p:txBody>
-      </p:sp>
-      <p:sp>
-        <p:nvSpPr>
-          <p:cNvPr id="12" name="Rounded Rectangle 11"/>
-          <p:cNvSpPr/>
-          <p:nvPr/>
-        </p:nvSpPr>
-        <p:spPr>
-          <a:xfrm>
-            <a:off x="9646919" y="493776"/>
-            <a:ext cx="219456" cy="219456"/>
-          </a:xfrm>
-          <a:prstGeom prst="roundRect">
-            <a:avLst>
-              <a:gd name="adj" fmla="val 32000"/>
-            </a:avLst>
-          </a:prstGeom>
-          <a:solidFill>
-            <a:srgbClr val="E9EBF0"/>
-          </a:solidFill>
-          <a:ln>
-            <a:noFill/>
-          </a:ln>
-        </p:spPr>
-        <p:style>
-          <a:lnRef idx="1">
-            <a:schemeClr val="accent1"/>
-          </a:lnRef>
-          <a:fillRef idx="3">
-            <a:schemeClr val="accent1"/>
-          </a:fillRef>
-          <a:effectRef idx="2">
-            <a:schemeClr val="accent1"/>
-          </a:effectRef>
-          <a:fontRef idx="minor">
-            <a:schemeClr val="lt1"/>
-          </a:fontRef>
-        </p:style>
-        <p:txBody>
-          <a:bodyPr rtlCol="0" anchor="ctr"/>
-          <a:lstStyle/>
-          <a:p>
-            <a:pPr algn="ctr"/>
-          </a:p>
-        </p:txBody>
-      </p:sp>
-      <p:sp>
-        <p:nvSpPr>
-          <p:cNvPr id="13" name="TextBox 12"/>
-          <p:cNvSpPr txBox="1"/>
-          <p:nvPr/>
-        </p:nvSpPr>
-        <p:spPr>
-          <a:xfrm>
-            <a:off x="9592055" y="489204"/>
-            <a:ext cx="329184" cy="228600"/>
-          </a:xfrm>
-          <a:prstGeom prst="rect">
-            <a:avLst/>
-          </a:prstGeom>
-          <a:noFill/>
-        </p:spPr>
-        <p:txBody>
-          <a:bodyPr wrap="square" lIns="0" rIns="0" tIns="0" bIns="0">
-            <a:spAutoFit/>
-          </a:bodyPr>
-          <a:lstStyle/>
-          <a:p>
-            <a:pPr algn="ctr"/>
-            <a:r>
-              <a:rPr sz="950" b="1" i="0">
-                <a:solidFill>
-                  <a:srgbClr val="AEB4BF"/>
-                </a:solidFill>
-                <a:latin typeface="Helvetica Neue"/>
-              </a:rPr>
-              <a:t>4</a:t>
-            </a:r>
-          </a:p>
-        </p:txBody>
-      </p:sp>
-      <p:sp>
-        <p:nvSpPr>
-          <p:cNvPr id="14" name="Rounded Rectangle 13"/>
-          <p:cNvSpPr/>
-          <p:nvPr/>
-        </p:nvSpPr>
-        <p:spPr>
-          <a:xfrm>
-            <a:off x="10122407" y="493776"/>
-            <a:ext cx="219456" cy="219456"/>
-          </a:xfrm>
-          <a:prstGeom prst="roundRect">
-            <a:avLst>
-              <a:gd name="adj" fmla="val 32000"/>
-            </a:avLst>
-          </a:prstGeom>
-          <a:solidFill>
-            <a:srgbClr val="E9EBF0"/>
-          </a:solidFill>
-          <a:ln>
-            <a:noFill/>
-          </a:ln>
-        </p:spPr>
-        <p:style>
-          <a:lnRef idx="1">
-            <a:schemeClr val="accent1"/>
-          </a:lnRef>
-          <a:fillRef idx="3">
-            <a:schemeClr val="accent1"/>
-          </a:fillRef>
-          <a:effectRef idx="2">
-            <a:schemeClr val="accent1"/>
-          </a:effectRef>
-          <a:fontRef idx="minor">
-            <a:schemeClr val="lt1"/>
-          </a:fontRef>
-        </p:style>
-        <p:txBody>
-          <a:bodyPr rtlCol="0" anchor="ctr"/>
-          <a:lstStyle/>
-          <a:p>
-            <a:pPr algn="ctr"/>
-          </a:p>
-        </p:txBody>
-      </p:sp>
-      <p:sp>
-        <p:nvSpPr>
-          <p:cNvPr id="15" name="TextBox 14"/>
-          <p:cNvSpPr txBox="1"/>
-          <p:nvPr/>
-        </p:nvSpPr>
-        <p:spPr>
-          <a:xfrm>
-            <a:off x="10067543" y="489204"/>
-            <a:ext cx="329184" cy="228600"/>
-          </a:xfrm>
-          <a:prstGeom prst="rect">
-            <a:avLst/>
-          </a:prstGeom>
-          <a:noFill/>
-        </p:spPr>
-        <p:txBody>
-          <a:bodyPr wrap="square" lIns="0" rIns="0" tIns="0" bIns="0">
-            <a:spAutoFit/>
-          </a:bodyPr>
-          <a:lstStyle/>
-          <a:p>
-            <a:pPr algn="ctr"/>
-            <a:r>
-              <a:rPr sz="950" b="1" i="0">
-                <a:solidFill>
-                  <a:srgbClr val="AEB4BF"/>
-                </a:solidFill>
-                <a:latin typeface="Helvetica Neue"/>
-              </a:rPr>
-              <a:t>5</a:t>
-            </a:r>
-          </a:p>
-        </p:txBody>
-      </p:sp>
-      <p:sp>
-        <p:nvSpPr>
-          <p:cNvPr id="16" name="Rounded Rectangle 15"/>
-          <p:cNvSpPr/>
-          <p:nvPr/>
-        </p:nvSpPr>
-        <p:spPr>
-          <a:xfrm>
-            <a:off x="10597895" y="493776"/>
-            <a:ext cx="219456" cy="219456"/>
-          </a:xfrm>
-          <a:prstGeom prst="roundRect">
-            <a:avLst>
-              <a:gd name="adj" fmla="val 32000"/>
-            </a:avLst>
-          </a:prstGeom>
-          <a:solidFill>
-            <a:srgbClr val="E9EBF0"/>
-          </a:solidFill>
-          <a:ln>
-            <a:noFill/>
-          </a:ln>
-        </p:spPr>
-        <p:style>
-          <a:lnRef idx="1">
-            <a:schemeClr val="accent1"/>
-          </a:lnRef>
-          <a:fillRef idx="3">
-            <a:schemeClr val="accent1"/>
-          </a:fillRef>
-          <a:effectRef idx="2">
-            <a:schemeClr val="accent1"/>
-          </a:effectRef>
-          <a:fontRef idx="minor">
-            <a:schemeClr val="lt1"/>
-          </a:fontRef>
-        </p:style>
-        <p:txBody>
-          <a:bodyPr rtlCol="0" anchor="ctr"/>
-          <a:lstStyle/>
-          <a:p>
-            <a:pPr algn="ctr"/>
-          </a:p>
-        </p:txBody>
-      </p:sp>
-      <p:sp>
-        <p:nvSpPr>
-          <p:cNvPr id="17" name="TextBox 16"/>
-          <p:cNvSpPr txBox="1"/>
-          <p:nvPr/>
-        </p:nvSpPr>
-        <p:spPr>
-          <a:xfrm>
-            <a:off x="10543031" y="489204"/>
-            <a:ext cx="329184" cy="228600"/>
-          </a:xfrm>
-          <a:prstGeom prst="rect">
-            <a:avLst/>
-          </a:prstGeom>
-          <a:noFill/>
-        </p:spPr>
-        <p:txBody>
-          <a:bodyPr wrap="square" lIns="0" rIns="0" tIns="0" bIns="0">
-            <a:spAutoFit/>
-          </a:bodyPr>
-          <a:lstStyle/>
-          <a:p>
-            <a:pPr algn="ctr"/>
-            <a:r>
-              <a:rPr sz="950" b="1" i="0">
-                <a:solidFill>
-                  <a:srgbClr val="AEB4BF"/>
-                </a:solidFill>
-                <a:latin typeface="Helvetica Neue"/>
-              </a:rPr>
-              <a:t>6</a:t>
-            </a:r>
-          </a:p>
-        </p:txBody>
-      </p:sp>
-      <p:sp>
-        <p:nvSpPr>
-          <p:cNvPr id="18" name="Rounded Rectangle 17"/>
-          <p:cNvSpPr/>
-          <p:nvPr/>
-        </p:nvSpPr>
-        <p:spPr>
-          <a:xfrm>
-            <a:off x="11073384" y="493776"/>
-            <a:ext cx="219456" cy="219456"/>
-          </a:xfrm>
-          <a:prstGeom prst="roundRect">
-            <a:avLst>
-              <a:gd name="adj" fmla="val 32000"/>
-            </a:avLst>
-          </a:prstGeom>
-          <a:solidFill>
-            <a:srgbClr val="E9EBF0"/>
-          </a:solidFill>
-          <a:ln>
-            <a:noFill/>
-          </a:ln>
-        </p:spPr>
-        <p:style>
-          <a:lnRef idx="1">
-            <a:schemeClr val="accent1"/>
-          </a:lnRef>
-          <a:fillRef idx="3">
-            <a:schemeClr val="accent1"/>
-          </a:fillRef>
-          <a:effectRef idx="2">
-            <a:schemeClr val="accent1"/>
-          </a:effectRef>
-          <a:fontRef idx="minor">
-            <a:schemeClr val="lt1"/>
-          </a:fontRef>
-        </p:style>
-        <p:txBody>
-          <a:bodyPr rtlCol="0" anchor="ctr"/>
-          <a:lstStyle/>
-          <a:p>
-            <a:pPr algn="ctr"/>
-          </a:p>
-        </p:txBody>
-      </p:sp>
-      <p:sp>
-        <p:nvSpPr>
-          <p:cNvPr id="19" name="TextBox 18"/>
-          <p:cNvSpPr txBox="1"/>
-          <p:nvPr/>
-        </p:nvSpPr>
-        <p:spPr>
-          <a:xfrm>
-            <a:off x="11018519" y="489204"/>
-            <a:ext cx="329184" cy="228600"/>
-          </a:xfrm>
-          <a:prstGeom prst="rect">
-            <a:avLst/>
-          </a:prstGeom>
-          <a:noFill/>
-        </p:spPr>
-        <p:txBody>
-          <a:bodyPr wrap="square" lIns="0" rIns="0" tIns="0" bIns="0">
-            <a:spAutoFit/>
-          </a:bodyPr>
-          <a:lstStyle/>
-          <a:p>
-            <a:pPr algn="ctr"/>
-            <a:r>
-              <a:rPr sz="950" b="1" i="0">
-                <a:solidFill>
-                  <a:srgbClr val="AEB4BF"/>
-                </a:solidFill>
-                <a:latin typeface="Helvetica Neue"/>
-              </a:rPr>
-              <a:t>7</a:t>
-            </a:r>
-          </a:p>
-        </p:txBody>
-      </p:sp>
-      <p:sp>
-        <p:nvSpPr>
-          <p:cNvPr id="20" name="TextBox 19"/>
+              <a:t>Ordered bottom to top by how much of your own data each one requires, with what each costs. Rungs 1 and 2 were Lecture 13; rung 3 is Week 8; rungs 4 to 7 are tonight.</a:t>
+            </a:r>
+          </a:p>
+        </p:txBody>
+      </p:sp>
+      <p:sp>
+        <p:nvSpPr>
+          <p:cNvPr id="5" name="TextBox 4"/>
           <p:cNvSpPr txBox="1"/>
           <p:nvPr/>
         </p:nvSpPr>
@@ -13055,7 +12647,7 @@
       </p:sp>
       <p:pic>
         <p:nvPicPr>
-          <p:cNvPr id="21" name="Picture 20" descr="d_mlmbook.png"/>
+          <p:cNvPr id="6" name="Picture 5" descr="fig_ladder.png"/>
           <p:cNvPicPr>
             <a:picLocks noChangeAspect="1"/>
           </p:cNvPicPr>
@@ -13069,8 +12661,8 @@
         </p:blipFill>
         <p:spPr>
           <a:xfrm>
-            <a:off x="380847" y="2098852"/>
-            <a:ext cx="11430000" cy="4077615"/>
+            <a:off x="1577949" y="1874519"/>
+            <a:ext cx="9035796" cy="4480560"/>
           </a:xfrm>
           <a:prstGeom prst="rect">
             <a:avLst/>
@@ -13160,7 +12752,7 @@
                 </a:solidFill>
                 <a:latin typeface="Helvetica Neue"/>
               </a:rPr>
-              <a:t>The fill-in-the-blank task, run live</a:t>
+              <a:t>How BERT was trained to read</a:t>
             </a:r>
           </a:p>
         </p:txBody>
@@ -13195,7 +12787,7 @@
                 </a:solidFill>
                 <a:latin typeface="Helvetica Neue"/>
               </a:rPr>
-              <a:t>bert-base-uncased predicting a hidden word from the words around it. No labelled data is needed for this, which is why it could be run on very large amounts of text.</a:t>
+              <a:t>15% of the words are chosen. Of those, 80% are replaced with a blank, 10% with a wrong word, and 10% are left unchanged. The right-hand panel explains why.</a:t>
             </a:r>
           </a:p>
         </p:txBody>
@@ -13840,7 +13432,7 @@
       </p:sp>
       <p:pic>
         <p:nvPicPr>
-          <p:cNvPr id="21" name="Picture 20" descr="d_mlm.png"/>
+          <p:cNvPr id="21" name="Picture 20" descr="d_mlmbook.png"/>
           <p:cNvPicPr>
             <a:picLocks noChangeAspect="1"/>
           </p:cNvPicPr>
@@ -13854,209 +13446,14 @@
         </p:blipFill>
         <p:spPr>
           <a:xfrm>
-            <a:off x="518007" y="2173672"/>
-            <a:ext cx="11155680" cy="3836534"/>
+            <a:off x="380847" y="2098852"/>
+            <a:ext cx="11430000" cy="4077615"/>
           </a:xfrm>
           <a:prstGeom prst="rect">
             <a:avLst/>
           </a:prstGeom>
         </p:spPr>
       </p:pic>
-      <p:sp>
-        <p:nvSpPr>
-          <p:cNvPr id="22" name="Rounded Rectangle 21"/>
-          <p:cNvSpPr/>
-          <p:nvPr/>
-        </p:nvSpPr>
-        <p:spPr>
-          <a:xfrm>
-            <a:off x="7906816" y="6345936"/>
-            <a:ext cx="3644798" cy="365760"/>
-          </a:xfrm>
-          <a:prstGeom prst="roundRect">
-            <a:avLst>
-              <a:gd name="adj" fmla="val 44000"/>
-            </a:avLst>
-          </a:prstGeom>
-          <a:solidFill>
-            <a:srgbClr val="059669"/>
-          </a:solidFill>
-          <a:ln>
-            <a:noFill/>
-          </a:ln>
-        </p:spPr>
-        <p:style>
-          <a:lnRef idx="1">
-            <a:schemeClr val="accent1"/>
-          </a:lnRef>
-          <a:fillRef idx="3">
-            <a:schemeClr val="accent1"/>
-          </a:fillRef>
-          <a:effectRef idx="2">
-            <a:schemeClr val="accent1"/>
-          </a:effectRef>
-          <a:fontRef idx="minor">
-            <a:schemeClr val="lt1"/>
-          </a:fontRef>
-        </p:style>
-        <p:txBody>
-          <a:bodyPr rtlCol="0" anchor="ctr"/>
-          <a:lstStyle/>
-          <a:p>
-            <a:pPr algn="ctr"/>
-          </a:p>
-        </p:txBody>
-      </p:sp>
-      <p:sp>
-        <p:nvSpPr>
-          <p:cNvPr id="23" name="Rounded Rectangle 22"/>
-          <p:cNvSpPr/>
-          <p:nvPr/>
-        </p:nvSpPr>
-        <p:spPr>
-          <a:xfrm>
-            <a:off x="8949232" y="6396228"/>
-            <a:ext cx="685800" cy="265176"/>
-          </a:xfrm>
-          <a:prstGeom prst="roundRect">
-            <a:avLst>
-              <a:gd name="adj" fmla="val 44000"/>
-            </a:avLst>
-          </a:prstGeom>
-          <a:solidFill>
-            <a:srgbClr val="064E3B"/>
-          </a:solidFill>
-          <a:ln>
-            <a:noFill/>
-          </a:ln>
-        </p:spPr>
-        <p:style>
-          <a:lnRef idx="1">
-            <a:schemeClr val="accent1"/>
-          </a:lnRef>
-          <a:fillRef idx="3">
-            <a:schemeClr val="accent1"/>
-          </a:fillRef>
-          <a:effectRef idx="2">
-            <a:schemeClr val="accent1"/>
-          </a:effectRef>
-          <a:fontRef idx="minor">
-            <a:schemeClr val="lt1"/>
-          </a:fontRef>
-        </p:style>
-        <p:txBody>
-          <a:bodyPr rtlCol="0" anchor="ctr"/>
-          <a:lstStyle/>
-          <a:p>
-            <a:pPr algn="ctr"/>
-          </a:p>
-        </p:txBody>
-      </p:sp>
-      <p:sp>
-        <p:nvSpPr>
-          <p:cNvPr id="24" name="TextBox 23"/>
-          <p:cNvSpPr txBox="1"/>
-          <p:nvPr/>
-        </p:nvSpPr>
-        <p:spPr>
-          <a:xfrm>
-            <a:off x="8062264" y="6460236"/>
-            <a:ext cx="914400" cy="219456"/>
-          </a:xfrm>
-          <a:prstGeom prst="rect">
-            <a:avLst/>
-          </a:prstGeom>
-          <a:noFill/>
-        </p:spPr>
-        <p:txBody>
-          <a:bodyPr wrap="none" lIns="0" rIns="0" tIns="0" bIns="0">
-            <a:spAutoFit/>
-          </a:bodyPr>
-          <a:lstStyle/>
-          <a:p>
-            <a:pPr algn="l"/>
-            <a:r>
-              <a:rPr sz="950" b="1" i="0">
-                <a:solidFill>
-                  <a:srgbClr val="A7F3D0"/>
-                </a:solidFill>
-                <a:latin typeface="Helvetica Neue"/>
-              </a:rPr>
-              <a:t>▶ NOTEBOOK</a:t>
-            </a:r>
-          </a:p>
-        </p:txBody>
-      </p:sp>
-      <p:sp>
-        <p:nvSpPr>
-          <p:cNvPr id="25" name="TextBox 24"/>
-          <p:cNvSpPr txBox="1"/>
-          <p:nvPr/>
-        </p:nvSpPr>
-        <p:spPr>
-          <a:xfrm>
-            <a:off x="8949232" y="6451092"/>
-            <a:ext cx="685800" cy="219456"/>
-          </a:xfrm>
-          <a:prstGeom prst="rect">
-            <a:avLst/>
-          </a:prstGeom>
-          <a:noFill/>
-        </p:spPr>
-        <p:txBody>
-          <a:bodyPr wrap="none" lIns="0" rIns="0" tIns="0" bIns="0">
-            <a:spAutoFit/>
-          </a:bodyPr>
-          <a:lstStyle/>
-          <a:p>
-            <a:pPr algn="ctr"/>
-            <a:r>
-              <a:rPr sz="1100" b="1" i="0">
-                <a:solidFill>
-                  <a:srgbClr val="FFFFFF"/>
-                </a:solidFill>
-                <a:latin typeface="Helvetica Neue"/>
-              </a:rPr>
-              <a:t>STEP 4</a:t>
-            </a:r>
-          </a:p>
-        </p:txBody>
-      </p:sp>
-      <p:sp>
-        <p:nvSpPr>
-          <p:cNvPr id="26" name="TextBox 25"/>
-          <p:cNvSpPr txBox="1"/>
-          <p:nvPr/>
-        </p:nvSpPr>
-        <p:spPr>
-          <a:xfrm>
-            <a:off x="9753904" y="6460236"/>
-            <a:ext cx="1697126" cy="219456"/>
-          </a:xfrm>
-          <a:prstGeom prst="rect">
-            <a:avLst/>
-          </a:prstGeom>
-          <a:noFill/>
-        </p:spPr>
-        <p:txBody>
-          <a:bodyPr wrap="none" lIns="0" rIns="0" tIns="0" bIns="0">
-            <a:spAutoFit/>
-          </a:bodyPr>
-          <a:lstStyle/>
-          <a:p>
-            <a:pPr algn="l"/>
-            <a:r>
-              <a:rPr sz="1000" b="1" i="0">
-                <a:solidFill>
-                  <a:srgbClr val="FFFFFF"/>
-                </a:solidFill>
-                <a:latin typeface="Helvetica Neue"/>
-              </a:rPr>
-              <a:t>Fill in the blank</a:t>
-            </a:r>
-          </a:p>
-        </p:txBody>
-      </p:sp>
     </p:spTree>
   </p:cSld>
   <p:clrMapOvr>
@@ -14140,7 +13537,7 @@
                 </a:solidFill>
                 <a:latin typeface="Helvetica Neue"/>
               </a:rPr>
-              <a:t>The same task on product vocabulary</a:t>
+              <a:t>The fill-in-the-blank task, run live</a:t>
             </a:r>
           </a:p>
         </p:txBody>
@@ -14175,7 +13572,7 @@
                 </a:solidFill>
                 <a:latin typeface="Helvetica Neue"/>
               </a:rPr>
-              <a:t>The same model and the same task, asked to fill a blank whose answer is a vendor name it rarely encountered during pretraining.</a:t>
+              <a:t>bert-base-uncased predicting a hidden word from the words around it. No labelled data is needed for this, which is why it could be run on very large amounts of text.</a:t>
             </a:r>
           </a:p>
         </p:txBody>
@@ -14820,7 +14217,7 @@
       </p:sp>
       <p:pic>
         <p:nvPicPr>
-          <p:cNvPr id="21" name="Picture 20" descr="d_jargon14.png"/>
+          <p:cNvPr id="21" name="Picture 20" descr="d_mlm.png"/>
           <p:cNvPicPr>
             <a:picLocks noChangeAspect="1"/>
           </p:cNvPicPr>
@@ -14834,8 +14231,8 @@
         </p:blipFill>
         <p:spPr>
           <a:xfrm>
-            <a:off x="518007" y="2163061"/>
-            <a:ext cx="11155680" cy="3857757"/>
+            <a:off x="518007" y="2173672"/>
+            <a:ext cx="11155680" cy="3836534"/>
           </a:xfrm>
           <a:prstGeom prst="rect">
             <a:avLst/>
@@ -14850,8 +14247,8 @@
         </p:nvSpPr>
         <p:spPr>
           <a:xfrm>
-            <a:off x="6772046" y="6345936"/>
-            <a:ext cx="4779568" cy="365760"/>
+            <a:off x="7906816" y="6345936"/>
+            <a:ext cx="3644798" cy="365760"/>
           </a:xfrm>
           <a:prstGeom prst="roundRect">
             <a:avLst>
@@ -14895,7 +14292,7 @@
         </p:nvSpPr>
         <p:spPr>
           <a:xfrm>
-            <a:off x="7814462" y="6396228"/>
+            <a:off x="8949232" y="6396228"/>
             <a:ext cx="685800" cy="265176"/>
           </a:xfrm>
           <a:prstGeom prst="roundRect">
@@ -14940,7 +14337,7 @@
         </p:nvSpPr>
         <p:spPr>
           <a:xfrm>
-            <a:off x="6927494" y="6460236"/>
+            <a:off x="8062264" y="6460236"/>
             <a:ext cx="914400" cy="219456"/>
           </a:xfrm>
           <a:prstGeom prst="rect">
@@ -14975,7 +14372,7 @@
         </p:nvSpPr>
         <p:spPr>
           <a:xfrm>
-            <a:off x="7814462" y="6451092"/>
+            <a:off x="8949232" y="6451092"/>
             <a:ext cx="685800" cy="219456"/>
           </a:xfrm>
           <a:prstGeom prst="rect">
@@ -14997,7 +14394,7 @@
                 </a:solidFill>
                 <a:latin typeface="Helvetica Neue"/>
               </a:rPr>
-              <a:t>STEP 5</a:t>
+              <a:t>STEP 4</a:t>
             </a:r>
           </a:p>
         </p:txBody>
@@ -15010,8 +14407,8 @@
         </p:nvSpPr>
         <p:spPr>
           <a:xfrm>
-            <a:off x="8619134" y="6460236"/>
-            <a:ext cx="2831896" cy="219456"/>
+            <a:off x="9753904" y="6460236"/>
+            <a:ext cx="1697126" cy="219456"/>
           </a:xfrm>
           <a:prstGeom prst="rect">
             <a:avLst/>
@@ -15032,7 +14429,7 @@
                 </a:solidFill>
                 <a:latin typeface="Helvetica Neue"/>
               </a:rPr>
-              <a:t>Fill in the blank on Cobalt jargon</a:t>
+              <a:t>Fill in the blank</a:t>
             </a:r>
           </a:p>
         </p:txBody>
@@ -15085,7 +14482,7 @@
                 </a:solidFill>
                 <a:latin typeface="Helvetica Neue"/>
               </a:rPr>
-              <a:t>ENCODER AND DECODER MODELS</a:t>
+              <a:t>MASKED LANGUAGE MODELLING</a:t>
             </a:r>
           </a:p>
         </p:txBody>
@@ -15099,7 +14496,7 @@
         <p:spPr>
           <a:xfrm>
             <a:off x="640080" y="758952"/>
-            <a:ext cx="10972800" cy="704088"/>
+            <a:ext cx="7315200" cy="704088"/>
           </a:xfrm>
           <a:prstGeom prst="rect">
             <a:avLst/>
@@ -15120,7 +14517,7 @@
                 </a:solidFill>
                 <a:latin typeface="Helvetica Neue"/>
               </a:rPr>
-              <a:t>Which words each model is allowed to look at</a:t>
+              <a:t>The same task on product vocabulary</a:t>
             </a:r>
           </a:p>
         </p:txBody>
@@ -15155,14 +14552,617 @@
                 </a:solidFill>
                 <a:latin typeface="Helvetica Neue"/>
               </a:rPr>
-              <a:t>Each row is a word doing the looking; each column is a word being looked at. Green is permitted, black is blocked.</a:t>
-            </a:r>
-          </a:p>
-        </p:txBody>
-      </p:sp>
-      <p:sp>
-        <p:nvSpPr>
-          <p:cNvPr id="5" name="TextBox 4"/>
+              <a:t>The same model and the same task, asked to fill a blank whose answer is a vendor name it rarely encountered during pretraining.</a:t>
+            </a:r>
+          </a:p>
+        </p:txBody>
+      </p:sp>
+      <p:sp>
+        <p:nvSpPr>
+          <p:cNvPr id="5" name="Rounded Rectangle 4"/>
+          <p:cNvSpPr/>
+          <p:nvPr/>
+        </p:nvSpPr>
+        <p:spPr>
+          <a:xfrm>
+            <a:off x="8302752" y="593445"/>
+            <a:ext cx="2852928" cy="20116"/>
+          </a:xfrm>
+          <a:prstGeom prst="roundRect">
+            <a:avLst/>
+          </a:prstGeom>
+          <a:solidFill>
+            <a:srgbClr val="E9EBF0"/>
+          </a:solidFill>
+          <a:ln>
+            <a:noFill/>
+          </a:ln>
+        </p:spPr>
+        <p:style>
+          <a:lnRef idx="1">
+            <a:schemeClr val="accent1"/>
+          </a:lnRef>
+          <a:fillRef idx="3">
+            <a:schemeClr val="accent1"/>
+          </a:fillRef>
+          <a:effectRef idx="2">
+            <a:schemeClr val="accent1"/>
+          </a:effectRef>
+          <a:fontRef idx="minor">
+            <a:schemeClr val="lt1"/>
+          </a:fontRef>
+        </p:style>
+        <p:txBody>
+          <a:bodyPr rtlCol="0" anchor="ctr"/>
+          <a:lstStyle/>
+          <a:p>
+            <a:pPr algn="ctr"/>
+          </a:p>
+        </p:txBody>
+      </p:sp>
+      <p:sp>
+        <p:nvSpPr>
+          <p:cNvPr id="6" name="Rounded Rectangle 5"/>
+          <p:cNvSpPr/>
+          <p:nvPr/>
+        </p:nvSpPr>
+        <p:spPr>
+          <a:xfrm>
+            <a:off x="8183879" y="457200"/>
+            <a:ext cx="292608" cy="292608"/>
+          </a:xfrm>
+          <a:prstGeom prst="roundRect">
+            <a:avLst>
+              <a:gd name="adj" fmla="val 32000"/>
+            </a:avLst>
+          </a:prstGeom>
+          <a:solidFill>
+            <a:srgbClr val="0EA5E9"/>
+          </a:solidFill>
+          <a:ln>
+            <a:noFill/>
+          </a:ln>
+        </p:spPr>
+        <p:style>
+          <a:lnRef idx="1">
+            <a:schemeClr val="accent1"/>
+          </a:lnRef>
+          <a:fillRef idx="3">
+            <a:schemeClr val="accent1"/>
+          </a:fillRef>
+          <a:effectRef idx="2">
+            <a:schemeClr val="accent1"/>
+          </a:effectRef>
+          <a:fontRef idx="minor">
+            <a:schemeClr val="lt1"/>
+          </a:fontRef>
+        </p:style>
+        <p:txBody>
+          <a:bodyPr rtlCol="0" anchor="ctr"/>
+          <a:lstStyle/>
+          <a:p>
+            <a:pPr algn="ctr"/>
+          </a:p>
+        </p:txBody>
+      </p:sp>
+      <p:sp>
+        <p:nvSpPr>
+          <p:cNvPr id="7" name="TextBox 6"/>
+          <p:cNvSpPr txBox="1"/>
+          <p:nvPr/>
+        </p:nvSpPr>
+        <p:spPr>
+          <a:xfrm>
+            <a:off x="8129015" y="489204"/>
+            <a:ext cx="402336" cy="228600"/>
+          </a:xfrm>
+          <a:prstGeom prst="rect">
+            <a:avLst/>
+          </a:prstGeom>
+          <a:noFill/>
+        </p:spPr>
+        <p:txBody>
+          <a:bodyPr wrap="square" lIns="0" rIns="0" tIns="0" bIns="0">
+            <a:spAutoFit/>
+          </a:bodyPr>
+          <a:lstStyle/>
+          <a:p>
+            <a:pPr algn="ctr"/>
+            <a:r>
+              <a:rPr sz="1200" b="1" i="0">
+                <a:solidFill>
+                  <a:srgbClr val="FFFFFF"/>
+                </a:solidFill>
+                <a:latin typeface="Helvetica Neue"/>
+              </a:rPr>
+              <a:t>1</a:t>
+            </a:r>
+          </a:p>
+        </p:txBody>
+      </p:sp>
+      <p:sp>
+        <p:nvSpPr>
+          <p:cNvPr id="8" name="Rounded Rectangle 7"/>
+          <p:cNvSpPr/>
+          <p:nvPr/>
+        </p:nvSpPr>
+        <p:spPr>
+          <a:xfrm>
+            <a:off x="8695943" y="493776"/>
+            <a:ext cx="219456" cy="219456"/>
+          </a:xfrm>
+          <a:prstGeom prst="roundRect">
+            <a:avLst>
+              <a:gd name="adj" fmla="val 32000"/>
+            </a:avLst>
+          </a:prstGeom>
+          <a:solidFill>
+            <a:srgbClr val="E9EBF0"/>
+          </a:solidFill>
+          <a:ln>
+            <a:noFill/>
+          </a:ln>
+        </p:spPr>
+        <p:style>
+          <a:lnRef idx="1">
+            <a:schemeClr val="accent1"/>
+          </a:lnRef>
+          <a:fillRef idx="3">
+            <a:schemeClr val="accent1"/>
+          </a:fillRef>
+          <a:effectRef idx="2">
+            <a:schemeClr val="accent1"/>
+          </a:effectRef>
+          <a:fontRef idx="minor">
+            <a:schemeClr val="lt1"/>
+          </a:fontRef>
+        </p:style>
+        <p:txBody>
+          <a:bodyPr rtlCol="0" anchor="ctr"/>
+          <a:lstStyle/>
+          <a:p>
+            <a:pPr algn="ctr"/>
+          </a:p>
+        </p:txBody>
+      </p:sp>
+      <p:sp>
+        <p:nvSpPr>
+          <p:cNvPr id="9" name="TextBox 8"/>
+          <p:cNvSpPr txBox="1"/>
+          <p:nvPr/>
+        </p:nvSpPr>
+        <p:spPr>
+          <a:xfrm>
+            <a:off x="8641079" y="489204"/>
+            <a:ext cx="329184" cy="228600"/>
+          </a:xfrm>
+          <a:prstGeom prst="rect">
+            <a:avLst/>
+          </a:prstGeom>
+          <a:noFill/>
+        </p:spPr>
+        <p:txBody>
+          <a:bodyPr wrap="square" lIns="0" rIns="0" tIns="0" bIns="0">
+            <a:spAutoFit/>
+          </a:bodyPr>
+          <a:lstStyle/>
+          <a:p>
+            <a:pPr algn="ctr"/>
+            <a:r>
+              <a:rPr sz="950" b="1" i="0">
+                <a:solidFill>
+                  <a:srgbClr val="AEB4BF"/>
+                </a:solidFill>
+                <a:latin typeface="Helvetica Neue"/>
+              </a:rPr>
+              <a:t>2</a:t>
+            </a:r>
+          </a:p>
+        </p:txBody>
+      </p:sp>
+      <p:sp>
+        <p:nvSpPr>
+          <p:cNvPr id="10" name="Rounded Rectangle 9"/>
+          <p:cNvSpPr/>
+          <p:nvPr/>
+        </p:nvSpPr>
+        <p:spPr>
+          <a:xfrm>
+            <a:off x="9171431" y="493776"/>
+            <a:ext cx="219456" cy="219456"/>
+          </a:xfrm>
+          <a:prstGeom prst="roundRect">
+            <a:avLst>
+              <a:gd name="adj" fmla="val 32000"/>
+            </a:avLst>
+          </a:prstGeom>
+          <a:solidFill>
+            <a:srgbClr val="E9EBF0"/>
+          </a:solidFill>
+          <a:ln>
+            <a:noFill/>
+          </a:ln>
+        </p:spPr>
+        <p:style>
+          <a:lnRef idx="1">
+            <a:schemeClr val="accent1"/>
+          </a:lnRef>
+          <a:fillRef idx="3">
+            <a:schemeClr val="accent1"/>
+          </a:fillRef>
+          <a:effectRef idx="2">
+            <a:schemeClr val="accent1"/>
+          </a:effectRef>
+          <a:fontRef idx="minor">
+            <a:schemeClr val="lt1"/>
+          </a:fontRef>
+        </p:style>
+        <p:txBody>
+          <a:bodyPr rtlCol="0" anchor="ctr"/>
+          <a:lstStyle/>
+          <a:p>
+            <a:pPr algn="ctr"/>
+          </a:p>
+        </p:txBody>
+      </p:sp>
+      <p:sp>
+        <p:nvSpPr>
+          <p:cNvPr id="11" name="TextBox 10"/>
+          <p:cNvSpPr txBox="1"/>
+          <p:nvPr/>
+        </p:nvSpPr>
+        <p:spPr>
+          <a:xfrm>
+            <a:off x="9116567" y="489204"/>
+            <a:ext cx="329184" cy="228600"/>
+          </a:xfrm>
+          <a:prstGeom prst="rect">
+            <a:avLst/>
+          </a:prstGeom>
+          <a:noFill/>
+        </p:spPr>
+        <p:txBody>
+          <a:bodyPr wrap="square" lIns="0" rIns="0" tIns="0" bIns="0">
+            <a:spAutoFit/>
+          </a:bodyPr>
+          <a:lstStyle/>
+          <a:p>
+            <a:pPr algn="ctr"/>
+            <a:r>
+              <a:rPr sz="950" b="1" i="0">
+                <a:solidFill>
+                  <a:srgbClr val="AEB4BF"/>
+                </a:solidFill>
+                <a:latin typeface="Helvetica Neue"/>
+              </a:rPr>
+              <a:t>3</a:t>
+            </a:r>
+          </a:p>
+        </p:txBody>
+      </p:sp>
+      <p:sp>
+        <p:nvSpPr>
+          <p:cNvPr id="12" name="Rounded Rectangle 11"/>
+          <p:cNvSpPr/>
+          <p:nvPr/>
+        </p:nvSpPr>
+        <p:spPr>
+          <a:xfrm>
+            <a:off x="9646919" y="493776"/>
+            <a:ext cx="219456" cy="219456"/>
+          </a:xfrm>
+          <a:prstGeom prst="roundRect">
+            <a:avLst>
+              <a:gd name="adj" fmla="val 32000"/>
+            </a:avLst>
+          </a:prstGeom>
+          <a:solidFill>
+            <a:srgbClr val="E9EBF0"/>
+          </a:solidFill>
+          <a:ln>
+            <a:noFill/>
+          </a:ln>
+        </p:spPr>
+        <p:style>
+          <a:lnRef idx="1">
+            <a:schemeClr val="accent1"/>
+          </a:lnRef>
+          <a:fillRef idx="3">
+            <a:schemeClr val="accent1"/>
+          </a:fillRef>
+          <a:effectRef idx="2">
+            <a:schemeClr val="accent1"/>
+          </a:effectRef>
+          <a:fontRef idx="minor">
+            <a:schemeClr val="lt1"/>
+          </a:fontRef>
+        </p:style>
+        <p:txBody>
+          <a:bodyPr rtlCol="0" anchor="ctr"/>
+          <a:lstStyle/>
+          <a:p>
+            <a:pPr algn="ctr"/>
+          </a:p>
+        </p:txBody>
+      </p:sp>
+      <p:sp>
+        <p:nvSpPr>
+          <p:cNvPr id="13" name="TextBox 12"/>
+          <p:cNvSpPr txBox="1"/>
+          <p:nvPr/>
+        </p:nvSpPr>
+        <p:spPr>
+          <a:xfrm>
+            <a:off x="9592055" y="489204"/>
+            <a:ext cx="329184" cy="228600"/>
+          </a:xfrm>
+          <a:prstGeom prst="rect">
+            <a:avLst/>
+          </a:prstGeom>
+          <a:noFill/>
+        </p:spPr>
+        <p:txBody>
+          <a:bodyPr wrap="square" lIns="0" rIns="0" tIns="0" bIns="0">
+            <a:spAutoFit/>
+          </a:bodyPr>
+          <a:lstStyle/>
+          <a:p>
+            <a:pPr algn="ctr"/>
+            <a:r>
+              <a:rPr sz="950" b="1" i="0">
+                <a:solidFill>
+                  <a:srgbClr val="AEB4BF"/>
+                </a:solidFill>
+                <a:latin typeface="Helvetica Neue"/>
+              </a:rPr>
+              <a:t>4</a:t>
+            </a:r>
+          </a:p>
+        </p:txBody>
+      </p:sp>
+      <p:sp>
+        <p:nvSpPr>
+          <p:cNvPr id="14" name="Rounded Rectangle 13"/>
+          <p:cNvSpPr/>
+          <p:nvPr/>
+        </p:nvSpPr>
+        <p:spPr>
+          <a:xfrm>
+            <a:off x="10122407" y="493776"/>
+            <a:ext cx="219456" cy="219456"/>
+          </a:xfrm>
+          <a:prstGeom prst="roundRect">
+            <a:avLst>
+              <a:gd name="adj" fmla="val 32000"/>
+            </a:avLst>
+          </a:prstGeom>
+          <a:solidFill>
+            <a:srgbClr val="E9EBF0"/>
+          </a:solidFill>
+          <a:ln>
+            <a:noFill/>
+          </a:ln>
+        </p:spPr>
+        <p:style>
+          <a:lnRef idx="1">
+            <a:schemeClr val="accent1"/>
+          </a:lnRef>
+          <a:fillRef idx="3">
+            <a:schemeClr val="accent1"/>
+          </a:fillRef>
+          <a:effectRef idx="2">
+            <a:schemeClr val="accent1"/>
+          </a:effectRef>
+          <a:fontRef idx="minor">
+            <a:schemeClr val="lt1"/>
+          </a:fontRef>
+        </p:style>
+        <p:txBody>
+          <a:bodyPr rtlCol="0" anchor="ctr"/>
+          <a:lstStyle/>
+          <a:p>
+            <a:pPr algn="ctr"/>
+          </a:p>
+        </p:txBody>
+      </p:sp>
+      <p:sp>
+        <p:nvSpPr>
+          <p:cNvPr id="15" name="TextBox 14"/>
+          <p:cNvSpPr txBox="1"/>
+          <p:nvPr/>
+        </p:nvSpPr>
+        <p:spPr>
+          <a:xfrm>
+            <a:off x="10067543" y="489204"/>
+            <a:ext cx="329184" cy="228600"/>
+          </a:xfrm>
+          <a:prstGeom prst="rect">
+            <a:avLst/>
+          </a:prstGeom>
+          <a:noFill/>
+        </p:spPr>
+        <p:txBody>
+          <a:bodyPr wrap="square" lIns="0" rIns="0" tIns="0" bIns="0">
+            <a:spAutoFit/>
+          </a:bodyPr>
+          <a:lstStyle/>
+          <a:p>
+            <a:pPr algn="ctr"/>
+            <a:r>
+              <a:rPr sz="950" b="1" i="0">
+                <a:solidFill>
+                  <a:srgbClr val="AEB4BF"/>
+                </a:solidFill>
+                <a:latin typeface="Helvetica Neue"/>
+              </a:rPr>
+              <a:t>5</a:t>
+            </a:r>
+          </a:p>
+        </p:txBody>
+      </p:sp>
+      <p:sp>
+        <p:nvSpPr>
+          <p:cNvPr id="16" name="Rounded Rectangle 15"/>
+          <p:cNvSpPr/>
+          <p:nvPr/>
+        </p:nvSpPr>
+        <p:spPr>
+          <a:xfrm>
+            <a:off x="10597895" y="493776"/>
+            <a:ext cx="219456" cy="219456"/>
+          </a:xfrm>
+          <a:prstGeom prst="roundRect">
+            <a:avLst>
+              <a:gd name="adj" fmla="val 32000"/>
+            </a:avLst>
+          </a:prstGeom>
+          <a:solidFill>
+            <a:srgbClr val="E9EBF0"/>
+          </a:solidFill>
+          <a:ln>
+            <a:noFill/>
+          </a:ln>
+        </p:spPr>
+        <p:style>
+          <a:lnRef idx="1">
+            <a:schemeClr val="accent1"/>
+          </a:lnRef>
+          <a:fillRef idx="3">
+            <a:schemeClr val="accent1"/>
+          </a:fillRef>
+          <a:effectRef idx="2">
+            <a:schemeClr val="accent1"/>
+          </a:effectRef>
+          <a:fontRef idx="minor">
+            <a:schemeClr val="lt1"/>
+          </a:fontRef>
+        </p:style>
+        <p:txBody>
+          <a:bodyPr rtlCol="0" anchor="ctr"/>
+          <a:lstStyle/>
+          <a:p>
+            <a:pPr algn="ctr"/>
+          </a:p>
+        </p:txBody>
+      </p:sp>
+      <p:sp>
+        <p:nvSpPr>
+          <p:cNvPr id="17" name="TextBox 16"/>
+          <p:cNvSpPr txBox="1"/>
+          <p:nvPr/>
+        </p:nvSpPr>
+        <p:spPr>
+          <a:xfrm>
+            <a:off x="10543031" y="489204"/>
+            <a:ext cx="329184" cy="228600"/>
+          </a:xfrm>
+          <a:prstGeom prst="rect">
+            <a:avLst/>
+          </a:prstGeom>
+          <a:noFill/>
+        </p:spPr>
+        <p:txBody>
+          <a:bodyPr wrap="square" lIns="0" rIns="0" tIns="0" bIns="0">
+            <a:spAutoFit/>
+          </a:bodyPr>
+          <a:lstStyle/>
+          <a:p>
+            <a:pPr algn="ctr"/>
+            <a:r>
+              <a:rPr sz="950" b="1" i="0">
+                <a:solidFill>
+                  <a:srgbClr val="AEB4BF"/>
+                </a:solidFill>
+                <a:latin typeface="Helvetica Neue"/>
+              </a:rPr>
+              <a:t>6</a:t>
+            </a:r>
+          </a:p>
+        </p:txBody>
+      </p:sp>
+      <p:sp>
+        <p:nvSpPr>
+          <p:cNvPr id="18" name="Rounded Rectangle 17"/>
+          <p:cNvSpPr/>
+          <p:nvPr/>
+        </p:nvSpPr>
+        <p:spPr>
+          <a:xfrm>
+            <a:off x="11073384" y="493776"/>
+            <a:ext cx="219456" cy="219456"/>
+          </a:xfrm>
+          <a:prstGeom prst="roundRect">
+            <a:avLst>
+              <a:gd name="adj" fmla="val 32000"/>
+            </a:avLst>
+          </a:prstGeom>
+          <a:solidFill>
+            <a:srgbClr val="E9EBF0"/>
+          </a:solidFill>
+          <a:ln>
+            <a:noFill/>
+          </a:ln>
+        </p:spPr>
+        <p:style>
+          <a:lnRef idx="1">
+            <a:schemeClr val="accent1"/>
+          </a:lnRef>
+          <a:fillRef idx="3">
+            <a:schemeClr val="accent1"/>
+          </a:fillRef>
+          <a:effectRef idx="2">
+            <a:schemeClr val="accent1"/>
+          </a:effectRef>
+          <a:fontRef idx="minor">
+            <a:schemeClr val="lt1"/>
+          </a:fontRef>
+        </p:style>
+        <p:txBody>
+          <a:bodyPr rtlCol="0" anchor="ctr"/>
+          <a:lstStyle/>
+          <a:p>
+            <a:pPr algn="ctr"/>
+          </a:p>
+        </p:txBody>
+      </p:sp>
+      <p:sp>
+        <p:nvSpPr>
+          <p:cNvPr id="19" name="TextBox 18"/>
+          <p:cNvSpPr txBox="1"/>
+          <p:nvPr/>
+        </p:nvSpPr>
+        <p:spPr>
+          <a:xfrm>
+            <a:off x="11018519" y="489204"/>
+            <a:ext cx="329184" cy="228600"/>
+          </a:xfrm>
+          <a:prstGeom prst="rect">
+            <a:avLst/>
+          </a:prstGeom>
+          <a:noFill/>
+        </p:spPr>
+        <p:txBody>
+          <a:bodyPr wrap="square" lIns="0" rIns="0" tIns="0" bIns="0">
+            <a:spAutoFit/>
+          </a:bodyPr>
+          <a:lstStyle/>
+          <a:p>
+            <a:pPr algn="ctr"/>
+            <a:r>
+              <a:rPr sz="950" b="1" i="0">
+                <a:solidFill>
+                  <a:srgbClr val="AEB4BF"/>
+                </a:solidFill>
+                <a:latin typeface="Helvetica Neue"/>
+              </a:rPr>
+              <a:t>7</a:t>
+            </a:r>
+          </a:p>
+        </p:txBody>
+      </p:sp>
+      <p:sp>
+        <p:nvSpPr>
+          <p:cNvPr id="20" name="TextBox 19"/>
           <p:cNvSpPr txBox="1"/>
           <p:nvPr/>
         </p:nvSpPr>
@@ -15197,7 +15197,7 @@
       </p:sp>
       <p:pic>
         <p:nvPicPr>
-          <p:cNvPr id="6" name="Picture 5" descr="d_direction.png"/>
+          <p:cNvPr id="21" name="Picture 20" descr="d_jargon14.png"/>
           <p:cNvPicPr>
             <a:picLocks noChangeAspect="1"/>
           </p:cNvPicPr>
@@ -15211,14 +15211,209 @@
         </p:blipFill>
         <p:spPr>
           <a:xfrm>
-            <a:off x="1053402" y="1965960"/>
-            <a:ext cx="10084890" cy="4343400"/>
+            <a:off x="518007" y="2163061"/>
+            <a:ext cx="11155680" cy="3857757"/>
           </a:xfrm>
           <a:prstGeom prst="rect">
             <a:avLst/>
           </a:prstGeom>
         </p:spPr>
       </p:pic>
+      <p:sp>
+        <p:nvSpPr>
+          <p:cNvPr id="22" name="Rounded Rectangle 21"/>
+          <p:cNvSpPr/>
+          <p:nvPr/>
+        </p:nvSpPr>
+        <p:spPr>
+          <a:xfrm>
+            <a:off x="6772046" y="6345936"/>
+            <a:ext cx="4779568" cy="365760"/>
+          </a:xfrm>
+          <a:prstGeom prst="roundRect">
+            <a:avLst>
+              <a:gd name="adj" fmla="val 44000"/>
+            </a:avLst>
+          </a:prstGeom>
+          <a:solidFill>
+            <a:srgbClr val="059669"/>
+          </a:solidFill>
+          <a:ln>
+            <a:noFill/>
+          </a:ln>
+        </p:spPr>
+        <p:style>
+          <a:lnRef idx="1">
+            <a:schemeClr val="accent1"/>
+          </a:lnRef>
+          <a:fillRef idx="3">
+            <a:schemeClr val="accent1"/>
+          </a:fillRef>
+          <a:effectRef idx="2">
+            <a:schemeClr val="accent1"/>
+          </a:effectRef>
+          <a:fontRef idx="minor">
+            <a:schemeClr val="lt1"/>
+          </a:fontRef>
+        </p:style>
+        <p:txBody>
+          <a:bodyPr rtlCol="0" anchor="ctr"/>
+          <a:lstStyle/>
+          <a:p>
+            <a:pPr algn="ctr"/>
+          </a:p>
+        </p:txBody>
+      </p:sp>
+      <p:sp>
+        <p:nvSpPr>
+          <p:cNvPr id="23" name="Rounded Rectangle 22"/>
+          <p:cNvSpPr/>
+          <p:nvPr/>
+        </p:nvSpPr>
+        <p:spPr>
+          <a:xfrm>
+            <a:off x="7814462" y="6396228"/>
+            <a:ext cx="685800" cy="265176"/>
+          </a:xfrm>
+          <a:prstGeom prst="roundRect">
+            <a:avLst>
+              <a:gd name="adj" fmla="val 44000"/>
+            </a:avLst>
+          </a:prstGeom>
+          <a:solidFill>
+            <a:srgbClr val="064E3B"/>
+          </a:solidFill>
+          <a:ln>
+            <a:noFill/>
+          </a:ln>
+        </p:spPr>
+        <p:style>
+          <a:lnRef idx="1">
+            <a:schemeClr val="accent1"/>
+          </a:lnRef>
+          <a:fillRef idx="3">
+            <a:schemeClr val="accent1"/>
+          </a:fillRef>
+          <a:effectRef idx="2">
+            <a:schemeClr val="accent1"/>
+          </a:effectRef>
+          <a:fontRef idx="minor">
+            <a:schemeClr val="lt1"/>
+          </a:fontRef>
+        </p:style>
+        <p:txBody>
+          <a:bodyPr rtlCol="0" anchor="ctr"/>
+          <a:lstStyle/>
+          <a:p>
+            <a:pPr algn="ctr"/>
+          </a:p>
+        </p:txBody>
+      </p:sp>
+      <p:sp>
+        <p:nvSpPr>
+          <p:cNvPr id="24" name="TextBox 23"/>
+          <p:cNvSpPr txBox="1"/>
+          <p:nvPr/>
+        </p:nvSpPr>
+        <p:spPr>
+          <a:xfrm>
+            <a:off x="6927494" y="6460236"/>
+            <a:ext cx="914400" cy="219456"/>
+          </a:xfrm>
+          <a:prstGeom prst="rect">
+            <a:avLst/>
+          </a:prstGeom>
+          <a:noFill/>
+        </p:spPr>
+        <p:txBody>
+          <a:bodyPr wrap="none" lIns="0" rIns="0" tIns="0" bIns="0">
+            <a:spAutoFit/>
+          </a:bodyPr>
+          <a:lstStyle/>
+          <a:p>
+            <a:pPr algn="l"/>
+            <a:r>
+              <a:rPr sz="950" b="1" i="0">
+                <a:solidFill>
+                  <a:srgbClr val="A7F3D0"/>
+                </a:solidFill>
+                <a:latin typeface="Helvetica Neue"/>
+              </a:rPr>
+              <a:t>▶ NOTEBOOK</a:t>
+            </a:r>
+          </a:p>
+        </p:txBody>
+      </p:sp>
+      <p:sp>
+        <p:nvSpPr>
+          <p:cNvPr id="25" name="TextBox 24"/>
+          <p:cNvSpPr txBox="1"/>
+          <p:nvPr/>
+        </p:nvSpPr>
+        <p:spPr>
+          <a:xfrm>
+            <a:off x="7814462" y="6451092"/>
+            <a:ext cx="685800" cy="219456"/>
+          </a:xfrm>
+          <a:prstGeom prst="rect">
+            <a:avLst/>
+          </a:prstGeom>
+          <a:noFill/>
+        </p:spPr>
+        <p:txBody>
+          <a:bodyPr wrap="none" lIns="0" rIns="0" tIns="0" bIns="0">
+            <a:spAutoFit/>
+          </a:bodyPr>
+          <a:lstStyle/>
+          <a:p>
+            <a:pPr algn="ctr"/>
+            <a:r>
+              <a:rPr sz="1100" b="1" i="0">
+                <a:solidFill>
+                  <a:srgbClr val="FFFFFF"/>
+                </a:solidFill>
+                <a:latin typeface="Helvetica Neue"/>
+              </a:rPr>
+              <a:t>STEP 5</a:t>
+            </a:r>
+          </a:p>
+        </p:txBody>
+      </p:sp>
+      <p:sp>
+        <p:nvSpPr>
+          <p:cNvPr id="26" name="TextBox 25"/>
+          <p:cNvSpPr txBox="1"/>
+          <p:nvPr/>
+        </p:nvSpPr>
+        <p:spPr>
+          <a:xfrm>
+            <a:off x="8619134" y="6460236"/>
+            <a:ext cx="2831896" cy="219456"/>
+          </a:xfrm>
+          <a:prstGeom prst="rect">
+            <a:avLst/>
+          </a:prstGeom>
+          <a:noFill/>
+        </p:spPr>
+        <p:txBody>
+          <a:bodyPr wrap="none" lIns="0" rIns="0" tIns="0" bIns="0">
+            <a:spAutoFit/>
+          </a:bodyPr>
+          <a:lstStyle/>
+          <a:p>
+            <a:pPr algn="l"/>
+            <a:r>
+              <a:rPr sz="1000" b="1" i="0">
+                <a:solidFill>
+                  <a:srgbClr val="FFFFFF"/>
+                </a:solidFill>
+                <a:latin typeface="Helvetica Neue"/>
+              </a:rPr>
+              <a:t>Fill in the blank on Cobalt jargon</a:t>
+            </a:r>
+          </a:p>
+        </p:txBody>
+      </p:sp>
     </p:spTree>
   </p:cSld>
   <p:clrMapOvr>
@@ -15302,7 +15497,7 @@
                 </a:solidFill>
                 <a:latin typeface="Helvetica Neue"/>
               </a:rPr>
-              <a:t>What each of the two is used for</a:t>
+              <a:t>Which words each model is allowed to look at</a:t>
             </a:r>
           </a:p>
         </p:txBody>
@@ -15337,7 +15532,7 @@
                 </a:solidFill>
                 <a:latin typeface="Helvetica Neue"/>
               </a:rPr>
-              <a:t>Both use the transformer block from Lecture 13. The only difference is whether a word may look at the words to its right.</a:t>
+              <a:t>Each row is a word doing the looking; each column is a word being looked at. Green is permitted, black is blocked.</a:t>
             </a:r>
           </a:p>
         </p:txBody>
@@ -15379,7 +15574,7 @@
       </p:sp>
       <p:pic>
         <p:nvPicPr>
-          <p:cNvPr id="6" name="Picture 5" descr="d_encdec.png"/>
+          <p:cNvPr id="6" name="Picture 5" descr="d_direction.png"/>
           <p:cNvPicPr>
             <a:picLocks noChangeAspect="1"/>
           </p:cNvPicPr>
@@ -15393,209 +15588,14 @@
         </p:blipFill>
         <p:spPr>
           <a:xfrm>
-            <a:off x="518007" y="3077305"/>
-            <a:ext cx="11155680" cy="2166429"/>
+            <a:off x="1053402" y="1965960"/>
+            <a:ext cx="10084890" cy="4343400"/>
           </a:xfrm>
           <a:prstGeom prst="rect">
             <a:avLst/>
           </a:prstGeom>
         </p:spPr>
       </p:pic>
-      <p:sp>
-        <p:nvSpPr>
-          <p:cNvPr id="7" name="Rounded Rectangle 6"/>
-          <p:cNvSpPr/>
-          <p:nvPr/>
-        </p:nvSpPr>
-        <p:spPr>
-          <a:xfrm>
-            <a:off x="7105802" y="6345936"/>
-            <a:ext cx="4445812" cy="365760"/>
-          </a:xfrm>
-          <a:prstGeom prst="roundRect">
-            <a:avLst>
-              <a:gd name="adj" fmla="val 44000"/>
-            </a:avLst>
-          </a:prstGeom>
-          <a:solidFill>
-            <a:srgbClr val="059669"/>
-          </a:solidFill>
-          <a:ln>
-            <a:noFill/>
-          </a:ln>
-        </p:spPr>
-        <p:style>
-          <a:lnRef idx="1">
-            <a:schemeClr val="accent1"/>
-          </a:lnRef>
-          <a:fillRef idx="3">
-            <a:schemeClr val="accent1"/>
-          </a:fillRef>
-          <a:effectRef idx="2">
-            <a:schemeClr val="accent1"/>
-          </a:effectRef>
-          <a:fontRef idx="minor">
-            <a:schemeClr val="lt1"/>
-          </a:fontRef>
-        </p:style>
-        <p:txBody>
-          <a:bodyPr rtlCol="0" anchor="ctr"/>
-          <a:lstStyle/>
-          <a:p>
-            <a:pPr algn="ctr"/>
-          </a:p>
-        </p:txBody>
-      </p:sp>
-      <p:sp>
-        <p:nvSpPr>
-          <p:cNvPr id="8" name="Rounded Rectangle 7"/>
-          <p:cNvSpPr/>
-          <p:nvPr/>
-        </p:nvSpPr>
-        <p:spPr>
-          <a:xfrm>
-            <a:off x="8148218" y="6396228"/>
-            <a:ext cx="685800" cy="265176"/>
-          </a:xfrm>
-          <a:prstGeom prst="roundRect">
-            <a:avLst>
-              <a:gd name="adj" fmla="val 44000"/>
-            </a:avLst>
-          </a:prstGeom>
-          <a:solidFill>
-            <a:srgbClr val="064E3B"/>
-          </a:solidFill>
-          <a:ln>
-            <a:noFill/>
-          </a:ln>
-        </p:spPr>
-        <p:style>
-          <a:lnRef idx="1">
-            <a:schemeClr val="accent1"/>
-          </a:lnRef>
-          <a:fillRef idx="3">
-            <a:schemeClr val="accent1"/>
-          </a:fillRef>
-          <a:effectRef idx="2">
-            <a:schemeClr val="accent1"/>
-          </a:effectRef>
-          <a:fontRef idx="minor">
-            <a:schemeClr val="lt1"/>
-          </a:fontRef>
-        </p:style>
-        <p:txBody>
-          <a:bodyPr rtlCol="0" anchor="ctr"/>
-          <a:lstStyle/>
-          <a:p>
-            <a:pPr algn="ctr"/>
-          </a:p>
-        </p:txBody>
-      </p:sp>
-      <p:sp>
-        <p:nvSpPr>
-          <p:cNvPr id="9" name="TextBox 8"/>
-          <p:cNvSpPr txBox="1"/>
-          <p:nvPr/>
-        </p:nvSpPr>
-        <p:spPr>
-          <a:xfrm>
-            <a:off x="7261250" y="6460236"/>
-            <a:ext cx="914400" cy="219456"/>
-          </a:xfrm>
-          <a:prstGeom prst="rect">
-            <a:avLst/>
-          </a:prstGeom>
-          <a:noFill/>
-        </p:spPr>
-        <p:txBody>
-          <a:bodyPr wrap="none" lIns="0" rIns="0" tIns="0" bIns="0">
-            <a:spAutoFit/>
-          </a:bodyPr>
-          <a:lstStyle/>
-          <a:p>
-            <a:pPr algn="l"/>
-            <a:r>
-              <a:rPr sz="950" b="1" i="0">
-                <a:solidFill>
-                  <a:srgbClr val="A7F3D0"/>
-                </a:solidFill>
-                <a:latin typeface="Helvetica Neue"/>
-              </a:rPr>
-              <a:t>▶ NOTEBOOK</a:t>
-            </a:r>
-          </a:p>
-        </p:txBody>
-      </p:sp>
-      <p:sp>
-        <p:nvSpPr>
-          <p:cNvPr id="10" name="TextBox 9"/>
-          <p:cNvSpPr txBox="1"/>
-          <p:nvPr/>
-        </p:nvSpPr>
-        <p:spPr>
-          <a:xfrm>
-            <a:off x="8148218" y="6451092"/>
-            <a:ext cx="685800" cy="219456"/>
-          </a:xfrm>
-          <a:prstGeom prst="rect">
-            <a:avLst/>
-          </a:prstGeom>
-          <a:noFill/>
-        </p:spPr>
-        <p:txBody>
-          <a:bodyPr wrap="none" lIns="0" rIns="0" tIns="0" bIns="0">
-            <a:spAutoFit/>
-          </a:bodyPr>
-          <a:lstStyle/>
-          <a:p>
-            <a:pPr algn="ctr"/>
-            <a:r>
-              <a:rPr sz="1100" b="1" i="0">
-                <a:solidFill>
-                  <a:srgbClr val="FFFFFF"/>
-                </a:solidFill>
-                <a:latin typeface="Helvetica Neue"/>
-              </a:rPr>
-              <a:t>STEP 6</a:t>
-            </a:r>
-          </a:p>
-        </p:txBody>
-      </p:sp>
-      <p:sp>
-        <p:nvSpPr>
-          <p:cNvPr id="11" name="TextBox 10"/>
-          <p:cNvSpPr txBox="1"/>
-          <p:nvPr/>
-        </p:nvSpPr>
-        <p:spPr>
-          <a:xfrm>
-            <a:off x="8952890" y="6460236"/>
-            <a:ext cx="2498140" cy="219456"/>
-          </a:xfrm>
-          <a:prstGeom prst="rect">
-            <a:avLst/>
-          </a:prstGeom>
-          <a:noFill/>
-        </p:spPr>
-        <p:txBody>
-          <a:bodyPr wrap="none" lIns="0" rIns="0" tIns="0" bIns="0">
-            <a:spAutoFit/>
-          </a:bodyPr>
-          <a:lstStyle/>
-          <a:p>
-            <a:pPr algn="l"/>
-            <a:r>
-              <a:rPr sz="1000" b="1" i="0">
-                <a:solidFill>
-                  <a:srgbClr val="FFFFFF"/>
-                </a:solidFill>
-                <a:latin typeface="Helvetica Neue"/>
-              </a:rPr>
-              <a:t>Why BERT reads and GPT writes</a:t>
-            </a:r>
-          </a:p>
-        </p:txBody>
-      </p:sp>
     </p:spTree>
   </p:cSld>
   <p:clrMapOvr>
